--- a/Theory Class-Notes/Unit-3 Unsupervised Learning.pptx
+++ b/Theory Class-Notes/Unit-3 Unsupervised Learning.pptx
@@ -14,13 +14,32 @@
     <p:sldId id="289" r:id="rId8"/>
     <p:sldId id="290" r:id="rId9"/>
     <p:sldId id="291" r:id="rId10"/>
-    <p:sldId id="840" r:id="rId11"/>
-    <p:sldId id="841" r:id="rId12"/>
-    <p:sldId id="842" r:id="rId13"/>
-    <p:sldId id="847" r:id="rId14"/>
-    <p:sldId id="843" r:id="rId15"/>
-    <p:sldId id="844" r:id="rId16"/>
-    <p:sldId id="845" r:id="rId17"/>
+    <p:sldId id="455" r:id="rId11"/>
+    <p:sldId id="456" r:id="rId12"/>
+    <p:sldId id="840" r:id="rId13"/>
+    <p:sldId id="485" r:id="rId14"/>
+    <p:sldId id="459" r:id="rId15"/>
+    <p:sldId id="841" r:id="rId16"/>
+    <p:sldId id="842" r:id="rId17"/>
+    <p:sldId id="843" r:id="rId18"/>
+    <p:sldId id="844" r:id="rId19"/>
+    <p:sldId id="845" r:id="rId20"/>
+    <p:sldId id="848" r:id="rId21"/>
+    <p:sldId id="490" r:id="rId22"/>
+    <p:sldId id="491" r:id="rId23"/>
+    <p:sldId id="849" r:id="rId24"/>
+    <p:sldId id="850" r:id="rId25"/>
+    <p:sldId id="851" r:id="rId26"/>
+    <p:sldId id="492" r:id="rId27"/>
+    <p:sldId id="852" r:id="rId28"/>
+    <p:sldId id="854" r:id="rId29"/>
+    <p:sldId id="855" r:id="rId30"/>
+    <p:sldId id="853" r:id="rId31"/>
+    <p:sldId id="847" r:id="rId32"/>
+    <p:sldId id="856" r:id="rId33"/>
+    <p:sldId id="857" r:id="rId34"/>
+    <p:sldId id="858" r:id="rId35"/>
+    <p:sldId id="859" r:id="rId36"/>
   </p:sldIdLst>
   <p:sldSz cx="12192000" cy="6858000"/>
   <p:notesSz cx="6858000" cy="9144000"/>
@@ -903,7 +922,7 @@
           <a:p>
             <a:fld id="{050FF069-687C-4110-9C8F-B52BF36C2535}" type="datetimeFigureOut">
               <a:rPr lang="en-IN" smtClean="0"/>
-              <a:t>04-07-2025</a:t>
+              <a:t>06-07-2025</a:t>
             </a:fld>
             <a:endParaRPr lang="en-IN"/>
           </a:p>
@@ -1101,7 +1120,7 @@
           <a:p>
             <a:fld id="{050FF069-687C-4110-9C8F-B52BF36C2535}" type="datetimeFigureOut">
               <a:rPr lang="en-IN" smtClean="0"/>
-              <a:t>04-07-2025</a:t>
+              <a:t>06-07-2025</a:t>
             </a:fld>
             <a:endParaRPr lang="en-IN"/>
           </a:p>
@@ -1309,7 +1328,7 @@
           <a:p>
             <a:fld id="{050FF069-687C-4110-9C8F-B52BF36C2535}" type="datetimeFigureOut">
               <a:rPr lang="en-IN" smtClean="0"/>
-              <a:t>04-07-2025</a:t>
+              <a:t>06-07-2025</a:t>
             </a:fld>
             <a:endParaRPr lang="en-IN"/>
           </a:p>
@@ -1507,7 +1526,7 @@
           <a:p>
             <a:fld id="{050FF069-687C-4110-9C8F-B52BF36C2535}" type="datetimeFigureOut">
               <a:rPr lang="en-IN" smtClean="0"/>
-              <a:t>04-07-2025</a:t>
+              <a:t>06-07-2025</a:t>
             </a:fld>
             <a:endParaRPr lang="en-IN"/>
           </a:p>
@@ -1783,7 +1802,7 @@
           <a:p>
             <a:fld id="{050FF069-687C-4110-9C8F-B52BF36C2535}" type="datetimeFigureOut">
               <a:rPr lang="en-IN" smtClean="0"/>
-              <a:t>04-07-2025</a:t>
+              <a:t>06-07-2025</a:t>
             </a:fld>
             <a:endParaRPr lang="en-IN"/>
           </a:p>
@@ -2050,7 +2069,7 @@
           <a:p>
             <a:fld id="{050FF069-687C-4110-9C8F-B52BF36C2535}" type="datetimeFigureOut">
               <a:rPr lang="en-IN" smtClean="0"/>
-              <a:t>04-07-2025</a:t>
+              <a:t>06-07-2025</a:t>
             </a:fld>
             <a:endParaRPr lang="en-IN"/>
           </a:p>
@@ -2464,7 +2483,7 @@
           <a:p>
             <a:fld id="{050FF069-687C-4110-9C8F-B52BF36C2535}" type="datetimeFigureOut">
               <a:rPr lang="en-IN" smtClean="0"/>
-              <a:t>04-07-2025</a:t>
+              <a:t>06-07-2025</a:t>
             </a:fld>
             <a:endParaRPr lang="en-IN"/>
           </a:p>
@@ -2611,7 +2630,7 @@
           <a:p>
             <a:fld id="{050FF069-687C-4110-9C8F-B52BF36C2535}" type="datetimeFigureOut">
               <a:rPr lang="en-IN" smtClean="0"/>
-              <a:t>04-07-2025</a:t>
+              <a:t>06-07-2025</a:t>
             </a:fld>
             <a:endParaRPr lang="en-IN"/>
           </a:p>
@@ -2724,7 +2743,7 @@
           <a:p>
             <a:fld id="{050FF069-687C-4110-9C8F-B52BF36C2535}" type="datetimeFigureOut">
               <a:rPr lang="en-IN" smtClean="0"/>
-              <a:t>04-07-2025</a:t>
+              <a:t>06-07-2025</a:t>
             </a:fld>
             <a:endParaRPr lang="en-IN"/>
           </a:p>
@@ -3043,7 +3062,7 @@
           <a:p>
             <a:fld id="{050FF069-687C-4110-9C8F-B52BF36C2535}" type="datetimeFigureOut">
               <a:rPr lang="en-IN" smtClean="0"/>
-              <a:t>04-07-2025</a:t>
+              <a:t>06-07-2025</a:t>
             </a:fld>
             <a:endParaRPr lang="en-IN"/>
           </a:p>
@@ -3338,7 +3357,7 @@
           <a:p>
             <a:fld id="{050FF069-687C-4110-9C8F-B52BF36C2535}" type="datetimeFigureOut">
               <a:rPr lang="en-IN" smtClean="0"/>
-              <a:t>04-07-2025</a:t>
+              <a:t>06-07-2025</a:t>
             </a:fld>
             <a:endParaRPr lang="en-IN"/>
           </a:p>
@@ -4723,7 +4742,7 @@
           <a:p>
             <a:fld id="{050FF069-687C-4110-9C8F-B52BF36C2535}" type="datetimeFigureOut">
               <a:rPr lang="en-IN" smtClean="0"/>
-              <a:t>04-07-2025</a:t>
+              <a:t>06-07-2025</a:t>
             </a:fld>
             <a:endParaRPr lang="en-IN"/>
           </a:p>
@@ -5518,6 +5537,509 @@
         <p:cNvPr id="1" name="">
           <a:extLst>
             <a:ext uri="{FF2B5EF4-FFF2-40B4-BE49-F238E27FC236}">
+              <a16:creationId xmlns:a16="http://schemas.microsoft.com/office/drawing/2014/main" id="{F3D7A7F9-0D0C-329D-25DC-8DBDD4A563A9}"/>
+            </a:ext>
+          </a:extLst>
+        </p:cNvPr>
+        <p:cNvGrpSpPr/>
+        <p:nvPr/>
+      </p:nvGrpSpPr>
+      <p:grpSpPr>
+        <a:xfrm>
+          <a:off x="0" y="0"/>
+          <a:ext cx="0" cy="0"/>
+          <a:chOff x="0" y="0"/>
+          <a:chExt cx="0" cy="0"/>
+        </a:xfrm>
+      </p:grpSpPr>
+      <p:sp>
+        <p:nvSpPr>
+          <p:cNvPr id="7" name="TextBox 6">
+            <a:extLst>
+              <a:ext uri="{FF2B5EF4-FFF2-40B4-BE49-F238E27FC236}">
+                <a16:creationId xmlns:a16="http://schemas.microsoft.com/office/drawing/2014/main" id="{E93DFBB5-F703-60DB-6DCD-FAA31092D776}"/>
+              </a:ext>
+            </a:extLst>
+          </p:cNvPr>
+          <p:cNvSpPr txBox="1"/>
+          <p:nvPr/>
+        </p:nvSpPr>
+        <p:spPr>
+          <a:xfrm>
+            <a:off x="1349829" y="997566"/>
+            <a:ext cx="8389857" cy="5509200"/>
+          </a:xfrm>
+          <a:prstGeom prst="rect">
+            <a:avLst/>
+          </a:prstGeom>
+          <a:noFill/>
+        </p:spPr>
+        <p:txBody>
+          <a:bodyPr wrap="square">
+            <a:spAutoFit/>
+          </a:bodyPr>
+          <a:lstStyle/>
+          <a:p>
+            <a:r>
+              <a:rPr lang="en-US" sz="3200" dirty="0"/>
+              <a:t>The major clustering techniques are </a:t>
+            </a:r>
+          </a:p>
+          <a:p>
+            <a:pPr marL="342900" indent="-342900">
+              <a:buAutoNum type="arabicPeriod"/>
+            </a:pPr>
+            <a:r>
+              <a:rPr lang="en-US" sz="3200" b="1" dirty="0"/>
+              <a:t>Partitioning methods</a:t>
+            </a:r>
+          </a:p>
+          <a:p>
+            <a:pPr marL="800100" lvl="1" indent="-342900">
+              <a:buAutoNum type="arabicPeriod"/>
+            </a:pPr>
+            <a:r>
+              <a:rPr lang="en-US" sz="3200" b="1" dirty="0">
+                <a:solidFill>
+                  <a:schemeClr val="tx2">
+                    <a:lumMod val="75000"/>
+                    <a:lumOff val="25000"/>
+                  </a:schemeClr>
+                </a:solidFill>
+                <a:latin typeface="Söhne"/>
+              </a:rPr>
+              <a:t>K-Means </a:t>
+            </a:r>
+          </a:p>
+          <a:p>
+            <a:pPr marL="800100" lvl="1" indent="-342900">
+              <a:buAutoNum type="arabicPeriod"/>
+            </a:pPr>
+            <a:r>
+              <a:rPr lang="en-US" sz="3200" dirty="0" err="1"/>
+              <a:t>kmedoid</a:t>
+            </a:r>
+            <a:r>
+              <a:rPr lang="en-US" sz="3200" dirty="0"/>
+              <a:t>.</a:t>
+            </a:r>
+          </a:p>
+          <a:p>
+            <a:pPr marL="800100" lvl="1" indent="-342900">
+              <a:buAutoNum type="arabicPeriod"/>
+            </a:pPr>
+            <a:endParaRPr lang="en-US" sz="3200" dirty="0"/>
+          </a:p>
+          <a:p>
+            <a:pPr marL="342900" indent="-342900">
+              <a:buAutoNum type="arabicPeriod"/>
+            </a:pPr>
+            <a:r>
+              <a:rPr lang="en-US" sz="3200" b="1" dirty="0"/>
+              <a:t>Hierarchical methods </a:t>
+            </a:r>
+          </a:p>
+          <a:p>
+            <a:pPr marL="800100" lvl="1" indent="-342900">
+              <a:buAutoNum type="arabicPeriod"/>
+            </a:pPr>
+            <a:r>
+              <a:rPr lang="en-US" sz="3200" b="1" i="0" dirty="0">
+                <a:solidFill>
+                  <a:schemeClr val="tx2">
+                    <a:lumMod val="75000"/>
+                    <a:lumOff val="25000"/>
+                  </a:schemeClr>
+                </a:solidFill>
+                <a:effectLst/>
+                <a:latin typeface="Söhne"/>
+              </a:rPr>
+              <a:t>Agglomerative Hierarchical Clustering</a:t>
+            </a:r>
+          </a:p>
+          <a:p>
+            <a:pPr marL="800100" lvl="1" indent="-342900">
+              <a:buFontTx/>
+              <a:buAutoNum type="arabicPeriod"/>
+            </a:pPr>
+            <a:r>
+              <a:rPr lang="en-US" sz="3200" i="0" dirty="0">
+                <a:solidFill>
+                  <a:srgbClr val="0D0D0D"/>
+                </a:solidFill>
+                <a:effectLst/>
+                <a:latin typeface="Söhne"/>
+              </a:rPr>
+              <a:t>Divisive Hierarchical Clustering</a:t>
+            </a:r>
+          </a:p>
+          <a:p>
+            <a:pPr marL="800100" lvl="1" indent="-342900">
+              <a:buFontTx/>
+              <a:buAutoNum type="arabicPeriod"/>
+            </a:pPr>
+            <a:endParaRPr lang="en-US" sz="3200" dirty="0"/>
+          </a:p>
+          <a:p>
+            <a:pPr marL="342900" indent="-342900">
+              <a:buAutoNum type="arabicPeriod"/>
+            </a:pPr>
+            <a:r>
+              <a:rPr lang="en-US" sz="3200" b="1" dirty="0"/>
+              <a:t>Density-based methods</a:t>
+            </a:r>
+          </a:p>
+          <a:p>
+            <a:pPr marL="800100" lvl="1" indent="-342900">
+              <a:buAutoNum type="arabicPeriod"/>
+            </a:pPr>
+            <a:r>
+              <a:rPr lang="en-US" sz="3200" dirty="0"/>
+              <a:t>DBSCAN</a:t>
+            </a:r>
+          </a:p>
+        </p:txBody>
+      </p:sp>
+      <p:sp>
+        <p:nvSpPr>
+          <p:cNvPr id="3" name="TextBox 2">
+            <a:extLst>
+              <a:ext uri="{FF2B5EF4-FFF2-40B4-BE49-F238E27FC236}">
+                <a16:creationId xmlns:a16="http://schemas.microsoft.com/office/drawing/2014/main" id="{BA4B06C4-92A7-DC82-64D5-95000A6AD6D0}"/>
+              </a:ext>
+            </a:extLst>
+          </p:cNvPr>
+          <p:cNvSpPr txBox="1"/>
+          <p:nvPr/>
+        </p:nvSpPr>
+        <p:spPr>
+          <a:xfrm>
+            <a:off x="1219200" y="351234"/>
+            <a:ext cx="8112816" cy="646331"/>
+          </a:xfrm>
+          <a:prstGeom prst="rect">
+            <a:avLst/>
+          </a:prstGeom>
+          <a:noFill/>
+        </p:spPr>
+        <p:txBody>
+          <a:bodyPr wrap="square">
+            <a:spAutoFit/>
+          </a:bodyPr>
+          <a:lstStyle/>
+          <a:p>
+            <a:r>
+              <a:rPr lang="en-US" sz="3600" b="1" dirty="0">
+                <a:solidFill>
+                  <a:srgbClr val="002060"/>
+                </a:solidFill>
+              </a:rPr>
+              <a:t>Different Types of Clustering Techniques</a:t>
+            </a:r>
+            <a:r>
+              <a:rPr lang="en-US" sz="3600" dirty="0">
+                <a:solidFill>
+                  <a:srgbClr val="002060"/>
+                </a:solidFill>
+              </a:rPr>
+              <a:t> </a:t>
+            </a:r>
+          </a:p>
+        </p:txBody>
+      </p:sp>
+    </p:spTree>
+    <p:extLst>
+      <p:ext uri="{BB962C8B-B14F-4D97-AF65-F5344CB8AC3E}">
+        <p14:creationId xmlns:p14="http://schemas.microsoft.com/office/powerpoint/2010/main" val="3438584767"/>
+      </p:ext>
+    </p:extLst>
+  </p:cSld>
+  <p:clrMapOvr>
+    <a:masterClrMapping/>
+  </p:clrMapOvr>
+</p:sld>
+</file>
+
+<file path=ppt/slides/slide11.xml><?xml version="1.0" encoding="utf-8"?>
+<p:sld xmlns:a="http://schemas.openxmlformats.org/drawingml/2006/main" xmlns:r="http://schemas.openxmlformats.org/officeDocument/2006/relationships" xmlns:p="http://schemas.openxmlformats.org/presentationml/2006/main">
+  <p:cSld>
+    <p:spTree>
+      <p:nvGrpSpPr>
+        <p:cNvPr id="1" name="">
+          <a:extLst>
+            <a:ext uri="{FF2B5EF4-FFF2-40B4-BE49-F238E27FC236}">
+              <a16:creationId xmlns:a16="http://schemas.microsoft.com/office/drawing/2014/main" id="{051CE02B-BEEF-95F7-ACB7-8B9D38B476E3}"/>
+            </a:ext>
+          </a:extLst>
+        </p:cNvPr>
+        <p:cNvGrpSpPr/>
+        <p:nvPr/>
+      </p:nvGrpSpPr>
+      <p:grpSpPr>
+        <a:xfrm>
+          <a:off x="0" y="0"/>
+          <a:ext cx="0" cy="0"/>
+          <a:chOff x="0" y="0"/>
+          <a:chExt cx="0" cy="0"/>
+        </a:xfrm>
+      </p:grpSpPr>
+      <p:sp>
+        <p:nvSpPr>
+          <p:cNvPr id="6" name="TextBox 5">
+            <a:extLst>
+              <a:ext uri="{FF2B5EF4-FFF2-40B4-BE49-F238E27FC236}">
+                <a16:creationId xmlns:a16="http://schemas.microsoft.com/office/drawing/2014/main" id="{D7F0F61B-B69E-2BED-E271-6FAF3AC420CE}"/>
+              </a:ext>
+            </a:extLst>
+          </p:cNvPr>
+          <p:cNvSpPr txBox="1"/>
+          <p:nvPr/>
+        </p:nvSpPr>
+        <p:spPr>
+          <a:xfrm>
+            <a:off x="564045" y="530951"/>
+            <a:ext cx="11064738" cy="5324535"/>
+          </a:xfrm>
+          <a:prstGeom prst="rect">
+            <a:avLst/>
+          </a:prstGeom>
+          <a:noFill/>
+        </p:spPr>
+        <p:txBody>
+          <a:bodyPr wrap="square">
+            <a:spAutoFit/>
+          </a:bodyPr>
+          <a:lstStyle/>
+          <a:p>
+            <a:r>
+              <a:rPr lang="en-US" sz="2800" b="1" dirty="0">
+                <a:solidFill>
+                  <a:srgbClr val="C00000"/>
+                </a:solidFill>
+              </a:rPr>
+              <a:t>Partitioning Methods:</a:t>
+            </a:r>
+          </a:p>
+          <a:p>
+            <a:r>
+              <a:rPr lang="en-US" sz="2400" b="0" i="0" dirty="0">
+                <a:solidFill>
+                  <a:srgbClr val="0D0D0D"/>
+                </a:solidFill>
+                <a:effectLst/>
+                <a:latin typeface="Söhne"/>
+              </a:rPr>
+              <a:t>	Partitioning methods aim to </a:t>
+            </a:r>
+            <a:r>
+              <a:rPr lang="en-US" sz="2400" b="1" i="0" dirty="0">
+                <a:solidFill>
+                  <a:srgbClr val="0D0D0D"/>
+                </a:solidFill>
+                <a:effectLst/>
+                <a:latin typeface="Söhne"/>
+              </a:rPr>
+              <a:t>divide the data points into </a:t>
+            </a:r>
+            <a:r>
+              <a:rPr lang="en-US" sz="2400" b="1" i="0" dirty="0">
+                <a:solidFill>
+                  <a:srgbClr val="C00000"/>
+                </a:solidFill>
+                <a:effectLst/>
+                <a:latin typeface="Söhne"/>
+              </a:rPr>
+              <a:t>distinct</a:t>
+            </a:r>
+            <a:r>
+              <a:rPr lang="en-US" sz="2400" b="1" i="0" dirty="0">
+                <a:solidFill>
+                  <a:srgbClr val="0D0D0D"/>
+                </a:solidFill>
+                <a:effectLst/>
+                <a:latin typeface="Söhne"/>
+              </a:rPr>
+              <a:t> </a:t>
+            </a:r>
+            <a:r>
+              <a:rPr lang="en-US" sz="2400" b="1" i="0" dirty="0">
+                <a:solidFill>
+                  <a:srgbClr val="C00000"/>
+                </a:solidFill>
+                <a:effectLst/>
+                <a:latin typeface="Söhne"/>
+              </a:rPr>
+              <a:t>non-overlapping </a:t>
+            </a:r>
+            <a:r>
+              <a:rPr lang="en-US" sz="2400" b="1" i="0" dirty="0">
+                <a:solidFill>
+                  <a:srgbClr val="0D0D0D"/>
+                </a:solidFill>
+                <a:effectLst/>
+                <a:latin typeface="Söhne"/>
+              </a:rPr>
+              <a:t>subgroups or clusters. </a:t>
+            </a:r>
+            <a:r>
+              <a:rPr lang="en-US" sz="2400" b="1" i="0" dirty="0">
+                <a:solidFill>
+                  <a:srgbClr val="C00000"/>
+                </a:solidFill>
+                <a:effectLst/>
+                <a:latin typeface="Söhne"/>
+              </a:rPr>
+              <a:t>Each data point belongs to exactly one cluster. </a:t>
+            </a:r>
+          </a:p>
+          <a:p>
+            <a:r>
+              <a:rPr lang="en-US" sz="2400" dirty="0"/>
+              <a:t>	</a:t>
+            </a:r>
+          </a:p>
+          <a:p>
+            <a:r>
+              <a:rPr lang="en-US" sz="2400" dirty="0"/>
+              <a:t>Two of the most important algorithms for partitioning-based clustering are:</a:t>
+            </a:r>
+          </a:p>
+          <a:p>
+            <a:pPr marL="342900" indent="-342900">
+              <a:buAutoNum type="arabicPeriod"/>
+            </a:pPr>
+            <a:r>
+              <a:rPr lang="en-US" sz="2400" b="1" dirty="0"/>
+              <a:t>k-means (</a:t>
+            </a:r>
+            <a:r>
+              <a:rPr lang="en-US" sz="2400" b="1" dirty="0">
+                <a:solidFill>
+                  <a:srgbClr val="C00000"/>
+                </a:solidFill>
+              </a:rPr>
+              <a:t>A centroid-based technique)</a:t>
+            </a:r>
+            <a:endParaRPr lang="en-US" sz="2400" b="1" dirty="0"/>
+          </a:p>
+          <a:p>
+            <a:pPr marL="342900" indent="-342900">
+              <a:buAutoNum type="arabicPeriod"/>
+            </a:pPr>
+            <a:r>
+              <a:rPr lang="en-US" sz="2400" b="1" dirty="0" err="1"/>
+              <a:t>kmedoid</a:t>
+            </a:r>
+            <a:endParaRPr lang="en-US" sz="2400" b="1" dirty="0"/>
+          </a:p>
+          <a:p>
+            <a:pPr marL="342900" indent="-342900">
+              <a:buAutoNum type="arabicPeriod"/>
+            </a:pPr>
+            <a:endParaRPr lang="en-US" sz="2400" b="1" dirty="0">
+              <a:solidFill>
+                <a:srgbClr val="C00000"/>
+              </a:solidFill>
+            </a:endParaRPr>
+          </a:p>
+          <a:p>
+            <a:pPr marL="342900" indent="-342900">
+              <a:buAutoNum type="arabicPeriod"/>
+            </a:pPr>
+            <a:endParaRPr lang="en-US" sz="2400" b="1" dirty="0">
+              <a:solidFill>
+                <a:srgbClr val="C00000"/>
+              </a:solidFill>
+            </a:endParaRPr>
+          </a:p>
+          <a:p>
+            <a:r>
+              <a:rPr lang="en-US" sz="2400" dirty="0"/>
+              <a:t>	In the k-means algorithm, the </a:t>
+            </a:r>
+            <a:r>
+              <a:rPr lang="en-US" sz="2400" b="1" dirty="0">
+                <a:solidFill>
+                  <a:schemeClr val="tx2">
+                    <a:lumMod val="75000"/>
+                    <a:lumOff val="25000"/>
+                  </a:schemeClr>
+                </a:solidFill>
+              </a:rPr>
+              <a:t>centroid</a:t>
+            </a:r>
+            <a:r>
+              <a:rPr lang="en-US" sz="2400" dirty="0"/>
+              <a:t> of the prototype is identified for clustering, which is normally the </a:t>
+            </a:r>
+            <a:r>
+              <a:rPr lang="en-US" sz="2400" b="1" dirty="0">
+                <a:solidFill>
+                  <a:schemeClr val="tx2">
+                    <a:lumMod val="75000"/>
+                    <a:lumOff val="25000"/>
+                  </a:schemeClr>
+                </a:solidFill>
+              </a:rPr>
+              <a:t>mean of a group of points</a:t>
+            </a:r>
+            <a:r>
+              <a:rPr lang="en-US" sz="2400" dirty="0"/>
+              <a:t>. Similarly, the k-medoid algorithm identifies the </a:t>
+            </a:r>
+            <a:r>
+              <a:rPr lang="en-US" sz="2400" b="1" dirty="0">
+                <a:solidFill>
+                  <a:srgbClr val="C00000"/>
+                </a:solidFill>
+              </a:rPr>
+              <a:t>medoid</a:t>
+            </a:r>
+            <a:r>
+              <a:rPr lang="en-US" sz="2400" dirty="0"/>
+              <a:t> which is the </a:t>
+            </a:r>
+            <a:r>
+              <a:rPr lang="en-US" sz="2400" b="1" dirty="0">
+                <a:solidFill>
+                  <a:srgbClr val="C00000"/>
+                </a:solidFill>
+              </a:rPr>
+              <a:t>most representative point</a:t>
+            </a:r>
+            <a:r>
+              <a:rPr lang="en-US" sz="2400" dirty="0"/>
+              <a:t> for a group of points. We can also infer that in most cases, the centroid does not correspond to an actual data point, whereas medoid is always an actual data point.</a:t>
+            </a:r>
+            <a:endParaRPr lang="en-US" sz="2400" b="1" dirty="0">
+              <a:solidFill>
+                <a:srgbClr val="C00000"/>
+              </a:solidFill>
+            </a:endParaRPr>
+          </a:p>
+        </p:txBody>
+      </p:sp>
+    </p:spTree>
+    <p:extLst>
+      <p:ext uri="{BB962C8B-B14F-4D97-AF65-F5344CB8AC3E}">
+        <p14:creationId xmlns:p14="http://schemas.microsoft.com/office/powerpoint/2010/main" val="3978233378"/>
+      </p:ext>
+    </p:extLst>
+  </p:cSld>
+  <p:clrMapOvr>
+    <a:masterClrMapping/>
+  </p:clrMapOvr>
+</p:sld>
+</file>
+
+<file path=ppt/slides/slide12.xml><?xml version="1.0" encoding="utf-8"?>
+<p:sld xmlns:a="http://schemas.openxmlformats.org/drawingml/2006/main" xmlns:r="http://schemas.openxmlformats.org/officeDocument/2006/relationships" xmlns:p="http://schemas.openxmlformats.org/presentationml/2006/main">
+  <p:cSld>
+    <p:spTree>
+      <p:nvGrpSpPr>
+        <p:cNvPr id="1" name="">
+          <a:extLst>
+            <a:ext uri="{FF2B5EF4-FFF2-40B4-BE49-F238E27FC236}">
               <a16:creationId xmlns:a16="http://schemas.microsoft.com/office/drawing/2014/main" id="{8AE2A66C-C4A7-C7B7-6FAE-BB60108C070E}"/>
             </a:ext>
           </a:extLst>
@@ -5557,9 +6079,203 @@
         </p:spPr>
         <p:txBody>
           <a:bodyPr>
-            <a:normAutofit/>
+            <a:normAutofit lnSpcReduction="10000"/>
           </a:bodyPr>
           <a:lstStyle/>
+          <a:p>
+            <a:pPr marL="0" indent="0">
+              <a:buNone/>
+            </a:pPr>
+            <a:r>
+              <a:rPr lang="en-US" sz="2800" b="1" dirty="0"/>
+              <a:t>K-Means Clustering:</a:t>
+            </a:r>
+          </a:p>
+          <a:p>
+            <a:pPr marL="0" indent="0">
+              <a:buNone/>
+            </a:pPr>
+            <a:r>
+              <a:rPr lang="en-US" sz="2400" dirty="0"/>
+              <a:t>K-Means is an unsupervised learning algorithm used to </a:t>
+            </a:r>
+            <a:r>
+              <a:rPr lang="en-US" sz="2400" b="1" dirty="0">
+                <a:solidFill>
+                  <a:schemeClr val="tx2">
+                    <a:lumMod val="50000"/>
+                    <a:lumOff val="50000"/>
+                  </a:schemeClr>
+                </a:solidFill>
+              </a:rPr>
+              <a:t>group similar data points into K clusters</a:t>
+            </a:r>
+            <a:r>
+              <a:rPr lang="en-US" sz="2400" dirty="0"/>
+              <a:t>. Each cluster has a centroid (center point), and each data point belongs to the cluster with the nearest </a:t>
+            </a:r>
+            <a:r>
+              <a:rPr lang="en-US" sz="2400" b="1" dirty="0">
+                <a:solidFill>
+                  <a:srgbClr val="C00000"/>
+                </a:solidFill>
+                <a:latin typeface="Söhne"/>
+              </a:rPr>
+              <a:t>mean </a:t>
+            </a:r>
+            <a:r>
+              <a:rPr lang="en-US" sz="2400" dirty="0"/>
+              <a:t>or </a:t>
+            </a:r>
+            <a:r>
+              <a:rPr lang="en-US" sz="2400" b="1" dirty="0">
+                <a:solidFill>
+                  <a:srgbClr val="C00000"/>
+                </a:solidFill>
+                <a:latin typeface="Söhne"/>
+              </a:rPr>
+              <a:t>centroid</a:t>
+            </a:r>
+            <a:r>
+              <a:rPr lang="en-US" sz="2400" dirty="0"/>
+              <a:t>.</a:t>
+            </a:r>
+          </a:p>
+          <a:p>
+            <a:r>
+              <a:rPr lang="en-US" sz="2400" dirty="0">
+                <a:solidFill>
+                  <a:srgbClr val="273239"/>
+                </a:solidFill>
+                <a:latin typeface="Calibri (Body)"/>
+              </a:rPr>
+              <a:t>The goal of </a:t>
+            </a:r>
+            <a:r>
+              <a:rPr lang="en-US" sz="2400" u="sng" dirty="0">
+                <a:latin typeface="Calibri (Body)"/>
+                <a:hlinkClick r:id="rId2"/>
+              </a:rPr>
+              <a:t>clustering</a:t>
+            </a:r>
+            <a:r>
+              <a:rPr lang="en-US" sz="2400" dirty="0">
+                <a:solidFill>
+                  <a:srgbClr val="273239"/>
+                </a:solidFill>
+                <a:latin typeface="Calibri (Body)"/>
+              </a:rPr>
+              <a:t> is to divide the </a:t>
+            </a:r>
+            <a:r>
+              <a:rPr lang="en-US" sz="2400" b="1" dirty="0">
+                <a:solidFill>
+                  <a:srgbClr val="C00000"/>
+                </a:solidFill>
+                <a:latin typeface="Calibri (Body)"/>
+              </a:rPr>
+              <a:t>population</a:t>
+            </a:r>
+            <a:r>
+              <a:rPr lang="en-US" sz="2400" dirty="0">
+                <a:solidFill>
+                  <a:srgbClr val="273239"/>
+                </a:solidFill>
+                <a:latin typeface="Calibri (Body)"/>
+              </a:rPr>
+              <a:t> or set of data points into a number of groups </a:t>
+            </a:r>
+            <a:r>
+              <a:rPr lang="en-US" sz="2400" b="1" dirty="0">
+                <a:solidFill>
+                  <a:srgbClr val="273239"/>
+                </a:solidFill>
+                <a:latin typeface="Calibri (Body)"/>
+              </a:rPr>
+              <a:t>so that the data points within each group are more comparable to one another and different from the data points within the other groups</a:t>
+            </a:r>
+            <a:r>
+              <a:rPr lang="en-US" sz="2400" dirty="0">
+                <a:solidFill>
+                  <a:srgbClr val="273239"/>
+                </a:solidFill>
+                <a:latin typeface="Calibri (Body)"/>
+              </a:rPr>
+              <a:t>.</a:t>
+            </a:r>
+            <a:r>
+              <a:rPr lang="en-US" sz="2400" dirty="0">
+                <a:solidFill>
+                  <a:srgbClr val="C00000"/>
+                </a:solidFill>
+                <a:latin typeface="Calibri (Body)"/>
+              </a:rPr>
+              <a:t> It is essentially a grouping of things based on how similar and different they are to one another. </a:t>
+            </a:r>
+          </a:p>
+          <a:p>
+            <a:r>
+              <a:rPr lang="en-US" sz="2400" dirty="0">
+                <a:solidFill>
+                  <a:srgbClr val="273239"/>
+                </a:solidFill>
+                <a:latin typeface="Calibri (Body)"/>
+              </a:rPr>
+              <a:t>	</a:t>
+            </a:r>
+            <a:r>
+              <a:rPr lang="en-US" sz="2400" dirty="0">
+                <a:solidFill>
+                  <a:schemeClr val="accent6"/>
+                </a:solidFill>
+              </a:rPr>
+              <a:t>The principle of the k-means algorithm is to assign each of the ‘n’ data points to one of the K clusters where ‘K’ is a </a:t>
+            </a:r>
+            <a:r>
+              <a:rPr lang="en-US" sz="2400" b="1" dirty="0">
+                <a:solidFill>
+                  <a:schemeClr val="accent6"/>
+                </a:solidFill>
+              </a:rPr>
+              <a:t>user-defined parameter </a:t>
+            </a:r>
+            <a:r>
+              <a:rPr lang="en-US" sz="2400" dirty="0">
+                <a:solidFill>
+                  <a:schemeClr val="accent6"/>
+                </a:solidFill>
+              </a:rPr>
+              <a:t>as the number of clusters desired</a:t>
+            </a:r>
+            <a:r>
+              <a:rPr lang="en-US" sz="2400" dirty="0"/>
+              <a:t>. The objective is to maximize the </a:t>
+            </a:r>
+            <a:r>
+              <a:rPr lang="en-US" sz="2400" b="1" dirty="0">
+                <a:solidFill>
+                  <a:srgbClr val="C00000"/>
+                </a:solidFill>
+              </a:rPr>
+              <a:t>Homogeneity</a:t>
+            </a:r>
+            <a:r>
+              <a:rPr lang="en-US" sz="2400" dirty="0"/>
+              <a:t> within the clusters and also to maximize the differences between the clusters. The homogeneity and differences are measured in terms of the distance between the objects or points in the data set. </a:t>
+            </a:r>
+            <a:endParaRPr lang="en-US" sz="2400" dirty="0">
+              <a:solidFill>
+                <a:srgbClr val="273239"/>
+              </a:solidFill>
+              <a:latin typeface="Calibri (Body)"/>
+            </a:endParaRPr>
+          </a:p>
+          <a:p>
+            <a:pPr marL="0" indent="0">
+              <a:buNone/>
+            </a:pPr>
+            <a:endParaRPr lang="en-US" sz="2400" dirty="0"/>
+          </a:p>
           <a:p>
             <a:pPr marL="0" indent="0">
               <a:buNone/>
@@ -5581,7 +6297,634 @@
 </p:sld>
 </file>
 
-<file path=ppt/slides/slide11.xml><?xml version="1.0" encoding="utf-8"?>
+<file path=ppt/slides/slide13.xml><?xml version="1.0" encoding="utf-8"?>
+<p:sld xmlns:a="http://schemas.openxmlformats.org/drawingml/2006/main" xmlns:r="http://schemas.openxmlformats.org/officeDocument/2006/relationships" xmlns:p="http://schemas.openxmlformats.org/presentationml/2006/main">
+  <p:cSld>
+    <p:spTree>
+      <p:nvGrpSpPr>
+        <p:cNvPr id="1" name="">
+          <a:extLst>
+            <a:ext uri="{FF2B5EF4-FFF2-40B4-BE49-F238E27FC236}">
+              <a16:creationId xmlns:a16="http://schemas.microsoft.com/office/drawing/2014/main" id="{5DC1D124-782C-FBE6-B006-71A8E9F32022}"/>
+            </a:ext>
+          </a:extLst>
+        </p:cNvPr>
+        <p:cNvGrpSpPr/>
+        <p:nvPr/>
+      </p:nvGrpSpPr>
+      <p:grpSpPr>
+        <a:xfrm>
+          <a:off x="0" y="0"/>
+          <a:ext cx="0" cy="0"/>
+          <a:chOff x="0" y="0"/>
+          <a:chExt cx="0" cy="0"/>
+        </a:xfrm>
+      </p:grpSpPr>
+      <p:sp>
+        <p:nvSpPr>
+          <p:cNvPr id="4" name="TextBox 3">
+            <a:extLst>
+              <a:ext uri="{FF2B5EF4-FFF2-40B4-BE49-F238E27FC236}">
+                <a16:creationId xmlns:a16="http://schemas.microsoft.com/office/drawing/2014/main" id="{76FBA7F6-DA95-75DB-9DB6-00380EAF2C6D}"/>
+              </a:ext>
+            </a:extLst>
+          </p:cNvPr>
+          <p:cNvSpPr txBox="1"/>
+          <p:nvPr/>
+        </p:nvSpPr>
+        <p:spPr>
+          <a:xfrm>
+            <a:off x="604935" y="305068"/>
+            <a:ext cx="11383345" cy="6247864"/>
+          </a:xfrm>
+          <a:prstGeom prst="rect">
+            <a:avLst/>
+          </a:prstGeom>
+          <a:noFill/>
+        </p:spPr>
+        <p:txBody>
+          <a:bodyPr wrap="square">
+            <a:spAutoFit/>
+          </a:bodyPr>
+          <a:lstStyle/>
+          <a:p>
+            <a:pPr algn="l"/>
+            <a:r>
+              <a:rPr lang="en-US" sz="2000" b="1" i="0" dirty="0">
+                <a:solidFill>
+                  <a:srgbClr val="002060"/>
+                </a:solidFill>
+                <a:effectLst/>
+                <a:latin typeface="Söhne"/>
+              </a:rPr>
+              <a:t>What the “Means” indicates in the Name K-Means:</a:t>
+            </a:r>
+            <a:endParaRPr lang="en-US" sz="2000" b="0" i="0" dirty="0">
+              <a:solidFill>
+                <a:srgbClr val="002060"/>
+              </a:solidFill>
+              <a:effectLst/>
+              <a:latin typeface="Söhne"/>
+            </a:endParaRPr>
+          </a:p>
+          <a:p>
+            <a:pPr algn="l"/>
+            <a:r>
+              <a:rPr lang="en-US" sz="2000" b="0" i="0" dirty="0">
+                <a:solidFill>
+                  <a:srgbClr val="0D0D0D"/>
+                </a:solidFill>
+                <a:effectLst/>
+                <a:latin typeface="Söhne"/>
+              </a:rPr>
+              <a:t>	In the context of the k-Means algorithm, "</a:t>
+            </a:r>
+            <a:r>
+              <a:rPr lang="en-US" sz="2000" b="1" i="0" dirty="0">
+                <a:solidFill>
+                  <a:srgbClr val="0D0D0D"/>
+                </a:solidFill>
+                <a:effectLst/>
+                <a:latin typeface="Söhne"/>
+              </a:rPr>
+              <a:t>Means</a:t>
+            </a:r>
+            <a:r>
+              <a:rPr lang="en-US" sz="2000" b="0" i="0" dirty="0">
+                <a:solidFill>
+                  <a:srgbClr val="0D0D0D"/>
+                </a:solidFill>
+                <a:effectLst/>
+                <a:latin typeface="Söhne"/>
+              </a:rPr>
+              <a:t>" refers to the </a:t>
+            </a:r>
+            <a:r>
+              <a:rPr lang="en-US" sz="2000" b="1" i="0" dirty="0">
+                <a:solidFill>
+                  <a:srgbClr val="C00000"/>
+                </a:solidFill>
+                <a:effectLst/>
+                <a:latin typeface="Söhne"/>
+              </a:rPr>
+              <a:t>centroids</a:t>
+            </a:r>
+            <a:r>
+              <a:rPr lang="en-US" sz="2000" b="0" i="0" dirty="0">
+                <a:solidFill>
+                  <a:srgbClr val="0D0D0D"/>
+                </a:solidFill>
+                <a:effectLst/>
+                <a:latin typeface="Söhne"/>
+              </a:rPr>
+              <a:t> </a:t>
+            </a:r>
+            <a:r>
+              <a:rPr lang="en-US" sz="2000" b="1" i="0" dirty="0">
+                <a:solidFill>
+                  <a:srgbClr val="0D0D0D"/>
+                </a:solidFill>
+                <a:effectLst/>
+                <a:latin typeface="Söhne"/>
+              </a:rPr>
+              <a:t>of the clusters</a:t>
+            </a:r>
+            <a:r>
+              <a:rPr lang="en-US" sz="2000" b="0" i="0" dirty="0">
+                <a:solidFill>
+                  <a:srgbClr val="0D0D0D"/>
+                </a:solidFill>
+                <a:effectLst/>
+                <a:latin typeface="Söhne"/>
+              </a:rPr>
+              <a:t>.</a:t>
+            </a:r>
+          </a:p>
+          <a:p>
+            <a:pPr algn="l"/>
+            <a:r>
+              <a:rPr lang="en-US" sz="2000" b="0" i="0" dirty="0">
+                <a:solidFill>
+                  <a:srgbClr val="0D0D0D"/>
+                </a:solidFill>
+                <a:effectLst/>
+                <a:latin typeface="Söhne"/>
+              </a:rPr>
+              <a:t>	The word "Means" comes from the fact that in the k-Means algorithm, each cluster is represented by the </a:t>
+            </a:r>
+            <a:r>
+              <a:rPr lang="en-US" sz="2000" b="1" i="0" dirty="0">
+                <a:solidFill>
+                  <a:srgbClr val="C00000"/>
+                </a:solidFill>
+                <a:effectLst/>
+                <a:latin typeface="Söhne"/>
+              </a:rPr>
+              <a:t>mean</a:t>
+            </a:r>
+            <a:r>
+              <a:rPr lang="en-US" sz="2000" b="0" i="0" dirty="0">
+                <a:solidFill>
+                  <a:srgbClr val="0D0D0D"/>
+                </a:solidFill>
+                <a:effectLst/>
+                <a:latin typeface="Söhne"/>
+              </a:rPr>
+              <a:t> or </a:t>
+            </a:r>
+            <a:r>
+              <a:rPr lang="en-US" sz="2000" b="1" i="0" dirty="0">
+                <a:solidFill>
+                  <a:srgbClr val="C00000"/>
+                </a:solidFill>
+                <a:effectLst/>
+                <a:latin typeface="Söhne"/>
+              </a:rPr>
+              <a:t>average</a:t>
+            </a:r>
+            <a:r>
+              <a:rPr lang="en-US" sz="2000" b="0" i="0" dirty="0">
+                <a:solidFill>
+                  <a:srgbClr val="0D0D0D"/>
+                </a:solidFill>
+                <a:effectLst/>
+                <a:latin typeface="Söhne"/>
+              </a:rPr>
+              <a:t>  of all the data points assigned to that cluster. These means are also called centroids.</a:t>
+            </a:r>
+          </a:p>
+          <a:p>
+            <a:pPr algn="l"/>
+            <a:r>
+              <a:rPr lang="en-US" sz="2000" b="0" i="0" dirty="0">
+                <a:solidFill>
+                  <a:srgbClr val="0D0D0D"/>
+                </a:solidFill>
+                <a:effectLst/>
+                <a:latin typeface="Söhne"/>
+              </a:rPr>
+              <a:t>	During each iteration of the algorithm, the centroids are recalculated to update their positions based on the current assignment of data points to clusters. The centroids are computed as the average of the data points belonging to each cluster.</a:t>
+            </a:r>
+          </a:p>
+          <a:p>
+            <a:pPr algn="l"/>
+            <a:endParaRPr lang="en-US" sz="2000" dirty="0">
+              <a:solidFill>
+                <a:srgbClr val="0D0D0D"/>
+              </a:solidFill>
+              <a:latin typeface="Söhne"/>
+            </a:endParaRPr>
+          </a:p>
+          <a:p>
+            <a:pPr algn="l"/>
+            <a:r>
+              <a:rPr lang="en-US" sz="2000" b="1" i="0" dirty="0">
+                <a:solidFill>
+                  <a:srgbClr val="C00000"/>
+                </a:solidFill>
+                <a:effectLst/>
+                <a:latin typeface="Söhne"/>
+              </a:rPr>
+              <a:t>For example, </a:t>
+            </a:r>
+            <a:r>
+              <a:rPr lang="en-US" sz="2000" b="0" i="0" dirty="0">
+                <a:solidFill>
+                  <a:srgbClr val="0D0D0D"/>
+                </a:solidFill>
+                <a:effectLst/>
+                <a:latin typeface="Söhne"/>
+              </a:rPr>
+              <a:t>suppose you have a cluster of two-dimensional points with the following coordinates:</a:t>
+            </a:r>
+          </a:p>
+          <a:p>
+            <a:pPr algn="l"/>
+            <a:endParaRPr lang="en-US" sz="2000" dirty="0">
+              <a:solidFill>
+                <a:srgbClr val="0D0D0D"/>
+              </a:solidFill>
+              <a:latin typeface="Söhne"/>
+            </a:endParaRPr>
+          </a:p>
+          <a:p>
+            <a:pPr algn="l"/>
+            <a:r>
+              <a:rPr lang="en-US" sz="2000" b="0" i="0" dirty="0">
+                <a:solidFill>
+                  <a:srgbClr val="0D0D0D"/>
+                </a:solidFill>
+                <a:effectLst/>
+                <a:latin typeface="Söhne"/>
+              </a:rPr>
+              <a:t>	(1, 3), (2, 4), (3, 5)</a:t>
+            </a:r>
+          </a:p>
+          <a:p>
+            <a:pPr algn="l"/>
+            <a:endParaRPr lang="en-US" sz="2000" b="0" i="0" dirty="0">
+              <a:solidFill>
+                <a:srgbClr val="0D0D0D"/>
+              </a:solidFill>
+              <a:effectLst/>
+              <a:latin typeface="Söhne"/>
+            </a:endParaRPr>
+          </a:p>
+          <a:p>
+            <a:pPr algn="l"/>
+            <a:r>
+              <a:rPr lang="en-US" sz="2000" b="0" i="0" dirty="0">
+                <a:solidFill>
+                  <a:srgbClr val="0D0D0D"/>
+                </a:solidFill>
+                <a:effectLst/>
+                <a:latin typeface="Söhne"/>
+              </a:rPr>
+              <a:t>	</a:t>
+            </a:r>
+            <a:r>
+              <a:rPr lang="en-US" sz="2000" b="1" i="0" dirty="0">
+                <a:solidFill>
+                  <a:schemeClr val="accent6"/>
+                </a:solidFill>
+                <a:effectLst/>
+                <a:latin typeface="Söhne"/>
+              </a:rPr>
+              <a:t>To find the centroid of this cluster, you would calculate the mean of the x-coordinates and the mean of the y-coordinates separately:</a:t>
+            </a:r>
+          </a:p>
+          <a:p>
+            <a:pPr algn="l"/>
+            <a:r>
+              <a:rPr lang="en-US" sz="2000" b="0" i="0" dirty="0">
+                <a:solidFill>
+                  <a:srgbClr val="0D0D0D"/>
+                </a:solidFill>
+                <a:effectLst/>
+                <a:latin typeface="Söhne"/>
+              </a:rPr>
+              <a:t>Mean x-coordinate = (1 + 2 + 3) / 3 = 2</a:t>
+            </a:r>
+          </a:p>
+          <a:p>
+            <a:pPr algn="l"/>
+            <a:r>
+              <a:rPr lang="en-US" sz="2000" b="0" i="0" dirty="0">
+                <a:solidFill>
+                  <a:srgbClr val="0D0D0D"/>
+                </a:solidFill>
+                <a:effectLst/>
+                <a:latin typeface="Söhne"/>
+              </a:rPr>
+              <a:t>Mean y-coordinate = (3 + 4 + 5) / 3 = 4</a:t>
+            </a:r>
+          </a:p>
+          <a:p>
+            <a:pPr algn="l"/>
+            <a:endParaRPr lang="en-US" sz="2000" dirty="0">
+              <a:solidFill>
+                <a:srgbClr val="0D0D0D"/>
+              </a:solidFill>
+              <a:latin typeface="Söhne"/>
+            </a:endParaRPr>
+          </a:p>
+          <a:p>
+            <a:pPr algn="l"/>
+            <a:r>
+              <a:rPr lang="en-US" sz="2000" b="0" i="0" dirty="0">
+                <a:solidFill>
+                  <a:srgbClr val="0D0D0D"/>
+                </a:solidFill>
+                <a:effectLst/>
+                <a:latin typeface="Söhne"/>
+              </a:rPr>
+              <a:t>	So, the centroid of this cluster would be the point (2, 4). This point represents the "</a:t>
+            </a:r>
+            <a:r>
+              <a:rPr lang="en-US" sz="2000" b="1" i="0" dirty="0">
+                <a:solidFill>
+                  <a:srgbClr val="C00000"/>
+                </a:solidFill>
+                <a:effectLst/>
+                <a:latin typeface="Söhne"/>
+              </a:rPr>
+              <a:t>mean</a:t>
+            </a:r>
+            <a:r>
+              <a:rPr lang="en-US" sz="2000" b="0" i="0" dirty="0">
+                <a:solidFill>
+                  <a:srgbClr val="0D0D0D"/>
+                </a:solidFill>
+                <a:effectLst/>
+                <a:latin typeface="Söhne"/>
+              </a:rPr>
+              <a:t>" or "</a:t>
+            </a:r>
+            <a:r>
+              <a:rPr lang="en-US" sz="2000" b="1" i="0" dirty="0">
+                <a:solidFill>
+                  <a:srgbClr val="C00000"/>
+                </a:solidFill>
+                <a:effectLst/>
+                <a:latin typeface="Söhne"/>
+              </a:rPr>
+              <a:t>average</a:t>
+            </a:r>
+            <a:r>
+              <a:rPr lang="en-US" sz="2000" b="0" i="0" dirty="0">
+                <a:solidFill>
+                  <a:srgbClr val="0D0D0D"/>
+                </a:solidFill>
+                <a:effectLst/>
+                <a:latin typeface="Söhne"/>
+              </a:rPr>
+              <a:t>" location of the data points in that cluster.</a:t>
+            </a:r>
+          </a:p>
+        </p:txBody>
+      </p:sp>
+    </p:spTree>
+    <p:extLst>
+      <p:ext uri="{BB962C8B-B14F-4D97-AF65-F5344CB8AC3E}">
+        <p14:creationId xmlns:p14="http://schemas.microsoft.com/office/powerpoint/2010/main" val="119090809"/>
+      </p:ext>
+    </p:extLst>
+  </p:cSld>
+  <p:clrMapOvr>
+    <a:masterClrMapping/>
+  </p:clrMapOvr>
+</p:sld>
+</file>
+
+<file path=ppt/slides/slide14.xml><?xml version="1.0" encoding="utf-8"?>
+<p:sld xmlns:a="http://schemas.openxmlformats.org/drawingml/2006/main" xmlns:r="http://schemas.openxmlformats.org/officeDocument/2006/relationships" xmlns:p="http://schemas.openxmlformats.org/presentationml/2006/main">
+  <p:cSld>
+    <p:spTree>
+      <p:nvGrpSpPr>
+        <p:cNvPr id="1" name="">
+          <a:extLst>
+            <a:ext uri="{FF2B5EF4-FFF2-40B4-BE49-F238E27FC236}">
+              <a16:creationId xmlns:a16="http://schemas.microsoft.com/office/drawing/2014/main" id="{D6F36FAF-0AD9-20D3-9B96-B76D5C6C8E34}"/>
+            </a:ext>
+          </a:extLst>
+        </p:cNvPr>
+        <p:cNvGrpSpPr/>
+        <p:nvPr/>
+      </p:nvGrpSpPr>
+      <p:grpSpPr>
+        <a:xfrm>
+          <a:off x="0" y="0"/>
+          <a:ext cx="0" cy="0"/>
+          <a:chOff x="0" y="0"/>
+          <a:chExt cx="0" cy="0"/>
+        </a:xfrm>
+      </p:grpSpPr>
+      <p:sp>
+        <p:nvSpPr>
+          <p:cNvPr id="3" name="TextBox 2">
+            <a:extLst>
+              <a:ext uri="{FF2B5EF4-FFF2-40B4-BE49-F238E27FC236}">
+                <a16:creationId xmlns:a16="http://schemas.microsoft.com/office/drawing/2014/main" id="{E32B92FB-B42E-05FD-05DE-641312D69F43}"/>
+              </a:ext>
+            </a:extLst>
+          </p:cNvPr>
+          <p:cNvSpPr txBox="1"/>
+          <p:nvPr/>
+        </p:nvSpPr>
+        <p:spPr>
+          <a:xfrm>
+            <a:off x="500269" y="426030"/>
+            <a:ext cx="11923644" cy="6005940"/>
+          </a:xfrm>
+          <a:prstGeom prst="rect">
+            <a:avLst/>
+          </a:prstGeom>
+          <a:noFill/>
+        </p:spPr>
+        <p:txBody>
+          <a:bodyPr wrap="square">
+            <a:spAutoFit/>
+          </a:bodyPr>
+          <a:lstStyle/>
+          <a:p>
+            <a:r>
+              <a:rPr lang="en-US" sz="2800" b="1" dirty="0"/>
+              <a:t>Simple algorithm of K-means:</a:t>
+            </a:r>
+            <a:r>
+              <a:rPr lang="en-US" sz="2400" b="1" dirty="0"/>
+              <a:t> </a:t>
+            </a:r>
+          </a:p>
+          <a:p>
+            <a:pPr algn="l"/>
+            <a:r>
+              <a:rPr lang="en-US" sz="2400" b="1" dirty="0"/>
+              <a:t>Step 1: </a:t>
+            </a:r>
+          </a:p>
+          <a:p>
+            <a:pPr algn="l"/>
+            <a:r>
+              <a:rPr lang="en-US" sz="2400" b="1" i="0" dirty="0">
+                <a:solidFill>
+                  <a:srgbClr val="0D0D0D"/>
+                </a:solidFill>
+                <a:effectLst/>
+                <a:latin typeface="Söhne"/>
+              </a:rPr>
+              <a:t>	</a:t>
+            </a:r>
+            <a:r>
+              <a:rPr lang="en-US" sz="2400" b="0" i="0" dirty="0">
+                <a:solidFill>
+                  <a:srgbClr val="0D0D0D"/>
+                </a:solidFill>
+                <a:effectLst/>
+                <a:latin typeface="Söhne"/>
+              </a:rPr>
+              <a:t>Choose the number of clusters, 'k', that you want to identify.</a:t>
+            </a:r>
+          </a:p>
+          <a:p>
+            <a:pPr algn="l"/>
+            <a:r>
+              <a:rPr lang="en-US" sz="2400" b="0" i="0" dirty="0">
+                <a:solidFill>
+                  <a:srgbClr val="0D0D0D"/>
+                </a:solidFill>
+                <a:effectLst/>
+                <a:latin typeface="Söhne"/>
+              </a:rPr>
+              <a:t>	Randomly initialize 'k' cluster centroids. </a:t>
+            </a:r>
+            <a:endParaRPr lang="en-US" sz="2400" dirty="0"/>
+          </a:p>
+          <a:p>
+            <a:pPr>
+              <a:lnSpc>
+                <a:spcPct val="150000"/>
+              </a:lnSpc>
+            </a:pPr>
+            <a:r>
+              <a:rPr lang="en-US" sz="2400" b="1" dirty="0">
+                <a:solidFill>
+                  <a:srgbClr val="C00000"/>
+                </a:solidFill>
+              </a:rPr>
+              <a:t>Loop </a:t>
+            </a:r>
+          </a:p>
+          <a:p>
+            <a:pPr lvl="1">
+              <a:lnSpc>
+                <a:spcPct val="150000"/>
+              </a:lnSpc>
+            </a:pPr>
+            <a:r>
+              <a:rPr lang="en-US" sz="2400" b="1" dirty="0"/>
+              <a:t>Step 2: </a:t>
+            </a:r>
+            <a:r>
+              <a:rPr lang="en-US" sz="2400" dirty="0"/>
+              <a:t>Assign each point in the data space to the nearest centroid to form K clusters </a:t>
+            </a:r>
+          </a:p>
+          <a:p>
+            <a:pPr lvl="1">
+              <a:lnSpc>
+                <a:spcPct val="150000"/>
+              </a:lnSpc>
+            </a:pPr>
+            <a:r>
+              <a:rPr lang="en-US" sz="2400" b="1" dirty="0"/>
+              <a:t>Step 3: </a:t>
+            </a:r>
+            <a:r>
+              <a:rPr lang="en-US" sz="2400" dirty="0"/>
+              <a:t>Measure the distance of each point in the cluster from the centroid </a:t>
+            </a:r>
+          </a:p>
+          <a:p>
+            <a:pPr lvl="1">
+              <a:lnSpc>
+                <a:spcPct val="150000"/>
+              </a:lnSpc>
+            </a:pPr>
+            <a:r>
+              <a:rPr lang="en-US" sz="2400" b="1" dirty="0"/>
+              <a:t>Step 4: </a:t>
+            </a:r>
+            <a:r>
+              <a:rPr lang="en-US" sz="2400" dirty="0"/>
+              <a:t>Calculate the Sum of Squared Error (SSE) to measure the quality of the clusters. </a:t>
+            </a:r>
+          </a:p>
+          <a:p>
+            <a:pPr lvl="1">
+              <a:lnSpc>
+                <a:spcPct val="150000"/>
+              </a:lnSpc>
+            </a:pPr>
+            <a:r>
+              <a:rPr lang="en-US" sz="2400" dirty="0"/>
+              <a:t>		This is to measure whether the K value is good or bad.</a:t>
+            </a:r>
+          </a:p>
+          <a:p>
+            <a:pPr lvl="1">
+              <a:lnSpc>
+                <a:spcPct val="150000"/>
+              </a:lnSpc>
+            </a:pPr>
+            <a:r>
+              <a:rPr lang="en-US" sz="2400" b="1" dirty="0"/>
+              <a:t>Step 5: </a:t>
+            </a:r>
+            <a:r>
+              <a:rPr lang="en-US" sz="2400" dirty="0"/>
+              <a:t>Identify the new centroid of each cluster on the basis of distance between points </a:t>
+            </a:r>
+            <a:r>
+              <a:rPr lang="en-US" sz="2400" b="1" dirty="0"/>
+              <a:t>Step 6: </a:t>
+            </a:r>
+            <a:r>
+              <a:rPr lang="en-US" sz="2400" dirty="0"/>
+              <a:t>Repeat Steps 2 to 5 to refine until centroids do not change.</a:t>
+            </a:r>
+          </a:p>
+          <a:p>
+            <a:pPr>
+              <a:lnSpc>
+                <a:spcPct val="150000"/>
+              </a:lnSpc>
+            </a:pPr>
+            <a:r>
+              <a:rPr lang="en-US" sz="2400" b="1" dirty="0">
+                <a:solidFill>
+                  <a:srgbClr val="C00000"/>
+                </a:solidFill>
+              </a:rPr>
+              <a:t>End Loop.</a:t>
+            </a:r>
+          </a:p>
+        </p:txBody>
+      </p:sp>
+    </p:spTree>
+    <p:extLst>
+      <p:ext uri="{BB962C8B-B14F-4D97-AF65-F5344CB8AC3E}">
+        <p14:creationId xmlns:p14="http://schemas.microsoft.com/office/powerpoint/2010/main" val="3501062775"/>
+      </p:ext>
+    </p:extLst>
+  </p:cSld>
+  <p:clrMapOvr>
+    <a:masterClrMapping/>
+  </p:clrMapOvr>
+</p:sld>
+</file>
+
+<file path=ppt/slides/slide15.xml><?xml version="1.0" encoding="utf-8"?>
 <p:sld xmlns:a="http://schemas.openxmlformats.org/drawingml/2006/main" xmlns:r="http://schemas.openxmlformats.org/officeDocument/2006/relationships" xmlns:p="http://schemas.openxmlformats.org/presentationml/2006/main">
   <p:cSld>
     <p:spTree>
@@ -5635,6 +6978,93 @@
             <a:pPr marL="0" indent="0">
               <a:buNone/>
             </a:pPr>
+            <a:r>
+              <a:rPr lang="en-US" sz="2800" b="1" dirty="0"/>
+              <a:t>🔷 Real-Life Example:</a:t>
+            </a:r>
+          </a:p>
+          <a:p>
+            <a:pPr marL="0" indent="0">
+              <a:buNone/>
+            </a:pPr>
+            <a:r>
+              <a:rPr lang="en-US" sz="2400" dirty="0"/>
+              <a:t>Let’s say you own a </a:t>
+            </a:r>
+            <a:r>
+              <a:rPr lang="en-US" sz="2400" b="1" dirty="0"/>
+              <a:t>shopping mall</a:t>
+            </a:r>
+            <a:r>
+              <a:rPr lang="en-US" sz="2400" dirty="0"/>
+              <a:t>, and you want to understand customer segments based on:</a:t>
+            </a:r>
+          </a:p>
+          <a:p>
+            <a:r>
+              <a:rPr lang="en-US" sz="2400" dirty="0"/>
+              <a:t>Age</a:t>
+            </a:r>
+          </a:p>
+          <a:p>
+            <a:r>
+              <a:rPr lang="en-US" sz="2400" dirty="0"/>
+              <a:t>Spending Score (1–100)</a:t>
+            </a:r>
+          </a:p>
+          <a:p>
+            <a:pPr marL="0" indent="0">
+              <a:buNone/>
+            </a:pPr>
+            <a:r>
+              <a:rPr lang="en-US" sz="2400" dirty="0"/>
+              <a:t>You have no labels like “</a:t>
+            </a:r>
+            <a:r>
+              <a:rPr lang="en-US" sz="2400" b="1" dirty="0">
+                <a:solidFill>
+                  <a:srgbClr val="002060"/>
+                </a:solidFill>
+              </a:rPr>
+              <a:t>Student</a:t>
+            </a:r>
+            <a:r>
+              <a:rPr lang="en-US" sz="2400" dirty="0"/>
+              <a:t>”, “</a:t>
+            </a:r>
+            <a:r>
+              <a:rPr lang="en-US" sz="2400" b="1" dirty="0">
+                <a:solidFill>
+                  <a:srgbClr val="002060"/>
+                </a:solidFill>
+              </a:rPr>
+              <a:t>Worker</a:t>
+            </a:r>
+            <a:r>
+              <a:rPr lang="en-US" sz="2400" dirty="0"/>
+              <a:t>”, etc., but you want to </a:t>
+            </a:r>
+            <a:r>
+              <a:rPr lang="en-US" sz="2400" b="1" dirty="0"/>
+              <a:t>group similar customers together</a:t>
+            </a:r>
+            <a:r>
+              <a:rPr lang="en-US" sz="2400" dirty="0"/>
+              <a:t> — that's where </a:t>
+            </a:r>
+            <a:r>
+              <a:rPr lang="en-US" sz="2400" b="1" dirty="0"/>
+              <a:t>K-Means</a:t>
+            </a:r>
+            <a:r>
+              <a:rPr lang="en-US" sz="2400" dirty="0"/>
+              <a:t> helps.</a:t>
+            </a:r>
+          </a:p>
+          <a:p>
+            <a:pPr marL="0" indent="0">
+              <a:buNone/>
+            </a:pPr>
             <a:endParaRPr lang="en-IN" sz="2400" dirty="0"/>
           </a:p>
         </p:txBody>
@@ -5652,7 +7082,7 @@
 </p:sld>
 </file>
 
-<file path=ppt/slides/slide12.xml><?xml version="1.0" encoding="utf-8"?>
+<file path=ppt/slides/slide16.xml><?xml version="1.0" encoding="utf-8"?>
 <p:sld xmlns:a="http://schemas.openxmlformats.org/drawingml/2006/main" xmlns:r="http://schemas.openxmlformats.org/officeDocument/2006/relationships" xmlns:p="http://schemas.openxmlformats.org/presentationml/2006/main">
   <p:cSld>
     <p:spTree>
@@ -5693,20 +7123,225 @@
         </p:nvSpPr>
         <p:spPr>
           <a:xfrm>
-            <a:off x="702853" y="968829"/>
-            <a:ext cx="10900568" cy="4931228"/>
+            <a:off x="702853" y="391886"/>
+            <a:ext cx="10900568" cy="5965371"/>
           </a:xfrm>
         </p:spPr>
         <p:txBody>
           <a:bodyPr>
-            <a:normAutofit/>
+            <a:normAutofit fontScale="92500" lnSpcReduction="10000"/>
           </a:bodyPr>
           <a:lstStyle/>
           <a:p>
             <a:pPr marL="0" indent="0">
               <a:buNone/>
             </a:pPr>
-            <a:endParaRPr lang="en-IN" sz="2400" dirty="0"/>
+            <a:r>
+              <a:rPr lang="en-US" sz="3000" b="1" dirty="0"/>
+              <a:t>🔷 Step-by-Step K-Means Algorithm:</a:t>
+            </a:r>
+          </a:p>
+          <a:p>
+            <a:pPr marL="0" indent="0">
+              <a:buNone/>
+            </a:pPr>
+            <a:r>
+              <a:rPr lang="en-US" sz="2400" dirty="0"/>
+              <a:t>Let’s assume we want to divide the customers into K = 2 clusters.</a:t>
+            </a:r>
+          </a:p>
+          <a:p>
+            <a:pPr marL="0" indent="0">
+              <a:buNone/>
+            </a:pPr>
+            <a:r>
+              <a:rPr lang="en-US" sz="2400" b="1" dirty="0"/>
+              <a:t>Step 1: </a:t>
+            </a:r>
+            <a:r>
+              <a:rPr lang="en-US" sz="2400" dirty="0"/>
+              <a:t>Choose the number of clusters K</a:t>
+            </a:r>
+          </a:p>
+          <a:p>
+            <a:pPr lvl="1"/>
+            <a:r>
+              <a:rPr lang="en-US" sz="2200" dirty="0"/>
+              <a:t>Let’s choose </a:t>
+            </a:r>
+            <a:r>
+              <a:rPr lang="en-US" sz="2200" b="1" dirty="0">
+                <a:solidFill>
+                  <a:schemeClr val="tx2">
+                    <a:lumMod val="75000"/>
+                    <a:lumOff val="25000"/>
+                  </a:schemeClr>
+                </a:solidFill>
+              </a:rPr>
+              <a:t>K = 2 </a:t>
+            </a:r>
+            <a:r>
+              <a:rPr lang="en-US" sz="2200" dirty="0"/>
+              <a:t>for now.</a:t>
+            </a:r>
+          </a:p>
+          <a:p>
+            <a:pPr marL="0" indent="0">
+              <a:buNone/>
+            </a:pPr>
+            <a:r>
+              <a:rPr lang="en-US" sz="2400" b="1" dirty="0"/>
+              <a:t>Step 2: </a:t>
+            </a:r>
+            <a:r>
+              <a:rPr lang="en-US" sz="2400" dirty="0"/>
+              <a:t>Initialize Centroids</a:t>
+            </a:r>
+          </a:p>
+          <a:p>
+            <a:pPr lvl="1"/>
+            <a:r>
+              <a:rPr lang="en-US" sz="2200" b="1" dirty="0">
+                <a:solidFill>
+                  <a:schemeClr val="tx2">
+                    <a:lumMod val="75000"/>
+                    <a:lumOff val="25000"/>
+                  </a:schemeClr>
+                </a:solidFill>
+              </a:rPr>
+              <a:t>Randomly pick </a:t>
+            </a:r>
+            <a:r>
+              <a:rPr lang="en-US" sz="2200" dirty="0"/>
+              <a:t>2 points as initial centroids (cluster centers).</a:t>
+            </a:r>
+          </a:p>
+          <a:p>
+            <a:pPr marL="0" indent="0">
+              <a:buNone/>
+            </a:pPr>
+            <a:r>
+              <a:rPr lang="en-US" sz="2400" b="1" dirty="0"/>
+              <a:t> Step 3: </a:t>
+            </a:r>
+            <a:r>
+              <a:rPr lang="en-US" sz="2400" dirty="0"/>
+              <a:t>Assign Each Data Point to the Closest Centroid</a:t>
+            </a:r>
+          </a:p>
+          <a:p>
+            <a:pPr lvl="1"/>
+            <a:r>
+              <a:rPr lang="en-US" sz="2200" dirty="0"/>
+              <a:t>For each customer (data point), calculate the </a:t>
+            </a:r>
+            <a:r>
+              <a:rPr lang="en-US" sz="2200" b="1" dirty="0"/>
+              <a:t>distance</a:t>
+            </a:r>
+            <a:r>
+              <a:rPr lang="en-US" sz="2200" dirty="0"/>
+              <a:t> (typically </a:t>
+            </a:r>
+            <a:r>
+              <a:rPr lang="en-US" sz="2200" b="1" dirty="0">
+                <a:solidFill>
+                  <a:schemeClr val="tx2">
+                    <a:lumMod val="75000"/>
+                    <a:lumOff val="25000"/>
+                  </a:schemeClr>
+                </a:solidFill>
+              </a:rPr>
+              <a:t>Euclidean distance</a:t>
+            </a:r>
+            <a:r>
+              <a:rPr lang="en-US" sz="2200" dirty="0"/>
+              <a:t>) to each centroid.</a:t>
+            </a:r>
+          </a:p>
+          <a:p>
+            <a:pPr lvl="1"/>
+            <a:r>
+              <a:rPr lang="en-US" sz="2200" dirty="0"/>
+              <a:t>Assign it to the cluster of the </a:t>
+            </a:r>
+            <a:r>
+              <a:rPr lang="en-US" sz="2200" b="1" dirty="0">
+                <a:solidFill>
+                  <a:schemeClr val="tx2">
+                    <a:lumMod val="75000"/>
+                    <a:lumOff val="25000"/>
+                  </a:schemeClr>
+                </a:solidFill>
+              </a:rPr>
+              <a:t>nearest centroid</a:t>
+            </a:r>
+            <a:r>
+              <a:rPr lang="en-US" sz="2200" dirty="0"/>
+              <a:t>.</a:t>
+            </a:r>
+          </a:p>
+          <a:p>
+            <a:pPr marL="0" indent="0">
+              <a:buNone/>
+            </a:pPr>
+            <a:r>
+              <a:rPr lang="en-US" sz="2400" b="1" dirty="0"/>
+              <a:t>Step 4: </a:t>
+            </a:r>
+            <a:r>
+              <a:rPr lang="en-US" sz="2400" dirty="0"/>
+              <a:t>Update Centroids</a:t>
+            </a:r>
+          </a:p>
+          <a:p>
+            <a:pPr lvl="1"/>
+            <a:r>
+              <a:rPr lang="en-US" sz="2200" dirty="0"/>
+              <a:t>For each cluster, calculate the mean of all points in the cluster.</a:t>
+            </a:r>
+          </a:p>
+          <a:p>
+            <a:pPr lvl="1"/>
+            <a:r>
+              <a:rPr lang="en-US" sz="2200" dirty="0"/>
+              <a:t>This becomes the new centroid.</a:t>
+            </a:r>
+          </a:p>
+          <a:p>
+            <a:pPr marL="0" indent="0">
+              <a:buNone/>
+            </a:pPr>
+            <a:r>
+              <a:rPr lang="en-US" sz="2400" b="1" dirty="0"/>
+              <a:t>Step 5: </a:t>
+            </a:r>
+            <a:r>
+              <a:rPr lang="en-US" sz="2400" dirty="0"/>
+              <a:t>Repeat</a:t>
+            </a:r>
+          </a:p>
+          <a:p>
+            <a:pPr lvl="1"/>
+            <a:r>
+              <a:rPr lang="en-US" sz="2200" dirty="0"/>
+              <a:t>Repeat Steps 3 and 4 until:</a:t>
+            </a:r>
+          </a:p>
+          <a:p>
+            <a:pPr lvl="2"/>
+            <a:r>
+              <a:rPr lang="en-US" sz="2000" dirty="0"/>
+              <a:t>Centroids do not change significantly (convergence)</a:t>
+            </a:r>
+          </a:p>
+          <a:p>
+            <a:pPr lvl="2"/>
+            <a:r>
+              <a:rPr lang="en-US" sz="2000" dirty="0"/>
+              <a:t>OR after a fixed number of iterations</a:t>
+            </a:r>
+            <a:endParaRPr lang="en-IN" sz="2000" dirty="0"/>
           </a:p>
         </p:txBody>
       </p:sp>
@@ -5723,139 +7358,7 @@
 </p:sld>
 </file>
 
-<file path=ppt/slides/slide13.xml><?xml version="1.0" encoding="utf-8"?>
-<p:sld xmlns:a="http://schemas.openxmlformats.org/drawingml/2006/main" xmlns:r="http://schemas.openxmlformats.org/officeDocument/2006/relationships" xmlns:p="http://schemas.openxmlformats.org/presentationml/2006/main">
-  <p:cSld>
-    <p:spTree>
-      <p:nvGrpSpPr>
-        <p:cNvPr id="1" name="">
-          <a:extLst>
-            <a:ext uri="{FF2B5EF4-FFF2-40B4-BE49-F238E27FC236}">
-              <a16:creationId xmlns:a16="http://schemas.microsoft.com/office/drawing/2014/main" id="{BF3CB578-9E14-2602-8E80-FECBE2ABF9A3}"/>
-            </a:ext>
-          </a:extLst>
-        </p:cNvPr>
-        <p:cNvGrpSpPr/>
-        <p:nvPr/>
-      </p:nvGrpSpPr>
-      <p:grpSpPr>
-        <a:xfrm>
-          <a:off x="0" y="0"/>
-          <a:ext cx="0" cy="0"/>
-          <a:chOff x="0" y="0"/>
-          <a:chExt cx="0" cy="0"/>
-        </a:xfrm>
-      </p:grpSpPr>
-      <p:sp>
-        <p:nvSpPr>
-          <p:cNvPr id="3" name="Content Placeholder 2">
-            <a:extLst>
-              <a:ext uri="{FF2B5EF4-FFF2-40B4-BE49-F238E27FC236}">
-                <a16:creationId xmlns:a16="http://schemas.microsoft.com/office/drawing/2014/main" id="{2A513252-8515-5192-5692-4098998FE324}"/>
-              </a:ext>
-            </a:extLst>
-          </p:cNvPr>
-          <p:cNvSpPr>
-            <a:spLocks noGrp="1"/>
-          </p:cNvSpPr>
-          <p:nvPr>
-            <p:ph idx="1"/>
-          </p:nvPr>
-        </p:nvSpPr>
-        <p:spPr>
-          <a:xfrm>
-            <a:off x="743688" y="1088572"/>
-            <a:ext cx="10900568" cy="4354286"/>
-          </a:xfrm>
-        </p:spPr>
-        <p:txBody>
-          <a:bodyPr>
-            <a:normAutofit/>
-          </a:bodyPr>
-          <a:lstStyle/>
-          <a:p>
-            <a:pPr marL="0" indent="0">
-              <a:buNone/>
-            </a:pPr>
-            <a:r>
-              <a:rPr lang="en-US" sz="3200" b="1" dirty="0">
-                <a:solidFill>
-                  <a:srgbClr val="C00000"/>
-                </a:solidFill>
-              </a:rPr>
-              <a:t>Module-3: </a:t>
-            </a:r>
-            <a:r>
-              <a:rPr lang="en-US" sz="3200" b="1" dirty="0">
-                <a:solidFill>
-                  <a:schemeClr val="accent3">
-                    <a:lumMod val="50000"/>
-                  </a:schemeClr>
-                </a:solidFill>
-              </a:rPr>
-              <a:t>Unsupervised Learning: </a:t>
-            </a:r>
-          </a:p>
-          <a:p>
-            <a:pPr marL="0" indent="0">
-              <a:buNone/>
-            </a:pPr>
-            <a:r>
-              <a:rPr lang="en-US" sz="3200" b="1" dirty="0"/>
-              <a:t>Clustering: </a:t>
-            </a:r>
-            <a:r>
-              <a:rPr lang="en-US" sz="3200" dirty="0"/>
-              <a:t>K-Means clustering, Hierarchical clustering, Evaluation of clustering results. </a:t>
-            </a:r>
-          </a:p>
-          <a:p>
-            <a:pPr marL="0" indent="0">
-              <a:buNone/>
-            </a:pPr>
-            <a:r>
-              <a:rPr lang="en-US" sz="3200" b="1" dirty="0"/>
-              <a:t>Dimensionality Reduction: </a:t>
-            </a:r>
-            <a:r>
-              <a:rPr lang="en-US" sz="3200" dirty="0"/>
-              <a:t>Principal Component Analysis (PCA), Linear Discriminant Analysis (LDA) t-Distributed Stochastic Neighbor Embedding (t-SNE).  </a:t>
-            </a:r>
-          </a:p>
-          <a:p>
-            <a:pPr marL="0" indent="0">
-              <a:buNone/>
-            </a:pPr>
-            <a:r>
-              <a:rPr lang="en-US" sz="3200" b="1" dirty="0"/>
-              <a:t>Association Rule Learning: </a:t>
-            </a:r>
-            <a:r>
-              <a:rPr lang="en-US" sz="3200" dirty="0" err="1"/>
-              <a:t>Apriori</a:t>
-            </a:r>
-            <a:r>
-              <a:rPr lang="en-US" sz="3200" dirty="0"/>
-              <a:t> algorithm, Market Basket Analysis, Evaluation metrics for association rules </a:t>
-            </a:r>
-            <a:endParaRPr lang="en-IN" sz="3200" dirty="0"/>
-          </a:p>
-        </p:txBody>
-      </p:sp>
-    </p:spTree>
-    <p:extLst>
-      <p:ext uri="{BB962C8B-B14F-4D97-AF65-F5344CB8AC3E}">
-        <p14:creationId xmlns:p14="http://schemas.microsoft.com/office/powerpoint/2010/main" val="1788168237"/>
-      </p:ext>
-    </p:extLst>
-  </p:cSld>
-  <p:clrMapOvr>
-    <a:masterClrMapping/>
-  </p:clrMapOvr>
-</p:sld>
-</file>
-
-<file path=ppt/slides/slide14.xml><?xml version="1.0" encoding="utf-8"?>
+<file path=ppt/slides/slide17.xml><?xml version="1.0" encoding="utf-8"?>
 <p:sld xmlns:a="http://schemas.openxmlformats.org/drawingml/2006/main" xmlns:r="http://schemas.openxmlformats.org/officeDocument/2006/relationships" xmlns:p="http://schemas.openxmlformats.org/presentationml/2006/main">
   <p:cSld>
     <p:spTree>
@@ -5909,10 +7412,658 @@
             <a:pPr marL="0" indent="0">
               <a:buNone/>
             </a:pPr>
+            <a:r>
+              <a:rPr lang="en-US" sz="2400" b="1" dirty="0"/>
+              <a:t>Problem Statement:</a:t>
+            </a:r>
+          </a:p>
+          <a:p>
+            <a:pPr marL="0" indent="0">
+              <a:buNone/>
+            </a:pPr>
             <a:endParaRPr lang="en-IN" sz="2400" dirty="0"/>
           </a:p>
         </p:txBody>
       </p:sp>
+      <p:graphicFrame>
+        <p:nvGraphicFramePr>
+          <p:cNvPr id="2" name="Table 1">
+            <a:extLst>
+              <a:ext uri="{FF2B5EF4-FFF2-40B4-BE49-F238E27FC236}">
+                <a16:creationId xmlns:a16="http://schemas.microsoft.com/office/drawing/2014/main" id="{7BF820A9-AEAB-1CBE-E799-3C28ABE831E2}"/>
+              </a:ext>
+            </a:extLst>
+          </p:cNvPr>
+          <p:cNvGraphicFramePr>
+            <a:graphicFrameLocks noGrp="1"/>
+          </p:cNvGraphicFramePr>
+          <p:nvPr>
+            <p:extLst>
+              <p:ext uri="{D42A27DB-BD31-4B8C-83A1-F6EECF244321}">
+                <p14:modId xmlns:p14="http://schemas.microsoft.com/office/powerpoint/2010/main" val="3893678237"/>
+              </p:ext>
+            </p:extLst>
+          </p:nvPr>
+        </p:nvGraphicFramePr>
+        <p:xfrm>
+          <a:off x="1165360" y="1783437"/>
+          <a:ext cx="7456124" cy="2679708"/>
+        </p:xfrm>
+        <a:graphic>
+          <a:graphicData uri="http://schemas.openxmlformats.org/drawingml/2006/table">
+            <a:tbl>
+              <a:tblPr firstRow="1" firstCol="1" bandRow="1">
+                <a:tableStyleId>{5C22544A-7EE6-4342-B048-85BDC9FD1C3A}</a:tableStyleId>
+              </a:tblPr>
+              <a:tblGrid>
+                <a:gridCol w="2485099">
+                  <a:extLst>
+                    <a:ext uri="{9D8B030D-6E8A-4147-A177-3AD203B41FA5}">
+                      <a16:colId xmlns:a16="http://schemas.microsoft.com/office/drawing/2014/main" val="4250616701"/>
+                    </a:ext>
+                  </a:extLst>
+                </a:gridCol>
+                <a:gridCol w="2485099">
+                  <a:extLst>
+                    <a:ext uri="{9D8B030D-6E8A-4147-A177-3AD203B41FA5}">
+                      <a16:colId xmlns:a16="http://schemas.microsoft.com/office/drawing/2014/main" val="408921545"/>
+                    </a:ext>
+                  </a:extLst>
+                </a:gridCol>
+                <a:gridCol w="2485926">
+                  <a:extLst>
+                    <a:ext uri="{9D8B030D-6E8A-4147-A177-3AD203B41FA5}">
+                      <a16:colId xmlns:a16="http://schemas.microsoft.com/office/drawing/2014/main" val="4122893870"/>
+                    </a:ext>
+                  </a:extLst>
+                </a:gridCol>
+              </a:tblGrid>
+              <a:tr h="446618">
+                <a:tc>
+                  <a:txBody>
+                    <a:bodyPr/>
+                    <a:lstStyle/>
+                    <a:p>
+                      <a:pPr>
+                        <a:lnSpc>
+                          <a:spcPct val="107000"/>
+                        </a:lnSpc>
+                        <a:spcAft>
+                          <a:spcPts val="800"/>
+                        </a:spcAft>
+                        <a:buNone/>
+                      </a:pPr>
+                      <a:r>
+                        <a:rPr lang="en-IN" sz="2000" kern="100">
+                          <a:effectLst/>
+                        </a:rPr>
+                        <a:t>Customer ID</a:t>
+                      </a:r>
+                      <a:endParaRPr lang="en-IN" sz="2000" kern="100">
+                        <a:effectLst/>
+                        <a:latin typeface="Aptos" panose="020B0004020202020204" pitchFamily="34" charset="0"/>
+                        <a:ea typeface="Aptos" panose="020B0004020202020204" pitchFamily="34" charset="0"/>
+                        <a:cs typeface="Tunga" panose="020B0502040204020203" pitchFamily="34" charset="0"/>
+                      </a:endParaRPr>
+                    </a:p>
+                  </a:txBody>
+                  <a:tcPr marL="68580" marR="68580" marT="0" marB="0"/>
+                </a:tc>
+                <a:tc>
+                  <a:txBody>
+                    <a:bodyPr/>
+                    <a:lstStyle/>
+                    <a:p>
+                      <a:pPr>
+                        <a:lnSpc>
+                          <a:spcPct val="107000"/>
+                        </a:lnSpc>
+                        <a:spcAft>
+                          <a:spcPts val="800"/>
+                        </a:spcAft>
+                        <a:buNone/>
+                      </a:pPr>
+                      <a:r>
+                        <a:rPr lang="en-IN" sz="2000" kern="100">
+                          <a:effectLst/>
+                        </a:rPr>
+                        <a:t>Age</a:t>
+                      </a:r>
+                      <a:endParaRPr lang="en-IN" sz="2000" kern="100">
+                        <a:effectLst/>
+                        <a:latin typeface="Aptos" panose="020B0004020202020204" pitchFamily="34" charset="0"/>
+                        <a:ea typeface="Aptos" panose="020B0004020202020204" pitchFamily="34" charset="0"/>
+                        <a:cs typeface="Tunga" panose="020B0502040204020203" pitchFamily="34" charset="0"/>
+                      </a:endParaRPr>
+                    </a:p>
+                  </a:txBody>
+                  <a:tcPr marL="68580" marR="68580" marT="0" marB="0"/>
+                </a:tc>
+                <a:tc>
+                  <a:txBody>
+                    <a:bodyPr/>
+                    <a:lstStyle/>
+                    <a:p>
+                      <a:pPr>
+                        <a:lnSpc>
+                          <a:spcPct val="107000"/>
+                        </a:lnSpc>
+                        <a:spcAft>
+                          <a:spcPts val="800"/>
+                        </a:spcAft>
+                        <a:buNone/>
+                      </a:pPr>
+                      <a:r>
+                        <a:rPr lang="en-IN" sz="2000" kern="100">
+                          <a:effectLst/>
+                        </a:rPr>
+                        <a:t>Spending Score</a:t>
+                      </a:r>
+                      <a:endParaRPr lang="en-IN" sz="2000" kern="100">
+                        <a:effectLst/>
+                        <a:latin typeface="Aptos" panose="020B0004020202020204" pitchFamily="34" charset="0"/>
+                        <a:ea typeface="Aptos" panose="020B0004020202020204" pitchFamily="34" charset="0"/>
+                        <a:cs typeface="Tunga" panose="020B0502040204020203" pitchFamily="34" charset="0"/>
+                      </a:endParaRPr>
+                    </a:p>
+                  </a:txBody>
+                  <a:tcPr marL="68580" marR="68580" marT="0" marB="0"/>
+                </a:tc>
+                <a:extLst>
+                  <a:ext uri="{0D108BD9-81ED-4DB2-BD59-A6C34878D82A}">
+                    <a16:rowId xmlns:a16="http://schemas.microsoft.com/office/drawing/2014/main" val="1022009319"/>
+                  </a:ext>
+                </a:extLst>
+              </a:tr>
+              <a:tr h="446618">
+                <a:tc>
+                  <a:txBody>
+                    <a:bodyPr/>
+                    <a:lstStyle/>
+                    <a:p>
+                      <a:pPr>
+                        <a:lnSpc>
+                          <a:spcPct val="107000"/>
+                        </a:lnSpc>
+                        <a:spcAft>
+                          <a:spcPts val="800"/>
+                        </a:spcAft>
+                        <a:buNone/>
+                      </a:pPr>
+                      <a:r>
+                        <a:rPr lang="en-IN" sz="2000" kern="100">
+                          <a:effectLst/>
+                        </a:rPr>
+                        <a:t>1</a:t>
+                      </a:r>
+                      <a:endParaRPr lang="en-IN" sz="2000" kern="100">
+                        <a:effectLst/>
+                        <a:latin typeface="Aptos" panose="020B0004020202020204" pitchFamily="34" charset="0"/>
+                        <a:ea typeface="Aptos" panose="020B0004020202020204" pitchFamily="34" charset="0"/>
+                        <a:cs typeface="Tunga" panose="020B0502040204020203" pitchFamily="34" charset="0"/>
+                      </a:endParaRPr>
+                    </a:p>
+                  </a:txBody>
+                  <a:tcPr marL="68580" marR="68580" marT="0" marB="0"/>
+                </a:tc>
+                <a:tc>
+                  <a:txBody>
+                    <a:bodyPr/>
+                    <a:lstStyle/>
+                    <a:p>
+                      <a:pPr>
+                        <a:lnSpc>
+                          <a:spcPct val="107000"/>
+                        </a:lnSpc>
+                        <a:spcAft>
+                          <a:spcPts val="800"/>
+                        </a:spcAft>
+                        <a:buNone/>
+                      </a:pPr>
+                      <a:r>
+                        <a:rPr lang="en-IN" sz="2000" kern="100">
+                          <a:effectLst/>
+                        </a:rPr>
+                        <a:t>25</a:t>
+                      </a:r>
+                      <a:endParaRPr lang="en-IN" sz="2000" kern="100">
+                        <a:effectLst/>
+                        <a:latin typeface="Aptos" panose="020B0004020202020204" pitchFamily="34" charset="0"/>
+                        <a:ea typeface="Aptos" panose="020B0004020202020204" pitchFamily="34" charset="0"/>
+                        <a:cs typeface="Tunga" panose="020B0502040204020203" pitchFamily="34" charset="0"/>
+                      </a:endParaRPr>
+                    </a:p>
+                  </a:txBody>
+                  <a:tcPr marL="68580" marR="68580" marT="0" marB="0"/>
+                </a:tc>
+                <a:tc>
+                  <a:txBody>
+                    <a:bodyPr/>
+                    <a:lstStyle/>
+                    <a:p>
+                      <a:pPr>
+                        <a:lnSpc>
+                          <a:spcPct val="107000"/>
+                        </a:lnSpc>
+                        <a:spcAft>
+                          <a:spcPts val="800"/>
+                        </a:spcAft>
+                        <a:buNone/>
+                      </a:pPr>
+                      <a:r>
+                        <a:rPr lang="en-IN" sz="2000" kern="100">
+                          <a:effectLst/>
+                        </a:rPr>
+                        <a:t>80</a:t>
+                      </a:r>
+                      <a:endParaRPr lang="en-IN" sz="2000" kern="100">
+                        <a:effectLst/>
+                        <a:latin typeface="Aptos" panose="020B0004020202020204" pitchFamily="34" charset="0"/>
+                        <a:ea typeface="Aptos" panose="020B0004020202020204" pitchFamily="34" charset="0"/>
+                        <a:cs typeface="Tunga" panose="020B0502040204020203" pitchFamily="34" charset="0"/>
+                      </a:endParaRPr>
+                    </a:p>
+                  </a:txBody>
+                  <a:tcPr marL="68580" marR="68580" marT="0" marB="0"/>
+                </a:tc>
+                <a:extLst>
+                  <a:ext uri="{0D108BD9-81ED-4DB2-BD59-A6C34878D82A}">
+                    <a16:rowId xmlns:a16="http://schemas.microsoft.com/office/drawing/2014/main" val="3597455401"/>
+                  </a:ext>
+                </a:extLst>
+              </a:tr>
+              <a:tr h="446618">
+                <a:tc>
+                  <a:txBody>
+                    <a:bodyPr/>
+                    <a:lstStyle/>
+                    <a:p>
+                      <a:pPr>
+                        <a:lnSpc>
+                          <a:spcPct val="107000"/>
+                        </a:lnSpc>
+                        <a:spcAft>
+                          <a:spcPts val="800"/>
+                        </a:spcAft>
+                        <a:buNone/>
+                      </a:pPr>
+                      <a:r>
+                        <a:rPr lang="en-IN" sz="2000" kern="100">
+                          <a:effectLst/>
+                        </a:rPr>
+                        <a:t>2</a:t>
+                      </a:r>
+                      <a:endParaRPr lang="en-IN" sz="2000" kern="100">
+                        <a:effectLst/>
+                        <a:latin typeface="Aptos" panose="020B0004020202020204" pitchFamily="34" charset="0"/>
+                        <a:ea typeface="Aptos" panose="020B0004020202020204" pitchFamily="34" charset="0"/>
+                        <a:cs typeface="Tunga" panose="020B0502040204020203" pitchFamily="34" charset="0"/>
+                      </a:endParaRPr>
+                    </a:p>
+                  </a:txBody>
+                  <a:tcPr marL="68580" marR="68580" marT="0" marB="0"/>
+                </a:tc>
+                <a:tc>
+                  <a:txBody>
+                    <a:bodyPr/>
+                    <a:lstStyle/>
+                    <a:p>
+                      <a:pPr>
+                        <a:lnSpc>
+                          <a:spcPct val="107000"/>
+                        </a:lnSpc>
+                        <a:spcAft>
+                          <a:spcPts val="800"/>
+                        </a:spcAft>
+                        <a:buNone/>
+                      </a:pPr>
+                      <a:r>
+                        <a:rPr lang="en-IN" sz="2000" kern="100" dirty="0">
+                          <a:effectLst/>
+                        </a:rPr>
+                        <a:t>34</a:t>
+                      </a:r>
+                      <a:endParaRPr lang="en-IN" sz="2000" kern="100" dirty="0">
+                        <a:effectLst/>
+                        <a:latin typeface="Aptos" panose="020B0004020202020204" pitchFamily="34" charset="0"/>
+                        <a:ea typeface="Aptos" panose="020B0004020202020204" pitchFamily="34" charset="0"/>
+                        <a:cs typeface="Tunga" panose="020B0502040204020203" pitchFamily="34" charset="0"/>
+                      </a:endParaRPr>
+                    </a:p>
+                  </a:txBody>
+                  <a:tcPr marL="68580" marR="68580" marT="0" marB="0"/>
+                </a:tc>
+                <a:tc>
+                  <a:txBody>
+                    <a:bodyPr/>
+                    <a:lstStyle/>
+                    <a:p>
+                      <a:pPr>
+                        <a:lnSpc>
+                          <a:spcPct val="107000"/>
+                        </a:lnSpc>
+                        <a:spcAft>
+                          <a:spcPts val="800"/>
+                        </a:spcAft>
+                        <a:buNone/>
+                      </a:pPr>
+                      <a:r>
+                        <a:rPr lang="en-IN" sz="2000" kern="100">
+                          <a:effectLst/>
+                        </a:rPr>
+                        <a:t>65</a:t>
+                      </a:r>
+                      <a:endParaRPr lang="en-IN" sz="2000" kern="100">
+                        <a:effectLst/>
+                        <a:latin typeface="Aptos" panose="020B0004020202020204" pitchFamily="34" charset="0"/>
+                        <a:ea typeface="Aptos" panose="020B0004020202020204" pitchFamily="34" charset="0"/>
+                        <a:cs typeface="Tunga" panose="020B0502040204020203" pitchFamily="34" charset="0"/>
+                      </a:endParaRPr>
+                    </a:p>
+                  </a:txBody>
+                  <a:tcPr marL="68580" marR="68580" marT="0" marB="0"/>
+                </a:tc>
+                <a:extLst>
+                  <a:ext uri="{0D108BD9-81ED-4DB2-BD59-A6C34878D82A}">
+                    <a16:rowId xmlns:a16="http://schemas.microsoft.com/office/drawing/2014/main" val="548598037"/>
+                  </a:ext>
+                </a:extLst>
+              </a:tr>
+              <a:tr h="446618">
+                <a:tc>
+                  <a:txBody>
+                    <a:bodyPr/>
+                    <a:lstStyle/>
+                    <a:p>
+                      <a:pPr>
+                        <a:lnSpc>
+                          <a:spcPct val="107000"/>
+                        </a:lnSpc>
+                        <a:spcAft>
+                          <a:spcPts val="800"/>
+                        </a:spcAft>
+                        <a:buNone/>
+                      </a:pPr>
+                      <a:r>
+                        <a:rPr lang="en-IN" sz="2000" kern="100">
+                          <a:effectLst/>
+                        </a:rPr>
+                        <a:t>3</a:t>
+                      </a:r>
+                      <a:endParaRPr lang="en-IN" sz="2000" kern="100">
+                        <a:effectLst/>
+                        <a:latin typeface="Aptos" panose="020B0004020202020204" pitchFamily="34" charset="0"/>
+                        <a:ea typeface="Aptos" panose="020B0004020202020204" pitchFamily="34" charset="0"/>
+                        <a:cs typeface="Tunga" panose="020B0502040204020203" pitchFamily="34" charset="0"/>
+                      </a:endParaRPr>
+                    </a:p>
+                  </a:txBody>
+                  <a:tcPr marL="68580" marR="68580" marT="0" marB="0"/>
+                </a:tc>
+                <a:tc>
+                  <a:txBody>
+                    <a:bodyPr/>
+                    <a:lstStyle/>
+                    <a:p>
+                      <a:pPr>
+                        <a:lnSpc>
+                          <a:spcPct val="107000"/>
+                        </a:lnSpc>
+                        <a:spcAft>
+                          <a:spcPts val="800"/>
+                        </a:spcAft>
+                        <a:buNone/>
+                      </a:pPr>
+                      <a:r>
+                        <a:rPr lang="en-IN" sz="2000" kern="100">
+                          <a:effectLst/>
+                        </a:rPr>
+                        <a:t>40</a:t>
+                      </a:r>
+                      <a:endParaRPr lang="en-IN" sz="2000" kern="100">
+                        <a:effectLst/>
+                        <a:latin typeface="Aptos" panose="020B0004020202020204" pitchFamily="34" charset="0"/>
+                        <a:ea typeface="Aptos" panose="020B0004020202020204" pitchFamily="34" charset="0"/>
+                        <a:cs typeface="Tunga" panose="020B0502040204020203" pitchFamily="34" charset="0"/>
+                      </a:endParaRPr>
+                    </a:p>
+                  </a:txBody>
+                  <a:tcPr marL="68580" marR="68580" marT="0" marB="0"/>
+                </a:tc>
+                <a:tc>
+                  <a:txBody>
+                    <a:bodyPr/>
+                    <a:lstStyle/>
+                    <a:p>
+                      <a:pPr>
+                        <a:lnSpc>
+                          <a:spcPct val="107000"/>
+                        </a:lnSpc>
+                        <a:spcAft>
+                          <a:spcPts val="800"/>
+                        </a:spcAft>
+                        <a:buNone/>
+                      </a:pPr>
+                      <a:r>
+                        <a:rPr lang="en-IN" sz="2000" kern="100">
+                          <a:effectLst/>
+                        </a:rPr>
+                        <a:t>20</a:t>
+                      </a:r>
+                      <a:endParaRPr lang="en-IN" sz="2000" kern="100">
+                        <a:effectLst/>
+                        <a:latin typeface="Aptos" panose="020B0004020202020204" pitchFamily="34" charset="0"/>
+                        <a:ea typeface="Aptos" panose="020B0004020202020204" pitchFamily="34" charset="0"/>
+                        <a:cs typeface="Tunga" panose="020B0502040204020203" pitchFamily="34" charset="0"/>
+                      </a:endParaRPr>
+                    </a:p>
+                  </a:txBody>
+                  <a:tcPr marL="68580" marR="68580" marT="0" marB="0"/>
+                </a:tc>
+                <a:extLst>
+                  <a:ext uri="{0D108BD9-81ED-4DB2-BD59-A6C34878D82A}">
+                    <a16:rowId xmlns:a16="http://schemas.microsoft.com/office/drawing/2014/main" val="2991682541"/>
+                  </a:ext>
+                </a:extLst>
+              </a:tr>
+              <a:tr h="446618">
+                <a:tc>
+                  <a:txBody>
+                    <a:bodyPr/>
+                    <a:lstStyle/>
+                    <a:p>
+                      <a:pPr>
+                        <a:lnSpc>
+                          <a:spcPct val="107000"/>
+                        </a:lnSpc>
+                        <a:spcAft>
+                          <a:spcPts val="800"/>
+                        </a:spcAft>
+                        <a:buNone/>
+                      </a:pPr>
+                      <a:r>
+                        <a:rPr lang="en-IN" sz="2000" kern="100">
+                          <a:effectLst/>
+                        </a:rPr>
+                        <a:t>4</a:t>
+                      </a:r>
+                      <a:endParaRPr lang="en-IN" sz="2000" kern="100">
+                        <a:effectLst/>
+                        <a:latin typeface="Aptos" panose="020B0004020202020204" pitchFamily="34" charset="0"/>
+                        <a:ea typeface="Aptos" panose="020B0004020202020204" pitchFamily="34" charset="0"/>
+                        <a:cs typeface="Tunga" panose="020B0502040204020203" pitchFamily="34" charset="0"/>
+                      </a:endParaRPr>
+                    </a:p>
+                  </a:txBody>
+                  <a:tcPr marL="68580" marR="68580" marT="0" marB="0"/>
+                </a:tc>
+                <a:tc>
+                  <a:txBody>
+                    <a:bodyPr/>
+                    <a:lstStyle/>
+                    <a:p>
+                      <a:pPr>
+                        <a:lnSpc>
+                          <a:spcPct val="107000"/>
+                        </a:lnSpc>
+                        <a:spcAft>
+                          <a:spcPts val="800"/>
+                        </a:spcAft>
+                        <a:buNone/>
+                      </a:pPr>
+                      <a:r>
+                        <a:rPr lang="en-IN" sz="2000" kern="100">
+                          <a:effectLst/>
+                        </a:rPr>
+                        <a:t>22</a:t>
+                      </a:r>
+                      <a:endParaRPr lang="en-IN" sz="2000" kern="100">
+                        <a:effectLst/>
+                        <a:latin typeface="Aptos" panose="020B0004020202020204" pitchFamily="34" charset="0"/>
+                        <a:ea typeface="Aptos" panose="020B0004020202020204" pitchFamily="34" charset="0"/>
+                        <a:cs typeface="Tunga" panose="020B0502040204020203" pitchFamily="34" charset="0"/>
+                      </a:endParaRPr>
+                    </a:p>
+                  </a:txBody>
+                  <a:tcPr marL="68580" marR="68580" marT="0" marB="0"/>
+                </a:tc>
+                <a:tc>
+                  <a:txBody>
+                    <a:bodyPr/>
+                    <a:lstStyle/>
+                    <a:p>
+                      <a:pPr>
+                        <a:lnSpc>
+                          <a:spcPct val="107000"/>
+                        </a:lnSpc>
+                        <a:spcAft>
+                          <a:spcPts val="800"/>
+                        </a:spcAft>
+                        <a:buNone/>
+                      </a:pPr>
+                      <a:r>
+                        <a:rPr lang="en-IN" sz="2000" kern="100">
+                          <a:effectLst/>
+                        </a:rPr>
+                        <a:t>85</a:t>
+                      </a:r>
+                      <a:endParaRPr lang="en-IN" sz="2000" kern="100">
+                        <a:effectLst/>
+                        <a:latin typeface="Aptos" panose="020B0004020202020204" pitchFamily="34" charset="0"/>
+                        <a:ea typeface="Aptos" panose="020B0004020202020204" pitchFamily="34" charset="0"/>
+                        <a:cs typeface="Tunga" panose="020B0502040204020203" pitchFamily="34" charset="0"/>
+                      </a:endParaRPr>
+                    </a:p>
+                  </a:txBody>
+                  <a:tcPr marL="68580" marR="68580" marT="0" marB="0"/>
+                </a:tc>
+                <a:extLst>
+                  <a:ext uri="{0D108BD9-81ED-4DB2-BD59-A6C34878D82A}">
+                    <a16:rowId xmlns:a16="http://schemas.microsoft.com/office/drawing/2014/main" val="3220788093"/>
+                  </a:ext>
+                </a:extLst>
+              </a:tr>
+              <a:tr h="446618">
+                <a:tc>
+                  <a:txBody>
+                    <a:bodyPr/>
+                    <a:lstStyle/>
+                    <a:p>
+                      <a:pPr>
+                        <a:lnSpc>
+                          <a:spcPct val="107000"/>
+                        </a:lnSpc>
+                        <a:spcAft>
+                          <a:spcPts val="800"/>
+                        </a:spcAft>
+                        <a:buNone/>
+                      </a:pPr>
+                      <a:r>
+                        <a:rPr lang="en-IN" sz="2000" kern="100" dirty="0">
+                          <a:effectLst/>
+                        </a:rPr>
+                        <a:t>5</a:t>
+                      </a:r>
+                      <a:endParaRPr lang="en-IN" sz="2000" kern="100" dirty="0">
+                        <a:effectLst/>
+                        <a:latin typeface="Aptos" panose="020B0004020202020204" pitchFamily="34" charset="0"/>
+                        <a:ea typeface="Aptos" panose="020B0004020202020204" pitchFamily="34" charset="0"/>
+                        <a:cs typeface="Tunga" panose="020B0502040204020203" pitchFamily="34" charset="0"/>
+                      </a:endParaRPr>
+                    </a:p>
+                  </a:txBody>
+                  <a:tcPr marL="68580" marR="68580" marT="0" marB="0"/>
+                </a:tc>
+                <a:tc>
+                  <a:txBody>
+                    <a:bodyPr/>
+                    <a:lstStyle/>
+                    <a:p>
+                      <a:pPr>
+                        <a:lnSpc>
+                          <a:spcPct val="107000"/>
+                        </a:lnSpc>
+                        <a:spcAft>
+                          <a:spcPts val="800"/>
+                        </a:spcAft>
+                        <a:buNone/>
+                      </a:pPr>
+                      <a:r>
+                        <a:rPr lang="en-IN" sz="2000" kern="100">
+                          <a:effectLst/>
+                        </a:rPr>
+                        <a:t>49</a:t>
+                      </a:r>
+                      <a:endParaRPr lang="en-IN" sz="2000" kern="100">
+                        <a:effectLst/>
+                        <a:latin typeface="Aptos" panose="020B0004020202020204" pitchFamily="34" charset="0"/>
+                        <a:ea typeface="Aptos" panose="020B0004020202020204" pitchFamily="34" charset="0"/>
+                        <a:cs typeface="Tunga" panose="020B0502040204020203" pitchFamily="34" charset="0"/>
+                      </a:endParaRPr>
+                    </a:p>
+                  </a:txBody>
+                  <a:tcPr marL="68580" marR="68580" marT="0" marB="0"/>
+                </a:tc>
+                <a:tc>
+                  <a:txBody>
+                    <a:bodyPr/>
+                    <a:lstStyle/>
+                    <a:p>
+                      <a:pPr>
+                        <a:lnSpc>
+                          <a:spcPct val="107000"/>
+                        </a:lnSpc>
+                        <a:spcAft>
+                          <a:spcPts val="800"/>
+                        </a:spcAft>
+                        <a:buNone/>
+                      </a:pPr>
+                      <a:r>
+                        <a:rPr lang="en-IN" sz="2000" kern="100" dirty="0">
+                          <a:effectLst/>
+                        </a:rPr>
+                        <a:t>10</a:t>
+                      </a:r>
+                      <a:endParaRPr lang="en-IN" sz="2000" kern="100" dirty="0">
+                        <a:effectLst/>
+                        <a:latin typeface="Aptos" panose="020B0004020202020204" pitchFamily="34" charset="0"/>
+                        <a:ea typeface="Aptos" panose="020B0004020202020204" pitchFamily="34" charset="0"/>
+                        <a:cs typeface="Tunga" panose="020B0502040204020203" pitchFamily="34" charset="0"/>
+                      </a:endParaRPr>
+                    </a:p>
+                  </a:txBody>
+                  <a:tcPr marL="68580" marR="68580" marT="0" marB="0"/>
+                </a:tc>
+                <a:extLst>
+                  <a:ext uri="{0D108BD9-81ED-4DB2-BD59-A6C34878D82A}">
+                    <a16:rowId xmlns:a16="http://schemas.microsoft.com/office/drawing/2014/main" val="572278594"/>
+                  </a:ext>
+                </a:extLst>
+              </a:tr>
+            </a:tbl>
+          </a:graphicData>
+        </a:graphic>
+      </p:graphicFrame>
     </p:spTree>
     <p:extLst>
       <p:ext uri="{BB962C8B-B14F-4D97-AF65-F5344CB8AC3E}">
@@ -5926,7 +8077,7 @@
 </p:sld>
 </file>
 
-<file path=ppt/slides/slide15.xml><?xml version="1.0" encoding="utf-8"?>
+<file path=ppt/slides/slide18.xml><?xml version="1.0" encoding="utf-8"?>
 <p:sld xmlns:a="http://schemas.openxmlformats.org/drawingml/2006/main" xmlns:r="http://schemas.openxmlformats.org/officeDocument/2006/relationships" xmlns:p="http://schemas.openxmlformats.org/presentationml/2006/main">
   <p:cSld>
     <p:spTree>
@@ -5967,8 +8118,8 @@
         </p:nvSpPr>
         <p:spPr>
           <a:xfrm>
-            <a:off x="702853" y="968829"/>
-            <a:ext cx="10900568" cy="4931228"/>
+            <a:off x="702853" y="566057"/>
+            <a:ext cx="10900568" cy="5736772"/>
           </a:xfrm>
         </p:spPr>
         <p:txBody>
@@ -5980,7 +8131,136 @@
             <a:pPr marL="0" indent="0">
               <a:buNone/>
             </a:pPr>
-            <a:endParaRPr lang="en-IN" sz="2400" dirty="0"/>
+            <a:r>
+              <a:rPr lang="en-IN" sz="2800" b="1" dirty="0"/>
+              <a:t>Solution: Apply K-Means Algorithm</a:t>
+            </a:r>
+          </a:p>
+          <a:p>
+            <a:pPr marL="0" indent="0">
+              <a:buNone/>
+            </a:pPr>
+            <a:r>
+              <a:rPr lang="en-IN" sz="2400" dirty="0"/>
+              <a:t>Let’s assume </a:t>
+            </a:r>
+            <a:r>
+              <a:rPr lang="en-IN" sz="2400" b="1" dirty="0">
+                <a:solidFill>
+                  <a:schemeClr val="tx2">
+                    <a:lumMod val="75000"/>
+                    <a:lumOff val="25000"/>
+                  </a:schemeClr>
+                </a:solidFill>
+              </a:rPr>
+              <a:t>K = 2</a:t>
+            </a:r>
+            <a:r>
+              <a:rPr lang="en-IN" sz="2400" dirty="0"/>
+              <a:t>.</a:t>
+            </a:r>
+          </a:p>
+          <a:p>
+            <a:pPr marL="457200" indent="-457200">
+              <a:buFont typeface="+mj-lt"/>
+              <a:buAutoNum type="arabicPeriod"/>
+            </a:pPr>
+            <a:r>
+              <a:rPr lang="en-IN" sz="2800" b="1" dirty="0"/>
+              <a:t>Initial centroids:</a:t>
+            </a:r>
+          </a:p>
+          <a:p>
+            <a:pPr lvl="1"/>
+            <a:r>
+              <a:rPr lang="en-IN" sz="2400" dirty="0"/>
+              <a:t>Centroid A: (25, 80)</a:t>
+            </a:r>
+          </a:p>
+          <a:p>
+            <a:pPr lvl="1"/>
+            <a:r>
+              <a:rPr lang="en-IN" sz="2400" dirty="0"/>
+              <a:t>Centroid B: (40, 20)</a:t>
+            </a:r>
+          </a:p>
+          <a:p>
+            <a:pPr marL="457200" indent="-457200">
+              <a:buFont typeface="+mj-lt"/>
+              <a:buAutoNum type="arabicPeriod"/>
+            </a:pPr>
+            <a:r>
+              <a:rPr lang="en-IN" sz="2800" b="1" dirty="0"/>
+              <a:t>Assign points to the closest centroid:</a:t>
+            </a:r>
+          </a:p>
+          <a:p>
+            <a:pPr lvl="1"/>
+            <a:r>
+              <a:rPr lang="en-IN" sz="2400" dirty="0"/>
+              <a:t>Points 1, 2, 4 closer to Centroid A (Cluster 1)</a:t>
+            </a:r>
+          </a:p>
+          <a:p>
+            <a:pPr lvl="1"/>
+            <a:r>
+              <a:rPr lang="en-IN" sz="2400" dirty="0"/>
+              <a:t>Points 3, 5 closer to Centroid B (Cluster 2)</a:t>
+            </a:r>
+          </a:p>
+          <a:p>
+            <a:pPr marL="457200" indent="-457200">
+              <a:buFont typeface="+mj-lt"/>
+              <a:buAutoNum type="arabicPeriod"/>
+            </a:pPr>
+            <a:r>
+              <a:rPr lang="en-IN" sz="2800" b="1" dirty="0"/>
+              <a:t>Recalculate centroids:</a:t>
+            </a:r>
+          </a:p>
+          <a:p>
+            <a:pPr lvl="1"/>
+            <a:r>
+              <a:rPr lang="en-IN" sz="2400" dirty="0"/>
+              <a:t>Cluster 1 mean = </a:t>
+            </a:r>
+            <a:r>
+              <a:rPr lang="en-IN" sz="2400" dirty="0" err="1"/>
+              <a:t>avg</a:t>
+            </a:r>
+            <a:r>
+              <a:rPr lang="en-IN" sz="2400" dirty="0"/>
+              <a:t> of (25, 80), (34, 65), (22, 85)</a:t>
+            </a:r>
+          </a:p>
+          <a:p>
+            <a:pPr lvl="1"/>
+            <a:r>
+              <a:rPr lang="en-IN" sz="2400" dirty="0"/>
+              <a:t>Cluster 2 mean = </a:t>
+            </a:r>
+            <a:r>
+              <a:rPr lang="en-IN" sz="2400" dirty="0" err="1"/>
+              <a:t>avg</a:t>
+            </a:r>
+            <a:r>
+              <a:rPr lang="en-IN" sz="2400" dirty="0"/>
+              <a:t> of (40, 20), (49, 10)</a:t>
+            </a:r>
+          </a:p>
+          <a:p>
+            <a:pPr marL="457200" indent="-457200">
+              <a:buFont typeface="+mj-lt"/>
+              <a:buAutoNum type="arabicPeriod"/>
+            </a:pPr>
+            <a:r>
+              <a:rPr lang="en-IN" sz="2800" b="1" dirty="0"/>
+              <a:t>Repeat</a:t>
+            </a:r>
+            <a:r>
+              <a:rPr lang="en-IN" sz="2800" dirty="0"/>
+              <a:t> this process until centroids don’t change.</a:t>
+            </a:r>
           </a:p>
         </p:txBody>
       </p:sp>
@@ -5997,7 +8277,7 @@
 </p:sld>
 </file>
 
-<file path=ppt/slides/slide16.xml><?xml version="1.0" encoding="utf-8"?>
+<file path=ppt/slides/slide19.xml><?xml version="1.0" encoding="utf-8"?>
 <p:sld xmlns:a="http://schemas.openxmlformats.org/drawingml/2006/main" xmlns:r="http://schemas.openxmlformats.org/officeDocument/2006/relationships" xmlns:p="http://schemas.openxmlformats.org/presentationml/2006/main">
   <p:cSld>
     <p:spTree>
@@ -6038,8 +8318,8 @@
         </p:nvSpPr>
         <p:spPr>
           <a:xfrm>
-            <a:off x="702853" y="968829"/>
-            <a:ext cx="10900568" cy="4931228"/>
+            <a:off x="702853" y="707571"/>
+            <a:ext cx="10900568" cy="5486400"/>
           </a:xfrm>
         </p:spPr>
         <p:txBody>
@@ -6051,10 +8331,188 @@
             <a:pPr marL="0" indent="0">
               <a:buNone/>
             </a:pPr>
+            <a:r>
+              <a:rPr lang="en-US" sz="2400" b="1" dirty="0"/>
+              <a:t>🔷 How to Choose K?</a:t>
+            </a:r>
+          </a:p>
+          <a:p>
+            <a:pPr marL="0" indent="0">
+              <a:buNone/>
+            </a:pPr>
+            <a:r>
+              <a:rPr lang="en-US" sz="2400" dirty="0"/>
+              <a:t>Use the </a:t>
+            </a:r>
+            <a:r>
+              <a:rPr lang="en-US" sz="2400" b="1" dirty="0">
+                <a:solidFill>
+                  <a:schemeClr val="tx2">
+                    <a:lumMod val="75000"/>
+                    <a:lumOff val="25000"/>
+                  </a:schemeClr>
+                </a:solidFill>
+              </a:rPr>
+              <a:t>Elbow</a:t>
+            </a:r>
+            <a:r>
+              <a:rPr lang="en-US" sz="2400" dirty="0"/>
+              <a:t> Method:</a:t>
+            </a:r>
+          </a:p>
+          <a:p>
+            <a:r>
+              <a:rPr lang="en-US" sz="2400" dirty="0"/>
+              <a:t>Run K-means for different values of K (e.g., 1 to 10)</a:t>
+            </a:r>
+          </a:p>
+          <a:p>
+            <a:r>
+              <a:rPr lang="en-US" sz="2400" dirty="0"/>
+              <a:t>Plot Within-Cluster Sum of Squares (WCSS)</a:t>
+            </a:r>
+          </a:p>
+          <a:p>
+            <a:r>
+              <a:rPr lang="en-US" sz="2400" dirty="0"/>
+              <a:t>The "</a:t>
+            </a:r>
+            <a:r>
+              <a:rPr lang="en-US" sz="2400" b="1" dirty="0">
+                <a:solidFill>
+                  <a:schemeClr val="tx2">
+                    <a:lumMod val="75000"/>
+                    <a:lumOff val="25000"/>
+                  </a:schemeClr>
+                </a:solidFill>
+              </a:rPr>
+              <a:t>elbow point</a:t>
+            </a:r>
+            <a:r>
+              <a:rPr lang="en-US" sz="2400" dirty="0"/>
+              <a:t>" is where the decrease slows down</a:t>
+            </a:r>
             <a:endParaRPr lang="en-IN" sz="2400" dirty="0"/>
           </a:p>
         </p:txBody>
       </p:sp>
+      <p:grpSp>
+        <p:nvGrpSpPr>
+          <p:cNvPr id="2" name="Group 1">
+            <a:extLst>
+              <a:ext uri="{FF2B5EF4-FFF2-40B4-BE49-F238E27FC236}">
+                <a16:creationId xmlns:a16="http://schemas.microsoft.com/office/drawing/2014/main" id="{85FE391D-3E5D-E891-A1C0-9BFE22400279}"/>
+              </a:ext>
+            </a:extLst>
+          </p:cNvPr>
+          <p:cNvGrpSpPr/>
+          <p:nvPr/>
+        </p:nvGrpSpPr>
+        <p:grpSpPr>
+          <a:xfrm>
+            <a:off x="2447379" y="3253491"/>
+            <a:ext cx="5978164" cy="3419452"/>
+            <a:chOff x="858065" y="1032805"/>
+            <a:chExt cx="9849080" cy="5568375"/>
+          </a:xfrm>
+        </p:grpSpPr>
+        <p:pic>
+          <p:nvPicPr>
+            <p:cNvPr id="4" name="Picture 3">
+              <a:extLst>
+                <a:ext uri="{FF2B5EF4-FFF2-40B4-BE49-F238E27FC236}">
+                  <a16:creationId xmlns:a16="http://schemas.microsoft.com/office/drawing/2014/main" id="{489EA389-3665-615F-6818-53D1158071BA}"/>
+                </a:ext>
+              </a:extLst>
+            </p:cNvPr>
+            <p:cNvPicPr>
+              <a:picLocks noChangeAspect="1"/>
+            </p:cNvPicPr>
+            <p:nvPr/>
+          </p:nvPicPr>
+          <p:blipFill>
+            <a:blip r:embed="rId2">
+              <a:extLst>
+                <a:ext uri="{28A0092B-C50C-407E-A947-70E740481C1C}">
+                  <a14:useLocalDpi xmlns:a14="http://schemas.microsoft.com/office/drawing/2010/main" val="0"/>
+                </a:ext>
+              </a:extLst>
+            </a:blip>
+            <a:stretch>
+              <a:fillRect/>
+            </a:stretch>
+          </p:blipFill>
+          <p:spPr>
+            <a:xfrm>
+              <a:off x="858065" y="1032805"/>
+              <a:ext cx="9458753" cy="5498014"/>
+            </a:xfrm>
+            <a:prstGeom prst="rect">
+              <a:avLst/>
+            </a:prstGeom>
+          </p:spPr>
+        </p:pic>
+        <p:sp>
+          <p:nvSpPr>
+            <p:cNvPr id="5" name="Rectangle 4">
+              <a:extLst>
+                <a:ext uri="{FF2B5EF4-FFF2-40B4-BE49-F238E27FC236}">
+                  <a16:creationId xmlns:a16="http://schemas.microsoft.com/office/drawing/2014/main" id="{2F634B45-D11A-33C7-B734-E33B6DCF4408}"/>
+                </a:ext>
+              </a:extLst>
+            </p:cNvPr>
+            <p:cNvSpPr/>
+            <p:nvPr/>
+          </p:nvSpPr>
+          <p:spPr>
+            <a:xfrm>
+              <a:off x="8672662" y="5693065"/>
+              <a:ext cx="2034483" cy="908115"/>
+            </a:xfrm>
+            <a:prstGeom prst="rect">
+              <a:avLst/>
+            </a:prstGeom>
+            <a:solidFill>
+              <a:schemeClr val="bg1"/>
+            </a:solidFill>
+            <a:ln>
+              <a:solidFill>
+                <a:schemeClr val="bg1"/>
+              </a:solidFill>
+            </a:ln>
+          </p:spPr>
+          <p:style>
+            <a:lnRef idx="2">
+              <a:schemeClr val="accent1">
+                <a:shade val="15000"/>
+              </a:schemeClr>
+            </a:lnRef>
+            <a:fillRef idx="1">
+              <a:schemeClr val="accent1"/>
+            </a:fillRef>
+            <a:effectRef idx="0">
+              <a:schemeClr val="accent1"/>
+            </a:effectRef>
+            <a:fontRef idx="minor">
+              <a:schemeClr val="lt1"/>
+            </a:fontRef>
+          </p:style>
+          <p:txBody>
+            <a:bodyPr rtlCol="0" anchor="ctr"/>
+            <a:lstStyle/>
+            <a:p>
+              <a:pPr algn="ctr"/>
+              <a:endParaRPr lang="en-US">
+                <a:ln>
+                  <a:solidFill>
+                    <a:schemeClr val="bg1"/>
+                  </a:solidFill>
+                </a:ln>
+              </a:endParaRPr>
+            </a:p>
+          </p:txBody>
+        </p:sp>
+      </p:grpSp>
     </p:spTree>
     <p:extLst>
       <p:ext uri="{BB962C8B-B14F-4D97-AF65-F5344CB8AC3E}">
@@ -6390,6 +8848,3311 @@
 </p:sld>
 </file>
 
+<file path=ppt/slides/slide20.xml><?xml version="1.0" encoding="utf-8"?>
+<p:sld xmlns:a="http://schemas.openxmlformats.org/drawingml/2006/main" xmlns:r="http://schemas.openxmlformats.org/officeDocument/2006/relationships" xmlns:p="http://schemas.openxmlformats.org/presentationml/2006/main">
+  <p:cSld>
+    <p:spTree>
+      <p:nvGrpSpPr>
+        <p:cNvPr id="1" name="">
+          <a:extLst>
+            <a:ext uri="{FF2B5EF4-FFF2-40B4-BE49-F238E27FC236}">
+              <a16:creationId xmlns:a16="http://schemas.microsoft.com/office/drawing/2014/main" id="{5853A3B2-5A92-1F6A-0C42-FF050142EA0B}"/>
+            </a:ext>
+          </a:extLst>
+        </p:cNvPr>
+        <p:cNvGrpSpPr/>
+        <p:nvPr/>
+      </p:nvGrpSpPr>
+      <p:grpSpPr>
+        <a:xfrm>
+          <a:off x="0" y="0"/>
+          <a:ext cx="0" cy="0"/>
+          <a:chOff x="0" y="0"/>
+          <a:chExt cx="0" cy="0"/>
+        </a:xfrm>
+      </p:grpSpPr>
+      <p:sp>
+        <p:nvSpPr>
+          <p:cNvPr id="3" name="Content Placeholder 2">
+            <a:extLst>
+              <a:ext uri="{FF2B5EF4-FFF2-40B4-BE49-F238E27FC236}">
+                <a16:creationId xmlns:a16="http://schemas.microsoft.com/office/drawing/2014/main" id="{C27929EA-180E-906F-5813-74FDC8341BFA}"/>
+              </a:ext>
+            </a:extLst>
+          </p:cNvPr>
+          <p:cNvSpPr>
+            <a:spLocks noGrp="1"/>
+          </p:cNvSpPr>
+          <p:nvPr>
+            <p:ph idx="1"/>
+          </p:nvPr>
+        </p:nvSpPr>
+        <p:spPr>
+          <a:xfrm>
+            <a:off x="702853" y="707571"/>
+            <a:ext cx="10900568" cy="5486400"/>
+          </a:xfrm>
+        </p:spPr>
+        <p:txBody>
+          <a:bodyPr>
+            <a:normAutofit/>
+          </a:bodyPr>
+          <a:lstStyle/>
+          <a:p>
+            <a:pPr marL="0" indent="0">
+              <a:buNone/>
+            </a:pPr>
+            <a:r>
+              <a:rPr lang="en-US" sz="2800" b="1" dirty="0"/>
+              <a:t>🔷 Applications of K-Means</a:t>
+            </a:r>
+          </a:p>
+          <a:p>
+            <a:r>
+              <a:rPr lang="en-US" sz="2400" dirty="0"/>
+              <a:t>Customer Segmentation</a:t>
+            </a:r>
+          </a:p>
+          <a:p>
+            <a:r>
+              <a:rPr lang="en-US" sz="2400" dirty="0"/>
+              <a:t>Document or News Clustering</a:t>
+            </a:r>
+          </a:p>
+          <a:p>
+            <a:r>
+              <a:rPr lang="en-US" sz="2400" dirty="0"/>
+              <a:t>Image Compression</a:t>
+            </a:r>
+          </a:p>
+          <a:p>
+            <a:r>
+              <a:rPr lang="en-US" sz="2400" dirty="0"/>
+              <a:t>Market Basket Analysis</a:t>
+            </a:r>
+          </a:p>
+          <a:p>
+            <a:pPr marL="0" indent="0">
+              <a:buNone/>
+            </a:pPr>
+            <a:endParaRPr lang="en-IN" sz="2400" dirty="0"/>
+          </a:p>
+        </p:txBody>
+      </p:sp>
+    </p:spTree>
+    <p:extLst>
+      <p:ext uri="{BB962C8B-B14F-4D97-AF65-F5344CB8AC3E}">
+        <p14:creationId xmlns:p14="http://schemas.microsoft.com/office/powerpoint/2010/main" val="965866799"/>
+      </p:ext>
+    </p:extLst>
+  </p:cSld>
+  <p:clrMapOvr>
+    <a:masterClrMapping/>
+  </p:clrMapOvr>
+</p:sld>
+</file>
+
+<file path=ppt/slides/slide21.xml><?xml version="1.0" encoding="utf-8"?>
+<p:sld xmlns:a="http://schemas.openxmlformats.org/drawingml/2006/main" xmlns:r="http://schemas.openxmlformats.org/officeDocument/2006/relationships" xmlns:p="http://schemas.openxmlformats.org/presentationml/2006/main">
+  <p:cSld>
+    <p:spTree>
+      <p:nvGrpSpPr>
+        <p:cNvPr id="1" name="">
+          <a:extLst>
+            <a:ext uri="{FF2B5EF4-FFF2-40B4-BE49-F238E27FC236}">
+              <a16:creationId xmlns:a16="http://schemas.microsoft.com/office/drawing/2014/main" id="{2711DEED-810B-A299-51D9-210E7F59D738}"/>
+            </a:ext>
+          </a:extLst>
+        </p:cNvPr>
+        <p:cNvGrpSpPr/>
+        <p:nvPr/>
+      </p:nvGrpSpPr>
+      <p:grpSpPr>
+        <a:xfrm>
+          <a:off x="0" y="0"/>
+          <a:ext cx="0" cy="0"/>
+          <a:chOff x="0" y="0"/>
+          <a:chExt cx="0" cy="0"/>
+        </a:xfrm>
+      </p:grpSpPr>
+      <p:sp>
+        <p:nvSpPr>
+          <p:cNvPr id="3" name="TextBox 2">
+            <a:extLst>
+              <a:ext uri="{FF2B5EF4-FFF2-40B4-BE49-F238E27FC236}">
+                <a16:creationId xmlns:a16="http://schemas.microsoft.com/office/drawing/2014/main" id="{40161B35-C5D2-BACC-FA5B-46C36C09D720}"/>
+              </a:ext>
+            </a:extLst>
+          </p:cNvPr>
+          <p:cNvSpPr txBox="1"/>
+          <p:nvPr/>
+        </p:nvSpPr>
+        <p:spPr>
+          <a:xfrm>
+            <a:off x="603768" y="650424"/>
+            <a:ext cx="10984463" cy="5386090"/>
+          </a:xfrm>
+          <a:prstGeom prst="rect">
+            <a:avLst/>
+          </a:prstGeom>
+          <a:noFill/>
+        </p:spPr>
+        <p:txBody>
+          <a:bodyPr wrap="square">
+            <a:spAutoFit/>
+          </a:bodyPr>
+          <a:lstStyle/>
+          <a:p>
+            <a:r>
+              <a:rPr lang="en-US" sz="2400" b="1" dirty="0">
+                <a:solidFill>
+                  <a:srgbClr val="C00000"/>
+                </a:solidFill>
+              </a:rPr>
+              <a:t>2. Hierarchical clustering:</a:t>
+            </a:r>
+          </a:p>
+          <a:p>
+            <a:r>
+              <a:rPr lang="en-US" sz="2000" b="0" i="0" dirty="0">
+                <a:solidFill>
+                  <a:srgbClr val="0D0D0D"/>
+                </a:solidFill>
+                <a:effectLst/>
+                <a:latin typeface="Söhne"/>
+              </a:rPr>
+              <a:t>	Hierarchical clustering is a clustering technique used in unsupervised machine learning to </a:t>
+            </a:r>
+            <a:r>
+              <a:rPr lang="en-US" sz="2000" b="1" i="0" dirty="0">
+                <a:solidFill>
+                  <a:srgbClr val="C00000"/>
+                </a:solidFill>
+                <a:effectLst/>
+                <a:latin typeface="Söhne"/>
+              </a:rPr>
+              <a:t>group similar data points into </a:t>
+            </a:r>
+            <a:r>
+              <a:rPr lang="en-US" sz="2000" b="1" i="0" dirty="0">
+                <a:solidFill>
+                  <a:srgbClr val="0D0D0D"/>
+                </a:solidFill>
+                <a:effectLst/>
+                <a:latin typeface="Söhne"/>
+              </a:rPr>
+              <a:t>clusters </a:t>
+            </a:r>
+            <a:r>
+              <a:rPr lang="en-US" sz="2000" b="1" i="0" dirty="0">
+                <a:solidFill>
+                  <a:srgbClr val="C00000"/>
+                </a:solidFill>
+                <a:effectLst/>
+                <a:latin typeface="Söhne"/>
+              </a:rPr>
+              <a:t>that form a hierarchy</a:t>
+            </a:r>
+            <a:r>
+              <a:rPr lang="en-US" sz="2000" b="0" i="0" dirty="0">
+                <a:solidFill>
+                  <a:srgbClr val="0D0D0D"/>
+                </a:solidFill>
+                <a:effectLst/>
+                <a:latin typeface="Söhne"/>
+              </a:rPr>
+              <a:t>. Unlike k-Means, which requires the number of clusters to be specified </a:t>
+            </a:r>
+            <a:r>
+              <a:rPr lang="en-US" sz="2000" b="1" i="0" dirty="0">
+                <a:solidFill>
+                  <a:srgbClr val="C00000"/>
+                </a:solidFill>
+                <a:effectLst/>
+                <a:latin typeface="Söhne"/>
+              </a:rPr>
+              <a:t>beforehand</a:t>
+            </a:r>
+            <a:r>
+              <a:rPr lang="en-US" sz="2000" b="0" i="0" dirty="0">
+                <a:solidFill>
+                  <a:srgbClr val="0D0D0D"/>
+                </a:solidFill>
+                <a:effectLst/>
+                <a:latin typeface="Söhne"/>
+              </a:rPr>
+              <a:t>, hierarchical clustering </a:t>
+            </a:r>
+            <a:r>
+              <a:rPr lang="en-US" sz="2000" b="1" i="0" dirty="0">
+                <a:solidFill>
+                  <a:srgbClr val="C00000"/>
+                </a:solidFill>
+                <a:effectLst/>
+                <a:latin typeface="Söhne"/>
+              </a:rPr>
+              <a:t>does not require the number of clusters to be predefined</a:t>
+            </a:r>
+            <a:r>
+              <a:rPr lang="en-US" sz="2000" b="0" i="0" dirty="0">
+                <a:solidFill>
+                  <a:srgbClr val="0D0D0D"/>
+                </a:solidFill>
+                <a:effectLst/>
+                <a:latin typeface="Söhne"/>
+              </a:rPr>
+              <a:t>. Instead, it organizes the data points into a </a:t>
+            </a:r>
+            <a:r>
+              <a:rPr lang="en-US" sz="2000" b="1" i="0" dirty="0">
+                <a:solidFill>
+                  <a:srgbClr val="0D0D0D"/>
+                </a:solidFill>
+                <a:effectLst/>
+                <a:latin typeface="Söhne"/>
+              </a:rPr>
+              <a:t>tree-like structure</a:t>
+            </a:r>
+            <a:r>
+              <a:rPr lang="en-US" sz="2000" b="0" i="0" dirty="0">
+                <a:solidFill>
+                  <a:srgbClr val="0D0D0D"/>
+                </a:solidFill>
+                <a:effectLst/>
+                <a:latin typeface="Söhne"/>
+              </a:rPr>
+              <a:t>, called a </a:t>
+            </a:r>
+            <a:r>
+              <a:rPr lang="en-US" sz="2000" b="1" i="0" dirty="0">
+                <a:solidFill>
+                  <a:srgbClr val="C00000"/>
+                </a:solidFill>
+                <a:effectLst/>
+                <a:latin typeface="Söhne"/>
+              </a:rPr>
+              <a:t>dendrogram</a:t>
+            </a:r>
+            <a:r>
+              <a:rPr lang="en-US" sz="2000" b="0" i="0" dirty="0">
+                <a:solidFill>
+                  <a:srgbClr val="0D0D0D"/>
+                </a:solidFill>
+                <a:effectLst/>
+                <a:latin typeface="Söhne"/>
+              </a:rPr>
+              <a:t>, based on their similarities.</a:t>
+            </a:r>
+          </a:p>
+          <a:p>
+            <a:r>
+              <a:rPr lang="en-US" sz="2000" dirty="0">
+                <a:solidFill>
+                  <a:srgbClr val="0D0D0D"/>
+                </a:solidFill>
+                <a:latin typeface="Söhne"/>
+              </a:rPr>
+              <a:t>	</a:t>
+            </a:r>
+            <a:r>
+              <a:rPr lang="en-US" sz="2000" dirty="0"/>
+              <a:t>The hierarchical clustering methods are used to group the data into hierarchy or tree-like structure. </a:t>
+            </a:r>
+          </a:p>
+          <a:p>
+            <a:r>
+              <a:rPr lang="en-US" sz="2000" b="1" dirty="0"/>
+              <a:t>For example, </a:t>
+            </a:r>
+            <a:r>
+              <a:rPr lang="en-US" sz="2000" dirty="0"/>
+              <a:t>in a machine learning problem of </a:t>
+            </a:r>
+            <a:r>
+              <a:rPr lang="en-US" sz="2000" b="1" dirty="0">
+                <a:solidFill>
+                  <a:srgbClr val="C00000"/>
+                </a:solidFill>
+              </a:rPr>
+              <a:t>organizing employees </a:t>
+            </a:r>
+            <a:r>
+              <a:rPr lang="en-US" sz="2000" dirty="0"/>
+              <a:t>of a university in different departments, first the employees are grouped under the </a:t>
+            </a:r>
+            <a:r>
+              <a:rPr lang="en-US" sz="2000" b="1" dirty="0"/>
+              <a:t>different departments </a:t>
+            </a:r>
+            <a:r>
+              <a:rPr lang="en-US" sz="2000" dirty="0"/>
+              <a:t>in the university, and then within each department, the employees can be grouped according to </a:t>
+            </a:r>
+            <a:r>
+              <a:rPr lang="en-US" sz="2000" b="1" dirty="0"/>
+              <a:t>their roles</a:t>
+            </a:r>
+            <a:r>
+              <a:rPr lang="en-US" sz="2000" dirty="0"/>
+              <a:t> such as professors, assistant professors, supervisors, lab assistants, etc. This creates a hierarchical structure of the employee data and eases visualization and analysis. Similarly, there may be a data set which has an underlying hierarchy structure that we want to discover and we can use the hierarchical clustering methods to achieve that.</a:t>
+            </a:r>
+          </a:p>
+          <a:p>
+            <a:endParaRPr lang="en-US" sz="2000" dirty="0"/>
+          </a:p>
+          <a:p>
+            <a:endParaRPr lang="en-US" sz="2000" dirty="0"/>
+          </a:p>
+        </p:txBody>
+      </p:sp>
+    </p:spTree>
+    <p:extLst>
+      <p:ext uri="{BB962C8B-B14F-4D97-AF65-F5344CB8AC3E}">
+        <p14:creationId xmlns:p14="http://schemas.microsoft.com/office/powerpoint/2010/main" val="3435732245"/>
+      </p:ext>
+    </p:extLst>
+  </p:cSld>
+  <p:clrMapOvr>
+    <a:masterClrMapping/>
+  </p:clrMapOvr>
+</p:sld>
+</file>
+
+<file path=ppt/slides/slide22.xml><?xml version="1.0" encoding="utf-8"?>
+<p:sld xmlns:a="http://schemas.openxmlformats.org/drawingml/2006/main" xmlns:r="http://schemas.openxmlformats.org/officeDocument/2006/relationships" xmlns:p="http://schemas.openxmlformats.org/presentationml/2006/main">
+  <p:cSld>
+    <p:spTree>
+      <p:nvGrpSpPr>
+        <p:cNvPr id="1" name="">
+          <a:extLst>
+            <a:ext uri="{FF2B5EF4-FFF2-40B4-BE49-F238E27FC236}">
+              <a16:creationId xmlns:a16="http://schemas.microsoft.com/office/drawing/2014/main" id="{3DC8CCD8-F160-6B99-2C5C-A31ECE018BF4}"/>
+            </a:ext>
+          </a:extLst>
+        </p:cNvPr>
+        <p:cNvGrpSpPr/>
+        <p:nvPr/>
+      </p:nvGrpSpPr>
+      <p:grpSpPr>
+        <a:xfrm>
+          <a:off x="0" y="0"/>
+          <a:ext cx="0" cy="0"/>
+          <a:chOff x="0" y="0"/>
+          <a:chExt cx="0" cy="0"/>
+        </a:xfrm>
+      </p:grpSpPr>
+      <p:pic>
+        <p:nvPicPr>
+          <p:cNvPr id="4098" name="Picture 2" descr="The Most Important Things You Need To Know About Agglomerative Clustering">
+            <a:extLst>
+              <a:ext uri="{FF2B5EF4-FFF2-40B4-BE49-F238E27FC236}">
+                <a16:creationId xmlns:a16="http://schemas.microsoft.com/office/drawing/2014/main" id="{FAD738D5-A8BB-2EEA-7DA2-5F8B3BAAE6AD}"/>
+              </a:ext>
+            </a:extLst>
+          </p:cNvPr>
+          <p:cNvPicPr>
+            <a:picLocks noChangeAspect="1" noChangeArrowheads="1"/>
+          </p:cNvPicPr>
+          <p:nvPr/>
+        </p:nvPicPr>
+        <p:blipFill rotWithShape="1">
+          <a:blip r:embed="rId2">
+            <a:extLst>
+              <a:ext uri="{28A0092B-C50C-407E-A947-70E740481C1C}">
+                <a14:useLocalDpi xmlns:a14="http://schemas.microsoft.com/office/drawing/2010/main" val="0"/>
+              </a:ext>
+            </a:extLst>
+          </a:blip>
+          <a:srcRect l="22373" t="21912" r="21541" b="14437"/>
+          <a:stretch>
+            <a:fillRect/>
+          </a:stretch>
+        </p:blipFill>
+        <p:spPr bwMode="auto">
+          <a:xfrm>
+            <a:off x="6749143" y="1634785"/>
+            <a:ext cx="5442857" cy="4632847"/>
+          </a:xfrm>
+          <a:prstGeom prst="rect">
+            <a:avLst/>
+          </a:prstGeom>
+          <a:noFill/>
+          <a:extLst>
+            <a:ext uri="{909E8E84-426E-40DD-AFC4-6F175D3DCCD1}">
+              <a14:hiddenFill xmlns:a14="http://schemas.microsoft.com/office/drawing/2010/main">
+                <a:solidFill>
+                  <a:srgbClr val="FFFFFF"/>
+                </a:solidFill>
+              </a14:hiddenFill>
+            </a:ext>
+          </a:extLst>
+        </p:spPr>
+      </p:pic>
+      <p:sp>
+        <p:nvSpPr>
+          <p:cNvPr id="3" name="TextBox 2">
+            <a:extLst>
+              <a:ext uri="{FF2B5EF4-FFF2-40B4-BE49-F238E27FC236}">
+                <a16:creationId xmlns:a16="http://schemas.microsoft.com/office/drawing/2014/main" id="{2C6D5F4E-893B-AF2F-B59C-8B5004B68759}"/>
+              </a:ext>
+            </a:extLst>
+          </p:cNvPr>
+          <p:cNvSpPr txBox="1"/>
+          <p:nvPr/>
+        </p:nvSpPr>
+        <p:spPr>
+          <a:xfrm>
+            <a:off x="650810" y="1634785"/>
+            <a:ext cx="6449786" cy="4832092"/>
+          </a:xfrm>
+          <a:prstGeom prst="rect">
+            <a:avLst/>
+          </a:prstGeom>
+          <a:noFill/>
+        </p:spPr>
+        <p:txBody>
+          <a:bodyPr wrap="square">
+            <a:spAutoFit/>
+          </a:bodyPr>
+          <a:lstStyle/>
+          <a:p>
+            <a:pPr algn="l">
+              <a:buFont typeface="+mj-lt"/>
+              <a:buAutoNum type="arabicPeriod"/>
+            </a:pPr>
+            <a:r>
+              <a:rPr lang="en-US" sz="2400" b="1" i="0" dirty="0">
+                <a:solidFill>
+                  <a:srgbClr val="0D0D0D"/>
+                </a:solidFill>
+                <a:effectLst/>
+                <a:latin typeface="Söhne"/>
+              </a:rPr>
+              <a:t>Agglomerative Hierarchical Clustering:</a:t>
+            </a:r>
+            <a:r>
+              <a:rPr lang="en-US" sz="2400" b="0" i="0" dirty="0">
+                <a:solidFill>
+                  <a:srgbClr val="0D0D0D"/>
+                </a:solidFill>
+                <a:effectLst/>
+                <a:latin typeface="Söhne"/>
+              </a:rPr>
+              <a:t>  </a:t>
+            </a:r>
+            <a:r>
+              <a:rPr lang="en-US" sz="2400" b="1" i="0" dirty="0">
+                <a:solidFill>
+                  <a:srgbClr val="C00000"/>
+                </a:solidFill>
+                <a:effectLst/>
+                <a:latin typeface="Söhne"/>
+              </a:rPr>
+              <a:t>(Bottom-Up)</a:t>
+            </a:r>
+          </a:p>
+          <a:p>
+            <a:pPr algn="l"/>
+            <a:r>
+              <a:rPr lang="en-US" sz="2000" dirty="0">
+                <a:solidFill>
+                  <a:srgbClr val="0D0D0D"/>
+                </a:solidFill>
+                <a:latin typeface="Söhne"/>
+              </a:rPr>
+              <a:t>	</a:t>
+            </a:r>
+            <a:r>
+              <a:rPr lang="en-US" sz="2000" dirty="0"/>
+              <a:t>The agglomerative hierarchical clustering method uses the </a:t>
+            </a:r>
+            <a:r>
+              <a:rPr lang="en-US" sz="2000" b="1" dirty="0">
+                <a:solidFill>
+                  <a:srgbClr val="C00000"/>
+                </a:solidFill>
+              </a:rPr>
+              <a:t>bottom-up strategy</a:t>
+            </a:r>
+            <a:r>
+              <a:rPr lang="en-US" sz="2000" dirty="0"/>
+              <a:t>. It starts with each object forming its </a:t>
+            </a:r>
+            <a:r>
+              <a:rPr lang="en-US" sz="2000" b="1" dirty="0"/>
+              <a:t>own cluster </a:t>
+            </a:r>
+            <a:r>
+              <a:rPr lang="en-US" sz="2000" dirty="0"/>
+              <a:t>and then iteratively merges the clusters </a:t>
+            </a:r>
+            <a:r>
+              <a:rPr lang="en-US" sz="2000" b="1" dirty="0">
+                <a:solidFill>
+                  <a:srgbClr val="C00000"/>
+                </a:solidFill>
+              </a:rPr>
+              <a:t>according to their similarity to form larger clusters.</a:t>
+            </a:r>
+            <a:r>
+              <a:rPr lang="en-US" sz="2000" dirty="0"/>
+              <a:t> It terminates either when a certain clustering condition imposed by the user is achieved or all the clusters merge into a single cluster.</a:t>
+            </a:r>
+          </a:p>
+          <a:p>
+            <a:pPr algn="l"/>
+            <a:r>
+              <a:rPr lang="en-US" sz="2000" b="0" i="0" dirty="0">
+                <a:solidFill>
+                  <a:srgbClr val="0D0D0D"/>
+                </a:solidFill>
+                <a:effectLst/>
+                <a:latin typeface="Söhne"/>
+              </a:rPr>
+              <a:t>	This approach starts by considering </a:t>
+            </a:r>
+            <a:r>
+              <a:rPr lang="en-US" sz="2000" b="1" i="0" dirty="0">
+                <a:solidFill>
+                  <a:srgbClr val="C00000"/>
+                </a:solidFill>
+                <a:effectLst/>
+                <a:latin typeface="Söhne"/>
+              </a:rPr>
+              <a:t>each data point as a single-cluster.</a:t>
+            </a:r>
+            <a:r>
+              <a:rPr lang="en-US" sz="2000" b="0" i="0" dirty="0">
+                <a:solidFill>
+                  <a:srgbClr val="0D0D0D"/>
+                </a:solidFill>
+                <a:effectLst/>
+                <a:latin typeface="Söhne"/>
+              </a:rPr>
+              <a:t> Then, at each step, it merges the two closest clusters until all data points belong to a single cluster or until a stopping </a:t>
+            </a:r>
+            <a:r>
+              <a:rPr lang="en-US" sz="2000" b="1" i="0" dirty="0">
+                <a:solidFill>
+                  <a:srgbClr val="C00000"/>
+                </a:solidFill>
+                <a:effectLst/>
+                <a:latin typeface="Söhne"/>
+              </a:rPr>
+              <a:t>criterion is met</a:t>
+            </a:r>
+            <a:r>
+              <a:rPr lang="en-US" sz="2000" b="0" i="0" dirty="0">
+                <a:solidFill>
+                  <a:srgbClr val="0D0D0D"/>
+                </a:solidFill>
+                <a:effectLst/>
+                <a:latin typeface="Söhne"/>
+              </a:rPr>
+              <a:t>. The result is a </a:t>
+            </a:r>
+            <a:r>
+              <a:rPr lang="en-US" sz="2000" b="1" i="0" dirty="0">
+                <a:solidFill>
+                  <a:schemeClr val="accent6"/>
+                </a:solidFill>
+                <a:effectLst/>
+                <a:latin typeface="Söhne"/>
+              </a:rPr>
+              <a:t>dendrogram</a:t>
+            </a:r>
+            <a:r>
+              <a:rPr lang="en-US" sz="2000" b="0" i="0" dirty="0">
+                <a:solidFill>
+                  <a:srgbClr val="0D0D0D"/>
+                </a:solidFill>
+                <a:effectLst/>
+                <a:latin typeface="Söhne"/>
+              </a:rPr>
+              <a:t> that shows the merging process and allows us to identify clusters at different levels of granularity.</a:t>
+            </a:r>
+          </a:p>
+        </p:txBody>
+      </p:sp>
+      <p:sp>
+        <p:nvSpPr>
+          <p:cNvPr id="5" name="TextBox 4">
+            <a:extLst>
+              <a:ext uri="{FF2B5EF4-FFF2-40B4-BE49-F238E27FC236}">
+                <a16:creationId xmlns:a16="http://schemas.microsoft.com/office/drawing/2014/main" id="{F050A830-8C43-0CB1-48EA-3A845965F16D}"/>
+              </a:ext>
+            </a:extLst>
+          </p:cNvPr>
+          <p:cNvSpPr txBox="1"/>
+          <p:nvPr/>
+        </p:nvSpPr>
+        <p:spPr>
+          <a:xfrm>
+            <a:off x="650810" y="434456"/>
+            <a:ext cx="7793393" cy="1200329"/>
+          </a:xfrm>
+          <a:prstGeom prst="rect">
+            <a:avLst/>
+          </a:prstGeom>
+          <a:noFill/>
+        </p:spPr>
+        <p:txBody>
+          <a:bodyPr wrap="square">
+            <a:spAutoFit/>
+          </a:bodyPr>
+          <a:lstStyle/>
+          <a:p>
+            <a:pPr algn="l"/>
+            <a:r>
+              <a:rPr lang="en-US" sz="2400" b="1" i="0" dirty="0">
+                <a:solidFill>
+                  <a:srgbClr val="0D0D0D"/>
+                </a:solidFill>
+                <a:effectLst/>
+                <a:latin typeface="Söhne"/>
+              </a:rPr>
+              <a:t>There are two main approaches to hierarchical clustering:</a:t>
+            </a:r>
+          </a:p>
+          <a:p>
+            <a:pPr marL="342900" indent="-342900">
+              <a:buAutoNum type="arabicPeriod"/>
+            </a:pPr>
+            <a:r>
+              <a:rPr lang="en-US" sz="2400" b="1" i="0" dirty="0">
+                <a:solidFill>
+                  <a:schemeClr val="tx2">
+                    <a:lumMod val="75000"/>
+                    <a:lumOff val="25000"/>
+                  </a:schemeClr>
+                </a:solidFill>
+                <a:effectLst/>
+                <a:latin typeface="Söhne"/>
+              </a:rPr>
+              <a:t>Agglomerative</a:t>
+            </a:r>
+            <a:r>
+              <a:rPr lang="en-US" sz="2400" b="1" i="0" dirty="0">
+                <a:solidFill>
+                  <a:srgbClr val="0D0D0D"/>
+                </a:solidFill>
+                <a:effectLst/>
+                <a:latin typeface="Söhne"/>
+              </a:rPr>
+              <a:t> Hierarchical Clustering</a:t>
+            </a:r>
+          </a:p>
+          <a:p>
+            <a:pPr marL="342900" indent="-342900">
+              <a:buFontTx/>
+              <a:buAutoNum type="arabicPeriod"/>
+            </a:pPr>
+            <a:r>
+              <a:rPr lang="en-US" sz="2400" b="1" i="0" dirty="0">
+                <a:solidFill>
+                  <a:schemeClr val="tx2">
+                    <a:lumMod val="75000"/>
+                    <a:lumOff val="25000"/>
+                  </a:schemeClr>
+                </a:solidFill>
+                <a:effectLst/>
+                <a:latin typeface="Söhne"/>
+              </a:rPr>
+              <a:t>Divisive</a:t>
+            </a:r>
+            <a:r>
+              <a:rPr lang="en-US" sz="2400" b="1" i="0" dirty="0">
+                <a:solidFill>
+                  <a:srgbClr val="0D0D0D"/>
+                </a:solidFill>
+                <a:effectLst/>
+                <a:latin typeface="Söhne"/>
+              </a:rPr>
+              <a:t> Hierarchical Clustering</a:t>
+            </a:r>
+            <a:endParaRPr lang="en-US" sz="2400" b="0" i="0" dirty="0">
+              <a:solidFill>
+                <a:srgbClr val="0D0D0D"/>
+              </a:solidFill>
+              <a:effectLst/>
+              <a:latin typeface="Söhne"/>
+            </a:endParaRPr>
+          </a:p>
+        </p:txBody>
+      </p:sp>
+    </p:spTree>
+    <p:extLst>
+      <p:ext uri="{BB962C8B-B14F-4D97-AF65-F5344CB8AC3E}">
+        <p14:creationId xmlns:p14="http://schemas.microsoft.com/office/powerpoint/2010/main" val="3667093489"/>
+      </p:ext>
+    </p:extLst>
+  </p:cSld>
+  <p:clrMapOvr>
+    <a:masterClrMapping/>
+  </p:clrMapOvr>
+</p:sld>
+</file>
+
+<file path=ppt/slides/slide23.xml><?xml version="1.0" encoding="utf-8"?>
+<p:sld xmlns:a="http://schemas.openxmlformats.org/drawingml/2006/main" xmlns:r="http://schemas.openxmlformats.org/officeDocument/2006/relationships" xmlns:p="http://schemas.openxmlformats.org/presentationml/2006/main">
+  <p:cSld>
+    <p:spTree>
+      <p:nvGrpSpPr>
+        <p:cNvPr id="1" name="">
+          <a:extLst>
+            <a:ext uri="{FF2B5EF4-FFF2-40B4-BE49-F238E27FC236}">
+              <a16:creationId xmlns:a16="http://schemas.microsoft.com/office/drawing/2014/main" id="{0CCBB6F8-D6AB-E98F-BDF2-0213C258BB74}"/>
+            </a:ext>
+          </a:extLst>
+        </p:cNvPr>
+        <p:cNvGrpSpPr/>
+        <p:nvPr/>
+      </p:nvGrpSpPr>
+      <p:grpSpPr>
+        <a:xfrm>
+          <a:off x="0" y="0"/>
+          <a:ext cx="0" cy="0"/>
+          <a:chOff x="0" y="0"/>
+          <a:chExt cx="0" cy="0"/>
+        </a:xfrm>
+      </p:grpSpPr>
+      <p:sp>
+        <p:nvSpPr>
+          <p:cNvPr id="3" name="Content Placeholder 2">
+            <a:extLst>
+              <a:ext uri="{FF2B5EF4-FFF2-40B4-BE49-F238E27FC236}">
+                <a16:creationId xmlns:a16="http://schemas.microsoft.com/office/drawing/2014/main" id="{DF9B135F-7FDE-DA25-088D-998E309B42DD}"/>
+              </a:ext>
+            </a:extLst>
+          </p:cNvPr>
+          <p:cNvSpPr>
+            <a:spLocks noGrp="1"/>
+          </p:cNvSpPr>
+          <p:nvPr>
+            <p:ph idx="1"/>
+          </p:nvPr>
+        </p:nvSpPr>
+        <p:spPr>
+          <a:xfrm>
+            <a:off x="702853" y="598714"/>
+            <a:ext cx="10900568" cy="5595257"/>
+          </a:xfrm>
+        </p:spPr>
+        <p:txBody>
+          <a:bodyPr>
+            <a:normAutofit fontScale="92500" lnSpcReduction="20000"/>
+          </a:bodyPr>
+          <a:lstStyle/>
+          <a:p>
+            <a:pPr marL="0" indent="0">
+              <a:buNone/>
+            </a:pPr>
+            <a:r>
+              <a:rPr lang="en-US" sz="3000" b="1" dirty="0"/>
+              <a:t> Step-by-Step: Agglomerative Hierarchical Clustering</a:t>
+            </a:r>
+          </a:p>
+          <a:p>
+            <a:pPr marL="0" indent="0">
+              <a:buNone/>
+            </a:pPr>
+            <a:r>
+              <a:rPr lang="en-US" sz="2600" b="1" dirty="0"/>
+              <a:t>Step 1: </a:t>
+            </a:r>
+            <a:r>
+              <a:rPr lang="en-US" sz="2600" b="1" dirty="0">
+                <a:solidFill>
+                  <a:srgbClr val="002060"/>
+                </a:solidFill>
+              </a:rPr>
+              <a:t>Treat</a:t>
+            </a:r>
+            <a:r>
+              <a:rPr lang="en-US" sz="2600" dirty="0"/>
+              <a:t> </a:t>
+            </a:r>
+            <a:r>
+              <a:rPr lang="en-US" sz="2600" b="1" dirty="0">
+                <a:solidFill>
+                  <a:srgbClr val="002060"/>
+                </a:solidFill>
+              </a:rPr>
+              <a:t>each point as its own cluster</a:t>
+            </a:r>
+          </a:p>
+          <a:p>
+            <a:pPr lvl="1"/>
+            <a:r>
+              <a:rPr lang="en-US" sz="2600" dirty="0"/>
+              <a:t>A, B, C, D, E → 5 separate clusters</a:t>
+            </a:r>
+          </a:p>
+          <a:p>
+            <a:pPr marL="0" indent="0">
+              <a:buNone/>
+            </a:pPr>
+            <a:endParaRPr lang="en-US" sz="2600" dirty="0"/>
+          </a:p>
+          <a:p>
+            <a:pPr marL="0" indent="0">
+              <a:buNone/>
+            </a:pPr>
+            <a:r>
+              <a:rPr lang="en-US" sz="2600" b="1" dirty="0"/>
+              <a:t>Step 2: </a:t>
+            </a:r>
+            <a:r>
+              <a:rPr lang="en-US" sz="2600" b="1" dirty="0">
+                <a:solidFill>
+                  <a:srgbClr val="002060"/>
+                </a:solidFill>
+              </a:rPr>
+              <a:t>Calculate distances between all clusters</a:t>
+            </a:r>
+          </a:p>
+          <a:p>
+            <a:pPr lvl="1"/>
+            <a:r>
+              <a:rPr lang="en-US" sz="2600" dirty="0"/>
+              <a:t>Use a distance metric (usually Euclidean distance)</a:t>
+            </a:r>
+          </a:p>
+          <a:p>
+            <a:pPr marL="0" indent="0">
+              <a:buNone/>
+            </a:pPr>
+            <a:endParaRPr lang="en-US" sz="2600" dirty="0"/>
+          </a:p>
+          <a:p>
+            <a:pPr marL="0" indent="0">
+              <a:buNone/>
+            </a:pPr>
+            <a:r>
+              <a:rPr lang="en-US" sz="2600" b="1" dirty="0"/>
+              <a:t>Step 3:</a:t>
+            </a:r>
+            <a:r>
+              <a:rPr lang="en-US" sz="2600" dirty="0"/>
+              <a:t> </a:t>
+            </a:r>
+            <a:r>
+              <a:rPr lang="en-US" sz="2600" b="1" dirty="0">
+                <a:solidFill>
+                  <a:srgbClr val="002060"/>
+                </a:solidFill>
+              </a:rPr>
+              <a:t>Merge the closest clusters</a:t>
+            </a:r>
+          </a:p>
+          <a:p>
+            <a:pPr lvl="1"/>
+            <a:r>
+              <a:rPr lang="en-US" sz="2600" dirty="0"/>
+              <a:t>Merge the pair with the least distance</a:t>
+            </a:r>
+          </a:p>
+          <a:p>
+            <a:pPr marL="0" indent="0">
+              <a:buNone/>
+            </a:pPr>
+            <a:endParaRPr lang="en-US" sz="2600" dirty="0"/>
+          </a:p>
+          <a:p>
+            <a:pPr marL="0" indent="0">
+              <a:buNone/>
+            </a:pPr>
+            <a:r>
+              <a:rPr lang="en-US" sz="2600" b="1" dirty="0"/>
+              <a:t>Step 4: </a:t>
+            </a:r>
+            <a:r>
+              <a:rPr lang="en-US" sz="2600" b="1" dirty="0">
+                <a:solidFill>
+                  <a:srgbClr val="002060"/>
+                </a:solidFill>
+              </a:rPr>
+              <a:t>Recalculate distances between the new cluster and all other clusters</a:t>
+            </a:r>
+          </a:p>
+          <a:p>
+            <a:pPr lvl="1"/>
+            <a:r>
+              <a:rPr lang="en-US" sz="2600" dirty="0"/>
+              <a:t>Depends on </a:t>
+            </a:r>
+            <a:r>
+              <a:rPr lang="en-US" sz="2600" b="1" dirty="0">
+                <a:solidFill>
+                  <a:schemeClr val="tx2">
+                    <a:lumMod val="75000"/>
+                    <a:lumOff val="25000"/>
+                  </a:schemeClr>
+                </a:solidFill>
+              </a:rPr>
+              <a:t>linkage method </a:t>
+            </a:r>
+            <a:r>
+              <a:rPr lang="en-US" sz="2600" dirty="0"/>
+              <a:t>(next slide)</a:t>
+            </a:r>
+          </a:p>
+          <a:p>
+            <a:pPr marL="0" indent="0">
+              <a:buNone/>
+            </a:pPr>
+            <a:endParaRPr lang="en-US" sz="2600" dirty="0"/>
+          </a:p>
+          <a:p>
+            <a:pPr marL="0" indent="0">
+              <a:buNone/>
+            </a:pPr>
+            <a:r>
+              <a:rPr lang="en-US" sz="2600" b="1" dirty="0"/>
+              <a:t>Step 5: </a:t>
+            </a:r>
+            <a:r>
+              <a:rPr lang="en-US" sz="2600" b="1" dirty="0">
+                <a:solidFill>
+                  <a:srgbClr val="002060"/>
+                </a:solidFill>
+              </a:rPr>
+              <a:t>Repeat Steps 3–4 </a:t>
+            </a:r>
+            <a:r>
+              <a:rPr lang="en-US" sz="2600" b="1" dirty="0">
+                <a:solidFill>
+                  <a:schemeClr val="tx2">
+                    <a:lumMod val="75000"/>
+                    <a:lumOff val="25000"/>
+                  </a:schemeClr>
+                </a:solidFill>
+              </a:rPr>
+              <a:t>until only one cluster remains</a:t>
+            </a:r>
+            <a:endParaRPr lang="en-IN" sz="2600" b="1" dirty="0">
+              <a:solidFill>
+                <a:schemeClr val="tx2">
+                  <a:lumMod val="75000"/>
+                  <a:lumOff val="25000"/>
+                </a:schemeClr>
+              </a:solidFill>
+            </a:endParaRPr>
+          </a:p>
+        </p:txBody>
+      </p:sp>
+    </p:spTree>
+    <p:extLst>
+      <p:ext uri="{BB962C8B-B14F-4D97-AF65-F5344CB8AC3E}">
+        <p14:creationId xmlns:p14="http://schemas.microsoft.com/office/powerpoint/2010/main" val="928423804"/>
+      </p:ext>
+    </p:extLst>
+  </p:cSld>
+  <p:clrMapOvr>
+    <a:masterClrMapping/>
+  </p:clrMapOvr>
+</p:sld>
+</file>
+
+<file path=ppt/slides/slide24.xml><?xml version="1.0" encoding="utf-8"?>
+<p:sld xmlns:a="http://schemas.openxmlformats.org/drawingml/2006/main" xmlns:r="http://schemas.openxmlformats.org/officeDocument/2006/relationships" xmlns:p="http://schemas.openxmlformats.org/presentationml/2006/main">
+  <p:cSld>
+    <p:spTree>
+      <p:nvGrpSpPr>
+        <p:cNvPr id="1" name="">
+          <a:extLst>
+            <a:ext uri="{FF2B5EF4-FFF2-40B4-BE49-F238E27FC236}">
+              <a16:creationId xmlns:a16="http://schemas.microsoft.com/office/drawing/2014/main" id="{C964473A-B4A6-5F70-F0CC-86269743D1EE}"/>
+            </a:ext>
+          </a:extLst>
+        </p:cNvPr>
+        <p:cNvGrpSpPr/>
+        <p:nvPr/>
+      </p:nvGrpSpPr>
+      <p:grpSpPr>
+        <a:xfrm>
+          <a:off x="0" y="0"/>
+          <a:ext cx="0" cy="0"/>
+          <a:chOff x="0" y="0"/>
+          <a:chExt cx="0" cy="0"/>
+        </a:xfrm>
+      </p:grpSpPr>
+      <p:sp>
+        <p:nvSpPr>
+          <p:cNvPr id="3" name="Content Placeholder 2">
+            <a:extLst>
+              <a:ext uri="{FF2B5EF4-FFF2-40B4-BE49-F238E27FC236}">
+                <a16:creationId xmlns:a16="http://schemas.microsoft.com/office/drawing/2014/main" id="{FE9B8BBA-2857-79C8-3F5D-7F5FEC76B3BE}"/>
+              </a:ext>
+            </a:extLst>
+          </p:cNvPr>
+          <p:cNvSpPr>
+            <a:spLocks noGrp="1"/>
+          </p:cNvSpPr>
+          <p:nvPr>
+            <p:ph type="title"/>
+          </p:nvPr>
+        </p:nvSpPr>
+        <p:spPr>
+          <a:xfrm>
+            <a:off x="777240" y="365125"/>
+            <a:ext cx="11186160" cy="1325563"/>
+          </a:xfrm>
+        </p:spPr>
+        <p:txBody>
+          <a:bodyPr anchor="ctr">
+            <a:noAutofit/>
+          </a:bodyPr>
+          <a:lstStyle/>
+          <a:p>
+            <a:r>
+              <a:rPr lang="en-US" sz="2800" b="1" dirty="0"/>
+              <a:t>🔷 Linkage Methods </a:t>
+            </a:r>
+            <a:r>
+              <a:rPr lang="en-US" sz="2400" b="1" dirty="0"/>
+              <a:t>(How to measure distance between clusters):</a:t>
+            </a:r>
+            <a:endParaRPr lang="en-US" sz="2800" b="1" dirty="0"/>
+          </a:p>
+        </p:txBody>
+      </p:sp>
+      <p:graphicFrame>
+        <p:nvGraphicFramePr>
+          <p:cNvPr id="5" name="Table 4">
+            <a:extLst>
+              <a:ext uri="{FF2B5EF4-FFF2-40B4-BE49-F238E27FC236}">
+                <a16:creationId xmlns:a16="http://schemas.microsoft.com/office/drawing/2014/main" id="{A86CF2E0-0C2D-0218-B392-80D0E051D58B}"/>
+              </a:ext>
+            </a:extLst>
+          </p:cNvPr>
+          <p:cNvGraphicFramePr>
+            <a:graphicFrameLocks noGrp="1"/>
+          </p:cNvGraphicFramePr>
+          <p:nvPr>
+            <p:extLst>
+              <p:ext uri="{D42A27DB-BD31-4B8C-83A1-F6EECF244321}">
+                <p14:modId xmlns:p14="http://schemas.microsoft.com/office/powerpoint/2010/main" val="1775155407"/>
+              </p:ext>
+            </p:extLst>
+          </p:nvPr>
+        </p:nvGraphicFramePr>
+        <p:xfrm>
+          <a:off x="777240" y="2119269"/>
+          <a:ext cx="10659108" cy="3764053"/>
+        </p:xfrm>
+        <a:graphic>
+          <a:graphicData uri="http://schemas.openxmlformats.org/drawingml/2006/table">
+            <a:tbl>
+              <a:tblPr firstRow="1" firstCol="1" bandRow="1">
+                <a:tableStyleId>{5C22544A-7EE6-4342-B048-85BDC9FD1C3A}</a:tableStyleId>
+              </a:tblPr>
+              <a:tblGrid>
+                <a:gridCol w="3775329">
+                  <a:extLst>
+                    <a:ext uri="{9D8B030D-6E8A-4147-A177-3AD203B41FA5}">
+                      <a16:colId xmlns:a16="http://schemas.microsoft.com/office/drawing/2014/main" val="679707189"/>
+                    </a:ext>
+                  </a:extLst>
+                </a:gridCol>
+                <a:gridCol w="6883779">
+                  <a:extLst>
+                    <a:ext uri="{9D8B030D-6E8A-4147-A177-3AD203B41FA5}">
+                      <a16:colId xmlns:a16="http://schemas.microsoft.com/office/drawing/2014/main" val="2593696760"/>
+                    </a:ext>
+                  </a:extLst>
+                </a:gridCol>
+              </a:tblGrid>
+              <a:tr h="496325">
+                <a:tc>
+                  <a:txBody>
+                    <a:bodyPr/>
+                    <a:lstStyle/>
+                    <a:p>
+                      <a:pPr>
+                        <a:lnSpc>
+                          <a:spcPct val="107000"/>
+                        </a:lnSpc>
+                        <a:spcAft>
+                          <a:spcPts val="800"/>
+                        </a:spcAft>
+                        <a:buNone/>
+                      </a:pPr>
+                      <a:r>
+                        <a:rPr lang="en-IN" sz="2600" kern="100">
+                          <a:effectLst/>
+                        </a:rPr>
+                        <a:t>Linkage Type</a:t>
+                      </a:r>
+                      <a:endParaRPr lang="en-IN" sz="2600" kern="100">
+                        <a:effectLst/>
+                        <a:latin typeface="Aptos" panose="020B0004020202020204" pitchFamily="34" charset="0"/>
+                        <a:ea typeface="Aptos" panose="020B0004020202020204" pitchFamily="34" charset="0"/>
+                        <a:cs typeface="Tunga" panose="020B0502040204020203" pitchFamily="34" charset="0"/>
+                      </a:endParaRPr>
+                    </a:p>
+                  </a:txBody>
+                  <a:tcPr marL="163424" marR="163424" marT="0" marB="0"/>
+                </a:tc>
+                <a:tc>
+                  <a:txBody>
+                    <a:bodyPr/>
+                    <a:lstStyle/>
+                    <a:p>
+                      <a:pPr>
+                        <a:lnSpc>
+                          <a:spcPct val="107000"/>
+                        </a:lnSpc>
+                        <a:spcAft>
+                          <a:spcPts val="800"/>
+                        </a:spcAft>
+                        <a:buNone/>
+                      </a:pPr>
+                      <a:r>
+                        <a:rPr lang="en-IN" sz="2600" kern="100">
+                          <a:effectLst/>
+                        </a:rPr>
+                        <a:t>Description</a:t>
+                      </a:r>
+                      <a:endParaRPr lang="en-IN" sz="2600" kern="100">
+                        <a:effectLst/>
+                        <a:latin typeface="Aptos" panose="020B0004020202020204" pitchFamily="34" charset="0"/>
+                        <a:ea typeface="Aptos" panose="020B0004020202020204" pitchFamily="34" charset="0"/>
+                        <a:cs typeface="Tunga" panose="020B0502040204020203" pitchFamily="34" charset="0"/>
+                      </a:endParaRPr>
+                    </a:p>
+                  </a:txBody>
+                  <a:tcPr marL="163424" marR="163424" marT="0" marB="0"/>
+                </a:tc>
+                <a:extLst>
+                  <a:ext uri="{0D108BD9-81ED-4DB2-BD59-A6C34878D82A}">
+                    <a16:rowId xmlns:a16="http://schemas.microsoft.com/office/drawing/2014/main" val="1455256466"/>
+                  </a:ext>
+                </a:extLst>
+              </a:tr>
+              <a:tr h="923801">
+                <a:tc>
+                  <a:txBody>
+                    <a:bodyPr/>
+                    <a:lstStyle/>
+                    <a:p>
+                      <a:pPr>
+                        <a:lnSpc>
+                          <a:spcPct val="107000"/>
+                        </a:lnSpc>
+                        <a:spcAft>
+                          <a:spcPts val="800"/>
+                        </a:spcAft>
+                        <a:buNone/>
+                      </a:pPr>
+                      <a:r>
+                        <a:rPr lang="en-IN" sz="2600" kern="100">
+                          <a:effectLst/>
+                        </a:rPr>
+                        <a:t>Single</a:t>
+                      </a:r>
+                      <a:endParaRPr lang="en-IN" sz="2600" kern="100">
+                        <a:effectLst/>
+                        <a:latin typeface="Aptos" panose="020B0004020202020204" pitchFamily="34" charset="0"/>
+                        <a:ea typeface="Aptos" panose="020B0004020202020204" pitchFamily="34" charset="0"/>
+                        <a:cs typeface="Tunga" panose="020B0502040204020203" pitchFamily="34" charset="0"/>
+                      </a:endParaRPr>
+                    </a:p>
+                  </a:txBody>
+                  <a:tcPr marL="163424" marR="163424" marT="0" marB="0"/>
+                </a:tc>
+                <a:tc>
+                  <a:txBody>
+                    <a:bodyPr/>
+                    <a:lstStyle/>
+                    <a:p>
+                      <a:pPr>
+                        <a:lnSpc>
+                          <a:spcPct val="107000"/>
+                        </a:lnSpc>
+                        <a:spcAft>
+                          <a:spcPts val="800"/>
+                        </a:spcAft>
+                        <a:buNone/>
+                      </a:pPr>
+                      <a:r>
+                        <a:rPr lang="en-IN" sz="2600" kern="100" dirty="0">
+                          <a:effectLst/>
+                        </a:rPr>
+                        <a:t>Distance between the closest points of two clusters</a:t>
+                      </a:r>
+                      <a:endParaRPr lang="en-IN" sz="2600" kern="100" dirty="0">
+                        <a:effectLst/>
+                        <a:latin typeface="Aptos" panose="020B0004020202020204" pitchFamily="34" charset="0"/>
+                        <a:ea typeface="Aptos" panose="020B0004020202020204" pitchFamily="34" charset="0"/>
+                        <a:cs typeface="Tunga" panose="020B0502040204020203" pitchFamily="34" charset="0"/>
+                      </a:endParaRPr>
+                    </a:p>
+                  </a:txBody>
+                  <a:tcPr marL="163424" marR="163424" marT="0" marB="0"/>
+                </a:tc>
+                <a:extLst>
+                  <a:ext uri="{0D108BD9-81ED-4DB2-BD59-A6C34878D82A}">
+                    <a16:rowId xmlns:a16="http://schemas.microsoft.com/office/drawing/2014/main" val="2543470977"/>
+                  </a:ext>
+                </a:extLst>
+              </a:tr>
+              <a:tr h="496325">
+                <a:tc>
+                  <a:txBody>
+                    <a:bodyPr/>
+                    <a:lstStyle/>
+                    <a:p>
+                      <a:pPr>
+                        <a:lnSpc>
+                          <a:spcPct val="107000"/>
+                        </a:lnSpc>
+                        <a:spcAft>
+                          <a:spcPts val="800"/>
+                        </a:spcAft>
+                        <a:buNone/>
+                      </a:pPr>
+                      <a:r>
+                        <a:rPr lang="en-IN" sz="2600" kern="100">
+                          <a:effectLst/>
+                        </a:rPr>
+                        <a:t>Complete</a:t>
+                      </a:r>
+                      <a:endParaRPr lang="en-IN" sz="2600" kern="100">
+                        <a:effectLst/>
+                        <a:latin typeface="Aptos" panose="020B0004020202020204" pitchFamily="34" charset="0"/>
+                        <a:ea typeface="Aptos" panose="020B0004020202020204" pitchFamily="34" charset="0"/>
+                        <a:cs typeface="Tunga" panose="020B0502040204020203" pitchFamily="34" charset="0"/>
+                      </a:endParaRPr>
+                    </a:p>
+                  </a:txBody>
+                  <a:tcPr marL="163424" marR="163424" marT="0" marB="0"/>
+                </a:tc>
+                <a:tc>
+                  <a:txBody>
+                    <a:bodyPr/>
+                    <a:lstStyle/>
+                    <a:p>
+                      <a:pPr>
+                        <a:lnSpc>
+                          <a:spcPct val="107000"/>
+                        </a:lnSpc>
+                        <a:spcAft>
+                          <a:spcPts val="800"/>
+                        </a:spcAft>
+                        <a:buNone/>
+                      </a:pPr>
+                      <a:r>
+                        <a:rPr lang="en-IN" sz="2600" kern="100">
+                          <a:effectLst/>
+                        </a:rPr>
+                        <a:t>Distance between the farthest points</a:t>
+                      </a:r>
+                      <a:endParaRPr lang="en-IN" sz="2600" kern="100">
+                        <a:effectLst/>
+                        <a:latin typeface="Aptos" panose="020B0004020202020204" pitchFamily="34" charset="0"/>
+                        <a:ea typeface="Aptos" panose="020B0004020202020204" pitchFamily="34" charset="0"/>
+                        <a:cs typeface="Tunga" panose="020B0502040204020203" pitchFamily="34" charset="0"/>
+                      </a:endParaRPr>
+                    </a:p>
+                  </a:txBody>
+                  <a:tcPr marL="163424" marR="163424" marT="0" marB="0"/>
+                </a:tc>
+                <a:extLst>
+                  <a:ext uri="{0D108BD9-81ED-4DB2-BD59-A6C34878D82A}">
+                    <a16:rowId xmlns:a16="http://schemas.microsoft.com/office/drawing/2014/main" val="2533710684"/>
+                  </a:ext>
+                </a:extLst>
+              </a:tr>
+              <a:tr h="923801">
+                <a:tc>
+                  <a:txBody>
+                    <a:bodyPr/>
+                    <a:lstStyle/>
+                    <a:p>
+                      <a:pPr>
+                        <a:lnSpc>
+                          <a:spcPct val="107000"/>
+                        </a:lnSpc>
+                        <a:spcAft>
+                          <a:spcPts val="800"/>
+                        </a:spcAft>
+                        <a:buNone/>
+                      </a:pPr>
+                      <a:r>
+                        <a:rPr lang="en-IN" sz="2600" kern="100">
+                          <a:effectLst/>
+                        </a:rPr>
+                        <a:t>Average</a:t>
+                      </a:r>
+                      <a:endParaRPr lang="en-IN" sz="2600" kern="100">
+                        <a:effectLst/>
+                        <a:latin typeface="Aptos" panose="020B0004020202020204" pitchFamily="34" charset="0"/>
+                        <a:ea typeface="Aptos" panose="020B0004020202020204" pitchFamily="34" charset="0"/>
+                        <a:cs typeface="Tunga" panose="020B0502040204020203" pitchFamily="34" charset="0"/>
+                      </a:endParaRPr>
+                    </a:p>
+                  </a:txBody>
+                  <a:tcPr marL="163424" marR="163424" marT="0" marB="0"/>
+                </a:tc>
+                <a:tc>
+                  <a:txBody>
+                    <a:bodyPr/>
+                    <a:lstStyle/>
+                    <a:p>
+                      <a:pPr>
+                        <a:lnSpc>
+                          <a:spcPct val="107000"/>
+                        </a:lnSpc>
+                        <a:spcAft>
+                          <a:spcPts val="800"/>
+                        </a:spcAft>
+                        <a:buNone/>
+                      </a:pPr>
+                      <a:r>
+                        <a:rPr lang="en-IN" sz="2600" kern="100">
+                          <a:effectLst/>
+                        </a:rPr>
+                        <a:t>Average distance between all points of the two clusters</a:t>
+                      </a:r>
+                      <a:endParaRPr lang="en-IN" sz="2600" kern="100">
+                        <a:effectLst/>
+                        <a:latin typeface="Aptos" panose="020B0004020202020204" pitchFamily="34" charset="0"/>
+                        <a:ea typeface="Aptos" panose="020B0004020202020204" pitchFamily="34" charset="0"/>
+                        <a:cs typeface="Tunga" panose="020B0502040204020203" pitchFamily="34" charset="0"/>
+                      </a:endParaRPr>
+                    </a:p>
+                  </a:txBody>
+                  <a:tcPr marL="163424" marR="163424" marT="0" marB="0"/>
+                </a:tc>
+                <a:extLst>
+                  <a:ext uri="{0D108BD9-81ED-4DB2-BD59-A6C34878D82A}">
+                    <a16:rowId xmlns:a16="http://schemas.microsoft.com/office/drawing/2014/main" val="1391478989"/>
+                  </a:ext>
+                </a:extLst>
+              </a:tr>
+              <a:tr h="923801">
+                <a:tc>
+                  <a:txBody>
+                    <a:bodyPr/>
+                    <a:lstStyle/>
+                    <a:p>
+                      <a:pPr>
+                        <a:lnSpc>
+                          <a:spcPct val="107000"/>
+                        </a:lnSpc>
+                        <a:spcAft>
+                          <a:spcPts val="800"/>
+                        </a:spcAft>
+                        <a:buNone/>
+                      </a:pPr>
+                      <a:r>
+                        <a:rPr lang="en-IN" sz="2600" kern="100">
+                          <a:effectLst/>
+                        </a:rPr>
+                        <a:t>Ward</a:t>
+                      </a:r>
+                      <a:endParaRPr lang="en-IN" sz="2600" kern="100">
+                        <a:effectLst/>
+                        <a:latin typeface="Aptos" panose="020B0004020202020204" pitchFamily="34" charset="0"/>
+                        <a:ea typeface="Aptos" panose="020B0004020202020204" pitchFamily="34" charset="0"/>
+                        <a:cs typeface="Tunga" panose="020B0502040204020203" pitchFamily="34" charset="0"/>
+                      </a:endParaRPr>
+                    </a:p>
+                  </a:txBody>
+                  <a:tcPr marL="163424" marR="163424" marT="0" marB="0"/>
+                </a:tc>
+                <a:tc>
+                  <a:txBody>
+                    <a:bodyPr/>
+                    <a:lstStyle/>
+                    <a:p>
+                      <a:pPr>
+                        <a:lnSpc>
+                          <a:spcPct val="107000"/>
+                        </a:lnSpc>
+                        <a:spcAft>
+                          <a:spcPts val="800"/>
+                        </a:spcAft>
+                        <a:buNone/>
+                      </a:pPr>
+                      <a:r>
+                        <a:rPr lang="en-IN" sz="2600" kern="100" dirty="0">
+                          <a:effectLst/>
+                        </a:rPr>
+                        <a:t>Minimize variance between clusters (default in scikit-learn)</a:t>
+                      </a:r>
+                      <a:endParaRPr lang="en-IN" sz="2600" kern="100" dirty="0">
+                        <a:effectLst/>
+                        <a:latin typeface="Aptos" panose="020B0004020202020204" pitchFamily="34" charset="0"/>
+                        <a:ea typeface="Aptos" panose="020B0004020202020204" pitchFamily="34" charset="0"/>
+                        <a:cs typeface="Tunga" panose="020B0502040204020203" pitchFamily="34" charset="0"/>
+                      </a:endParaRPr>
+                    </a:p>
+                  </a:txBody>
+                  <a:tcPr marL="163424" marR="163424" marT="0" marB="0"/>
+                </a:tc>
+                <a:extLst>
+                  <a:ext uri="{0D108BD9-81ED-4DB2-BD59-A6C34878D82A}">
+                    <a16:rowId xmlns:a16="http://schemas.microsoft.com/office/drawing/2014/main" val="728695204"/>
+                  </a:ext>
+                </a:extLst>
+              </a:tr>
+            </a:tbl>
+          </a:graphicData>
+        </a:graphic>
+      </p:graphicFrame>
+    </p:spTree>
+    <p:extLst>
+      <p:ext uri="{BB962C8B-B14F-4D97-AF65-F5344CB8AC3E}">
+        <p14:creationId xmlns:p14="http://schemas.microsoft.com/office/powerpoint/2010/main" val="972782073"/>
+      </p:ext>
+    </p:extLst>
+  </p:cSld>
+  <p:clrMapOvr>
+    <a:masterClrMapping/>
+  </p:clrMapOvr>
+</p:sld>
+</file>
+
+<file path=ppt/slides/slide25.xml><?xml version="1.0" encoding="utf-8"?>
+<p:sld xmlns:a="http://schemas.openxmlformats.org/drawingml/2006/main" xmlns:r="http://schemas.openxmlformats.org/officeDocument/2006/relationships" xmlns:p="http://schemas.openxmlformats.org/presentationml/2006/main">
+  <p:cSld>
+    <p:spTree>
+      <p:nvGrpSpPr>
+        <p:cNvPr id="1" name="">
+          <a:extLst>
+            <a:ext uri="{FF2B5EF4-FFF2-40B4-BE49-F238E27FC236}">
+              <a16:creationId xmlns:a16="http://schemas.microsoft.com/office/drawing/2014/main" id="{EFC6E852-5A86-1A87-E8C1-73A1A8E8B126}"/>
+            </a:ext>
+          </a:extLst>
+        </p:cNvPr>
+        <p:cNvGrpSpPr/>
+        <p:nvPr/>
+      </p:nvGrpSpPr>
+      <p:grpSpPr>
+        <a:xfrm>
+          <a:off x="0" y="0"/>
+          <a:ext cx="0" cy="0"/>
+          <a:chOff x="0" y="0"/>
+          <a:chExt cx="0" cy="0"/>
+        </a:xfrm>
+      </p:grpSpPr>
+      <p:sp>
+        <p:nvSpPr>
+          <p:cNvPr id="4103" name="Title 1">
+            <a:extLst>
+              <a:ext uri="{FF2B5EF4-FFF2-40B4-BE49-F238E27FC236}">
+                <a16:creationId xmlns:a16="http://schemas.microsoft.com/office/drawing/2014/main" id="{52FF76B6-4F01-43CB-3B72-B26A00EDD666}"/>
+              </a:ext>
+            </a:extLst>
+          </p:cNvPr>
+          <p:cNvSpPr>
+            <a:spLocks noGrp="1"/>
+          </p:cNvSpPr>
+          <p:nvPr>
+            <p:ph type="title"/>
+          </p:nvPr>
+        </p:nvSpPr>
+        <p:spPr>
+          <a:xfrm>
+            <a:off x="777240" y="457200"/>
+            <a:ext cx="4790123" cy="2501900"/>
+          </a:xfrm>
+        </p:spPr>
+        <p:txBody>
+          <a:bodyPr>
+            <a:normAutofit/>
+          </a:bodyPr>
+          <a:lstStyle/>
+          <a:p>
+            <a:r>
+              <a:rPr lang="en-US" b="1" dirty="0"/>
+              <a:t>Dendrogram: The Tree of Clusters 🌳</a:t>
+            </a:r>
+            <a:br>
+              <a:rPr lang="en-US" b="1" dirty="0"/>
+            </a:br>
+            <a:endParaRPr lang="en-US" dirty="0"/>
+          </a:p>
+        </p:txBody>
+      </p:sp>
+      <p:sp>
+        <p:nvSpPr>
+          <p:cNvPr id="3" name="Content Placeholder 2">
+            <a:extLst>
+              <a:ext uri="{FF2B5EF4-FFF2-40B4-BE49-F238E27FC236}">
+                <a16:creationId xmlns:a16="http://schemas.microsoft.com/office/drawing/2014/main" id="{9AA9EA31-59F0-551C-B58A-68C9D19873B3}"/>
+              </a:ext>
+            </a:extLst>
+          </p:cNvPr>
+          <p:cNvSpPr>
+            <a:spLocks noGrp="1"/>
+          </p:cNvSpPr>
+          <p:nvPr>
+            <p:ph type="body" sz="half" idx="2"/>
+          </p:nvPr>
+        </p:nvSpPr>
+        <p:spPr>
+          <a:xfrm>
+            <a:off x="777240" y="2711450"/>
+            <a:ext cx="4790123" cy="2776537"/>
+          </a:xfrm>
+        </p:spPr>
+        <p:txBody>
+          <a:bodyPr>
+            <a:normAutofit fontScale="92500"/>
+          </a:bodyPr>
+          <a:lstStyle/>
+          <a:p>
+            <a:pPr marL="0" indent="0">
+              <a:buNone/>
+            </a:pPr>
+            <a:r>
+              <a:rPr lang="en-US" sz="2400" dirty="0"/>
+              <a:t>A </a:t>
+            </a:r>
+            <a:r>
+              <a:rPr lang="en-US" sz="2400" b="1" dirty="0"/>
+              <a:t>dendrogram</a:t>
+            </a:r>
+            <a:r>
+              <a:rPr lang="en-US" sz="2400" dirty="0"/>
+              <a:t> is a diagram showing </a:t>
+            </a:r>
+            <a:r>
+              <a:rPr lang="en-US" sz="2400" b="1" dirty="0"/>
+              <a:t>how clusters were merged</a:t>
+            </a:r>
+            <a:r>
+              <a:rPr lang="en-US" sz="2400" dirty="0"/>
+              <a:t> or </a:t>
+            </a:r>
+            <a:r>
+              <a:rPr lang="en-US" sz="2400" b="1" dirty="0"/>
+              <a:t>split</a:t>
+            </a:r>
+            <a:r>
+              <a:rPr lang="en-US" sz="2400" dirty="0"/>
+              <a:t> </a:t>
+            </a:r>
+            <a:r>
+              <a:rPr lang="en-US" sz="2400" b="1" dirty="0"/>
+              <a:t>at</a:t>
+            </a:r>
+            <a:r>
+              <a:rPr lang="en-US" sz="2400" dirty="0"/>
+              <a:t> </a:t>
+            </a:r>
+            <a:r>
+              <a:rPr lang="en-US" sz="2400" b="1" dirty="0"/>
+              <a:t>each</a:t>
+            </a:r>
+            <a:r>
+              <a:rPr lang="en-US" sz="2400" dirty="0"/>
+              <a:t> </a:t>
+            </a:r>
+            <a:r>
+              <a:rPr lang="en-US" sz="2400" b="1" dirty="0"/>
+              <a:t>step</a:t>
+            </a:r>
+            <a:r>
+              <a:rPr lang="en-US" sz="2400" dirty="0"/>
+              <a:t>.</a:t>
+            </a:r>
+          </a:p>
+          <a:p>
+            <a:pPr marL="342900" indent="-342900">
+              <a:buFont typeface="Arial" panose="020B0604020202020204" pitchFamily="34" charset="0"/>
+              <a:buChar char="•"/>
+            </a:pPr>
+            <a:r>
+              <a:rPr lang="en-US" sz="2200" dirty="0"/>
+              <a:t>The height of the branches shows the distance (dissimilarity) between clusters.</a:t>
+            </a:r>
+          </a:p>
+          <a:p>
+            <a:pPr marL="342900" indent="-342900">
+              <a:buFont typeface="Arial" panose="020B0604020202020204" pitchFamily="34" charset="0"/>
+              <a:buChar char="•"/>
+            </a:pPr>
+            <a:r>
+              <a:rPr lang="en-US" sz="2200" dirty="0"/>
+              <a:t>You can cut the dendrogram at a certain height to choose the number of clusters.</a:t>
+            </a:r>
+            <a:endParaRPr lang="en-IN" sz="2200" dirty="0"/>
+          </a:p>
+        </p:txBody>
+      </p:sp>
+      <p:pic>
+        <p:nvPicPr>
+          <p:cNvPr id="4100" name="Picture 4" descr="What is hierarchical clustering? - mTab">
+            <a:extLst>
+              <a:ext uri="{FF2B5EF4-FFF2-40B4-BE49-F238E27FC236}">
+                <a16:creationId xmlns:a16="http://schemas.microsoft.com/office/drawing/2014/main" id="{6039FF5D-42C8-1510-3C75-9E5A27D11975}"/>
+              </a:ext>
+            </a:extLst>
+          </p:cNvPr>
+          <p:cNvPicPr>
+            <a:picLocks noChangeAspect="1" noChangeArrowheads="1"/>
+          </p:cNvPicPr>
+          <p:nvPr/>
+        </p:nvPicPr>
+        <p:blipFill>
+          <a:blip r:embed="rId2">
+            <a:extLst>
+              <a:ext uri="{28A0092B-C50C-407E-A947-70E740481C1C}">
+                <a14:useLocalDpi xmlns:a14="http://schemas.microsoft.com/office/drawing/2010/main" val="0"/>
+              </a:ext>
+            </a:extLst>
+          </a:blip>
+          <a:srcRect/>
+          <a:stretch>
+            <a:fillRect/>
+          </a:stretch>
+        </p:blipFill>
+        <p:spPr bwMode="auto">
+          <a:xfrm>
+            <a:off x="5740854" y="717233"/>
+            <a:ext cx="5423533" cy="5423533"/>
+          </a:xfrm>
+          <a:prstGeom prst="rect">
+            <a:avLst/>
+          </a:prstGeom>
+          <a:noFill/>
+          <a:extLst>
+            <a:ext uri="{909E8E84-426E-40DD-AFC4-6F175D3DCCD1}">
+              <a14:hiddenFill xmlns:a14="http://schemas.microsoft.com/office/drawing/2010/main">
+                <a:solidFill>
+                  <a:srgbClr val="FFFFFF"/>
+                </a:solidFill>
+              </a14:hiddenFill>
+            </a:ext>
+          </a:extLst>
+        </p:spPr>
+      </p:pic>
+    </p:spTree>
+    <p:extLst>
+      <p:ext uri="{BB962C8B-B14F-4D97-AF65-F5344CB8AC3E}">
+        <p14:creationId xmlns:p14="http://schemas.microsoft.com/office/powerpoint/2010/main" val="2352048730"/>
+      </p:ext>
+    </p:extLst>
+  </p:cSld>
+  <p:clrMapOvr>
+    <a:masterClrMapping/>
+  </p:clrMapOvr>
+</p:sld>
+</file>
+
+<file path=ppt/slides/slide26.xml><?xml version="1.0" encoding="utf-8"?>
+<p:sld xmlns:a="http://schemas.openxmlformats.org/drawingml/2006/main" xmlns:r="http://schemas.openxmlformats.org/officeDocument/2006/relationships" xmlns:p="http://schemas.openxmlformats.org/presentationml/2006/main">
+  <p:cSld>
+    <p:spTree>
+      <p:nvGrpSpPr>
+        <p:cNvPr id="1" name="">
+          <a:extLst>
+            <a:ext uri="{FF2B5EF4-FFF2-40B4-BE49-F238E27FC236}">
+              <a16:creationId xmlns:a16="http://schemas.microsoft.com/office/drawing/2014/main" id="{6032190C-BBA2-EB67-58BB-18E836C342DB}"/>
+            </a:ext>
+          </a:extLst>
+        </p:cNvPr>
+        <p:cNvGrpSpPr/>
+        <p:nvPr/>
+      </p:nvGrpSpPr>
+      <p:grpSpPr>
+        <a:xfrm>
+          <a:off x="0" y="0"/>
+          <a:ext cx="0" cy="0"/>
+          <a:chOff x="0" y="0"/>
+          <a:chExt cx="0" cy="0"/>
+        </a:xfrm>
+      </p:grpSpPr>
+      <p:grpSp>
+        <p:nvGrpSpPr>
+          <p:cNvPr id="6" name="Group 5">
+            <a:extLst>
+              <a:ext uri="{FF2B5EF4-FFF2-40B4-BE49-F238E27FC236}">
+                <a16:creationId xmlns:a16="http://schemas.microsoft.com/office/drawing/2014/main" id="{43209140-ADDA-EBB1-2152-3366962A652C}"/>
+              </a:ext>
+            </a:extLst>
+          </p:cNvPr>
+          <p:cNvGrpSpPr/>
+          <p:nvPr/>
+        </p:nvGrpSpPr>
+        <p:grpSpPr>
+          <a:xfrm>
+            <a:off x="0" y="0"/>
+            <a:ext cx="12192000" cy="6878206"/>
+            <a:chOff x="0" y="0"/>
+            <a:chExt cx="12192000" cy="6878206"/>
+          </a:xfrm>
+        </p:grpSpPr>
+        <p:pic>
+          <p:nvPicPr>
+            <p:cNvPr id="7170" name="Picture 2" descr="An Introduction to Hierarchical Clustering in Python | DataCamp">
+              <a:extLst>
+                <a:ext uri="{FF2B5EF4-FFF2-40B4-BE49-F238E27FC236}">
+                  <a16:creationId xmlns:a16="http://schemas.microsoft.com/office/drawing/2014/main" id="{9F6193B6-2A91-F022-CEB2-EFF39B0D0F16}"/>
+                </a:ext>
+              </a:extLst>
+            </p:cNvPr>
+            <p:cNvPicPr>
+              <a:picLocks noChangeAspect="1" noChangeArrowheads="1"/>
+            </p:cNvPicPr>
+            <p:nvPr/>
+          </p:nvPicPr>
+          <p:blipFill>
+            <a:blip r:embed="rId2">
+              <a:extLst>
+                <a:ext uri="{28A0092B-C50C-407E-A947-70E740481C1C}">
+                  <a14:useLocalDpi xmlns:a14="http://schemas.microsoft.com/office/drawing/2010/main" val="0"/>
+                </a:ext>
+              </a:extLst>
+            </a:blip>
+            <a:srcRect/>
+            <a:stretch>
+              <a:fillRect/>
+            </a:stretch>
+          </p:blipFill>
+          <p:spPr bwMode="auto">
+            <a:xfrm>
+              <a:off x="3704253" y="0"/>
+              <a:ext cx="8487747" cy="6858000"/>
+            </a:xfrm>
+            <a:prstGeom prst="rect">
+              <a:avLst/>
+            </a:prstGeom>
+            <a:noFill/>
+            <a:extLst>
+              <a:ext uri="{909E8E84-426E-40DD-AFC4-6F175D3DCCD1}">
+                <a14:hiddenFill xmlns:a14="http://schemas.microsoft.com/office/drawing/2010/main">
+                  <a:solidFill>
+                    <a:srgbClr val="FFFFFF"/>
+                  </a:solidFill>
+                </a14:hiddenFill>
+              </a:ext>
+            </a:extLst>
+          </p:spPr>
+        </p:pic>
+        <p:pic>
+          <p:nvPicPr>
+            <p:cNvPr id="5" name="Picture 4">
+              <a:extLst>
+                <a:ext uri="{FF2B5EF4-FFF2-40B4-BE49-F238E27FC236}">
+                  <a16:creationId xmlns:a16="http://schemas.microsoft.com/office/drawing/2014/main" id="{3386897D-0F43-4E63-2883-EECB4C104553}"/>
+                </a:ext>
+              </a:extLst>
+            </p:cNvPr>
+            <p:cNvPicPr>
+              <a:picLocks noChangeAspect="1"/>
+            </p:cNvPicPr>
+            <p:nvPr/>
+          </p:nvPicPr>
+          <p:blipFill>
+            <a:blip r:embed="rId3">
+              <a:extLst>
+                <a:ext uri="{28A0092B-C50C-407E-A947-70E740481C1C}">
+                  <a14:useLocalDpi xmlns:a14="http://schemas.microsoft.com/office/drawing/2010/main" val="0"/>
+                </a:ext>
+              </a:extLst>
+            </a:blip>
+            <a:stretch>
+              <a:fillRect/>
+            </a:stretch>
+          </p:blipFill>
+          <p:spPr>
+            <a:xfrm>
+              <a:off x="0" y="20206"/>
+              <a:ext cx="3704253" cy="6858000"/>
+            </a:xfrm>
+            <a:prstGeom prst="rect">
+              <a:avLst/>
+            </a:prstGeom>
+          </p:spPr>
+        </p:pic>
+      </p:grpSp>
+      <p:sp>
+        <p:nvSpPr>
+          <p:cNvPr id="3" name="TextBox 2">
+            <a:extLst>
+              <a:ext uri="{FF2B5EF4-FFF2-40B4-BE49-F238E27FC236}">
+                <a16:creationId xmlns:a16="http://schemas.microsoft.com/office/drawing/2014/main" id="{820618C5-227F-DF4A-520F-04F841D7B5B3}"/>
+              </a:ext>
+            </a:extLst>
+          </p:cNvPr>
+          <p:cNvSpPr txBox="1"/>
+          <p:nvPr/>
+        </p:nvSpPr>
+        <p:spPr>
+          <a:xfrm>
+            <a:off x="73867" y="119466"/>
+            <a:ext cx="3932075" cy="4832092"/>
+          </a:xfrm>
+          <a:prstGeom prst="rect">
+            <a:avLst/>
+          </a:prstGeom>
+          <a:noFill/>
+        </p:spPr>
+        <p:txBody>
+          <a:bodyPr wrap="square">
+            <a:spAutoFit/>
+          </a:bodyPr>
+          <a:lstStyle/>
+          <a:p>
+            <a:pPr algn="l"/>
+            <a:r>
+              <a:rPr lang="en-US" sz="2400" b="1" i="0" dirty="0">
+                <a:solidFill>
+                  <a:srgbClr val="0D0D0D"/>
+                </a:solidFill>
+                <a:effectLst/>
+                <a:latin typeface="Söhne"/>
+              </a:rPr>
+              <a:t>2. Divisive Hierarchical Clustering:</a:t>
+            </a:r>
+            <a:r>
+              <a:rPr lang="en-US" sz="2400" b="0" i="0" dirty="0">
+                <a:solidFill>
+                  <a:srgbClr val="0D0D0D"/>
+                </a:solidFill>
+                <a:effectLst/>
+                <a:latin typeface="Söhne"/>
+              </a:rPr>
+              <a:t>  </a:t>
+            </a:r>
+            <a:r>
+              <a:rPr lang="en-US" sz="2400" b="1" i="0" dirty="0">
+                <a:solidFill>
+                  <a:srgbClr val="C00000"/>
+                </a:solidFill>
+                <a:effectLst/>
+                <a:latin typeface="Söhne"/>
+              </a:rPr>
+              <a:t>(Top-Down)</a:t>
+            </a:r>
+          </a:p>
+          <a:p>
+            <a:pPr algn="l"/>
+            <a:r>
+              <a:rPr lang="en-US" sz="2000" dirty="0">
+                <a:solidFill>
+                  <a:srgbClr val="0D0D0D"/>
+                </a:solidFill>
+                <a:latin typeface="Söhne"/>
+              </a:rPr>
+              <a:t>	</a:t>
+            </a:r>
+            <a:r>
+              <a:rPr lang="en-US" sz="2000" dirty="0"/>
+              <a:t>The divisive hierarchical clustering method uses a top-down strategy. The starting point is the </a:t>
+            </a:r>
+            <a:r>
+              <a:rPr lang="en-US" sz="2000" b="1" dirty="0">
+                <a:solidFill>
+                  <a:srgbClr val="C00000"/>
+                </a:solidFill>
+              </a:rPr>
+              <a:t>largest cluster </a:t>
+            </a:r>
+            <a:r>
+              <a:rPr lang="en-US" sz="2000" dirty="0"/>
+              <a:t>with all the objects in it, and then, it is </a:t>
+            </a:r>
+            <a:r>
+              <a:rPr lang="en-US" sz="2000" b="1" dirty="0">
+                <a:solidFill>
+                  <a:srgbClr val="C00000"/>
+                </a:solidFill>
+              </a:rPr>
+              <a:t>split recursively </a:t>
+            </a:r>
+            <a:r>
+              <a:rPr lang="en-US" sz="2000" dirty="0"/>
+              <a:t>to form smaller and smaller clusters, thus forming the hierarchy. </a:t>
+            </a:r>
+            <a:r>
+              <a:rPr lang="en-US" sz="2000" b="1" dirty="0">
+                <a:solidFill>
+                  <a:schemeClr val="accent6">
+                    <a:lumMod val="50000"/>
+                  </a:schemeClr>
+                </a:solidFill>
+              </a:rPr>
+              <a:t>The end of iterations is achieved when the objects in the final clusters are sufficiently homogeneous to each other or the final clusters contain only one object or the user-defined clustering condition is achieved</a:t>
+            </a:r>
+            <a:r>
+              <a:rPr lang="en-US" sz="2000" dirty="0"/>
+              <a:t>.</a:t>
+            </a:r>
+            <a:endParaRPr lang="en-US" sz="2000" b="0" i="0" dirty="0">
+              <a:solidFill>
+                <a:srgbClr val="0D0D0D"/>
+              </a:solidFill>
+              <a:effectLst/>
+              <a:latin typeface="Söhne"/>
+            </a:endParaRPr>
+          </a:p>
+        </p:txBody>
+      </p:sp>
+    </p:spTree>
+    <p:extLst>
+      <p:ext uri="{BB962C8B-B14F-4D97-AF65-F5344CB8AC3E}">
+        <p14:creationId xmlns:p14="http://schemas.microsoft.com/office/powerpoint/2010/main" val="212636500"/>
+      </p:ext>
+    </p:extLst>
+  </p:cSld>
+  <p:clrMapOvr>
+    <a:masterClrMapping/>
+  </p:clrMapOvr>
+</p:sld>
+</file>
+
+<file path=ppt/slides/slide27.xml><?xml version="1.0" encoding="utf-8"?>
+<p:sld xmlns:a="http://schemas.openxmlformats.org/drawingml/2006/main" xmlns:r="http://schemas.openxmlformats.org/officeDocument/2006/relationships" xmlns:p="http://schemas.openxmlformats.org/presentationml/2006/main">
+  <p:cSld>
+    <p:spTree>
+      <p:nvGrpSpPr>
+        <p:cNvPr id="1" name="">
+          <a:extLst>
+            <a:ext uri="{FF2B5EF4-FFF2-40B4-BE49-F238E27FC236}">
+              <a16:creationId xmlns:a16="http://schemas.microsoft.com/office/drawing/2014/main" id="{90E4076B-A0FA-AF73-1C57-D3D6F3822F82}"/>
+            </a:ext>
+          </a:extLst>
+        </p:cNvPr>
+        <p:cNvGrpSpPr/>
+        <p:nvPr/>
+      </p:nvGrpSpPr>
+      <p:grpSpPr>
+        <a:xfrm>
+          <a:off x="0" y="0"/>
+          <a:ext cx="0" cy="0"/>
+          <a:chOff x="0" y="0"/>
+          <a:chExt cx="0" cy="0"/>
+        </a:xfrm>
+      </p:grpSpPr>
+      <p:sp>
+        <p:nvSpPr>
+          <p:cNvPr id="3" name="Content Placeholder 2">
+            <a:extLst>
+              <a:ext uri="{FF2B5EF4-FFF2-40B4-BE49-F238E27FC236}">
+                <a16:creationId xmlns:a16="http://schemas.microsoft.com/office/drawing/2014/main" id="{80477268-4D21-FDDB-DA37-D18D1985DA74}"/>
+              </a:ext>
+            </a:extLst>
+          </p:cNvPr>
+          <p:cNvSpPr>
+            <a:spLocks noGrp="1"/>
+          </p:cNvSpPr>
+          <p:nvPr>
+            <p:ph idx="1"/>
+          </p:nvPr>
+        </p:nvSpPr>
+        <p:spPr>
+          <a:xfrm>
+            <a:off x="702853" y="707571"/>
+            <a:ext cx="10900568" cy="5486400"/>
+          </a:xfrm>
+        </p:spPr>
+        <p:txBody>
+          <a:bodyPr>
+            <a:normAutofit fontScale="92500" lnSpcReduction="10000"/>
+          </a:bodyPr>
+          <a:lstStyle/>
+          <a:p>
+            <a:pPr marL="0" indent="0">
+              <a:buNone/>
+            </a:pPr>
+            <a:r>
+              <a:rPr lang="en-US" sz="2400" b="1" dirty="0"/>
+              <a:t>What is Divisive Hierarchical Clustering?</a:t>
+            </a:r>
+          </a:p>
+          <a:p>
+            <a:pPr marL="0" indent="0">
+              <a:buNone/>
+            </a:pPr>
+            <a:r>
+              <a:rPr lang="en-US" sz="2400" dirty="0"/>
+              <a:t>Divisive Clustering is a top-down approach:</a:t>
+            </a:r>
+          </a:p>
+          <a:p>
+            <a:pPr lvl="1"/>
+            <a:r>
+              <a:rPr lang="en-US" sz="2200" dirty="0"/>
+              <a:t>Start with all data points in one big cluster</a:t>
+            </a:r>
+          </a:p>
+          <a:p>
+            <a:pPr lvl="1"/>
+            <a:r>
+              <a:rPr lang="en-US" sz="2200" dirty="0"/>
+              <a:t>Recursively split the cluster into smaller sub-clusters</a:t>
+            </a:r>
+          </a:p>
+          <a:p>
+            <a:pPr lvl="1"/>
+            <a:r>
+              <a:rPr lang="en-US" sz="2200" dirty="0"/>
+              <a:t>Continue until each point is in its own cluster</a:t>
+            </a:r>
+          </a:p>
+          <a:p>
+            <a:pPr marL="0" indent="0">
+              <a:buNone/>
+            </a:pPr>
+            <a:r>
+              <a:rPr lang="en-US" sz="2400" dirty="0"/>
+              <a:t>📌 It’s the </a:t>
+            </a:r>
+            <a:r>
+              <a:rPr lang="en-US" sz="2600" b="1" dirty="0">
+                <a:solidFill>
+                  <a:schemeClr val="tx2">
+                    <a:lumMod val="75000"/>
+                    <a:lumOff val="25000"/>
+                  </a:schemeClr>
+                </a:solidFill>
+              </a:rPr>
+              <a:t>reverse</a:t>
+            </a:r>
+            <a:r>
+              <a:rPr lang="en-US" sz="2400" dirty="0"/>
+              <a:t> </a:t>
+            </a:r>
+            <a:r>
+              <a:rPr lang="en-US" sz="2600" b="1" dirty="0">
+                <a:solidFill>
+                  <a:schemeClr val="tx2">
+                    <a:lumMod val="75000"/>
+                    <a:lumOff val="25000"/>
+                  </a:schemeClr>
+                </a:solidFill>
+              </a:rPr>
+              <a:t>of</a:t>
+            </a:r>
+            <a:r>
+              <a:rPr lang="en-US" sz="2400" dirty="0"/>
+              <a:t> </a:t>
+            </a:r>
+            <a:r>
+              <a:rPr lang="en-US" sz="2400" b="1" dirty="0">
+                <a:solidFill>
+                  <a:srgbClr val="002060"/>
+                </a:solidFill>
+              </a:rPr>
+              <a:t>Agglomerative Clustering</a:t>
+            </a:r>
+            <a:r>
+              <a:rPr lang="en-US" sz="2400" dirty="0"/>
+              <a:t>, which builds clusters </a:t>
+            </a:r>
+            <a:r>
+              <a:rPr lang="en-US" sz="2400" b="1" dirty="0">
+                <a:solidFill>
+                  <a:srgbClr val="C00000"/>
+                </a:solidFill>
+              </a:rPr>
+              <a:t>bottom-up</a:t>
+            </a:r>
+            <a:r>
+              <a:rPr lang="en-US" sz="2400" dirty="0"/>
+              <a:t>.</a:t>
+            </a:r>
+          </a:p>
+          <a:p>
+            <a:pPr marL="0" indent="0">
+              <a:buNone/>
+            </a:pPr>
+            <a:endParaRPr lang="en-US" sz="2400" dirty="0"/>
+          </a:p>
+          <a:p>
+            <a:pPr marL="0" indent="0">
+              <a:buNone/>
+            </a:pPr>
+            <a:r>
+              <a:rPr lang="en-US" sz="2400" b="1" dirty="0"/>
+              <a:t>Real-Life Analogy</a:t>
+            </a:r>
+          </a:p>
+          <a:p>
+            <a:pPr marL="0" indent="0">
+              <a:buNone/>
+            </a:pPr>
+            <a:r>
+              <a:rPr lang="en-US" sz="2400" dirty="0"/>
+              <a:t>Imagine you’re organizing a conference with 100 participants.</a:t>
+            </a:r>
+          </a:p>
+          <a:p>
+            <a:pPr marL="0" indent="0">
+              <a:buNone/>
+            </a:pPr>
+            <a:r>
+              <a:rPr lang="en-US" sz="2400" dirty="0"/>
+              <a:t>You start by </a:t>
+            </a:r>
+            <a:r>
+              <a:rPr lang="en-US" sz="2400" b="1" dirty="0">
+                <a:solidFill>
+                  <a:srgbClr val="C00000"/>
+                </a:solidFill>
+              </a:rPr>
+              <a:t>putting everyone in one big room</a:t>
+            </a:r>
+            <a:r>
+              <a:rPr lang="en-US" sz="2400" dirty="0"/>
+              <a:t>.</a:t>
+            </a:r>
+          </a:p>
+          <a:p>
+            <a:pPr marL="0" indent="0">
+              <a:buNone/>
+            </a:pPr>
+            <a:r>
+              <a:rPr lang="en-US" sz="2400" dirty="0"/>
+              <a:t>Then you:</a:t>
+            </a:r>
+          </a:p>
+          <a:p>
+            <a:pPr lvl="1"/>
+            <a:r>
+              <a:rPr lang="en-US" sz="2200" dirty="0"/>
+              <a:t>Split them </a:t>
+            </a:r>
+            <a:r>
+              <a:rPr lang="en-US" sz="2200" b="1" dirty="0">
+                <a:solidFill>
+                  <a:srgbClr val="002060"/>
+                </a:solidFill>
+              </a:rPr>
+              <a:t>based on role</a:t>
+            </a:r>
+            <a:r>
+              <a:rPr lang="en-US" sz="2200" b="1" dirty="0"/>
+              <a:t> </a:t>
+            </a:r>
+            <a:r>
+              <a:rPr lang="en-US" sz="2200" dirty="0"/>
+              <a:t>(e.g., Speaker vs. Attendee)</a:t>
+            </a:r>
+          </a:p>
+          <a:p>
+            <a:pPr lvl="1"/>
+            <a:r>
+              <a:rPr lang="en-US" sz="2200" dirty="0"/>
+              <a:t>Split Attendees by </a:t>
+            </a:r>
+            <a:r>
+              <a:rPr lang="en-US" sz="2200" b="1" dirty="0">
+                <a:solidFill>
+                  <a:srgbClr val="002060"/>
+                </a:solidFill>
+              </a:rPr>
+              <a:t>experience</a:t>
+            </a:r>
+            <a:r>
+              <a:rPr lang="en-US" sz="2200" dirty="0"/>
+              <a:t> </a:t>
+            </a:r>
+            <a:r>
+              <a:rPr lang="en-US" sz="2200" b="1" dirty="0">
+                <a:solidFill>
+                  <a:srgbClr val="002060"/>
+                </a:solidFill>
+              </a:rPr>
+              <a:t>level</a:t>
+            </a:r>
+            <a:r>
+              <a:rPr lang="en-US" sz="2200" dirty="0"/>
+              <a:t> (Beginner vs. Advanced)</a:t>
+            </a:r>
+          </a:p>
+          <a:p>
+            <a:pPr lvl="1"/>
+            <a:r>
+              <a:rPr lang="en-US" sz="2200" dirty="0"/>
+              <a:t>Further divide based on </a:t>
+            </a:r>
+            <a:r>
+              <a:rPr lang="en-US" sz="2200" b="1" dirty="0">
+                <a:solidFill>
+                  <a:srgbClr val="002060"/>
+                </a:solidFill>
+              </a:rPr>
+              <a:t>topics</a:t>
+            </a:r>
+            <a:r>
+              <a:rPr lang="en-US" sz="2200" dirty="0"/>
+              <a:t> </a:t>
+            </a:r>
+            <a:r>
+              <a:rPr lang="en-US" sz="2200" b="1" dirty="0">
+                <a:solidFill>
+                  <a:srgbClr val="002060"/>
+                </a:solidFill>
+              </a:rPr>
+              <a:t>of</a:t>
+            </a:r>
+            <a:r>
+              <a:rPr lang="en-US" sz="2200" dirty="0"/>
+              <a:t> </a:t>
+            </a:r>
+            <a:r>
+              <a:rPr lang="en-US" sz="2200" b="1" dirty="0">
+                <a:solidFill>
+                  <a:srgbClr val="002060"/>
+                </a:solidFill>
+              </a:rPr>
+              <a:t>interest</a:t>
+            </a:r>
+            <a:r>
+              <a:rPr lang="en-US" sz="2200" dirty="0"/>
+              <a:t> (e.g., AI, Web Dev)</a:t>
+            </a:r>
+          </a:p>
+          <a:p>
+            <a:pPr marL="0" indent="0">
+              <a:buNone/>
+            </a:pPr>
+            <a:r>
+              <a:rPr lang="en-US" sz="2400" dirty="0"/>
+              <a:t>This </a:t>
+            </a:r>
+            <a:r>
+              <a:rPr lang="en-US" sz="2400" b="1" dirty="0">
+                <a:solidFill>
+                  <a:schemeClr val="tx2">
+                    <a:lumMod val="50000"/>
+                    <a:lumOff val="50000"/>
+                  </a:schemeClr>
+                </a:solidFill>
+              </a:rPr>
+              <a:t>recursive</a:t>
+            </a:r>
+            <a:r>
+              <a:rPr lang="en-US" sz="2400" dirty="0"/>
+              <a:t> </a:t>
+            </a:r>
+            <a:r>
+              <a:rPr lang="en-US" sz="2400" b="1" dirty="0">
+                <a:solidFill>
+                  <a:schemeClr val="tx2">
+                    <a:lumMod val="50000"/>
+                    <a:lumOff val="50000"/>
+                  </a:schemeClr>
+                </a:solidFill>
+              </a:rPr>
+              <a:t>splitting</a:t>
+            </a:r>
+            <a:r>
+              <a:rPr lang="en-US" sz="2400" dirty="0"/>
+              <a:t> continues until you form meaningful subgroups.</a:t>
+            </a:r>
+            <a:endParaRPr lang="en-IN" sz="2400" dirty="0"/>
+          </a:p>
+        </p:txBody>
+      </p:sp>
+    </p:spTree>
+    <p:extLst>
+      <p:ext uri="{BB962C8B-B14F-4D97-AF65-F5344CB8AC3E}">
+        <p14:creationId xmlns:p14="http://schemas.microsoft.com/office/powerpoint/2010/main" val="4133568543"/>
+      </p:ext>
+    </p:extLst>
+  </p:cSld>
+  <p:clrMapOvr>
+    <a:masterClrMapping/>
+  </p:clrMapOvr>
+</p:sld>
+</file>
+
+<file path=ppt/slides/slide28.xml><?xml version="1.0" encoding="utf-8"?>
+<p:sld xmlns:a="http://schemas.openxmlformats.org/drawingml/2006/main" xmlns:r="http://schemas.openxmlformats.org/officeDocument/2006/relationships" xmlns:p="http://schemas.openxmlformats.org/presentationml/2006/main">
+  <p:cSld>
+    <p:spTree>
+      <p:nvGrpSpPr>
+        <p:cNvPr id="1" name="">
+          <a:extLst>
+            <a:ext uri="{FF2B5EF4-FFF2-40B4-BE49-F238E27FC236}">
+              <a16:creationId xmlns:a16="http://schemas.microsoft.com/office/drawing/2014/main" id="{4AF87CF8-CBAD-CA34-08E4-D9080B5FD778}"/>
+            </a:ext>
+          </a:extLst>
+        </p:cNvPr>
+        <p:cNvGrpSpPr/>
+        <p:nvPr/>
+      </p:nvGrpSpPr>
+      <p:grpSpPr>
+        <a:xfrm>
+          <a:off x="0" y="0"/>
+          <a:ext cx="0" cy="0"/>
+          <a:chOff x="0" y="0"/>
+          <a:chExt cx="0" cy="0"/>
+        </a:xfrm>
+      </p:grpSpPr>
+      <p:sp>
+        <p:nvSpPr>
+          <p:cNvPr id="3" name="Content Placeholder 2">
+            <a:extLst>
+              <a:ext uri="{FF2B5EF4-FFF2-40B4-BE49-F238E27FC236}">
+                <a16:creationId xmlns:a16="http://schemas.microsoft.com/office/drawing/2014/main" id="{2BFDF9E3-B569-7920-48AD-EC7B37D88186}"/>
+              </a:ext>
+            </a:extLst>
+          </p:cNvPr>
+          <p:cNvSpPr>
+            <a:spLocks noGrp="1"/>
+          </p:cNvSpPr>
+          <p:nvPr>
+            <p:ph type="title"/>
+          </p:nvPr>
+        </p:nvSpPr>
+        <p:spPr>
+          <a:xfrm>
+            <a:off x="899903" y="621603"/>
+            <a:ext cx="10659110" cy="1325563"/>
+          </a:xfrm>
+        </p:spPr>
+        <p:txBody>
+          <a:bodyPr anchor="ctr">
+            <a:normAutofit/>
+          </a:bodyPr>
+          <a:lstStyle/>
+          <a:p>
+            <a:pPr marL="0" indent="0">
+              <a:buNone/>
+            </a:pPr>
+            <a:r>
+              <a:rPr lang="en-US" sz="2600" b="1" dirty="0"/>
+              <a:t>Divisive Clustering: Step-by-Step</a:t>
+            </a:r>
+          </a:p>
+          <a:p>
+            <a:pPr marL="0" indent="0">
+              <a:buNone/>
+            </a:pPr>
+            <a:r>
+              <a:rPr lang="en-US" sz="2600" dirty="0"/>
+              <a:t>Let’s say you have </a:t>
+            </a:r>
+            <a:r>
+              <a:rPr lang="en-US" sz="2600" b="1" dirty="0">
+                <a:solidFill>
+                  <a:srgbClr val="C00000"/>
+                </a:solidFill>
+              </a:rPr>
+              <a:t>5 animals</a:t>
+            </a:r>
+            <a:r>
+              <a:rPr lang="en-US" sz="2600" dirty="0"/>
+              <a:t>, each described by their features (like weight and speed):</a:t>
+            </a:r>
+          </a:p>
+          <a:p>
+            <a:pPr marL="0" indent="0">
+              <a:buNone/>
+            </a:pPr>
+            <a:endParaRPr lang="en-IN" sz="2600" dirty="0"/>
+          </a:p>
+        </p:txBody>
+      </p:sp>
+      <p:graphicFrame>
+        <p:nvGraphicFramePr>
+          <p:cNvPr id="2" name="Table 1">
+            <a:extLst>
+              <a:ext uri="{FF2B5EF4-FFF2-40B4-BE49-F238E27FC236}">
+                <a16:creationId xmlns:a16="http://schemas.microsoft.com/office/drawing/2014/main" id="{76A8B238-90DD-BDC8-D8FA-7849B7A503FC}"/>
+              </a:ext>
+            </a:extLst>
+          </p:cNvPr>
+          <p:cNvGraphicFramePr>
+            <a:graphicFrameLocks noGrp="1"/>
+          </p:cNvGraphicFramePr>
+          <p:nvPr>
+            <p:extLst>
+              <p:ext uri="{D42A27DB-BD31-4B8C-83A1-F6EECF244321}">
+                <p14:modId xmlns:p14="http://schemas.microsoft.com/office/powerpoint/2010/main" val="1711782666"/>
+              </p:ext>
+            </p:extLst>
+          </p:nvPr>
+        </p:nvGraphicFramePr>
+        <p:xfrm>
+          <a:off x="1530055" y="2126774"/>
+          <a:ext cx="9153481" cy="3749040"/>
+        </p:xfrm>
+        <a:graphic>
+          <a:graphicData uri="http://schemas.openxmlformats.org/drawingml/2006/table">
+            <a:tbl>
+              <a:tblPr firstRow="1" firstCol="1" bandRow="1">
+                <a:tableStyleId>{5C22544A-7EE6-4342-B048-85BDC9FD1C3A}</a:tableStyleId>
+              </a:tblPr>
+              <a:tblGrid>
+                <a:gridCol w="3133151">
+                  <a:extLst>
+                    <a:ext uri="{9D8B030D-6E8A-4147-A177-3AD203B41FA5}">
+                      <a16:colId xmlns:a16="http://schemas.microsoft.com/office/drawing/2014/main" val="2365835095"/>
+                    </a:ext>
+                  </a:extLst>
+                </a:gridCol>
+                <a:gridCol w="2863448">
+                  <a:extLst>
+                    <a:ext uri="{9D8B030D-6E8A-4147-A177-3AD203B41FA5}">
+                      <a16:colId xmlns:a16="http://schemas.microsoft.com/office/drawing/2014/main" val="1119287340"/>
+                    </a:ext>
+                  </a:extLst>
+                </a:gridCol>
+                <a:gridCol w="3156882">
+                  <a:extLst>
+                    <a:ext uri="{9D8B030D-6E8A-4147-A177-3AD203B41FA5}">
+                      <a16:colId xmlns:a16="http://schemas.microsoft.com/office/drawing/2014/main" val="1253508621"/>
+                    </a:ext>
+                  </a:extLst>
+                </a:gridCol>
+              </a:tblGrid>
+              <a:tr h="624840">
+                <a:tc>
+                  <a:txBody>
+                    <a:bodyPr/>
+                    <a:lstStyle/>
+                    <a:p>
+                      <a:pPr>
+                        <a:lnSpc>
+                          <a:spcPct val="107000"/>
+                        </a:lnSpc>
+                        <a:spcAft>
+                          <a:spcPts val="800"/>
+                        </a:spcAft>
+                        <a:buNone/>
+                      </a:pPr>
+                      <a:r>
+                        <a:rPr lang="en-IN" sz="3300" kern="100">
+                          <a:effectLst/>
+                        </a:rPr>
+                        <a:t>Animal</a:t>
+                      </a:r>
+                      <a:endParaRPr lang="en-IN" sz="3300" kern="100">
+                        <a:effectLst/>
+                        <a:latin typeface="Aptos" panose="020B0004020202020204" pitchFamily="34" charset="0"/>
+                        <a:ea typeface="Aptos" panose="020B0004020202020204" pitchFamily="34" charset="0"/>
+                        <a:cs typeface="Tunga" panose="020B0502040204020203" pitchFamily="34" charset="0"/>
+                      </a:endParaRPr>
+                    </a:p>
+                  </a:txBody>
+                  <a:tcPr marL="205740" marR="205740" marT="0" marB="0"/>
+                </a:tc>
+                <a:tc>
+                  <a:txBody>
+                    <a:bodyPr/>
+                    <a:lstStyle/>
+                    <a:p>
+                      <a:pPr>
+                        <a:lnSpc>
+                          <a:spcPct val="107000"/>
+                        </a:lnSpc>
+                        <a:spcAft>
+                          <a:spcPts val="800"/>
+                        </a:spcAft>
+                        <a:buNone/>
+                      </a:pPr>
+                      <a:r>
+                        <a:rPr lang="en-IN" sz="3300" kern="100">
+                          <a:effectLst/>
+                        </a:rPr>
+                        <a:t>Speed</a:t>
+                      </a:r>
+                      <a:endParaRPr lang="en-IN" sz="3300" kern="100">
+                        <a:effectLst/>
+                        <a:latin typeface="Aptos" panose="020B0004020202020204" pitchFamily="34" charset="0"/>
+                        <a:ea typeface="Aptos" panose="020B0004020202020204" pitchFamily="34" charset="0"/>
+                        <a:cs typeface="Tunga" panose="020B0502040204020203" pitchFamily="34" charset="0"/>
+                      </a:endParaRPr>
+                    </a:p>
+                  </a:txBody>
+                  <a:tcPr marL="205740" marR="205740" marT="0" marB="0"/>
+                </a:tc>
+                <a:tc>
+                  <a:txBody>
+                    <a:bodyPr/>
+                    <a:lstStyle/>
+                    <a:p>
+                      <a:pPr>
+                        <a:lnSpc>
+                          <a:spcPct val="107000"/>
+                        </a:lnSpc>
+                        <a:spcAft>
+                          <a:spcPts val="800"/>
+                        </a:spcAft>
+                        <a:buNone/>
+                      </a:pPr>
+                      <a:r>
+                        <a:rPr lang="en-IN" sz="3300" kern="100">
+                          <a:effectLst/>
+                        </a:rPr>
+                        <a:t>Weight</a:t>
+                      </a:r>
+                      <a:endParaRPr lang="en-IN" sz="3300" kern="100">
+                        <a:effectLst/>
+                        <a:latin typeface="Aptos" panose="020B0004020202020204" pitchFamily="34" charset="0"/>
+                        <a:ea typeface="Aptos" panose="020B0004020202020204" pitchFamily="34" charset="0"/>
+                        <a:cs typeface="Tunga" panose="020B0502040204020203" pitchFamily="34" charset="0"/>
+                      </a:endParaRPr>
+                    </a:p>
+                  </a:txBody>
+                  <a:tcPr marL="205740" marR="205740" marT="0" marB="0"/>
+                </a:tc>
+                <a:extLst>
+                  <a:ext uri="{0D108BD9-81ED-4DB2-BD59-A6C34878D82A}">
+                    <a16:rowId xmlns:a16="http://schemas.microsoft.com/office/drawing/2014/main" val="3550372441"/>
+                  </a:ext>
+                </a:extLst>
+              </a:tr>
+              <a:tr h="624840">
+                <a:tc>
+                  <a:txBody>
+                    <a:bodyPr/>
+                    <a:lstStyle/>
+                    <a:p>
+                      <a:pPr>
+                        <a:lnSpc>
+                          <a:spcPct val="107000"/>
+                        </a:lnSpc>
+                        <a:spcAft>
+                          <a:spcPts val="800"/>
+                        </a:spcAft>
+                        <a:buNone/>
+                      </a:pPr>
+                      <a:r>
+                        <a:rPr lang="en-IN" sz="3300" kern="100">
+                          <a:effectLst/>
+                        </a:rPr>
+                        <a:t>Tiger</a:t>
+                      </a:r>
+                      <a:endParaRPr lang="en-IN" sz="3300" kern="100">
+                        <a:effectLst/>
+                        <a:latin typeface="Aptos" panose="020B0004020202020204" pitchFamily="34" charset="0"/>
+                        <a:ea typeface="Aptos" panose="020B0004020202020204" pitchFamily="34" charset="0"/>
+                        <a:cs typeface="Tunga" panose="020B0502040204020203" pitchFamily="34" charset="0"/>
+                      </a:endParaRPr>
+                    </a:p>
+                  </a:txBody>
+                  <a:tcPr marL="205740" marR="205740" marT="0" marB="0"/>
+                </a:tc>
+                <a:tc>
+                  <a:txBody>
+                    <a:bodyPr/>
+                    <a:lstStyle/>
+                    <a:p>
+                      <a:pPr>
+                        <a:lnSpc>
+                          <a:spcPct val="107000"/>
+                        </a:lnSpc>
+                        <a:spcAft>
+                          <a:spcPts val="800"/>
+                        </a:spcAft>
+                        <a:buNone/>
+                      </a:pPr>
+                      <a:r>
+                        <a:rPr lang="en-IN" sz="3300" kern="100">
+                          <a:effectLst/>
+                        </a:rPr>
+                        <a:t>80</a:t>
+                      </a:r>
+                      <a:endParaRPr lang="en-IN" sz="3300" kern="100">
+                        <a:effectLst/>
+                        <a:latin typeface="Aptos" panose="020B0004020202020204" pitchFamily="34" charset="0"/>
+                        <a:ea typeface="Aptos" panose="020B0004020202020204" pitchFamily="34" charset="0"/>
+                        <a:cs typeface="Tunga" panose="020B0502040204020203" pitchFamily="34" charset="0"/>
+                      </a:endParaRPr>
+                    </a:p>
+                  </a:txBody>
+                  <a:tcPr marL="205740" marR="205740" marT="0" marB="0"/>
+                </a:tc>
+                <a:tc>
+                  <a:txBody>
+                    <a:bodyPr/>
+                    <a:lstStyle/>
+                    <a:p>
+                      <a:pPr>
+                        <a:lnSpc>
+                          <a:spcPct val="107000"/>
+                        </a:lnSpc>
+                        <a:spcAft>
+                          <a:spcPts val="800"/>
+                        </a:spcAft>
+                        <a:buNone/>
+                      </a:pPr>
+                      <a:r>
+                        <a:rPr lang="en-IN" sz="3300" kern="100">
+                          <a:effectLst/>
+                        </a:rPr>
+                        <a:t>200</a:t>
+                      </a:r>
+                      <a:endParaRPr lang="en-IN" sz="3300" kern="100">
+                        <a:effectLst/>
+                        <a:latin typeface="Aptos" panose="020B0004020202020204" pitchFamily="34" charset="0"/>
+                        <a:ea typeface="Aptos" panose="020B0004020202020204" pitchFamily="34" charset="0"/>
+                        <a:cs typeface="Tunga" panose="020B0502040204020203" pitchFamily="34" charset="0"/>
+                      </a:endParaRPr>
+                    </a:p>
+                  </a:txBody>
+                  <a:tcPr marL="205740" marR="205740" marT="0" marB="0"/>
+                </a:tc>
+                <a:extLst>
+                  <a:ext uri="{0D108BD9-81ED-4DB2-BD59-A6C34878D82A}">
+                    <a16:rowId xmlns:a16="http://schemas.microsoft.com/office/drawing/2014/main" val="3379721395"/>
+                  </a:ext>
+                </a:extLst>
+              </a:tr>
+              <a:tr h="624840">
+                <a:tc>
+                  <a:txBody>
+                    <a:bodyPr/>
+                    <a:lstStyle/>
+                    <a:p>
+                      <a:pPr>
+                        <a:lnSpc>
+                          <a:spcPct val="107000"/>
+                        </a:lnSpc>
+                        <a:spcAft>
+                          <a:spcPts val="800"/>
+                        </a:spcAft>
+                        <a:buNone/>
+                      </a:pPr>
+                      <a:r>
+                        <a:rPr lang="en-IN" sz="3300" kern="100">
+                          <a:effectLst/>
+                        </a:rPr>
+                        <a:t>Lion</a:t>
+                      </a:r>
+                      <a:endParaRPr lang="en-IN" sz="3300" kern="100">
+                        <a:effectLst/>
+                        <a:latin typeface="Aptos" panose="020B0004020202020204" pitchFamily="34" charset="0"/>
+                        <a:ea typeface="Aptos" panose="020B0004020202020204" pitchFamily="34" charset="0"/>
+                        <a:cs typeface="Tunga" panose="020B0502040204020203" pitchFamily="34" charset="0"/>
+                      </a:endParaRPr>
+                    </a:p>
+                  </a:txBody>
+                  <a:tcPr marL="205740" marR="205740" marT="0" marB="0"/>
+                </a:tc>
+                <a:tc>
+                  <a:txBody>
+                    <a:bodyPr/>
+                    <a:lstStyle/>
+                    <a:p>
+                      <a:pPr>
+                        <a:lnSpc>
+                          <a:spcPct val="107000"/>
+                        </a:lnSpc>
+                        <a:spcAft>
+                          <a:spcPts val="800"/>
+                        </a:spcAft>
+                        <a:buNone/>
+                      </a:pPr>
+                      <a:r>
+                        <a:rPr lang="en-IN" sz="3300" kern="100">
+                          <a:effectLst/>
+                        </a:rPr>
+                        <a:t>75</a:t>
+                      </a:r>
+                      <a:endParaRPr lang="en-IN" sz="3300" kern="100">
+                        <a:effectLst/>
+                        <a:latin typeface="Aptos" panose="020B0004020202020204" pitchFamily="34" charset="0"/>
+                        <a:ea typeface="Aptos" panose="020B0004020202020204" pitchFamily="34" charset="0"/>
+                        <a:cs typeface="Tunga" panose="020B0502040204020203" pitchFamily="34" charset="0"/>
+                      </a:endParaRPr>
+                    </a:p>
+                  </a:txBody>
+                  <a:tcPr marL="205740" marR="205740" marT="0" marB="0"/>
+                </a:tc>
+                <a:tc>
+                  <a:txBody>
+                    <a:bodyPr/>
+                    <a:lstStyle/>
+                    <a:p>
+                      <a:pPr>
+                        <a:lnSpc>
+                          <a:spcPct val="107000"/>
+                        </a:lnSpc>
+                        <a:spcAft>
+                          <a:spcPts val="800"/>
+                        </a:spcAft>
+                        <a:buNone/>
+                      </a:pPr>
+                      <a:r>
+                        <a:rPr lang="en-IN" sz="3300" kern="100">
+                          <a:effectLst/>
+                        </a:rPr>
+                        <a:t>190</a:t>
+                      </a:r>
+                      <a:endParaRPr lang="en-IN" sz="3300" kern="100">
+                        <a:effectLst/>
+                        <a:latin typeface="Aptos" panose="020B0004020202020204" pitchFamily="34" charset="0"/>
+                        <a:ea typeface="Aptos" panose="020B0004020202020204" pitchFamily="34" charset="0"/>
+                        <a:cs typeface="Tunga" panose="020B0502040204020203" pitchFamily="34" charset="0"/>
+                      </a:endParaRPr>
+                    </a:p>
+                  </a:txBody>
+                  <a:tcPr marL="205740" marR="205740" marT="0" marB="0"/>
+                </a:tc>
+                <a:extLst>
+                  <a:ext uri="{0D108BD9-81ED-4DB2-BD59-A6C34878D82A}">
+                    <a16:rowId xmlns:a16="http://schemas.microsoft.com/office/drawing/2014/main" val="3692154523"/>
+                  </a:ext>
+                </a:extLst>
+              </a:tr>
+              <a:tr h="624840">
+                <a:tc>
+                  <a:txBody>
+                    <a:bodyPr/>
+                    <a:lstStyle/>
+                    <a:p>
+                      <a:pPr>
+                        <a:lnSpc>
+                          <a:spcPct val="107000"/>
+                        </a:lnSpc>
+                        <a:spcAft>
+                          <a:spcPts val="800"/>
+                        </a:spcAft>
+                        <a:buNone/>
+                      </a:pPr>
+                      <a:r>
+                        <a:rPr lang="en-IN" sz="3300" kern="100">
+                          <a:effectLst/>
+                        </a:rPr>
+                        <a:t>Deer</a:t>
+                      </a:r>
+                      <a:endParaRPr lang="en-IN" sz="3300" kern="100">
+                        <a:effectLst/>
+                        <a:latin typeface="Aptos" panose="020B0004020202020204" pitchFamily="34" charset="0"/>
+                        <a:ea typeface="Aptos" panose="020B0004020202020204" pitchFamily="34" charset="0"/>
+                        <a:cs typeface="Tunga" panose="020B0502040204020203" pitchFamily="34" charset="0"/>
+                      </a:endParaRPr>
+                    </a:p>
+                  </a:txBody>
+                  <a:tcPr marL="205740" marR="205740" marT="0" marB="0"/>
+                </a:tc>
+                <a:tc>
+                  <a:txBody>
+                    <a:bodyPr/>
+                    <a:lstStyle/>
+                    <a:p>
+                      <a:pPr>
+                        <a:lnSpc>
+                          <a:spcPct val="107000"/>
+                        </a:lnSpc>
+                        <a:spcAft>
+                          <a:spcPts val="800"/>
+                        </a:spcAft>
+                        <a:buNone/>
+                      </a:pPr>
+                      <a:r>
+                        <a:rPr lang="en-IN" sz="3300" kern="100">
+                          <a:effectLst/>
+                        </a:rPr>
+                        <a:t>60</a:t>
+                      </a:r>
+                      <a:endParaRPr lang="en-IN" sz="3300" kern="100">
+                        <a:effectLst/>
+                        <a:latin typeface="Aptos" panose="020B0004020202020204" pitchFamily="34" charset="0"/>
+                        <a:ea typeface="Aptos" panose="020B0004020202020204" pitchFamily="34" charset="0"/>
+                        <a:cs typeface="Tunga" panose="020B0502040204020203" pitchFamily="34" charset="0"/>
+                      </a:endParaRPr>
+                    </a:p>
+                  </a:txBody>
+                  <a:tcPr marL="205740" marR="205740" marT="0" marB="0"/>
+                </a:tc>
+                <a:tc>
+                  <a:txBody>
+                    <a:bodyPr/>
+                    <a:lstStyle/>
+                    <a:p>
+                      <a:pPr>
+                        <a:lnSpc>
+                          <a:spcPct val="107000"/>
+                        </a:lnSpc>
+                        <a:spcAft>
+                          <a:spcPts val="800"/>
+                        </a:spcAft>
+                        <a:buNone/>
+                      </a:pPr>
+                      <a:r>
+                        <a:rPr lang="en-IN" sz="3300" kern="100">
+                          <a:effectLst/>
+                        </a:rPr>
+                        <a:t>90</a:t>
+                      </a:r>
+                      <a:endParaRPr lang="en-IN" sz="3300" kern="100">
+                        <a:effectLst/>
+                        <a:latin typeface="Aptos" panose="020B0004020202020204" pitchFamily="34" charset="0"/>
+                        <a:ea typeface="Aptos" panose="020B0004020202020204" pitchFamily="34" charset="0"/>
+                        <a:cs typeface="Tunga" panose="020B0502040204020203" pitchFamily="34" charset="0"/>
+                      </a:endParaRPr>
+                    </a:p>
+                  </a:txBody>
+                  <a:tcPr marL="205740" marR="205740" marT="0" marB="0"/>
+                </a:tc>
+                <a:extLst>
+                  <a:ext uri="{0D108BD9-81ED-4DB2-BD59-A6C34878D82A}">
+                    <a16:rowId xmlns:a16="http://schemas.microsoft.com/office/drawing/2014/main" val="933417984"/>
+                  </a:ext>
+                </a:extLst>
+              </a:tr>
+              <a:tr h="624840">
+                <a:tc>
+                  <a:txBody>
+                    <a:bodyPr/>
+                    <a:lstStyle/>
+                    <a:p>
+                      <a:pPr>
+                        <a:lnSpc>
+                          <a:spcPct val="107000"/>
+                        </a:lnSpc>
+                        <a:spcAft>
+                          <a:spcPts val="800"/>
+                        </a:spcAft>
+                        <a:buNone/>
+                      </a:pPr>
+                      <a:r>
+                        <a:rPr lang="en-IN" sz="3300" kern="100">
+                          <a:effectLst/>
+                        </a:rPr>
+                        <a:t>Rabbit</a:t>
+                      </a:r>
+                      <a:endParaRPr lang="en-IN" sz="3300" kern="100">
+                        <a:effectLst/>
+                        <a:latin typeface="Aptos" panose="020B0004020202020204" pitchFamily="34" charset="0"/>
+                        <a:ea typeface="Aptos" panose="020B0004020202020204" pitchFamily="34" charset="0"/>
+                        <a:cs typeface="Tunga" panose="020B0502040204020203" pitchFamily="34" charset="0"/>
+                      </a:endParaRPr>
+                    </a:p>
+                  </a:txBody>
+                  <a:tcPr marL="205740" marR="205740" marT="0" marB="0"/>
+                </a:tc>
+                <a:tc>
+                  <a:txBody>
+                    <a:bodyPr/>
+                    <a:lstStyle/>
+                    <a:p>
+                      <a:pPr>
+                        <a:lnSpc>
+                          <a:spcPct val="107000"/>
+                        </a:lnSpc>
+                        <a:spcAft>
+                          <a:spcPts val="800"/>
+                        </a:spcAft>
+                        <a:buNone/>
+                      </a:pPr>
+                      <a:r>
+                        <a:rPr lang="en-IN" sz="3300" kern="100">
+                          <a:effectLst/>
+                        </a:rPr>
+                        <a:t>45</a:t>
+                      </a:r>
+                      <a:endParaRPr lang="en-IN" sz="3300" kern="100">
+                        <a:effectLst/>
+                        <a:latin typeface="Aptos" panose="020B0004020202020204" pitchFamily="34" charset="0"/>
+                        <a:ea typeface="Aptos" panose="020B0004020202020204" pitchFamily="34" charset="0"/>
+                        <a:cs typeface="Tunga" panose="020B0502040204020203" pitchFamily="34" charset="0"/>
+                      </a:endParaRPr>
+                    </a:p>
+                  </a:txBody>
+                  <a:tcPr marL="205740" marR="205740" marT="0" marB="0"/>
+                </a:tc>
+                <a:tc>
+                  <a:txBody>
+                    <a:bodyPr/>
+                    <a:lstStyle/>
+                    <a:p>
+                      <a:pPr>
+                        <a:lnSpc>
+                          <a:spcPct val="107000"/>
+                        </a:lnSpc>
+                        <a:spcAft>
+                          <a:spcPts val="800"/>
+                        </a:spcAft>
+                        <a:buNone/>
+                      </a:pPr>
+                      <a:r>
+                        <a:rPr lang="en-IN" sz="3300" kern="100">
+                          <a:effectLst/>
+                        </a:rPr>
+                        <a:t>30</a:t>
+                      </a:r>
+                      <a:endParaRPr lang="en-IN" sz="3300" kern="100">
+                        <a:effectLst/>
+                        <a:latin typeface="Aptos" panose="020B0004020202020204" pitchFamily="34" charset="0"/>
+                        <a:ea typeface="Aptos" panose="020B0004020202020204" pitchFamily="34" charset="0"/>
+                        <a:cs typeface="Tunga" panose="020B0502040204020203" pitchFamily="34" charset="0"/>
+                      </a:endParaRPr>
+                    </a:p>
+                  </a:txBody>
+                  <a:tcPr marL="205740" marR="205740" marT="0" marB="0"/>
+                </a:tc>
+                <a:extLst>
+                  <a:ext uri="{0D108BD9-81ED-4DB2-BD59-A6C34878D82A}">
+                    <a16:rowId xmlns:a16="http://schemas.microsoft.com/office/drawing/2014/main" val="848383182"/>
+                  </a:ext>
+                </a:extLst>
+              </a:tr>
+              <a:tr h="624840">
+                <a:tc>
+                  <a:txBody>
+                    <a:bodyPr/>
+                    <a:lstStyle/>
+                    <a:p>
+                      <a:pPr>
+                        <a:lnSpc>
+                          <a:spcPct val="107000"/>
+                        </a:lnSpc>
+                        <a:spcAft>
+                          <a:spcPts val="800"/>
+                        </a:spcAft>
+                        <a:buNone/>
+                      </a:pPr>
+                      <a:r>
+                        <a:rPr lang="en-IN" sz="3300" kern="100">
+                          <a:effectLst/>
+                        </a:rPr>
+                        <a:t>Turtle</a:t>
+                      </a:r>
+                      <a:endParaRPr lang="en-IN" sz="3300" kern="100">
+                        <a:effectLst/>
+                        <a:latin typeface="Aptos" panose="020B0004020202020204" pitchFamily="34" charset="0"/>
+                        <a:ea typeface="Aptos" panose="020B0004020202020204" pitchFamily="34" charset="0"/>
+                        <a:cs typeface="Tunga" panose="020B0502040204020203" pitchFamily="34" charset="0"/>
+                      </a:endParaRPr>
+                    </a:p>
+                  </a:txBody>
+                  <a:tcPr marL="205740" marR="205740" marT="0" marB="0"/>
+                </a:tc>
+                <a:tc>
+                  <a:txBody>
+                    <a:bodyPr/>
+                    <a:lstStyle/>
+                    <a:p>
+                      <a:pPr>
+                        <a:lnSpc>
+                          <a:spcPct val="107000"/>
+                        </a:lnSpc>
+                        <a:spcAft>
+                          <a:spcPts val="800"/>
+                        </a:spcAft>
+                        <a:buNone/>
+                      </a:pPr>
+                      <a:r>
+                        <a:rPr lang="en-IN" sz="3300" kern="100">
+                          <a:effectLst/>
+                        </a:rPr>
+                        <a:t>5</a:t>
+                      </a:r>
+                      <a:endParaRPr lang="en-IN" sz="3300" kern="100">
+                        <a:effectLst/>
+                        <a:latin typeface="Aptos" panose="020B0004020202020204" pitchFamily="34" charset="0"/>
+                        <a:ea typeface="Aptos" panose="020B0004020202020204" pitchFamily="34" charset="0"/>
+                        <a:cs typeface="Tunga" panose="020B0502040204020203" pitchFamily="34" charset="0"/>
+                      </a:endParaRPr>
+                    </a:p>
+                  </a:txBody>
+                  <a:tcPr marL="205740" marR="205740" marT="0" marB="0"/>
+                </a:tc>
+                <a:tc>
+                  <a:txBody>
+                    <a:bodyPr/>
+                    <a:lstStyle/>
+                    <a:p>
+                      <a:pPr>
+                        <a:lnSpc>
+                          <a:spcPct val="107000"/>
+                        </a:lnSpc>
+                        <a:spcAft>
+                          <a:spcPts val="800"/>
+                        </a:spcAft>
+                        <a:buNone/>
+                      </a:pPr>
+                      <a:r>
+                        <a:rPr lang="en-IN" sz="3300" kern="100" dirty="0">
+                          <a:effectLst/>
+                        </a:rPr>
+                        <a:t>50</a:t>
+                      </a:r>
+                      <a:endParaRPr lang="en-IN" sz="3300" kern="100" dirty="0">
+                        <a:effectLst/>
+                        <a:latin typeface="Aptos" panose="020B0004020202020204" pitchFamily="34" charset="0"/>
+                        <a:ea typeface="Aptos" panose="020B0004020202020204" pitchFamily="34" charset="0"/>
+                        <a:cs typeface="Tunga" panose="020B0502040204020203" pitchFamily="34" charset="0"/>
+                      </a:endParaRPr>
+                    </a:p>
+                  </a:txBody>
+                  <a:tcPr marL="205740" marR="205740" marT="0" marB="0"/>
+                </a:tc>
+                <a:extLst>
+                  <a:ext uri="{0D108BD9-81ED-4DB2-BD59-A6C34878D82A}">
+                    <a16:rowId xmlns:a16="http://schemas.microsoft.com/office/drawing/2014/main" val="3719713551"/>
+                  </a:ext>
+                </a:extLst>
+              </a:tr>
+            </a:tbl>
+          </a:graphicData>
+        </a:graphic>
+      </p:graphicFrame>
+    </p:spTree>
+    <p:extLst>
+      <p:ext uri="{BB962C8B-B14F-4D97-AF65-F5344CB8AC3E}">
+        <p14:creationId xmlns:p14="http://schemas.microsoft.com/office/powerpoint/2010/main" val="2348467059"/>
+      </p:ext>
+    </p:extLst>
+  </p:cSld>
+  <p:clrMapOvr>
+    <a:masterClrMapping/>
+  </p:clrMapOvr>
+</p:sld>
+</file>
+
+<file path=ppt/slides/slide29.xml><?xml version="1.0" encoding="utf-8"?>
+<p:sld xmlns:a="http://schemas.openxmlformats.org/drawingml/2006/main" xmlns:r="http://schemas.openxmlformats.org/officeDocument/2006/relationships" xmlns:p="http://schemas.openxmlformats.org/presentationml/2006/main">
+  <p:cSld>
+    <p:spTree>
+      <p:nvGrpSpPr>
+        <p:cNvPr id="1" name="">
+          <a:extLst>
+            <a:ext uri="{FF2B5EF4-FFF2-40B4-BE49-F238E27FC236}">
+              <a16:creationId xmlns:a16="http://schemas.microsoft.com/office/drawing/2014/main" id="{D7AE4A5E-B9B8-F1CC-8B56-F67E2DBDF262}"/>
+            </a:ext>
+          </a:extLst>
+        </p:cNvPr>
+        <p:cNvGrpSpPr/>
+        <p:nvPr/>
+      </p:nvGrpSpPr>
+      <p:grpSpPr>
+        <a:xfrm>
+          <a:off x="0" y="0"/>
+          <a:ext cx="0" cy="0"/>
+          <a:chOff x="0" y="0"/>
+          <a:chExt cx="0" cy="0"/>
+        </a:xfrm>
+      </p:grpSpPr>
+      <p:sp>
+        <p:nvSpPr>
+          <p:cNvPr id="3" name="Content Placeholder 2">
+            <a:extLst>
+              <a:ext uri="{FF2B5EF4-FFF2-40B4-BE49-F238E27FC236}">
+                <a16:creationId xmlns:a16="http://schemas.microsoft.com/office/drawing/2014/main" id="{156120DD-8119-CC3D-D3B0-361B321D0BCA}"/>
+              </a:ext>
+            </a:extLst>
+          </p:cNvPr>
+          <p:cNvSpPr>
+            <a:spLocks noGrp="1"/>
+          </p:cNvSpPr>
+          <p:nvPr>
+            <p:ph idx="1"/>
+          </p:nvPr>
+        </p:nvSpPr>
+        <p:spPr>
+          <a:xfrm>
+            <a:off x="702853" y="348342"/>
+            <a:ext cx="10900568" cy="6052457"/>
+          </a:xfrm>
+        </p:spPr>
+        <p:txBody>
+          <a:bodyPr>
+            <a:noAutofit/>
+          </a:bodyPr>
+          <a:lstStyle/>
+          <a:p>
+            <a:pPr marL="0" indent="0">
+              <a:buNone/>
+            </a:pPr>
+            <a:r>
+              <a:rPr lang="en-US" sz="2800" b="1" dirty="0"/>
+              <a:t>Solution:</a:t>
+            </a:r>
+          </a:p>
+          <a:p>
+            <a:pPr marL="0" indent="0">
+              <a:buNone/>
+            </a:pPr>
+            <a:r>
+              <a:rPr lang="en-US" sz="2200" b="1" dirty="0"/>
+              <a:t>Step 1: Start with all data in one cluster</a:t>
+            </a:r>
+          </a:p>
+          <a:p>
+            <a:pPr marL="0" indent="0">
+              <a:buNone/>
+            </a:pPr>
+            <a:r>
+              <a:rPr lang="en-US" sz="2200" b="1" dirty="0">
+                <a:solidFill>
+                  <a:schemeClr val="tx2">
+                    <a:lumMod val="75000"/>
+                    <a:lumOff val="25000"/>
+                  </a:schemeClr>
+                </a:solidFill>
+              </a:rPr>
+              <a:t>Cluster</a:t>
+            </a:r>
+            <a:r>
+              <a:rPr lang="en-US" sz="2200" dirty="0"/>
+              <a:t>: [Tiger, Lion, Deer, Rabbit, Turtle]</a:t>
+            </a:r>
+          </a:p>
+          <a:p>
+            <a:pPr marL="0" indent="0">
+              <a:buNone/>
+            </a:pPr>
+            <a:r>
+              <a:rPr lang="en-US" sz="2200" b="1" dirty="0"/>
+              <a:t>Step 2: Split the cluster into 2 sub-clusters</a:t>
+            </a:r>
+          </a:p>
+          <a:p>
+            <a:pPr marL="0" indent="0">
+              <a:buNone/>
+            </a:pPr>
+            <a:r>
+              <a:rPr lang="en-US" sz="2200" dirty="0"/>
+              <a:t>Use a </a:t>
+            </a:r>
+            <a:r>
+              <a:rPr lang="en-US" sz="2200" b="1" dirty="0">
+                <a:solidFill>
+                  <a:schemeClr val="tx2">
+                    <a:lumMod val="75000"/>
+                    <a:lumOff val="25000"/>
+                  </a:schemeClr>
+                </a:solidFill>
+              </a:rPr>
+              <a:t>clustering algorithm </a:t>
+            </a:r>
+            <a:r>
+              <a:rPr lang="en-US" sz="2200" dirty="0"/>
+              <a:t>(like K-Means) to divide the cluster into 2 groups:</a:t>
+            </a:r>
+          </a:p>
+          <a:p>
+            <a:pPr lvl="1"/>
+            <a:r>
+              <a:rPr lang="en-US" sz="2200" b="1" dirty="0"/>
+              <a:t>Cluster A: </a:t>
+            </a:r>
+            <a:r>
+              <a:rPr lang="en-US" sz="2200" dirty="0"/>
+              <a:t>[Tiger, Lion]</a:t>
+            </a:r>
+          </a:p>
+          <a:p>
+            <a:pPr lvl="1"/>
+            <a:r>
+              <a:rPr lang="en-US" sz="2200" b="1" dirty="0"/>
+              <a:t>Cluster B: </a:t>
+            </a:r>
+            <a:r>
+              <a:rPr lang="en-US" sz="2200" dirty="0"/>
+              <a:t>[Deer, Rabbit, Turtle]</a:t>
+            </a:r>
+          </a:p>
+          <a:p>
+            <a:pPr marL="0" indent="0">
+              <a:buNone/>
+            </a:pPr>
+            <a:r>
+              <a:rPr lang="en-US" sz="2200" b="1" dirty="0"/>
+              <a:t>Step 3: Recursively apply Step 2 on each sub-cluster</a:t>
+            </a:r>
+          </a:p>
+          <a:p>
+            <a:pPr marL="0" indent="0">
+              <a:buNone/>
+            </a:pPr>
+            <a:r>
+              <a:rPr lang="en-US" sz="2200" dirty="0"/>
+              <a:t>Now split Cluster B further:</a:t>
+            </a:r>
+          </a:p>
+          <a:p>
+            <a:pPr lvl="1"/>
+            <a:r>
+              <a:rPr lang="en-US" sz="2200" b="1" dirty="0"/>
+              <a:t>Cluster B1: </a:t>
+            </a:r>
+            <a:r>
+              <a:rPr lang="en-US" sz="2200" dirty="0"/>
+              <a:t>[Deer]</a:t>
+            </a:r>
+          </a:p>
+          <a:p>
+            <a:pPr lvl="1"/>
+            <a:r>
+              <a:rPr lang="en-US" sz="2200" b="1" dirty="0"/>
+              <a:t>Cluster B2: </a:t>
+            </a:r>
+            <a:r>
+              <a:rPr lang="en-US" sz="2200" dirty="0"/>
+              <a:t>[Rabbit, Turtle]</a:t>
+            </a:r>
+          </a:p>
+          <a:p>
+            <a:pPr marL="0" indent="0">
+              <a:buNone/>
+            </a:pPr>
+            <a:r>
+              <a:rPr lang="en-US" sz="2200" b="1" dirty="0"/>
+              <a:t>Then split B2:</a:t>
+            </a:r>
+          </a:p>
+          <a:p>
+            <a:pPr lvl="1"/>
+            <a:r>
+              <a:rPr lang="en-US" sz="2000" dirty="0"/>
+              <a:t>[</a:t>
+            </a:r>
+            <a:r>
+              <a:rPr lang="en-US" sz="2000" b="1" dirty="0"/>
+              <a:t>Rabbit</a:t>
+            </a:r>
+            <a:r>
+              <a:rPr lang="en-US" sz="2000" dirty="0"/>
+              <a:t>] and [</a:t>
+            </a:r>
+            <a:r>
+              <a:rPr lang="en-US" sz="2000" b="1" dirty="0"/>
+              <a:t>Turtle</a:t>
+            </a:r>
+            <a:r>
+              <a:rPr lang="en-US" sz="2000" dirty="0"/>
+              <a:t>]</a:t>
+            </a:r>
+          </a:p>
+          <a:p>
+            <a:pPr marL="0" indent="0">
+              <a:buNone/>
+            </a:pPr>
+            <a:r>
+              <a:rPr lang="en-US" sz="2200" b="1" dirty="0">
+                <a:solidFill>
+                  <a:srgbClr val="002060"/>
+                </a:solidFill>
+              </a:rPr>
+              <a:t>Keep doing this until all animals are in individual clusters or you reach a stopping criterion</a:t>
+            </a:r>
+            <a:r>
+              <a:rPr lang="en-US" sz="2200" dirty="0"/>
+              <a:t>.</a:t>
+            </a:r>
+            <a:endParaRPr lang="en-IN" sz="2200" dirty="0"/>
+          </a:p>
+        </p:txBody>
+      </p:sp>
+    </p:spTree>
+    <p:extLst>
+      <p:ext uri="{BB962C8B-B14F-4D97-AF65-F5344CB8AC3E}">
+        <p14:creationId xmlns:p14="http://schemas.microsoft.com/office/powerpoint/2010/main" val="179001533"/>
+      </p:ext>
+    </p:extLst>
+  </p:cSld>
+  <p:clrMapOvr>
+    <a:masterClrMapping/>
+  </p:clrMapOvr>
+</p:sld>
+</file>
+
 <file path=ppt/slides/slide3.xml><?xml version="1.0" encoding="utf-8"?>
 <p:sld xmlns:a="http://schemas.openxmlformats.org/drawingml/2006/main" xmlns:r="http://schemas.openxmlformats.org/officeDocument/2006/relationships" xmlns:p="http://schemas.openxmlformats.org/presentationml/2006/main">
   <p:cSld>
@@ -6530,6 +12293,658 @@
     <p:extLst>
       <p:ext uri="{BB962C8B-B14F-4D97-AF65-F5344CB8AC3E}">
         <p14:creationId xmlns:p14="http://schemas.microsoft.com/office/powerpoint/2010/main" val="510186397"/>
+      </p:ext>
+    </p:extLst>
+  </p:cSld>
+  <p:clrMapOvr>
+    <a:masterClrMapping/>
+  </p:clrMapOvr>
+</p:sld>
+</file>
+
+<file path=ppt/slides/slide30.xml><?xml version="1.0" encoding="utf-8"?>
+<p:sld xmlns:a="http://schemas.openxmlformats.org/drawingml/2006/main" xmlns:r="http://schemas.openxmlformats.org/officeDocument/2006/relationships" xmlns:p="http://schemas.openxmlformats.org/presentationml/2006/main">
+  <p:cSld>
+    <p:spTree>
+      <p:nvGrpSpPr>
+        <p:cNvPr id="1" name="">
+          <a:extLst>
+            <a:ext uri="{FF2B5EF4-FFF2-40B4-BE49-F238E27FC236}">
+              <a16:creationId xmlns:a16="http://schemas.microsoft.com/office/drawing/2014/main" id="{E5EC5821-5E4B-0A54-56C9-617AB9F141E8}"/>
+            </a:ext>
+          </a:extLst>
+        </p:cNvPr>
+        <p:cNvGrpSpPr/>
+        <p:nvPr/>
+      </p:nvGrpSpPr>
+      <p:grpSpPr>
+        <a:xfrm>
+          <a:off x="0" y="0"/>
+          <a:ext cx="0" cy="0"/>
+          <a:chOff x="0" y="0"/>
+          <a:chExt cx="0" cy="0"/>
+        </a:xfrm>
+      </p:grpSpPr>
+      <p:sp>
+        <p:nvSpPr>
+          <p:cNvPr id="4107" name="Title 1">
+            <a:extLst>
+              <a:ext uri="{FF2B5EF4-FFF2-40B4-BE49-F238E27FC236}">
+                <a16:creationId xmlns:a16="http://schemas.microsoft.com/office/drawing/2014/main" id="{9BA0AA6B-6E95-F261-E69F-31824FE87672}"/>
+              </a:ext>
+            </a:extLst>
+          </p:cNvPr>
+          <p:cNvSpPr>
+            <a:spLocks noGrp="1"/>
+          </p:cNvSpPr>
+          <p:nvPr>
+            <p:ph type="title"/>
+          </p:nvPr>
+        </p:nvSpPr>
+        <p:spPr>
+          <a:xfrm>
+            <a:off x="777240" y="457200"/>
+            <a:ext cx="3994785" cy="2501900"/>
+          </a:xfrm>
+        </p:spPr>
+        <p:txBody>
+          <a:bodyPr/>
+          <a:lstStyle/>
+          <a:p>
+            <a:r>
+              <a:rPr lang="en-US" b="1" dirty="0"/>
+              <a:t>Dendrogram: The Tree of Clusters 🌳</a:t>
+            </a:r>
+            <a:br>
+              <a:rPr lang="en-US" b="1" dirty="0"/>
+            </a:br>
+            <a:endParaRPr lang="en-US" dirty="0"/>
+          </a:p>
+        </p:txBody>
+      </p:sp>
+      <p:pic>
+        <p:nvPicPr>
+          <p:cNvPr id="4102" name="Picture 6" descr="How the Hierarchical Clustering Algorithm Works">
+            <a:extLst>
+              <a:ext uri="{FF2B5EF4-FFF2-40B4-BE49-F238E27FC236}">
+                <a16:creationId xmlns:a16="http://schemas.microsoft.com/office/drawing/2014/main" id="{E94D3CF2-7F56-7604-5A9F-A64F44709205}"/>
+              </a:ext>
+            </a:extLst>
+          </p:cNvPr>
+          <p:cNvPicPr>
+            <a:picLocks noChangeAspect="1" noChangeArrowheads="1"/>
+          </p:cNvPicPr>
+          <p:nvPr/>
+        </p:nvPicPr>
+        <p:blipFill>
+          <a:blip r:embed="rId2">
+            <a:extLst>
+              <a:ext uri="{28A0092B-C50C-407E-A947-70E740481C1C}">
+                <a14:useLocalDpi xmlns:a14="http://schemas.microsoft.com/office/drawing/2010/main" val="0"/>
+              </a:ext>
+            </a:extLst>
+          </a:blip>
+          <a:stretch>
+            <a:fillRect/>
+          </a:stretch>
+        </p:blipFill>
+        <p:spPr bwMode="auto">
+          <a:xfrm>
+            <a:off x="5106985" y="867697"/>
+            <a:ext cx="6735745" cy="5001290"/>
+          </a:xfrm>
+          <a:prstGeom prst="rect">
+            <a:avLst/>
+          </a:prstGeom>
+          <a:solidFill>
+            <a:srgbClr val="FFFFFF"/>
+          </a:solidFill>
+          <a:extLst>
+            <a:ext uri="{909E8E84-426E-40DD-AFC4-6F175D3DCCD1}">
+              <a14:hiddenFill xmlns:a14="http://schemas.microsoft.com/office/drawing/2010/main">
+                <a:solidFill>
+                  <a:srgbClr val="FFFFFF"/>
+                </a:solidFill>
+              </a14:hiddenFill>
+            </a:ext>
+          </a:extLst>
+        </p:spPr>
+      </p:pic>
+      <p:sp>
+        <p:nvSpPr>
+          <p:cNvPr id="4109" name="Text Placeholder 3">
+            <a:extLst>
+              <a:ext uri="{FF2B5EF4-FFF2-40B4-BE49-F238E27FC236}">
+                <a16:creationId xmlns:a16="http://schemas.microsoft.com/office/drawing/2014/main" id="{A6B0CEB0-1EB9-F692-3BFA-64EB0C3DAF0A}"/>
+              </a:ext>
+            </a:extLst>
+          </p:cNvPr>
+          <p:cNvSpPr>
+            <a:spLocks noGrp="1"/>
+          </p:cNvSpPr>
+          <p:nvPr>
+            <p:ph type="body" sz="half" idx="2"/>
+          </p:nvPr>
+        </p:nvSpPr>
+        <p:spPr>
+          <a:xfrm>
+            <a:off x="777240" y="2722335"/>
+            <a:ext cx="3994785" cy="2776537"/>
+          </a:xfrm>
+        </p:spPr>
+        <p:txBody>
+          <a:bodyPr>
+            <a:normAutofit lnSpcReduction="10000"/>
+          </a:bodyPr>
+          <a:lstStyle/>
+          <a:p>
+            <a:r>
+              <a:rPr lang="en-US" dirty="0"/>
+              <a:t>A </a:t>
+            </a:r>
+            <a:r>
+              <a:rPr lang="en-US" b="1" dirty="0"/>
+              <a:t>dendrogram</a:t>
+            </a:r>
+            <a:r>
+              <a:rPr lang="en-US" dirty="0"/>
+              <a:t> is a diagram showing </a:t>
+            </a:r>
+            <a:r>
+              <a:rPr lang="en-US" b="1" dirty="0"/>
+              <a:t>how clusters were merged</a:t>
+            </a:r>
+            <a:r>
+              <a:rPr lang="en-US" dirty="0"/>
+              <a:t> or </a:t>
+            </a:r>
+            <a:r>
+              <a:rPr lang="en-US" b="1" dirty="0"/>
+              <a:t>split</a:t>
+            </a:r>
+            <a:r>
+              <a:rPr lang="en-US" dirty="0"/>
+              <a:t> </a:t>
+            </a:r>
+            <a:r>
+              <a:rPr lang="en-US" b="1" dirty="0"/>
+              <a:t>at</a:t>
+            </a:r>
+            <a:r>
+              <a:rPr lang="en-US" dirty="0"/>
+              <a:t> </a:t>
+            </a:r>
+            <a:r>
+              <a:rPr lang="en-US" b="1" dirty="0"/>
+              <a:t>each</a:t>
+            </a:r>
+            <a:r>
+              <a:rPr lang="en-US" dirty="0"/>
+              <a:t> </a:t>
+            </a:r>
+            <a:r>
+              <a:rPr lang="en-US" b="1" dirty="0"/>
+              <a:t>step</a:t>
+            </a:r>
+            <a:r>
+              <a:rPr lang="en-US" dirty="0"/>
+              <a:t>.</a:t>
+            </a:r>
+          </a:p>
+          <a:p>
+            <a:pPr marL="342900" indent="-342900">
+              <a:buFont typeface="Arial" panose="020B0604020202020204" pitchFamily="34" charset="0"/>
+              <a:buChar char="•"/>
+            </a:pPr>
+            <a:r>
+              <a:rPr lang="en-US" dirty="0"/>
+              <a:t>The height of the branches shows the distance (dissimilarity) between clusters.</a:t>
+            </a:r>
+          </a:p>
+          <a:p>
+            <a:pPr marL="342900" indent="-342900">
+              <a:buFont typeface="Arial" panose="020B0604020202020204" pitchFamily="34" charset="0"/>
+              <a:buChar char="•"/>
+            </a:pPr>
+            <a:r>
+              <a:rPr lang="en-US" dirty="0"/>
+              <a:t>You can cut the dendrogram at a certain height to choose the number of clusters.</a:t>
+            </a:r>
+            <a:endParaRPr lang="en-IN" dirty="0"/>
+          </a:p>
+          <a:p>
+            <a:endParaRPr lang="en-US" dirty="0"/>
+          </a:p>
+        </p:txBody>
+      </p:sp>
+    </p:spTree>
+    <p:extLst>
+      <p:ext uri="{BB962C8B-B14F-4D97-AF65-F5344CB8AC3E}">
+        <p14:creationId xmlns:p14="http://schemas.microsoft.com/office/powerpoint/2010/main" val="2426741630"/>
+      </p:ext>
+    </p:extLst>
+  </p:cSld>
+  <p:clrMapOvr>
+    <a:masterClrMapping/>
+  </p:clrMapOvr>
+</p:sld>
+</file>
+
+<file path=ppt/slides/slide31.xml><?xml version="1.0" encoding="utf-8"?>
+<p:sld xmlns:a="http://schemas.openxmlformats.org/drawingml/2006/main" xmlns:r="http://schemas.openxmlformats.org/officeDocument/2006/relationships" xmlns:p="http://schemas.openxmlformats.org/presentationml/2006/main">
+  <p:cSld>
+    <p:spTree>
+      <p:nvGrpSpPr>
+        <p:cNvPr id="1" name="">
+          <a:extLst>
+            <a:ext uri="{FF2B5EF4-FFF2-40B4-BE49-F238E27FC236}">
+              <a16:creationId xmlns:a16="http://schemas.microsoft.com/office/drawing/2014/main" id="{BF3CB578-9E14-2602-8E80-FECBE2ABF9A3}"/>
+            </a:ext>
+          </a:extLst>
+        </p:cNvPr>
+        <p:cNvGrpSpPr/>
+        <p:nvPr/>
+      </p:nvGrpSpPr>
+      <p:grpSpPr>
+        <a:xfrm>
+          <a:off x="0" y="0"/>
+          <a:ext cx="0" cy="0"/>
+          <a:chOff x="0" y="0"/>
+          <a:chExt cx="0" cy="0"/>
+        </a:xfrm>
+      </p:grpSpPr>
+      <p:sp>
+        <p:nvSpPr>
+          <p:cNvPr id="3" name="Content Placeholder 2">
+            <a:extLst>
+              <a:ext uri="{FF2B5EF4-FFF2-40B4-BE49-F238E27FC236}">
+                <a16:creationId xmlns:a16="http://schemas.microsoft.com/office/drawing/2014/main" id="{2A513252-8515-5192-5692-4098998FE324}"/>
+              </a:ext>
+            </a:extLst>
+          </p:cNvPr>
+          <p:cNvSpPr>
+            <a:spLocks noGrp="1"/>
+          </p:cNvSpPr>
+          <p:nvPr>
+            <p:ph idx="1"/>
+          </p:nvPr>
+        </p:nvSpPr>
+        <p:spPr>
+          <a:xfrm>
+            <a:off x="743688" y="1088572"/>
+            <a:ext cx="10900568" cy="4354286"/>
+          </a:xfrm>
+        </p:spPr>
+        <p:txBody>
+          <a:bodyPr>
+            <a:normAutofit/>
+          </a:bodyPr>
+          <a:lstStyle/>
+          <a:p>
+            <a:pPr marL="0" indent="0">
+              <a:buNone/>
+            </a:pPr>
+            <a:r>
+              <a:rPr lang="en-US" sz="3200" b="1" dirty="0">
+                <a:solidFill>
+                  <a:srgbClr val="C00000"/>
+                </a:solidFill>
+              </a:rPr>
+              <a:t>Module-3: </a:t>
+            </a:r>
+            <a:r>
+              <a:rPr lang="en-US" sz="3200" b="1" dirty="0">
+                <a:solidFill>
+                  <a:schemeClr val="accent3">
+                    <a:lumMod val="50000"/>
+                  </a:schemeClr>
+                </a:solidFill>
+              </a:rPr>
+              <a:t>Unsupervised Learning: </a:t>
+            </a:r>
+          </a:p>
+          <a:p>
+            <a:pPr marL="0" indent="0">
+              <a:buNone/>
+            </a:pPr>
+            <a:r>
+              <a:rPr lang="en-US" sz="3200" b="1" dirty="0"/>
+              <a:t>Clustering: K-Means clustering</a:t>
+            </a:r>
+            <a:r>
+              <a:rPr lang="en-US" sz="3200" dirty="0"/>
+              <a:t>, </a:t>
+            </a:r>
+            <a:r>
+              <a:rPr lang="en-US" sz="3200" b="1" dirty="0"/>
+              <a:t>Hierarchical clustering</a:t>
+            </a:r>
+            <a:r>
+              <a:rPr lang="en-US" sz="3200" dirty="0"/>
+              <a:t>, Evaluation of clustering results. </a:t>
+            </a:r>
+          </a:p>
+          <a:p>
+            <a:pPr marL="0" indent="0">
+              <a:buNone/>
+            </a:pPr>
+            <a:r>
+              <a:rPr lang="en-US" sz="3200" b="1" dirty="0"/>
+              <a:t>Dimensionality Reduction: </a:t>
+            </a:r>
+            <a:r>
+              <a:rPr lang="en-US" sz="3200" dirty="0"/>
+              <a:t>Principal Component Analysis (PCA), Linear Discriminant Analysis (LDA) t-Distributed Stochastic Neighbor Embedding (t-SNE).  </a:t>
+            </a:r>
+          </a:p>
+          <a:p>
+            <a:pPr marL="0" indent="0">
+              <a:buNone/>
+            </a:pPr>
+            <a:r>
+              <a:rPr lang="en-US" sz="3200" b="1" dirty="0"/>
+              <a:t>Association Rule Learning: </a:t>
+            </a:r>
+            <a:r>
+              <a:rPr lang="en-US" sz="3200" dirty="0" err="1"/>
+              <a:t>Apriori</a:t>
+            </a:r>
+            <a:r>
+              <a:rPr lang="en-US" sz="3200" dirty="0"/>
+              <a:t> algorithm, Market Basket Analysis, Evaluation metrics for association rules </a:t>
+            </a:r>
+            <a:endParaRPr lang="en-IN" sz="3200" dirty="0"/>
+          </a:p>
+        </p:txBody>
+      </p:sp>
+    </p:spTree>
+    <p:extLst>
+      <p:ext uri="{BB962C8B-B14F-4D97-AF65-F5344CB8AC3E}">
+        <p14:creationId xmlns:p14="http://schemas.microsoft.com/office/powerpoint/2010/main" val="1788168237"/>
+      </p:ext>
+    </p:extLst>
+  </p:cSld>
+  <p:clrMapOvr>
+    <a:masterClrMapping/>
+  </p:clrMapOvr>
+</p:sld>
+</file>
+
+<file path=ppt/slides/slide32.xml><?xml version="1.0" encoding="utf-8"?>
+<p:sld xmlns:a="http://schemas.openxmlformats.org/drawingml/2006/main" xmlns:r="http://schemas.openxmlformats.org/officeDocument/2006/relationships" xmlns:p="http://schemas.openxmlformats.org/presentationml/2006/main">
+  <p:cSld>
+    <p:spTree>
+      <p:nvGrpSpPr>
+        <p:cNvPr id="1" name="">
+          <a:extLst>
+            <a:ext uri="{FF2B5EF4-FFF2-40B4-BE49-F238E27FC236}">
+              <a16:creationId xmlns:a16="http://schemas.microsoft.com/office/drawing/2014/main" id="{01AD8779-AC95-F04E-10D3-1F7FE44D2D07}"/>
+            </a:ext>
+          </a:extLst>
+        </p:cNvPr>
+        <p:cNvGrpSpPr/>
+        <p:nvPr/>
+      </p:nvGrpSpPr>
+      <p:grpSpPr>
+        <a:xfrm>
+          <a:off x="0" y="0"/>
+          <a:ext cx="0" cy="0"/>
+          <a:chOff x="0" y="0"/>
+          <a:chExt cx="0" cy="0"/>
+        </a:xfrm>
+      </p:grpSpPr>
+      <p:sp>
+        <p:nvSpPr>
+          <p:cNvPr id="3" name="Content Placeholder 2">
+            <a:extLst>
+              <a:ext uri="{FF2B5EF4-FFF2-40B4-BE49-F238E27FC236}">
+                <a16:creationId xmlns:a16="http://schemas.microsoft.com/office/drawing/2014/main" id="{58F7B5A6-E7A5-AD58-274C-58370C0046D1}"/>
+              </a:ext>
+            </a:extLst>
+          </p:cNvPr>
+          <p:cNvSpPr>
+            <a:spLocks noGrp="1"/>
+          </p:cNvSpPr>
+          <p:nvPr>
+            <p:ph idx="1"/>
+          </p:nvPr>
+        </p:nvSpPr>
+        <p:spPr>
+          <a:xfrm>
+            <a:off x="702853" y="707571"/>
+            <a:ext cx="10900568" cy="5486400"/>
+          </a:xfrm>
+        </p:spPr>
+        <p:txBody>
+          <a:bodyPr>
+            <a:normAutofit/>
+          </a:bodyPr>
+          <a:lstStyle/>
+          <a:p>
+            <a:pPr marL="0" indent="0">
+              <a:buNone/>
+            </a:pPr>
+            <a:endParaRPr lang="en-IN" sz="2400" dirty="0"/>
+          </a:p>
+        </p:txBody>
+      </p:sp>
+    </p:spTree>
+    <p:extLst>
+      <p:ext uri="{BB962C8B-B14F-4D97-AF65-F5344CB8AC3E}">
+        <p14:creationId xmlns:p14="http://schemas.microsoft.com/office/powerpoint/2010/main" val="24984144"/>
+      </p:ext>
+    </p:extLst>
+  </p:cSld>
+  <p:clrMapOvr>
+    <a:masterClrMapping/>
+  </p:clrMapOvr>
+</p:sld>
+</file>
+
+<file path=ppt/slides/slide33.xml><?xml version="1.0" encoding="utf-8"?>
+<p:sld xmlns:a="http://schemas.openxmlformats.org/drawingml/2006/main" xmlns:r="http://schemas.openxmlformats.org/officeDocument/2006/relationships" xmlns:p="http://schemas.openxmlformats.org/presentationml/2006/main">
+  <p:cSld>
+    <p:spTree>
+      <p:nvGrpSpPr>
+        <p:cNvPr id="1" name="">
+          <a:extLst>
+            <a:ext uri="{FF2B5EF4-FFF2-40B4-BE49-F238E27FC236}">
+              <a16:creationId xmlns:a16="http://schemas.microsoft.com/office/drawing/2014/main" id="{CDCE5430-BCBD-8225-44D7-603FA096493C}"/>
+            </a:ext>
+          </a:extLst>
+        </p:cNvPr>
+        <p:cNvGrpSpPr/>
+        <p:nvPr/>
+      </p:nvGrpSpPr>
+      <p:grpSpPr>
+        <a:xfrm>
+          <a:off x="0" y="0"/>
+          <a:ext cx="0" cy="0"/>
+          <a:chOff x="0" y="0"/>
+          <a:chExt cx="0" cy="0"/>
+        </a:xfrm>
+      </p:grpSpPr>
+      <p:sp>
+        <p:nvSpPr>
+          <p:cNvPr id="3" name="Content Placeholder 2">
+            <a:extLst>
+              <a:ext uri="{FF2B5EF4-FFF2-40B4-BE49-F238E27FC236}">
+                <a16:creationId xmlns:a16="http://schemas.microsoft.com/office/drawing/2014/main" id="{9932100B-512B-7D7B-A10A-879FC9A5343F}"/>
+              </a:ext>
+            </a:extLst>
+          </p:cNvPr>
+          <p:cNvSpPr>
+            <a:spLocks noGrp="1"/>
+          </p:cNvSpPr>
+          <p:nvPr>
+            <p:ph idx="1"/>
+          </p:nvPr>
+        </p:nvSpPr>
+        <p:spPr>
+          <a:xfrm>
+            <a:off x="702853" y="707571"/>
+            <a:ext cx="10900568" cy="5486400"/>
+          </a:xfrm>
+        </p:spPr>
+        <p:txBody>
+          <a:bodyPr>
+            <a:normAutofit/>
+          </a:bodyPr>
+          <a:lstStyle/>
+          <a:p>
+            <a:pPr marL="0" indent="0">
+              <a:buNone/>
+            </a:pPr>
+            <a:endParaRPr lang="en-IN" sz="2400" dirty="0"/>
+          </a:p>
+        </p:txBody>
+      </p:sp>
+    </p:spTree>
+    <p:extLst>
+      <p:ext uri="{BB962C8B-B14F-4D97-AF65-F5344CB8AC3E}">
+        <p14:creationId xmlns:p14="http://schemas.microsoft.com/office/powerpoint/2010/main" val="2412775598"/>
+      </p:ext>
+    </p:extLst>
+  </p:cSld>
+  <p:clrMapOvr>
+    <a:masterClrMapping/>
+  </p:clrMapOvr>
+</p:sld>
+</file>
+
+<file path=ppt/slides/slide34.xml><?xml version="1.0" encoding="utf-8"?>
+<p:sld xmlns:a="http://schemas.openxmlformats.org/drawingml/2006/main" xmlns:r="http://schemas.openxmlformats.org/officeDocument/2006/relationships" xmlns:p="http://schemas.openxmlformats.org/presentationml/2006/main">
+  <p:cSld>
+    <p:spTree>
+      <p:nvGrpSpPr>
+        <p:cNvPr id="1" name="">
+          <a:extLst>
+            <a:ext uri="{FF2B5EF4-FFF2-40B4-BE49-F238E27FC236}">
+              <a16:creationId xmlns:a16="http://schemas.microsoft.com/office/drawing/2014/main" id="{70798EDE-8B7C-E5F8-D4FA-7CAE04851D1B}"/>
+            </a:ext>
+          </a:extLst>
+        </p:cNvPr>
+        <p:cNvGrpSpPr/>
+        <p:nvPr/>
+      </p:nvGrpSpPr>
+      <p:grpSpPr>
+        <a:xfrm>
+          <a:off x="0" y="0"/>
+          <a:ext cx="0" cy="0"/>
+          <a:chOff x="0" y="0"/>
+          <a:chExt cx="0" cy="0"/>
+        </a:xfrm>
+      </p:grpSpPr>
+      <p:sp>
+        <p:nvSpPr>
+          <p:cNvPr id="3" name="Content Placeholder 2">
+            <a:extLst>
+              <a:ext uri="{FF2B5EF4-FFF2-40B4-BE49-F238E27FC236}">
+                <a16:creationId xmlns:a16="http://schemas.microsoft.com/office/drawing/2014/main" id="{80B43C22-7CF1-1705-D89E-BA0C110BE761}"/>
+              </a:ext>
+            </a:extLst>
+          </p:cNvPr>
+          <p:cNvSpPr>
+            <a:spLocks noGrp="1"/>
+          </p:cNvSpPr>
+          <p:nvPr>
+            <p:ph idx="1"/>
+          </p:nvPr>
+        </p:nvSpPr>
+        <p:spPr>
+          <a:xfrm>
+            <a:off x="702853" y="707571"/>
+            <a:ext cx="10900568" cy="5486400"/>
+          </a:xfrm>
+        </p:spPr>
+        <p:txBody>
+          <a:bodyPr>
+            <a:normAutofit/>
+          </a:bodyPr>
+          <a:lstStyle/>
+          <a:p>
+            <a:pPr marL="0" indent="0">
+              <a:buNone/>
+            </a:pPr>
+            <a:endParaRPr lang="en-IN" sz="2400" dirty="0"/>
+          </a:p>
+        </p:txBody>
+      </p:sp>
+    </p:spTree>
+    <p:extLst>
+      <p:ext uri="{BB962C8B-B14F-4D97-AF65-F5344CB8AC3E}">
+        <p14:creationId xmlns:p14="http://schemas.microsoft.com/office/powerpoint/2010/main" val="915010708"/>
+      </p:ext>
+    </p:extLst>
+  </p:cSld>
+  <p:clrMapOvr>
+    <a:masterClrMapping/>
+  </p:clrMapOvr>
+</p:sld>
+</file>
+
+<file path=ppt/slides/slide35.xml><?xml version="1.0" encoding="utf-8"?>
+<p:sld xmlns:a="http://schemas.openxmlformats.org/drawingml/2006/main" xmlns:r="http://schemas.openxmlformats.org/officeDocument/2006/relationships" xmlns:p="http://schemas.openxmlformats.org/presentationml/2006/main">
+  <p:cSld>
+    <p:spTree>
+      <p:nvGrpSpPr>
+        <p:cNvPr id="1" name="">
+          <a:extLst>
+            <a:ext uri="{FF2B5EF4-FFF2-40B4-BE49-F238E27FC236}">
+              <a16:creationId xmlns:a16="http://schemas.microsoft.com/office/drawing/2014/main" id="{0269C1F4-6269-B35F-F43A-CEC24380E4E7}"/>
+            </a:ext>
+          </a:extLst>
+        </p:cNvPr>
+        <p:cNvGrpSpPr/>
+        <p:nvPr/>
+      </p:nvGrpSpPr>
+      <p:grpSpPr>
+        <a:xfrm>
+          <a:off x="0" y="0"/>
+          <a:ext cx="0" cy="0"/>
+          <a:chOff x="0" y="0"/>
+          <a:chExt cx="0" cy="0"/>
+        </a:xfrm>
+      </p:grpSpPr>
+      <p:sp>
+        <p:nvSpPr>
+          <p:cNvPr id="3" name="Content Placeholder 2">
+            <a:extLst>
+              <a:ext uri="{FF2B5EF4-FFF2-40B4-BE49-F238E27FC236}">
+                <a16:creationId xmlns:a16="http://schemas.microsoft.com/office/drawing/2014/main" id="{53380701-88D7-9CA1-836B-9C85B24767A3}"/>
+              </a:ext>
+            </a:extLst>
+          </p:cNvPr>
+          <p:cNvSpPr>
+            <a:spLocks noGrp="1"/>
+          </p:cNvSpPr>
+          <p:nvPr>
+            <p:ph idx="1"/>
+          </p:nvPr>
+        </p:nvSpPr>
+        <p:spPr>
+          <a:xfrm>
+            <a:off x="702853" y="707571"/>
+            <a:ext cx="10900568" cy="5486400"/>
+          </a:xfrm>
+        </p:spPr>
+        <p:txBody>
+          <a:bodyPr>
+            <a:normAutofit/>
+          </a:bodyPr>
+          <a:lstStyle/>
+          <a:p>
+            <a:pPr marL="0" indent="0">
+              <a:buNone/>
+            </a:pPr>
+            <a:endParaRPr lang="en-IN" sz="2400" dirty="0"/>
+          </a:p>
+        </p:txBody>
+      </p:sp>
+    </p:spTree>
+    <p:extLst>
+      <p:ext uri="{BB962C8B-B14F-4D97-AF65-F5344CB8AC3E}">
+        <p14:creationId xmlns:p14="http://schemas.microsoft.com/office/powerpoint/2010/main" val="4106113749"/>
       </p:ext>
     </p:extLst>
   </p:cSld>

--- a/Theory Class-Notes/Unit-3 Unsupervised Learning.pptx
+++ b/Theory Class-Notes/Unit-3 Unsupervised Learning.pptx
@@ -35,11 +35,43 @@
     <p:sldId id="854" r:id="rId29"/>
     <p:sldId id="855" r:id="rId30"/>
     <p:sldId id="853" r:id="rId31"/>
-    <p:sldId id="847" r:id="rId32"/>
-    <p:sldId id="856" r:id="rId33"/>
+    <p:sldId id="856" r:id="rId32"/>
+    <p:sldId id="858" r:id="rId33"/>
     <p:sldId id="857" r:id="rId34"/>
-    <p:sldId id="858" r:id="rId35"/>
-    <p:sldId id="859" r:id="rId36"/>
+    <p:sldId id="860" r:id="rId35"/>
+    <p:sldId id="861" r:id="rId36"/>
+    <p:sldId id="862" r:id="rId37"/>
+    <p:sldId id="863" r:id="rId38"/>
+    <p:sldId id="864" r:id="rId39"/>
+    <p:sldId id="865" r:id="rId40"/>
+    <p:sldId id="866" r:id="rId41"/>
+    <p:sldId id="867" r:id="rId42"/>
+    <p:sldId id="868" r:id="rId43"/>
+    <p:sldId id="869" r:id="rId44"/>
+    <p:sldId id="870" r:id="rId45"/>
+    <p:sldId id="871" r:id="rId46"/>
+    <p:sldId id="872" r:id="rId47"/>
+    <p:sldId id="873" r:id="rId48"/>
+    <p:sldId id="483" r:id="rId49"/>
+    <p:sldId id="484" r:id="rId50"/>
+    <p:sldId id="859" r:id="rId51"/>
+    <p:sldId id="874" r:id="rId52"/>
+    <p:sldId id="875" r:id="rId53"/>
+    <p:sldId id="876" r:id="rId54"/>
+    <p:sldId id="877" r:id="rId55"/>
+    <p:sldId id="878" r:id="rId56"/>
+    <p:sldId id="879" r:id="rId57"/>
+    <p:sldId id="880" r:id="rId58"/>
+    <p:sldId id="847" r:id="rId59"/>
+    <p:sldId id="881" r:id="rId60"/>
+    <p:sldId id="882" r:id="rId61"/>
+    <p:sldId id="883" r:id="rId62"/>
+    <p:sldId id="884" r:id="rId63"/>
+    <p:sldId id="885" r:id="rId64"/>
+    <p:sldId id="886" r:id="rId65"/>
+    <p:sldId id="887" r:id="rId66"/>
+    <p:sldId id="888" r:id="rId67"/>
+    <p:sldId id="889" r:id="rId68"/>
   </p:sldIdLst>
   <p:sldSz cx="12192000" cy="6858000"/>
   <p:notesSz cx="6858000" cy="9144000"/>
@@ -12399,15 +12431,6 @@
           <a:solidFill>
             <a:srgbClr val="FFFFFF"/>
           </a:solidFill>
-          <a:extLst>
-            <a:ext uri="{909E8E84-426E-40DD-AFC4-6F175D3DCCD1}">
-              <a14:hiddenFill xmlns:a14="http://schemas.microsoft.com/office/drawing/2010/main">
-                <a:solidFill>
-                  <a:srgbClr val="FFFFFF"/>
-                </a:solidFill>
-              </a14:hiddenFill>
-            </a:ext>
-          </a:extLst>
         </p:spPr>
       </p:pic>
       <p:sp>
@@ -12531,146 +12554,6 @@
 </file>
 
 <file path=ppt/slides/slide31.xml><?xml version="1.0" encoding="utf-8"?>
-<p:sld xmlns:a="http://schemas.openxmlformats.org/drawingml/2006/main" xmlns:r="http://schemas.openxmlformats.org/officeDocument/2006/relationships" xmlns:p="http://schemas.openxmlformats.org/presentationml/2006/main">
-  <p:cSld>
-    <p:spTree>
-      <p:nvGrpSpPr>
-        <p:cNvPr id="1" name="">
-          <a:extLst>
-            <a:ext uri="{FF2B5EF4-FFF2-40B4-BE49-F238E27FC236}">
-              <a16:creationId xmlns:a16="http://schemas.microsoft.com/office/drawing/2014/main" id="{BF3CB578-9E14-2602-8E80-FECBE2ABF9A3}"/>
-            </a:ext>
-          </a:extLst>
-        </p:cNvPr>
-        <p:cNvGrpSpPr/>
-        <p:nvPr/>
-      </p:nvGrpSpPr>
-      <p:grpSpPr>
-        <a:xfrm>
-          <a:off x="0" y="0"/>
-          <a:ext cx="0" cy="0"/>
-          <a:chOff x="0" y="0"/>
-          <a:chExt cx="0" cy="0"/>
-        </a:xfrm>
-      </p:grpSpPr>
-      <p:sp>
-        <p:nvSpPr>
-          <p:cNvPr id="3" name="Content Placeholder 2">
-            <a:extLst>
-              <a:ext uri="{FF2B5EF4-FFF2-40B4-BE49-F238E27FC236}">
-                <a16:creationId xmlns:a16="http://schemas.microsoft.com/office/drawing/2014/main" id="{2A513252-8515-5192-5692-4098998FE324}"/>
-              </a:ext>
-            </a:extLst>
-          </p:cNvPr>
-          <p:cNvSpPr>
-            <a:spLocks noGrp="1"/>
-          </p:cNvSpPr>
-          <p:nvPr>
-            <p:ph idx="1"/>
-          </p:nvPr>
-        </p:nvSpPr>
-        <p:spPr>
-          <a:xfrm>
-            <a:off x="743688" y="1088572"/>
-            <a:ext cx="10900568" cy="4354286"/>
-          </a:xfrm>
-        </p:spPr>
-        <p:txBody>
-          <a:bodyPr>
-            <a:normAutofit/>
-          </a:bodyPr>
-          <a:lstStyle/>
-          <a:p>
-            <a:pPr marL="0" indent="0">
-              <a:buNone/>
-            </a:pPr>
-            <a:r>
-              <a:rPr lang="en-US" sz="3200" b="1" dirty="0">
-                <a:solidFill>
-                  <a:srgbClr val="C00000"/>
-                </a:solidFill>
-              </a:rPr>
-              <a:t>Module-3: </a:t>
-            </a:r>
-            <a:r>
-              <a:rPr lang="en-US" sz="3200" b="1" dirty="0">
-                <a:solidFill>
-                  <a:schemeClr val="accent3">
-                    <a:lumMod val="50000"/>
-                  </a:schemeClr>
-                </a:solidFill>
-              </a:rPr>
-              <a:t>Unsupervised Learning: </a:t>
-            </a:r>
-          </a:p>
-          <a:p>
-            <a:pPr marL="0" indent="0">
-              <a:buNone/>
-            </a:pPr>
-            <a:r>
-              <a:rPr lang="en-US" sz="3200" b="1" dirty="0"/>
-              <a:t>Clustering: K-Means clustering</a:t>
-            </a:r>
-            <a:r>
-              <a:rPr lang="en-US" sz="3200" dirty="0"/>
-              <a:t>, </a:t>
-            </a:r>
-            <a:r>
-              <a:rPr lang="en-US" sz="3200" b="1" dirty="0"/>
-              <a:t>Hierarchical clustering</a:t>
-            </a:r>
-            <a:r>
-              <a:rPr lang="en-US" sz="3200" dirty="0"/>
-              <a:t>, Evaluation of clustering results. </a:t>
-            </a:r>
-          </a:p>
-          <a:p>
-            <a:pPr marL="0" indent="0">
-              <a:buNone/>
-            </a:pPr>
-            <a:r>
-              <a:rPr lang="en-US" sz="3200" b="1" dirty="0"/>
-              <a:t>Dimensionality Reduction: </a:t>
-            </a:r>
-            <a:r>
-              <a:rPr lang="en-US" sz="3200" dirty="0"/>
-              <a:t>Principal Component Analysis (PCA), Linear Discriminant Analysis (LDA) t-Distributed Stochastic Neighbor Embedding (t-SNE).  </a:t>
-            </a:r>
-          </a:p>
-          <a:p>
-            <a:pPr marL="0" indent="0">
-              <a:buNone/>
-            </a:pPr>
-            <a:r>
-              <a:rPr lang="en-US" sz="3200" b="1" dirty="0"/>
-              <a:t>Association Rule Learning: </a:t>
-            </a:r>
-            <a:r>
-              <a:rPr lang="en-US" sz="3200" dirty="0" err="1"/>
-              <a:t>Apriori</a:t>
-            </a:r>
-            <a:r>
-              <a:rPr lang="en-US" sz="3200" dirty="0"/>
-              <a:t> algorithm, Market Basket Analysis, Evaluation metrics for association rules </a:t>
-            </a:r>
-            <a:endParaRPr lang="en-IN" sz="3200" dirty="0"/>
-          </a:p>
-        </p:txBody>
-      </p:sp>
-    </p:spTree>
-    <p:extLst>
-      <p:ext uri="{BB962C8B-B14F-4D97-AF65-F5344CB8AC3E}">
-        <p14:creationId xmlns:p14="http://schemas.microsoft.com/office/powerpoint/2010/main" val="1788168237"/>
-      </p:ext>
-    </p:extLst>
-  </p:cSld>
-  <p:clrMapOvr>
-    <a:masterClrMapping/>
-  </p:clrMapOvr>
-</p:sld>
-</file>
-
-<file path=ppt/slides/slide32.xml><?xml version="1.0" encoding="utf-8"?>
 <p:sld xmlns:a="http://schemas.openxmlformats.org/drawingml/2006/main" xmlns:r="http://schemas.openxmlformats.org/officeDocument/2006/relationships" xmlns:p="http://schemas.openxmlformats.org/presentationml/2006/main">
   <p:cSld>
     <p:spTree>
@@ -12717,14 +12600,220 @@
         </p:spPr>
         <p:txBody>
           <a:bodyPr>
-            <a:normAutofit/>
+            <a:normAutofit lnSpcReduction="10000"/>
           </a:bodyPr>
           <a:lstStyle/>
           <a:p>
             <a:pPr marL="0" indent="0">
               <a:buNone/>
             </a:pPr>
-            <a:endParaRPr lang="en-IN" sz="2400" dirty="0"/>
+            <a:r>
+              <a:rPr lang="en-IN" sz="2800" b="1" dirty="0"/>
+              <a:t>Evaluation of Clustering Results:</a:t>
+            </a:r>
+          </a:p>
+          <a:p>
+            <a:pPr marL="0" indent="0">
+              <a:buNone/>
+            </a:pPr>
+            <a:r>
+              <a:rPr lang="en-US" sz="2800" dirty="0"/>
+              <a:t>Once you perform clustering, the next big question is:</a:t>
+            </a:r>
+          </a:p>
+          <a:p>
+            <a:pPr lvl="1"/>
+            <a:r>
+              <a:rPr lang="en-US" sz="2400" b="1" dirty="0">
+                <a:solidFill>
+                  <a:srgbClr val="002060"/>
+                </a:solidFill>
+              </a:rPr>
+              <a:t>How do I know if the clustering is good or meaningful?</a:t>
+            </a:r>
+          </a:p>
+          <a:p>
+            <a:pPr marL="0" indent="0">
+              <a:buNone/>
+            </a:pPr>
+            <a:r>
+              <a:rPr lang="en-US" sz="2800" dirty="0"/>
+              <a:t>Since clustering is </a:t>
+            </a:r>
+            <a:r>
+              <a:rPr lang="en-US" sz="2800" b="1" dirty="0"/>
+              <a:t>unsupervised</a:t>
+            </a:r>
+            <a:r>
+              <a:rPr lang="en-US" sz="2800" dirty="0"/>
+              <a:t> (no true labels), </a:t>
+            </a:r>
+            <a:r>
+              <a:rPr lang="en-US" sz="2800" b="1" dirty="0">
+                <a:solidFill>
+                  <a:srgbClr val="002060"/>
+                </a:solidFill>
+              </a:rPr>
+              <a:t>we need special evaluation metrics</a:t>
+            </a:r>
+            <a:r>
+              <a:rPr lang="en-US" sz="2800" dirty="0"/>
+              <a:t>.</a:t>
+            </a:r>
+          </a:p>
+          <a:p>
+            <a:pPr marL="0" indent="0">
+              <a:buNone/>
+            </a:pPr>
+            <a:endParaRPr lang="en-US" sz="1400" dirty="0"/>
+          </a:p>
+          <a:p>
+            <a:pPr marL="0" indent="0">
+              <a:buNone/>
+            </a:pPr>
+            <a:r>
+              <a:rPr lang="en-US" sz="2800" dirty="0"/>
+              <a:t>There are </a:t>
+            </a:r>
+            <a:r>
+              <a:rPr lang="en-US" sz="2800" b="1" dirty="0">
+                <a:solidFill>
+                  <a:schemeClr val="tx2">
+                    <a:lumMod val="75000"/>
+                    <a:lumOff val="25000"/>
+                  </a:schemeClr>
+                </a:solidFill>
+              </a:rPr>
+              <a:t>two main types </a:t>
+            </a:r>
+            <a:r>
+              <a:rPr lang="en-US" sz="2800" dirty="0"/>
+              <a:t>of evaluation methods:</a:t>
+            </a:r>
+          </a:p>
+          <a:p>
+            <a:pPr marL="0" indent="0">
+              <a:buNone/>
+            </a:pPr>
+            <a:r>
+              <a:rPr lang="en-US" sz="2800" b="1" dirty="0"/>
+              <a:t>1. Internal Evaluation</a:t>
+            </a:r>
+          </a:p>
+          <a:p>
+            <a:pPr marL="0" indent="0">
+              <a:buNone/>
+            </a:pPr>
+            <a:r>
+              <a:rPr lang="en-US" sz="2800" dirty="0"/>
+              <a:t>Measures the quality of clustering </a:t>
+            </a:r>
+            <a:r>
+              <a:rPr lang="en-US" sz="2800" b="1" dirty="0">
+                <a:solidFill>
+                  <a:schemeClr val="tx2">
+                    <a:lumMod val="75000"/>
+                    <a:lumOff val="25000"/>
+                  </a:schemeClr>
+                </a:solidFill>
+              </a:rPr>
+              <a:t>using the data itself </a:t>
+            </a:r>
+            <a:r>
+              <a:rPr lang="en-US" sz="2800" dirty="0"/>
+              <a:t>(without external labels).</a:t>
+            </a:r>
+          </a:p>
+          <a:p>
+            <a:pPr marL="0" indent="0">
+              <a:buNone/>
+            </a:pPr>
+            <a:r>
+              <a:rPr lang="en-US" sz="2800" b="1" dirty="0"/>
+              <a:t>2. External Evaluation</a:t>
+            </a:r>
+          </a:p>
+          <a:p>
+            <a:pPr marL="0" indent="0">
+              <a:buNone/>
+            </a:pPr>
+            <a:r>
+              <a:rPr lang="en-US" sz="2800" dirty="0"/>
+              <a:t>Compares the clustering result to </a:t>
+            </a:r>
+            <a:r>
+              <a:rPr lang="en-US" sz="2800" b="1" dirty="0">
+                <a:solidFill>
+                  <a:srgbClr val="C00000"/>
+                </a:solidFill>
+              </a:rPr>
+              <a:t>ground truth labels </a:t>
+            </a:r>
+            <a:r>
+              <a:rPr lang="en-US" sz="2800" dirty="0"/>
+              <a:t>(</a:t>
+            </a:r>
+            <a:r>
+              <a:rPr lang="en-US" sz="2800" b="1" dirty="0">
+                <a:solidFill>
+                  <a:schemeClr val="tx2">
+                    <a:lumMod val="75000"/>
+                    <a:lumOff val="25000"/>
+                  </a:schemeClr>
+                </a:solidFill>
+              </a:rPr>
+              <a:t>actual</a:t>
+            </a:r>
+            <a:r>
+              <a:rPr lang="en-US" sz="2800" dirty="0"/>
+              <a:t>, </a:t>
+            </a:r>
+            <a:r>
+              <a:rPr lang="en-US" sz="2800" b="1" dirty="0">
+                <a:solidFill>
+                  <a:schemeClr val="tx2">
+                    <a:lumMod val="75000"/>
+                    <a:lumOff val="25000"/>
+                  </a:schemeClr>
+                </a:solidFill>
+              </a:rPr>
+              <a:t>correct</a:t>
+            </a:r>
+            <a:r>
+              <a:rPr lang="en-US" sz="2800" dirty="0"/>
+              <a:t> </a:t>
+            </a:r>
+            <a:r>
+              <a:rPr lang="en-US" sz="2800" b="1" dirty="0">
+                <a:solidFill>
+                  <a:schemeClr val="tx2">
+                    <a:lumMod val="75000"/>
+                    <a:lumOff val="25000"/>
+                  </a:schemeClr>
+                </a:solidFill>
+              </a:rPr>
+              <a:t>labels</a:t>
+            </a:r>
+            <a:r>
+              <a:rPr lang="en-US" sz="2800" dirty="0"/>
+              <a:t> or </a:t>
+            </a:r>
+            <a:r>
+              <a:rPr lang="en-US" sz="2800" b="1" dirty="0">
+                <a:solidFill>
+                  <a:schemeClr val="tx2">
+                    <a:lumMod val="75000"/>
+                    <a:lumOff val="25000"/>
+                  </a:schemeClr>
+                </a:solidFill>
+              </a:rPr>
+              <a:t>categories</a:t>
+            </a:r>
+            <a:r>
+              <a:rPr lang="en-US" sz="2800" dirty="0"/>
+              <a:t> of the data, if available).</a:t>
+            </a:r>
+            <a:endParaRPr lang="en-IN" sz="2800" dirty="0"/>
           </a:p>
         </p:txBody>
       </p:sp>
@@ -12732,6 +12821,471 @@
     <p:extLst>
       <p:ext uri="{BB962C8B-B14F-4D97-AF65-F5344CB8AC3E}">
         <p14:creationId xmlns:p14="http://schemas.microsoft.com/office/powerpoint/2010/main" val="24984144"/>
+      </p:ext>
+    </p:extLst>
+  </p:cSld>
+  <p:clrMapOvr>
+    <a:masterClrMapping/>
+  </p:clrMapOvr>
+</p:sld>
+</file>
+
+<file path=ppt/slides/slide32.xml><?xml version="1.0" encoding="utf-8"?>
+<p:sld xmlns:a="http://schemas.openxmlformats.org/drawingml/2006/main" xmlns:r="http://schemas.openxmlformats.org/officeDocument/2006/relationships" xmlns:p="http://schemas.openxmlformats.org/presentationml/2006/main">
+  <p:cSld>
+    <p:spTree>
+      <p:nvGrpSpPr>
+        <p:cNvPr id="1" name="">
+          <a:extLst>
+            <a:ext uri="{FF2B5EF4-FFF2-40B4-BE49-F238E27FC236}">
+              <a16:creationId xmlns:a16="http://schemas.microsoft.com/office/drawing/2014/main" id="{70798EDE-8B7C-E5F8-D4FA-7CAE04851D1B}"/>
+            </a:ext>
+          </a:extLst>
+        </p:cNvPr>
+        <p:cNvGrpSpPr/>
+        <p:nvPr/>
+      </p:nvGrpSpPr>
+      <p:grpSpPr>
+        <a:xfrm>
+          <a:off x="0" y="0"/>
+          <a:ext cx="0" cy="0"/>
+          <a:chOff x="0" y="0"/>
+          <a:chExt cx="0" cy="0"/>
+        </a:xfrm>
+      </p:grpSpPr>
+      <p:sp>
+        <p:nvSpPr>
+          <p:cNvPr id="3" name="Content Placeholder 2">
+            <a:extLst>
+              <a:ext uri="{FF2B5EF4-FFF2-40B4-BE49-F238E27FC236}">
+                <a16:creationId xmlns:a16="http://schemas.microsoft.com/office/drawing/2014/main" id="{80B43C22-7CF1-1705-D89E-BA0C110BE761}"/>
+              </a:ext>
+            </a:extLst>
+          </p:cNvPr>
+          <p:cNvSpPr>
+            <a:spLocks noGrp="1"/>
+          </p:cNvSpPr>
+          <p:nvPr>
+            <p:ph idx="1"/>
+          </p:nvPr>
+        </p:nvSpPr>
+        <p:spPr>
+          <a:xfrm>
+            <a:off x="702853" y="707571"/>
+            <a:ext cx="10900568" cy="5486400"/>
+          </a:xfrm>
+        </p:spPr>
+        <p:txBody>
+          <a:bodyPr>
+            <a:normAutofit/>
+          </a:bodyPr>
+          <a:lstStyle/>
+          <a:p>
+            <a:pPr marL="0" indent="0">
+              <a:buNone/>
+            </a:pPr>
+            <a:r>
+              <a:rPr lang="en-US" sz="2800" b="1" dirty="0"/>
+              <a:t>1. Internal Evaluation Metrics (most common)</a:t>
+            </a:r>
+          </a:p>
+          <a:p>
+            <a:pPr marL="0" indent="0">
+              <a:buNone/>
+            </a:pPr>
+            <a:endParaRPr lang="en-IN" sz="2800" dirty="0"/>
+          </a:p>
+        </p:txBody>
+      </p:sp>
+      <p:graphicFrame>
+        <p:nvGraphicFramePr>
+          <p:cNvPr id="2" name="Table 1">
+            <a:extLst>
+              <a:ext uri="{FF2B5EF4-FFF2-40B4-BE49-F238E27FC236}">
+                <a16:creationId xmlns:a16="http://schemas.microsoft.com/office/drawing/2014/main" id="{E30B3347-D90B-C591-B979-11CE2756C0EF}"/>
+              </a:ext>
+            </a:extLst>
+          </p:cNvPr>
+          <p:cNvGraphicFramePr>
+            <a:graphicFrameLocks noGrp="1"/>
+          </p:cNvGraphicFramePr>
+          <p:nvPr>
+            <p:extLst>
+              <p:ext uri="{D42A27DB-BD31-4B8C-83A1-F6EECF244321}">
+                <p14:modId xmlns:p14="http://schemas.microsoft.com/office/powerpoint/2010/main" val="2394256958"/>
+              </p:ext>
+            </p:extLst>
+          </p:nvPr>
+        </p:nvGraphicFramePr>
+        <p:xfrm>
+          <a:off x="914989" y="1432467"/>
+          <a:ext cx="10155782" cy="3501359"/>
+        </p:xfrm>
+        <a:graphic>
+          <a:graphicData uri="http://schemas.openxmlformats.org/drawingml/2006/table">
+            <a:tbl>
+              <a:tblPr firstRow="1" firstCol="1" bandRow="1">
+                <a:tableStyleId>{5C22544A-7EE6-4342-B048-85BDC9FD1C3A}</a:tableStyleId>
+              </a:tblPr>
+              <a:tblGrid>
+                <a:gridCol w="3657011">
+                  <a:extLst>
+                    <a:ext uri="{9D8B030D-6E8A-4147-A177-3AD203B41FA5}">
+                      <a16:colId xmlns:a16="http://schemas.microsoft.com/office/drawing/2014/main" val="2499886717"/>
+                    </a:ext>
+                  </a:extLst>
+                </a:gridCol>
+                <a:gridCol w="6498771">
+                  <a:extLst>
+                    <a:ext uri="{9D8B030D-6E8A-4147-A177-3AD203B41FA5}">
+                      <a16:colId xmlns:a16="http://schemas.microsoft.com/office/drawing/2014/main" val="1912106177"/>
+                    </a:ext>
+                  </a:extLst>
+                </a:gridCol>
+              </a:tblGrid>
+              <a:tr h="483419">
+                <a:tc>
+                  <a:txBody>
+                    <a:bodyPr/>
+                    <a:lstStyle/>
+                    <a:p>
+                      <a:pPr>
+                        <a:lnSpc>
+                          <a:spcPct val="107000"/>
+                        </a:lnSpc>
+                        <a:spcAft>
+                          <a:spcPts val="800"/>
+                        </a:spcAft>
+                        <a:buNone/>
+                      </a:pPr>
+                      <a:r>
+                        <a:rPr lang="en-IN" sz="2000" kern="100" dirty="0">
+                          <a:effectLst/>
+                        </a:rPr>
+                        <a:t>Metric Name</a:t>
+                      </a:r>
+                      <a:endParaRPr lang="en-IN" sz="2000" kern="100" dirty="0">
+                        <a:effectLst/>
+                        <a:latin typeface="Aptos" panose="020B0004020202020204" pitchFamily="34" charset="0"/>
+                        <a:ea typeface="Aptos" panose="020B0004020202020204" pitchFamily="34" charset="0"/>
+                        <a:cs typeface="Tunga" panose="020B0502040204020203" pitchFamily="34" charset="0"/>
+                      </a:endParaRPr>
+                    </a:p>
+                  </a:txBody>
+                  <a:tcPr marL="68580" marR="68580" marT="0" marB="0"/>
+                </a:tc>
+                <a:tc>
+                  <a:txBody>
+                    <a:bodyPr/>
+                    <a:lstStyle/>
+                    <a:p>
+                      <a:pPr>
+                        <a:lnSpc>
+                          <a:spcPct val="107000"/>
+                        </a:lnSpc>
+                        <a:spcAft>
+                          <a:spcPts val="800"/>
+                        </a:spcAft>
+                        <a:buNone/>
+                      </a:pPr>
+                      <a:r>
+                        <a:rPr lang="en-IN" sz="2000" kern="100">
+                          <a:effectLst/>
+                        </a:rPr>
+                        <a:t>Meaning</a:t>
+                      </a:r>
+                      <a:endParaRPr lang="en-IN" sz="2000" kern="100">
+                        <a:effectLst/>
+                        <a:latin typeface="Aptos" panose="020B0004020202020204" pitchFamily="34" charset="0"/>
+                        <a:ea typeface="Aptos" panose="020B0004020202020204" pitchFamily="34" charset="0"/>
+                        <a:cs typeface="Tunga" panose="020B0502040204020203" pitchFamily="34" charset="0"/>
+                      </a:endParaRPr>
+                    </a:p>
+                  </a:txBody>
+                  <a:tcPr marL="68580" marR="68580" marT="0" marB="0"/>
+                </a:tc>
+                <a:extLst>
+                  <a:ext uri="{0D108BD9-81ED-4DB2-BD59-A6C34878D82A}">
+                    <a16:rowId xmlns:a16="http://schemas.microsoft.com/office/drawing/2014/main" val="2070322252"/>
+                  </a:ext>
+                </a:extLst>
+              </a:tr>
+              <a:tr h="669273">
+                <a:tc>
+                  <a:txBody>
+                    <a:bodyPr/>
+                    <a:lstStyle/>
+                    <a:p>
+                      <a:pPr>
+                        <a:lnSpc>
+                          <a:spcPct val="107000"/>
+                        </a:lnSpc>
+                        <a:spcAft>
+                          <a:spcPts val="800"/>
+                        </a:spcAft>
+                        <a:buNone/>
+                      </a:pPr>
+                      <a:r>
+                        <a:rPr lang="en-IN" sz="2000" kern="100">
+                          <a:effectLst/>
+                        </a:rPr>
+                        <a:t>Silhouette Score</a:t>
+                      </a:r>
+                      <a:endParaRPr lang="en-IN" sz="2000" kern="100">
+                        <a:effectLst/>
+                        <a:latin typeface="Aptos" panose="020B0004020202020204" pitchFamily="34" charset="0"/>
+                        <a:ea typeface="Aptos" panose="020B0004020202020204" pitchFamily="34" charset="0"/>
+                        <a:cs typeface="Tunga" panose="020B0502040204020203" pitchFamily="34" charset="0"/>
+                      </a:endParaRPr>
+                    </a:p>
+                  </a:txBody>
+                  <a:tcPr marL="68580" marR="68580" marT="0" marB="0"/>
+                </a:tc>
+                <a:tc>
+                  <a:txBody>
+                    <a:bodyPr/>
+                    <a:lstStyle/>
+                    <a:p>
+                      <a:pPr>
+                        <a:lnSpc>
+                          <a:spcPct val="107000"/>
+                        </a:lnSpc>
+                        <a:spcAft>
+                          <a:spcPts val="800"/>
+                        </a:spcAft>
+                        <a:buNone/>
+                      </a:pPr>
+                      <a:r>
+                        <a:rPr lang="en-IN" sz="2000" kern="100">
+                          <a:effectLst/>
+                        </a:rPr>
+                        <a:t>Measures how well a point fits into its cluster vs. others. Higher is better (range -1 to +1).</a:t>
+                      </a:r>
+                      <a:endParaRPr lang="en-IN" sz="2000" kern="100">
+                        <a:effectLst/>
+                        <a:latin typeface="Aptos" panose="020B0004020202020204" pitchFamily="34" charset="0"/>
+                        <a:ea typeface="Aptos" panose="020B0004020202020204" pitchFamily="34" charset="0"/>
+                        <a:cs typeface="Tunga" panose="020B0502040204020203" pitchFamily="34" charset="0"/>
+                      </a:endParaRPr>
+                    </a:p>
+                  </a:txBody>
+                  <a:tcPr marL="68580" marR="68580" marT="0" marB="0"/>
+                </a:tc>
+                <a:extLst>
+                  <a:ext uri="{0D108BD9-81ED-4DB2-BD59-A6C34878D82A}">
+                    <a16:rowId xmlns:a16="http://schemas.microsoft.com/office/drawing/2014/main" val="3260745313"/>
+                  </a:ext>
+                </a:extLst>
+              </a:tr>
+              <a:tr h="669273">
+                <a:tc>
+                  <a:txBody>
+                    <a:bodyPr/>
+                    <a:lstStyle/>
+                    <a:p>
+                      <a:pPr>
+                        <a:lnSpc>
+                          <a:spcPct val="107000"/>
+                        </a:lnSpc>
+                        <a:spcAft>
+                          <a:spcPts val="800"/>
+                        </a:spcAft>
+                        <a:buNone/>
+                      </a:pPr>
+                      <a:r>
+                        <a:rPr lang="en-IN" sz="2000" kern="100">
+                          <a:effectLst/>
+                        </a:rPr>
+                        <a:t>Inertia (Within-cluster SSE)</a:t>
+                      </a:r>
+                      <a:endParaRPr lang="en-IN" sz="2000" kern="100">
+                        <a:effectLst/>
+                        <a:latin typeface="Aptos" panose="020B0004020202020204" pitchFamily="34" charset="0"/>
+                        <a:ea typeface="Aptos" panose="020B0004020202020204" pitchFamily="34" charset="0"/>
+                        <a:cs typeface="Tunga" panose="020B0502040204020203" pitchFamily="34" charset="0"/>
+                      </a:endParaRPr>
+                    </a:p>
+                  </a:txBody>
+                  <a:tcPr marL="68580" marR="68580" marT="0" marB="0"/>
+                </a:tc>
+                <a:tc>
+                  <a:txBody>
+                    <a:bodyPr/>
+                    <a:lstStyle/>
+                    <a:p>
+                      <a:pPr>
+                        <a:lnSpc>
+                          <a:spcPct val="107000"/>
+                        </a:lnSpc>
+                        <a:spcAft>
+                          <a:spcPts val="800"/>
+                        </a:spcAft>
+                        <a:buNone/>
+                      </a:pPr>
+                      <a:r>
+                        <a:rPr lang="en-IN" sz="2000" kern="100" dirty="0">
+                          <a:effectLst/>
+                        </a:rPr>
+                        <a:t>Sum of squared distances between points and their cluster centroid. Lower is better.</a:t>
+                      </a:r>
+                      <a:endParaRPr lang="en-IN" sz="2000" kern="100" dirty="0">
+                        <a:effectLst/>
+                        <a:latin typeface="Aptos" panose="020B0004020202020204" pitchFamily="34" charset="0"/>
+                        <a:ea typeface="Aptos" panose="020B0004020202020204" pitchFamily="34" charset="0"/>
+                        <a:cs typeface="Tunga" panose="020B0502040204020203" pitchFamily="34" charset="0"/>
+                      </a:endParaRPr>
+                    </a:p>
+                  </a:txBody>
+                  <a:tcPr marL="68580" marR="68580" marT="0" marB="0"/>
+                </a:tc>
+                <a:extLst>
+                  <a:ext uri="{0D108BD9-81ED-4DB2-BD59-A6C34878D82A}">
+                    <a16:rowId xmlns:a16="http://schemas.microsoft.com/office/drawing/2014/main" val="109863377"/>
+                  </a:ext>
+                </a:extLst>
+              </a:tr>
+              <a:tr h="669273">
+                <a:tc>
+                  <a:txBody>
+                    <a:bodyPr/>
+                    <a:lstStyle/>
+                    <a:p>
+                      <a:pPr>
+                        <a:lnSpc>
+                          <a:spcPct val="107000"/>
+                        </a:lnSpc>
+                        <a:spcAft>
+                          <a:spcPts val="800"/>
+                        </a:spcAft>
+                        <a:buNone/>
+                      </a:pPr>
+                      <a:r>
+                        <a:rPr lang="en-IN" sz="2000" kern="100">
+                          <a:effectLst/>
+                        </a:rPr>
+                        <a:t>Davies–Bouldin Index</a:t>
+                      </a:r>
+                      <a:endParaRPr lang="en-IN" sz="2000" kern="100">
+                        <a:effectLst/>
+                        <a:latin typeface="Aptos" panose="020B0004020202020204" pitchFamily="34" charset="0"/>
+                        <a:ea typeface="Aptos" panose="020B0004020202020204" pitchFamily="34" charset="0"/>
+                        <a:cs typeface="Tunga" panose="020B0502040204020203" pitchFamily="34" charset="0"/>
+                      </a:endParaRPr>
+                    </a:p>
+                  </a:txBody>
+                  <a:tcPr marL="68580" marR="68580" marT="0" marB="0"/>
+                </a:tc>
+                <a:tc>
+                  <a:txBody>
+                    <a:bodyPr/>
+                    <a:lstStyle/>
+                    <a:p>
+                      <a:pPr>
+                        <a:lnSpc>
+                          <a:spcPct val="107000"/>
+                        </a:lnSpc>
+                        <a:spcAft>
+                          <a:spcPts val="800"/>
+                        </a:spcAft>
+                        <a:buNone/>
+                      </a:pPr>
+                      <a:r>
+                        <a:rPr lang="en-IN" sz="2000" kern="100" dirty="0">
+                          <a:effectLst/>
+                        </a:rPr>
+                        <a:t>Ratio of intra-cluster to inter-cluster distance. Lower is better.</a:t>
+                      </a:r>
+                      <a:endParaRPr lang="en-IN" sz="2000" kern="100" dirty="0">
+                        <a:effectLst/>
+                        <a:latin typeface="Aptos" panose="020B0004020202020204" pitchFamily="34" charset="0"/>
+                        <a:ea typeface="Aptos" panose="020B0004020202020204" pitchFamily="34" charset="0"/>
+                        <a:cs typeface="Tunga" panose="020B0502040204020203" pitchFamily="34" charset="0"/>
+                      </a:endParaRPr>
+                    </a:p>
+                  </a:txBody>
+                  <a:tcPr marL="68580" marR="68580" marT="0" marB="0"/>
+                </a:tc>
+                <a:extLst>
+                  <a:ext uri="{0D108BD9-81ED-4DB2-BD59-A6C34878D82A}">
+                    <a16:rowId xmlns:a16="http://schemas.microsoft.com/office/drawing/2014/main" val="1058170511"/>
+                  </a:ext>
+                </a:extLst>
+              </a:tr>
+              <a:tr h="1010121">
+                <a:tc>
+                  <a:txBody>
+                    <a:bodyPr/>
+                    <a:lstStyle/>
+                    <a:p>
+                      <a:pPr>
+                        <a:lnSpc>
+                          <a:spcPct val="107000"/>
+                        </a:lnSpc>
+                        <a:spcAft>
+                          <a:spcPts val="800"/>
+                        </a:spcAft>
+                        <a:buNone/>
+                      </a:pPr>
+                      <a:r>
+                        <a:rPr lang="en-IN" sz="2000" kern="100">
+                          <a:effectLst/>
+                        </a:rPr>
+                        <a:t>Dunn Index</a:t>
+                      </a:r>
+                      <a:endParaRPr lang="en-IN" sz="2000" kern="100">
+                        <a:effectLst/>
+                        <a:latin typeface="Aptos" panose="020B0004020202020204" pitchFamily="34" charset="0"/>
+                        <a:ea typeface="Aptos" panose="020B0004020202020204" pitchFamily="34" charset="0"/>
+                        <a:cs typeface="Tunga" panose="020B0502040204020203" pitchFamily="34" charset="0"/>
+                      </a:endParaRPr>
+                    </a:p>
+                  </a:txBody>
+                  <a:tcPr marL="68580" marR="68580" marT="0" marB="0"/>
+                </a:tc>
+                <a:tc>
+                  <a:txBody>
+                    <a:bodyPr/>
+                    <a:lstStyle/>
+                    <a:p>
+                      <a:pPr>
+                        <a:lnSpc>
+                          <a:spcPct val="107000"/>
+                        </a:lnSpc>
+                        <a:spcAft>
+                          <a:spcPts val="800"/>
+                        </a:spcAft>
+                        <a:buNone/>
+                      </a:pPr>
+                      <a:r>
+                        <a:rPr lang="en-IN" sz="2000" kern="100" dirty="0">
+                          <a:effectLst/>
+                        </a:rPr>
+                        <a:t>Ratio of the smallest distance between clusters to the largest diameter of a cluster. Higher is better.</a:t>
+                      </a:r>
+                      <a:endParaRPr lang="en-IN" sz="2000" kern="100" dirty="0">
+                        <a:effectLst/>
+                        <a:latin typeface="Aptos" panose="020B0004020202020204" pitchFamily="34" charset="0"/>
+                        <a:ea typeface="Aptos" panose="020B0004020202020204" pitchFamily="34" charset="0"/>
+                        <a:cs typeface="Tunga" panose="020B0502040204020203" pitchFamily="34" charset="0"/>
+                      </a:endParaRPr>
+                    </a:p>
+                  </a:txBody>
+                  <a:tcPr marL="68580" marR="68580" marT="0" marB="0"/>
+                </a:tc>
+                <a:extLst>
+                  <a:ext uri="{0D108BD9-81ED-4DB2-BD59-A6C34878D82A}">
+                    <a16:rowId xmlns:a16="http://schemas.microsoft.com/office/drawing/2014/main" val="4138270784"/>
+                  </a:ext>
+                </a:extLst>
+              </a:tr>
+            </a:tbl>
+          </a:graphicData>
+        </a:graphic>
+      </p:graphicFrame>
+    </p:spTree>
+    <p:extLst>
+      <p:ext uri="{BB962C8B-B14F-4D97-AF65-F5344CB8AC3E}">
+        <p14:creationId xmlns:p14="http://schemas.microsoft.com/office/powerpoint/2010/main" val="915010708"/>
       </p:ext>
     </p:extLst>
   </p:cSld>
@@ -12782,8 +13336,8 @@
         </p:nvSpPr>
         <p:spPr>
           <a:xfrm>
-            <a:off x="702853" y="707571"/>
-            <a:ext cx="10900568" cy="5486400"/>
+            <a:off x="702853" y="587829"/>
+            <a:ext cx="10900568" cy="5606142"/>
           </a:xfrm>
         </p:spPr>
         <p:txBody>
@@ -12795,10 +13349,211 @@
             <a:pPr marL="0" indent="0">
               <a:buNone/>
             </a:pPr>
+            <a:r>
+              <a:rPr lang="en-US" sz="2800" b="1" dirty="0"/>
+              <a:t>Silhouette Score:</a:t>
+            </a:r>
+          </a:p>
+          <a:p>
+            <a:pPr marL="0" indent="0">
+              <a:buNone/>
+            </a:pPr>
+            <a:r>
+              <a:rPr lang="en-US" sz="2400" dirty="0"/>
+              <a:t>The </a:t>
+            </a:r>
+            <a:r>
+              <a:rPr lang="en-US" sz="2400" b="1" dirty="0"/>
+              <a:t>Silhouette Score</a:t>
+            </a:r>
+            <a:r>
+              <a:rPr lang="en-US" sz="2400" dirty="0"/>
+              <a:t> is a metric used to evaluate the quality of a clustering result. It </a:t>
+            </a:r>
+            <a:r>
+              <a:rPr lang="en-US" sz="2400" b="1" dirty="0"/>
+              <a:t>measures how well each data point fits within its cluster </a:t>
+            </a:r>
+            <a:r>
+              <a:rPr lang="en-US" sz="2400" b="1" dirty="0">
+                <a:solidFill>
+                  <a:schemeClr val="tx2">
+                    <a:lumMod val="75000"/>
+                    <a:lumOff val="25000"/>
+                  </a:schemeClr>
+                </a:solidFill>
+              </a:rPr>
+              <a:t>compared to other clusters</a:t>
+            </a:r>
+            <a:r>
+              <a:rPr lang="en-US" sz="2400" dirty="0"/>
+              <a:t>.</a:t>
+            </a:r>
+          </a:p>
+          <a:p>
+            <a:pPr marL="0" indent="0">
+              <a:buNone/>
+            </a:pPr>
+            <a:r>
+              <a:rPr lang="en-US" sz="2400" b="1" dirty="0"/>
+              <a:t>Definition</a:t>
+            </a:r>
+          </a:p>
+          <a:p>
+            <a:pPr marL="0" indent="0">
+              <a:buNone/>
+            </a:pPr>
+            <a:r>
+              <a:rPr lang="en-US" sz="2400" dirty="0"/>
+              <a:t>For a data point i:</a:t>
+            </a:r>
+          </a:p>
+          <a:p>
+            <a:pPr lvl="1"/>
+            <a:r>
+              <a:rPr lang="en-US" sz="2200" b="1" dirty="0">
+                <a:solidFill>
+                  <a:schemeClr val="tx2">
+                    <a:lumMod val="75000"/>
+                    <a:lumOff val="25000"/>
+                  </a:schemeClr>
+                </a:solidFill>
+              </a:rPr>
+              <a:t>a(</a:t>
+            </a:r>
+            <a:r>
+              <a:rPr lang="en-US" sz="2200" b="1" dirty="0" err="1">
+                <a:solidFill>
+                  <a:schemeClr val="tx2">
+                    <a:lumMod val="75000"/>
+                    <a:lumOff val="25000"/>
+                  </a:schemeClr>
+                </a:solidFill>
+              </a:rPr>
+              <a:t>i</a:t>
+            </a:r>
+            <a:r>
+              <a:rPr lang="en-US" sz="2200" b="1" dirty="0">
+                <a:solidFill>
+                  <a:schemeClr val="tx2">
+                    <a:lumMod val="75000"/>
+                    <a:lumOff val="25000"/>
+                  </a:schemeClr>
+                </a:solidFill>
+              </a:rPr>
+              <a:t>) </a:t>
+            </a:r>
+            <a:r>
+              <a:rPr lang="en-US" sz="2200" dirty="0"/>
+              <a:t>= average distance between </a:t>
+            </a:r>
+            <a:r>
+              <a:rPr lang="en-US" sz="2200" dirty="0" err="1"/>
+              <a:t>i</a:t>
+            </a:r>
+            <a:r>
+              <a:rPr lang="en-US" sz="2200" dirty="0"/>
+              <a:t> and all other points in the same cluster</a:t>
+            </a:r>
+          </a:p>
+          <a:p>
+            <a:pPr lvl="1"/>
+            <a:r>
+              <a:rPr lang="en-US" sz="2200" b="1" dirty="0">
+                <a:solidFill>
+                  <a:schemeClr val="tx2">
+                    <a:lumMod val="75000"/>
+                    <a:lumOff val="25000"/>
+                  </a:schemeClr>
+                </a:solidFill>
+              </a:rPr>
+              <a:t>b(</a:t>
+            </a:r>
+            <a:r>
+              <a:rPr lang="en-US" sz="2200" b="1" dirty="0" err="1">
+                <a:solidFill>
+                  <a:schemeClr val="tx2">
+                    <a:lumMod val="75000"/>
+                    <a:lumOff val="25000"/>
+                  </a:schemeClr>
+                </a:solidFill>
+              </a:rPr>
+              <a:t>i</a:t>
+            </a:r>
+            <a:r>
+              <a:rPr lang="en-US" sz="2200" b="1" dirty="0">
+                <a:solidFill>
+                  <a:schemeClr val="tx2">
+                    <a:lumMod val="75000"/>
+                    <a:lumOff val="25000"/>
+                  </a:schemeClr>
+                </a:solidFill>
+              </a:rPr>
+              <a:t>) </a:t>
+            </a:r>
+            <a:r>
+              <a:rPr lang="en-US" sz="2200" dirty="0"/>
+              <a:t>= lowest average distance between </a:t>
+            </a:r>
+            <a:r>
+              <a:rPr lang="en-US" sz="2200" dirty="0" err="1"/>
+              <a:t>i</a:t>
+            </a:r>
+            <a:r>
+              <a:rPr lang="en-US" sz="2200" dirty="0"/>
+              <a:t> and points in any other cluster (i.e., the nearest cluster)</a:t>
+            </a:r>
+          </a:p>
+          <a:p>
+            <a:pPr marL="0" indent="0">
+              <a:buNone/>
+            </a:pPr>
+            <a:r>
+              <a:rPr lang="en-US" sz="2400" dirty="0"/>
+              <a:t>The silhouette score s(</a:t>
+            </a:r>
+            <a:r>
+              <a:rPr lang="en-US" sz="2400" dirty="0" err="1"/>
+              <a:t>i</a:t>
+            </a:r>
+            <a:r>
+              <a:rPr lang="en-US" sz="2400" dirty="0"/>
+              <a:t>) for a single point is calculated as:</a:t>
+            </a:r>
             <a:endParaRPr lang="en-IN" sz="2400" dirty="0"/>
           </a:p>
         </p:txBody>
       </p:sp>
+      <p:pic>
+        <p:nvPicPr>
+          <p:cNvPr id="4" name="Picture 3">
+            <a:extLst>
+              <a:ext uri="{FF2B5EF4-FFF2-40B4-BE49-F238E27FC236}">
+                <a16:creationId xmlns:a16="http://schemas.microsoft.com/office/drawing/2014/main" id="{7D1BA71F-5F35-9CBE-2C29-0A7448B0AE73}"/>
+              </a:ext>
+            </a:extLst>
+          </p:cNvPr>
+          <p:cNvPicPr>
+            <a:picLocks noChangeAspect="1"/>
+          </p:cNvPicPr>
+          <p:nvPr/>
+        </p:nvPicPr>
+        <p:blipFill>
+          <a:blip r:embed="rId2"/>
+          <a:stretch>
+            <a:fillRect/>
+          </a:stretch>
+        </p:blipFill>
+        <p:spPr>
+          <a:xfrm>
+            <a:off x="2985859" y="4482372"/>
+            <a:ext cx="4928056" cy="1955578"/>
+          </a:xfrm>
+          <a:prstGeom prst="rect">
+            <a:avLst/>
+          </a:prstGeom>
+        </p:spPr>
+      </p:pic>
     </p:spTree>
     <p:extLst>
       <p:ext uri="{BB962C8B-B14F-4D97-AF65-F5344CB8AC3E}">
@@ -12820,7 +13575,7 @@
         <p:cNvPr id="1" name="">
           <a:extLst>
             <a:ext uri="{FF2B5EF4-FFF2-40B4-BE49-F238E27FC236}">
-              <a16:creationId xmlns:a16="http://schemas.microsoft.com/office/drawing/2014/main" id="{70798EDE-8B7C-E5F8-D4FA-7CAE04851D1B}"/>
+              <a16:creationId xmlns:a16="http://schemas.microsoft.com/office/drawing/2014/main" id="{C53492FE-B133-8891-3009-FF4F56403374}"/>
             </a:ext>
           </a:extLst>
         </p:cNvPr>
@@ -12840,7 +13595,7 @@
           <p:cNvPr id="3" name="Content Placeholder 2">
             <a:extLst>
               <a:ext uri="{FF2B5EF4-FFF2-40B4-BE49-F238E27FC236}">
-                <a16:creationId xmlns:a16="http://schemas.microsoft.com/office/drawing/2014/main" id="{80B43C22-7CF1-1705-D89E-BA0C110BE761}"/>
+                <a16:creationId xmlns:a16="http://schemas.microsoft.com/office/drawing/2014/main" id="{B572B455-A3A3-6EF4-A1B5-EACF05049175}"/>
               </a:ext>
             </a:extLst>
           </p:cNvPr>
@@ -12866,6 +13621,140 @@
             <a:pPr marL="0" indent="0">
               <a:buNone/>
             </a:pPr>
+            <a:r>
+              <a:rPr lang="en-US" sz="2400" b="1" dirty="0"/>
+              <a:t>Score Range &amp; Interpretation</a:t>
+            </a:r>
+          </a:p>
+          <a:p>
+            <a:r>
+              <a:rPr lang="en-US" sz="2400" b="1" dirty="0"/>
+              <a:t>+1</a:t>
+            </a:r>
+            <a:r>
+              <a:rPr lang="en-US" sz="2400" dirty="0"/>
+              <a:t> → </a:t>
+            </a:r>
+            <a:r>
+              <a:rPr lang="en-US" sz="2400" b="1" dirty="0">
+                <a:solidFill>
+                  <a:srgbClr val="00B050"/>
+                </a:solidFill>
+              </a:rPr>
+              <a:t>Perfectly clustered </a:t>
+            </a:r>
+            <a:r>
+              <a:rPr lang="en-US" sz="2400" dirty="0"/>
+              <a:t>(well matched to its own cluster, far from others)</a:t>
+            </a:r>
+          </a:p>
+          <a:p>
+            <a:r>
+              <a:rPr lang="en-US" sz="2400" b="1" dirty="0"/>
+              <a:t>0</a:t>
+            </a:r>
+            <a:r>
+              <a:rPr lang="en-US" sz="2400" dirty="0"/>
+              <a:t> → </a:t>
+            </a:r>
+            <a:r>
+              <a:rPr lang="en-US" sz="2400" b="1" dirty="0">
+                <a:solidFill>
+                  <a:srgbClr val="FFC000"/>
+                </a:solidFill>
+              </a:rPr>
+              <a:t>On</a:t>
+            </a:r>
+            <a:r>
+              <a:rPr lang="en-US" sz="2400" dirty="0"/>
+              <a:t> or </a:t>
+            </a:r>
+            <a:r>
+              <a:rPr lang="en-US" sz="2400" b="1" dirty="0">
+                <a:solidFill>
+                  <a:srgbClr val="FFC000"/>
+                </a:solidFill>
+              </a:rPr>
+              <a:t>very</a:t>
+            </a:r>
+            <a:r>
+              <a:rPr lang="en-US" sz="2400" dirty="0"/>
+              <a:t> </a:t>
+            </a:r>
+            <a:r>
+              <a:rPr lang="en-US" sz="2400" b="1" dirty="0">
+                <a:solidFill>
+                  <a:srgbClr val="FFC000"/>
+                </a:solidFill>
+              </a:rPr>
+              <a:t>close</a:t>
+            </a:r>
+            <a:r>
+              <a:rPr lang="en-US" sz="2400" dirty="0"/>
+              <a:t> to the boundary between clusters</a:t>
+            </a:r>
+          </a:p>
+          <a:p>
+            <a:r>
+              <a:rPr lang="en-US" sz="2400" b="1" dirty="0"/>
+              <a:t>-1</a:t>
+            </a:r>
+            <a:r>
+              <a:rPr lang="en-US" sz="2400" dirty="0"/>
+              <a:t> → </a:t>
+            </a:r>
+            <a:r>
+              <a:rPr lang="en-US" sz="2400" b="1" dirty="0">
+                <a:solidFill>
+                  <a:srgbClr val="FF0000"/>
+                </a:solidFill>
+              </a:rPr>
+              <a:t>Probably in the wrong cluster</a:t>
+            </a:r>
+          </a:p>
+          <a:p>
+            <a:pPr marL="0" indent="0">
+              <a:buNone/>
+            </a:pPr>
+            <a:endParaRPr lang="en-US" sz="2400" b="1" dirty="0"/>
+          </a:p>
+          <a:p>
+            <a:pPr marL="0" indent="0">
+              <a:buNone/>
+            </a:pPr>
+            <a:r>
+              <a:rPr lang="en-US" sz="2400" b="1" dirty="0"/>
+              <a:t>Example (Intuitive)</a:t>
+            </a:r>
+          </a:p>
+          <a:p>
+            <a:r>
+              <a:rPr lang="en-US" sz="2400" dirty="0"/>
+              <a:t>Imagine you’re organizing books in a library:</a:t>
+            </a:r>
+          </a:p>
+          <a:p>
+            <a:r>
+              <a:rPr lang="en-US" sz="2400" dirty="0"/>
+              <a:t>If a book is grouped with very similar books and very different from books in other shelves → high silhouette score.</a:t>
+            </a:r>
+          </a:p>
+          <a:p>
+            <a:r>
+              <a:rPr lang="en-US" sz="2400" dirty="0"/>
+              <a:t>If a book is equally similar to books in multiple shelves → score around 0.</a:t>
+            </a:r>
+          </a:p>
+          <a:p>
+            <a:r>
+              <a:rPr lang="en-US" sz="2400" dirty="0"/>
+              <a:t>If a book is more similar to books in another shelf than its own → negative score.</a:t>
+            </a:r>
+          </a:p>
+          <a:p>
+            <a:pPr marL="0" indent="0">
+              <a:buNone/>
+            </a:pPr>
             <a:endParaRPr lang="en-IN" sz="2400" dirty="0"/>
           </a:p>
         </p:txBody>
@@ -12873,7 +13762,7 @@
     </p:spTree>
     <p:extLst>
       <p:ext uri="{BB962C8B-B14F-4D97-AF65-F5344CB8AC3E}">
-        <p14:creationId xmlns:p14="http://schemas.microsoft.com/office/powerpoint/2010/main" val="915010708"/>
+        <p14:creationId xmlns:p14="http://schemas.microsoft.com/office/powerpoint/2010/main" val="870610948"/>
       </p:ext>
     </p:extLst>
   </p:cSld>
@@ -12891,7 +13780,7 @@
         <p:cNvPr id="1" name="">
           <a:extLst>
             <a:ext uri="{FF2B5EF4-FFF2-40B4-BE49-F238E27FC236}">
-              <a16:creationId xmlns:a16="http://schemas.microsoft.com/office/drawing/2014/main" id="{0269C1F4-6269-B35F-F43A-CEC24380E4E7}"/>
+              <a16:creationId xmlns:a16="http://schemas.microsoft.com/office/drawing/2014/main" id="{6288AFBD-765A-29EA-C402-A2EED2615C4F}"/>
             </a:ext>
           </a:extLst>
         </p:cNvPr>
@@ -12911,7 +13800,7 @@
           <p:cNvPr id="3" name="Content Placeholder 2">
             <a:extLst>
               <a:ext uri="{FF2B5EF4-FFF2-40B4-BE49-F238E27FC236}">
-                <a16:creationId xmlns:a16="http://schemas.microsoft.com/office/drawing/2014/main" id="{53380701-88D7-9CA1-836B-9C85B24767A3}"/>
+                <a16:creationId xmlns:a16="http://schemas.microsoft.com/office/drawing/2014/main" id="{BA0D60A9-4C4E-9EFF-E3DA-37633AE1B45F}"/>
               </a:ext>
             </a:extLst>
           </p:cNvPr>
@@ -12937,14 +13826,928 @@
             <a:pPr marL="0" indent="0">
               <a:buNone/>
             </a:pPr>
-            <a:endParaRPr lang="en-IN" sz="2400" dirty="0"/>
+            <a:r>
+              <a:rPr lang="en-US" sz="2800" b="1" dirty="0"/>
+              <a:t>Example: Simple 2D Data</a:t>
+            </a:r>
+          </a:p>
+          <a:p>
+            <a:pPr marL="0" indent="0">
+              <a:buNone/>
+            </a:pPr>
+            <a:r>
+              <a:rPr lang="en-US" sz="2800" dirty="0"/>
+              <a:t>Assume we have </a:t>
+            </a:r>
+            <a:r>
+              <a:rPr lang="en-US" sz="2800" b="1" dirty="0">
+                <a:solidFill>
+                  <a:schemeClr val="tx2">
+                    <a:lumMod val="75000"/>
+                    <a:lumOff val="25000"/>
+                  </a:schemeClr>
+                </a:solidFill>
+              </a:rPr>
+              <a:t>6 data points </a:t>
+            </a:r>
+            <a:r>
+              <a:rPr lang="en-US" sz="2800" dirty="0"/>
+              <a:t>clustered into 2 clusters:</a:t>
+            </a:r>
+          </a:p>
+          <a:p>
+            <a:pPr lvl="1"/>
+            <a:r>
+              <a:rPr lang="en-US" sz="2800" dirty="0"/>
+              <a:t>Cluster A: A1(1,2), A2(2,1), A3(1,0)</a:t>
+            </a:r>
+          </a:p>
+          <a:p>
+            <a:pPr lvl="1"/>
+            <a:r>
+              <a:rPr lang="en-US" sz="2800" dirty="0"/>
+              <a:t>Cluster B: B1(8,8), B2(9,10), B3(10,9)</a:t>
+            </a:r>
+          </a:p>
+          <a:p>
+            <a:pPr marL="0" indent="0">
+              <a:buNone/>
+            </a:pPr>
+            <a:endParaRPr lang="en-US" sz="2800" dirty="0"/>
+          </a:p>
+          <a:p>
+            <a:pPr marL="0" indent="0">
+              <a:buNone/>
+            </a:pPr>
+            <a:r>
+              <a:rPr lang="en-US" sz="2800" dirty="0"/>
+              <a:t>Let’s compute the silhouette score for point A1(1,2).</a:t>
+            </a:r>
+            <a:endParaRPr lang="en-IN" sz="2800" dirty="0"/>
           </a:p>
         </p:txBody>
       </p:sp>
     </p:spTree>
     <p:extLst>
       <p:ext uri="{BB962C8B-B14F-4D97-AF65-F5344CB8AC3E}">
-        <p14:creationId xmlns:p14="http://schemas.microsoft.com/office/powerpoint/2010/main" val="4106113749"/>
+        <p14:creationId xmlns:p14="http://schemas.microsoft.com/office/powerpoint/2010/main" val="2451634351"/>
+      </p:ext>
+    </p:extLst>
+  </p:cSld>
+  <p:clrMapOvr>
+    <a:masterClrMapping/>
+  </p:clrMapOvr>
+</p:sld>
+</file>
+
+<file path=ppt/slides/slide36.xml><?xml version="1.0" encoding="utf-8"?>
+<p:sld xmlns:a="http://schemas.openxmlformats.org/drawingml/2006/main" xmlns:r="http://schemas.openxmlformats.org/officeDocument/2006/relationships" xmlns:p="http://schemas.openxmlformats.org/presentationml/2006/main">
+  <p:cSld>
+    <p:spTree>
+      <p:nvGrpSpPr>
+        <p:cNvPr id="1" name="">
+          <a:extLst>
+            <a:ext uri="{FF2B5EF4-FFF2-40B4-BE49-F238E27FC236}">
+              <a16:creationId xmlns:a16="http://schemas.microsoft.com/office/drawing/2014/main" id="{D7C93EA1-9DEA-E53C-3A44-4E44D9E5D5A4}"/>
+            </a:ext>
+          </a:extLst>
+        </p:cNvPr>
+        <p:cNvGrpSpPr/>
+        <p:nvPr/>
+      </p:nvGrpSpPr>
+      <p:grpSpPr>
+        <a:xfrm>
+          <a:off x="0" y="0"/>
+          <a:ext cx="0" cy="0"/>
+          <a:chOff x="0" y="0"/>
+          <a:chExt cx="0" cy="0"/>
+        </a:xfrm>
+      </p:grpSpPr>
+      <p:sp>
+        <p:nvSpPr>
+          <p:cNvPr id="3" name="Content Placeholder 2">
+            <a:extLst>
+              <a:ext uri="{FF2B5EF4-FFF2-40B4-BE49-F238E27FC236}">
+                <a16:creationId xmlns:a16="http://schemas.microsoft.com/office/drawing/2014/main" id="{10A461AC-1232-3C54-53CF-24FFAF570969}"/>
+              </a:ext>
+            </a:extLst>
+          </p:cNvPr>
+          <p:cNvSpPr>
+            <a:spLocks noGrp="1"/>
+          </p:cNvSpPr>
+          <p:nvPr>
+            <p:ph idx="1"/>
+          </p:nvPr>
+        </p:nvSpPr>
+        <p:spPr>
+          <a:xfrm>
+            <a:off x="702853" y="500743"/>
+            <a:ext cx="10900568" cy="5693228"/>
+          </a:xfrm>
+        </p:spPr>
+        <p:txBody>
+          <a:bodyPr>
+            <a:normAutofit/>
+          </a:bodyPr>
+          <a:lstStyle/>
+          <a:p>
+            <a:pPr marL="0" indent="0">
+              <a:buNone/>
+            </a:pPr>
+            <a:r>
+              <a:rPr lang="en-US" sz="2800" b="1" dirty="0"/>
+              <a:t>Step 1: Compute </a:t>
+            </a:r>
+            <a:r>
+              <a:rPr lang="en-US" sz="2800" b="1" dirty="0">
+                <a:solidFill>
+                  <a:schemeClr val="tx2">
+                    <a:lumMod val="75000"/>
+                    <a:lumOff val="25000"/>
+                  </a:schemeClr>
+                </a:solidFill>
+              </a:rPr>
+              <a:t>a(</a:t>
+            </a:r>
+            <a:r>
+              <a:rPr lang="en-US" sz="2800" b="1" dirty="0" err="1">
+                <a:solidFill>
+                  <a:schemeClr val="tx2">
+                    <a:lumMod val="75000"/>
+                    <a:lumOff val="25000"/>
+                  </a:schemeClr>
+                </a:solidFill>
+              </a:rPr>
+              <a:t>i</a:t>
+            </a:r>
+            <a:r>
+              <a:rPr lang="en-US" sz="2800" b="1" dirty="0">
+                <a:solidFill>
+                  <a:schemeClr val="tx2">
+                    <a:lumMod val="75000"/>
+                    <a:lumOff val="25000"/>
+                  </a:schemeClr>
+                </a:solidFill>
+              </a:rPr>
+              <a:t>)</a:t>
+            </a:r>
+            <a:r>
+              <a:rPr lang="en-US" sz="2800" b="1" dirty="0"/>
+              <a:t> – average distance to points in the same cluster</a:t>
+            </a:r>
+          </a:p>
+          <a:p>
+            <a:pPr marL="0" indent="0">
+              <a:buNone/>
+            </a:pPr>
+            <a:r>
+              <a:rPr lang="en-US" sz="2400" dirty="0"/>
+              <a:t>A1 is in </a:t>
+            </a:r>
+            <a:r>
+              <a:rPr lang="en-US" sz="2400" b="1" dirty="0"/>
+              <a:t>Cluster A</a:t>
+            </a:r>
+            <a:r>
+              <a:rPr lang="en-US" sz="2400" dirty="0"/>
+              <a:t>, so we compute distances to A2 and A3:</a:t>
+            </a:r>
+          </a:p>
+          <a:p>
+            <a:endParaRPr lang="en-US" sz="2400" b="1" dirty="0"/>
+          </a:p>
+          <a:p>
+            <a:r>
+              <a:rPr lang="en-US" sz="2400" b="1" dirty="0"/>
+              <a:t>Distance A1 to A2:</a:t>
+            </a:r>
+          </a:p>
+          <a:p>
+            <a:pPr marL="457200" lvl="1" indent="0">
+              <a:buNone/>
+            </a:pPr>
+            <a:endParaRPr lang="en-US" sz="2200" dirty="0"/>
+          </a:p>
+          <a:p>
+            <a:pPr marL="0" indent="0">
+              <a:buNone/>
+            </a:pPr>
+            <a:endParaRPr lang="en-IN" sz="2400" dirty="0"/>
+          </a:p>
+          <a:p>
+            <a:r>
+              <a:rPr lang="en-IN" sz="2400" b="1" dirty="0"/>
+              <a:t>Distance A1 to A3:</a:t>
+            </a:r>
+          </a:p>
+          <a:p>
+            <a:endParaRPr lang="en-IN" sz="2400" b="1" dirty="0"/>
+          </a:p>
+          <a:p>
+            <a:endParaRPr lang="en-IN" sz="2400" b="1" dirty="0"/>
+          </a:p>
+          <a:p>
+            <a:endParaRPr lang="en-IN" sz="2400" b="1" dirty="0"/>
+          </a:p>
+          <a:p>
+            <a:endParaRPr lang="en-IN" sz="2400" b="1" dirty="0"/>
+          </a:p>
+        </p:txBody>
+      </p:sp>
+      <p:pic>
+        <p:nvPicPr>
+          <p:cNvPr id="4" name="Picture 3">
+            <a:extLst>
+              <a:ext uri="{FF2B5EF4-FFF2-40B4-BE49-F238E27FC236}">
+                <a16:creationId xmlns:a16="http://schemas.microsoft.com/office/drawing/2014/main" id="{A3964EB2-61ED-36C4-77FA-A3110CB131F7}"/>
+              </a:ext>
+            </a:extLst>
+          </p:cNvPr>
+          <p:cNvPicPr>
+            <a:picLocks noChangeAspect="1"/>
+          </p:cNvPicPr>
+          <p:nvPr/>
+        </p:nvPicPr>
+        <p:blipFill>
+          <a:blip r:embed="rId2"/>
+          <a:srcRect t="15129"/>
+          <a:stretch>
+            <a:fillRect/>
+          </a:stretch>
+        </p:blipFill>
+        <p:spPr>
+          <a:xfrm>
+            <a:off x="3692185" y="1681128"/>
+            <a:ext cx="7796962" cy="760322"/>
+          </a:xfrm>
+          <a:prstGeom prst="rect">
+            <a:avLst/>
+          </a:prstGeom>
+        </p:spPr>
+      </p:pic>
+      <p:pic>
+        <p:nvPicPr>
+          <p:cNvPr id="6" name="Picture 5">
+            <a:extLst>
+              <a:ext uri="{FF2B5EF4-FFF2-40B4-BE49-F238E27FC236}">
+                <a16:creationId xmlns:a16="http://schemas.microsoft.com/office/drawing/2014/main" id="{5EC8DDA6-9D7A-1BD9-7FD4-D23A26C703AC}"/>
+              </a:ext>
+            </a:extLst>
+          </p:cNvPr>
+          <p:cNvPicPr>
+            <a:picLocks noChangeAspect="1"/>
+          </p:cNvPicPr>
+          <p:nvPr/>
+        </p:nvPicPr>
+        <p:blipFill>
+          <a:blip r:embed="rId3"/>
+          <a:srcRect l="2847" t="16444" r="4759"/>
+          <a:stretch>
+            <a:fillRect/>
+          </a:stretch>
+        </p:blipFill>
+        <p:spPr>
+          <a:xfrm>
+            <a:off x="3692185" y="3048958"/>
+            <a:ext cx="7796962" cy="812452"/>
+          </a:xfrm>
+          <a:prstGeom prst="rect">
+            <a:avLst/>
+          </a:prstGeom>
+        </p:spPr>
+      </p:pic>
+      <p:pic>
+        <p:nvPicPr>
+          <p:cNvPr id="8" name="Picture 7">
+            <a:extLst>
+              <a:ext uri="{FF2B5EF4-FFF2-40B4-BE49-F238E27FC236}">
+                <a16:creationId xmlns:a16="http://schemas.microsoft.com/office/drawing/2014/main" id="{83DF8167-9429-1C70-1868-BC2A1B674205}"/>
+              </a:ext>
+            </a:extLst>
+          </p:cNvPr>
+          <p:cNvPicPr>
+            <a:picLocks noChangeAspect="1"/>
+          </p:cNvPicPr>
+          <p:nvPr/>
+        </p:nvPicPr>
+        <p:blipFill>
+          <a:blip r:embed="rId4"/>
+          <a:stretch>
+            <a:fillRect/>
+          </a:stretch>
+        </p:blipFill>
+        <p:spPr>
+          <a:xfrm>
+            <a:off x="2378885" y="4641736"/>
+            <a:ext cx="5714286" cy="1323810"/>
+          </a:xfrm>
+          <a:prstGeom prst="rect">
+            <a:avLst/>
+          </a:prstGeom>
+        </p:spPr>
+      </p:pic>
+    </p:spTree>
+    <p:extLst>
+      <p:ext uri="{BB962C8B-B14F-4D97-AF65-F5344CB8AC3E}">
+        <p14:creationId xmlns:p14="http://schemas.microsoft.com/office/powerpoint/2010/main" val="2166564926"/>
+      </p:ext>
+    </p:extLst>
+  </p:cSld>
+  <p:clrMapOvr>
+    <a:masterClrMapping/>
+  </p:clrMapOvr>
+</p:sld>
+</file>
+
+<file path=ppt/slides/slide37.xml><?xml version="1.0" encoding="utf-8"?>
+<p:sld xmlns:a="http://schemas.openxmlformats.org/drawingml/2006/main" xmlns:r="http://schemas.openxmlformats.org/officeDocument/2006/relationships" xmlns:p="http://schemas.openxmlformats.org/presentationml/2006/main">
+  <p:cSld>
+    <p:spTree>
+      <p:nvGrpSpPr>
+        <p:cNvPr id="1" name="">
+          <a:extLst>
+            <a:ext uri="{FF2B5EF4-FFF2-40B4-BE49-F238E27FC236}">
+              <a16:creationId xmlns:a16="http://schemas.microsoft.com/office/drawing/2014/main" id="{F68AD3E3-67A4-922F-DCE5-889756772660}"/>
+            </a:ext>
+          </a:extLst>
+        </p:cNvPr>
+        <p:cNvGrpSpPr/>
+        <p:nvPr/>
+      </p:nvGrpSpPr>
+      <p:grpSpPr>
+        <a:xfrm>
+          <a:off x="0" y="0"/>
+          <a:ext cx="0" cy="0"/>
+          <a:chOff x="0" y="0"/>
+          <a:chExt cx="0" cy="0"/>
+        </a:xfrm>
+      </p:grpSpPr>
+      <p:sp>
+        <p:nvSpPr>
+          <p:cNvPr id="3" name="Content Placeholder 2">
+            <a:extLst>
+              <a:ext uri="{FF2B5EF4-FFF2-40B4-BE49-F238E27FC236}">
+                <a16:creationId xmlns:a16="http://schemas.microsoft.com/office/drawing/2014/main" id="{870FEB52-736B-0EF2-E5B7-14047E491B3C}"/>
+              </a:ext>
+            </a:extLst>
+          </p:cNvPr>
+          <p:cNvSpPr>
+            <a:spLocks noGrp="1"/>
+          </p:cNvSpPr>
+          <p:nvPr>
+            <p:ph idx="1"/>
+          </p:nvPr>
+        </p:nvSpPr>
+        <p:spPr>
+          <a:xfrm>
+            <a:off x="702853" y="707571"/>
+            <a:ext cx="10900568" cy="5486400"/>
+          </a:xfrm>
+        </p:spPr>
+        <p:txBody>
+          <a:bodyPr>
+            <a:normAutofit/>
+          </a:bodyPr>
+          <a:lstStyle/>
+          <a:p>
+            <a:pPr marL="0" indent="0">
+              <a:buNone/>
+            </a:pPr>
+            <a:r>
+              <a:rPr lang="en-US" sz="2800" b="1" dirty="0">
+                <a:solidFill>
+                  <a:srgbClr val="002060"/>
+                </a:solidFill>
+              </a:rPr>
+              <a:t>Step 2: Compute b(</a:t>
+            </a:r>
+            <a:r>
+              <a:rPr lang="en-US" sz="2800" b="1" dirty="0" err="1">
+                <a:solidFill>
+                  <a:srgbClr val="002060"/>
+                </a:solidFill>
+              </a:rPr>
+              <a:t>i</a:t>
+            </a:r>
+            <a:r>
+              <a:rPr lang="en-US" sz="2800" b="1" dirty="0">
+                <a:solidFill>
+                  <a:srgbClr val="002060"/>
+                </a:solidFill>
+              </a:rPr>
+              <a:t>) – average distance to the nearest other cluster</a:t>
+            </a:r>
+          </a:p>
+          <a:p>
+            <a:pPr marL="0" indent="0">
+              <a:buNone/>
+            </a:pPr>
+            <a:r>
+              <a:rPr lang="en-US" sz="2400" b="1" dirty="0"/>
+              <a:t>A1</a:t>
+            </a:r>
+            <a:r>
+              <a:rPr lang="en-US" sz="2400" dirty="0"/>
+              <a:t> is in </a:t>
+            </a:r>
+            <a:r>
+              <a:rPr lang="en-US" sz="2400" b="1" dirty="0">
+                <a:solidFill>
+                  <a:schemeClr val="tx2">
+                    <a:lumMod val="75000"/>
+                    <a:lumOff val="25000"/>
+                  </a:schemeClr>
+                </a:solidFill>
+              </a:rPr>
+              <a:t>Cluster A</a:t>
+            </a:r>
+            <a:r>
+              <a:rPr lang="en-US" sz="2400" dirty="0"/>
+              <a:t>. The nearest other cluster is </a:t>
+            </a:r>
+            <a:r>
+              <a:rPr lang="en-US" sz="2400" b="1" dirty="0">
+                <a:solidFill>
+                  <a:schemeClr val="tx2">
+                    <a:lumMod val="75000"/>
+                    <a:lumOff val="25000"/>
+                  </a:schemeClr>
+                </a:solidFill>
+              </a:rPr>
+              <a:t>Cluster B</a:t>
+            </a:r>
+            <a:r>
+              <a:rPr lang="en-US" sz="2400" dirty="0"/>
+              <a:t>. So compute average distance from A1 to all points in Cluster B:</a:t>
+            </a:r>
+          </a:p>
+          <a:p>
+            <a:pPr marL="0" indent="0">
+              <a:buNone/>
+            </a:pPr>
+            <a:endParaRPr lang="en-US" sz="2400" dirty="0"/>
+          </a:p>
+          <a:p>
+            <a:r>
+              <a:rPr lang="en-US" sz="2400" b="1" dirty="0"/>
+              <a:t>A1 to B1(8,8): </a:t>
+            </a:r>
+          </a:p>
+          <a:p>
+            <a:endParaRPr lang="en-US" sz="2400" b="1" dirty="0"/>
+          </a:p>
+          <a:p>
+            <a:endParaRPr lang="en-US" sz="1050" b="1" dirty="0"/>
+          </a:p>
+          <a:p>
+            <a:r>
+              <a:rPr lang="en-IN" sz="2400" b="1" dirty="0"/>
+              <a:t>A1 to B2(9,10):</a:t>
+            </a:r>
+          </a:p>
+          <a:p>
+            <a:endParaRPr lang="en-IN" sz="2400" b="1" dirty="0"/>
+          </a:p>
+          <a:p>
+            <a:r>
+              <a:rPr lang="en-IN" sz="2400" b="1" dirty="0"/>
+              <a:t>A1 to B3(10,9):</a:t>
+            </a:r>
+          </a:p>
+        </p:txBody>
+      </p:sp>
+      <p:pic>
+        <p:nvPicPr>
+          <p:cNvPr id="4" name="Picture 3">
+            <a:extLst>
+              <a:ext uri="{FF2B5EF4-FFF2-40B4-BE49-F238E27FC236}">
+                <a16:creationId xmlns:a16="http://schemas.microsoft.com/office/drawing/2014/main" id="{ED2FBBCA-44EE-E962-C2EC-64D0D09004F6}"/>
+              </a:ext>
+            </a:extLst>
+          </p:cNvPr>
+          <p:cNvPicPr>
+            <a:picLocks noChangeAspect="1"/>
+          </p:cNvPicPr>
+          <p:nvPr/>
+        </p:nvPicPr>
+        <p:blipFill>
+          <a:blip r:embed="rId2"/>
+          <a:srcRect t="60621" b="23532"/>
+          <a:stretch>
+            <a:fillRect/>
+          </a:stretch>
+        </p:blipFill>
+        <p:spPr>
+          <a:xfrm>
+            <a:off x="3050689" y="4464241"/>
+            <a:ext cx="8438457" cy="778904"/>
+          </a:xfrm>
+          <a:prstGeom prst="rect">
+            <a:avLst/>
+          </a:prstGeom>
+        </p:spPr>
+      </p:pic>
+      <p:pic>
+        <p:nvPicPr>
+          <p:cNvPr id="5" name="Picture 4">
+            <a:extLst>
+              <a:ext uri="{FF2B5EF4-FFF2-40B4-BE49-F238E27FC236}">
+                <a16:creationId xmlns:a16="http://schemas.microsoft.com/office/drawing/2014/main" id="{C717A7E0-751A-6C2A-B118-FEAAE25598BF}"/>
+              </a:ext>
+            </a:extLst>
+          </p:cNvPr>
+          <p:cNvPicPr>
+            <a:picLocks noChangeAspect="1"/>
+          </p:cNvPicPr>
+          <p:nvPr/>
+        </p:nvPicPr>
+        <p:blipFill>
+          <a:blip r:embed="rId2"/>
+          <a:srcRect t="32398" b="51756"/>
+          <a:stretch>
+            <a:fillRect/>
+          </a:stretch>
+        </p:blipFill>
+        <p:spPr>
+          <a:xfrm>
+            <a:off x="3050690" y="3324918"/>
+            <a:ext cx="8438457" cy="778905"/>
+          </a:xfrm>
+          <a:prstGeom prst="rect">
+            <a:avLst/>
+          </a:prstGeom>
+        </p:spPr>
+      </p:pic>
+      <p:pic>
+        <p:nvPicPr>
+          <p:cNvPr id="6" name="Picture 5">
+            <a:extLst>
+              <a:ext uri="{FF2B5EF4-FFF2-40B4-BE49-F238E27FC236}">
+                <a16:creationId xmlns:a16="http://schemas.microsoft.com/office/drawing/2014/main" id="{B4B09E84-0476-A62D-03AE-6198E116B379}"/>
+              </a:ext>
+            </a:extLst>
+          </p:cNvPr>
+          <p:cNvPicPr>
+            <a:picLocks noChangeAspect="1"/>
+          </p:cNvPicPr>
+          <p:nvPr/>
+        </p:nvPicPr>
+        <p:blipFill>
+          <a:blip r:embed="rId2"/>
+          <a:srcRect t="4821" b="79501"/>
+          <a:stretch>
+            <a:fillRect/>
+          </a:stretch>
+        </p:blipFill>
+        <p:spPr>
+          <a:xfrm>
+            <a:off x="3050690" y="2313302"/>
+            <a:ext cx="8438457" cy="770618"/>
+          </a:xfrm>
+          <a:prstGeom prst="rect">
+            <a:avLst/>
+          </a:prstGeom>
+        </p:spPr>
+      </p:pic>
+    </p:spTree>
+    <p:extLst>
+      <p:ext uri="{BB962C8B-B14F-4D97-AF65-F5344CB8AC3E}">
+        <p14:creationId xmlns:p14="http://schemas.microsoft.com/office/powerpoint/2010/main" val="1704327273"/>
+      </p:ext>
+    </p:extLst>
+  </p:cSld>
+  <p:clrMapOvr>
+    <a:masterClrMapping/>
+  </p:clrMapOvr>
+</p:sld>
+</file>
+
+<file path=ppt/slides/slide38.xml><?xml version="1.0" encoding="utf-8"?>
+<p:sld xmlns:a="http://schemas.openxmlformats.org/drawingml/2006/main" xmlns:r="http://schemas.openxmlformats.org/officeDocument/2006/relationships" xmlns:p="http://schemas.openxmlformats.org/presentationml/2006/main">
+  <p:cSld>
+    <p:spTree>
+      <p:nvGrpSpPr>
+        <p:cNvPr id="1" name="">
+          <a:extLst>
+            <a:ext uri="{FF2B5EF4-FFF2-40B4-BE49-F238E27FC236}">
+              <a16:creationId xmlns:a16="http://schemas.microsoft.com/office/drawing/2014/main" id="{1226C586-2992-AC53-88CB-C1492380447B}"/>
+            </a:ext>
+          </a:extLst>
+        </p:cNvPr>
+        <p:cNvGrpSpPr/>
+        <p:nvPr/>
+      </p:nvGrpSpPr>
+      <p:grpSpPr>
+        <a:xfrm>
+          <a:off x="0" y="0"/>
+          <a:ext cx="0" cy="0"/>
+          <a:chOff x="0" y="0"/>
+          <a:chExt cx="0" cy="0"/>
+        </a:xfrm>
+      </p:grpSpPr>
+      <p:sp>
+        <p:nvSpPr>
+          <p:cNvPr id="3" name="Content Placeholder 2">
+            <a:extLst>
+              <a:ext uri="{FF2B5EF4-FFF2-40B4-BE49-F238E27FC236}">
+                <a16:creationId xmlns:a16="http://schemas.microsoft.com/office/drawing/2014/main" id="{58F24B76-818A-5ADB-6A5C-893C10A458D9}"/>
+              </a:ext>
+            </a:extLst>
+          </p:cNvPr>
+          <p:cNvSpPr>
+            <a:spLocks noGrp="1"/>
+          </p:cNvSpPr>
+          <p:nvPr>
+            <p:ph idx="1"/>
+          </p:nvPr>
+        </p:nvSpPr>
+        <p:spPr>
+          <a:xfrm>
+            <a:off x="702853" y="707571"/>
+            <a:ext cx="10900568" cy="5486400"/>
+          </a:xfrm>
+        </p:spPr>
+        <p:txBody>
+          <a:bodyPr>
+            <a:normAutofit/>
+          </a:bodyPr>
+          <a:lstStyle/>
+          <a:p>
+            <a:pPr marL="0" indent="0">
+              <a:buNone/>
+            </a:pPr>
+            <a:endParaRPr lang="en-US" sz="2400" dirty="0"/>
+          </a:p>
+          <a:p>
+            <a:pPr marL="0" indent="0">
+              <a:buNone/>
+            </a:pPr>
+            <a:endParaRPr lang="en-US" sz="2400" dirty="0"/>
+          </a:p>
+          <a:p>
+            <a:pPr marL="0" indent="0">
+              <a:buNone/>
+            </a:pPr>
+            <a:endParaRPr lang="en-US" sz="2400" dirty="0"/>
+          </a:p>
+          <a:p>
+            <a:pPr marL="0" indent="0">
+              <a:buNone/>
+            </a:pPr>
+            <a:endParaRPr lang="en-US" sz="2400" dirty="0"/>
+          </a:p>
+          <a:p>
+            <a:pPr marL="0" indent="0">
+              <a:buNone/>
+            </a:pPr>
+            <a:r>
+              <a:rPr lang="en-US" sz="2800" b="1" dirty="0">
+                <a:solidFill>
+                  <a:srgbClr val="002060"/>
+                </a:solidFill>
+              </a:rPr>
+              <a:t>Step 3: Apply the Silhouette Formula</a:t>
+            </a:r>
+            <a:endParaRPr lang="en-IN" sz="2800" b="1" dirty="0">
+              <a:solidFill>
+                <a:srgbClr val="002060"/>
+              </a:solidFill>
+            </a:endParaRPr>
+          </a:p>
+        </p:txBody>
+      </p:sp>
+      <p:pic>
+        <p:nvPicPr>
+          <p:cNvPr id="2" name="Picture 1">
+            <a:extLst>
+              <a:ext uri="{FF2B5EF4-FFF2-40B4-BE49-F238E27FC236}">
+                <a16:creationId xmlns:a16="http://schemas.microsoft.com/office/drawing/2014/main" id="{DD268886-6529-2A44-DA01-5F83E429CEF0}"/>
+              </a:ext>
+            </a:extLst>
+          </p:cNvPr>
+          <p:cNvPicPr>
+            <a:picLocks noChangeAspect="1"/>
+          </p:cNvPicPr>
+          <p:nvPr/>
+        </p:nvPicPr>
+        <p:blipFill>
+          <a:blip r:embed="rId2"/>
+          <a:srcRect t="74612" b="3448"/>
+          <a:stretch>
+            <a:fillRect/>
+          </a:stretch>
+        </p:blipFill>
+        <p:spPr>
+          <a:xfrm>
+            <a:off x="1533871" y="892629"/>
+            <a:ext cx="9124257" cy="1165998"/>
+          </a:xfrm>
+          <a:prstGeom prst="rect">
+            <a:avLst/>
+          </a:prstGeom>
+        </p:spPr>
+      </p:pic>
+      <p:pic>
+        <p:nvPicPr>
+          <p:cNvPr id="5" name="Picture 4">
+            <a:extLst>
+              <a:ext uri="{FF2B5EF4-FFF2-40B4-BE49-F238E27FC236}">
+                <a16:creationId xmlns:a16="http://schemas.microsoft.com/office/drawing/2014/main" id="{604D47EE-A35A-5FD0-57BB-B54AC37BC676}"/>
+              </a:ext>
+            </a:extLst>
+          </p:cNvPr>
+          <p:cNvPicPr>
+            <a:picLocks noChangeAspect="1"/>
+          </p:cNvPicPr>
+          <p:nvPr/>
+        </p:nvPicPr>
+        <p:blipFill>
+          <a:blip r:embed="rId3"/>
+          <a:stretch>
+            <a:fillRect/>
+          </a:stretch>
+        </p:blipFill>
+        <p:spPr>
+          <a:xfrm>
+            <a:off x="822364" y="3703296"/>
+            <a:ext cx="10781057" cy="1576276"/>
+          </a:xfrm>
+          <a:prstGeom prst="rect">
+            <a:avLst/>
+          </a:prstGeom>
+        </p:spPr>
+      </p:pic>
+    </p:spTree>
+    <p:extLst>
+      <p:ext uri="{BB962C8B-B14F-4D97-AF65-F5344CB8AC3E}">
+        <p14:creationId xmlns:p14="http://schemas.microsoft.com/office/powerpoint/2010/main" val="1785359806"/>
+      </p:ext>
+    </p:extLst>
+  </p:cSld>
+  <p:clrMapOvr>
+    <a:masterClrMapping/>
+  </p:clrMapOvr>
+</p:sld>
+</file>
+
+<file path=ppt/slides/slide39.xml><?xml version="1.0" encoding="utf-8"?>
+<p:sld xmlns:a="http://schemas.openxmlformats.org/drawingml/2006/main" xmlns:r="http://schemas.openxmlformats.org/officeDocument/2006/relationships" xmlns:p="http://schemas.openxmlformats.org/presentationml/2006/main">
+  <p:cSld>
+    <p:spTree>
+      <p:nvGrpSpPr>
+        <p:cNvPr id="1" name="">
+          <a:extLst>
+            <a:ext uri="{FF2B5EF4-FFF2-40B4-BE49-F238E27FC236}">
+              <a16:creationId xmlns:a16="http://schemas.microsoft.com/office/drawing/2014/main" id="{A98ECA48-B4A6-7339-060D-B2954206DEE9}"/>
+            </a:ext>
+          </a:extLst>
+        </p:cNvPr>
+        <p:cNvGrpSpPr/>
+        <p:nvPr/>
+      </p:nvGrpSpPr>
+      <p:grpSpPr>
+        <a:xfrm>
+          <a:off x="0" y="0"/>
+          <a:ext cx="0" cy="0"/>
+          <a:chOff x="0" y="0"/>
+          <a:chExt cx="0" cy="0"/>
+        </a:xfrm>
+      </p:grpSpPr>
+      <p:sp>
+        <p:nvSpPr>
+          <p:cNvPr id="3" name="Content Placeholder 2">
+            <a:extLst>
+              <a:ext uri="{FF2B5EF4-FFF2-40B4-BE49-F238E27FC236}">
+                <a16:creationId xmlns:a16="http://schemas.microsoft.com/office/drawing/2014/main" id="{95655103-EFC8-7391-DDBD-A62440453084}"/>
+              </a:ext>
+            </a:extLst>
+          </p:cNvPr>
+          <p:cNvSpPr>
+            <a:spLocks noGrp="1"/>
+          </p:cNvSpPr>
+          <p:nvPr>
+            <p:ph idx="1"/>
+          </p:nvPr>
+        </p:nvSpPr>
+        <p:spPr>
+          <a:xfrm>
+            <a:off x="702853" y="740229"/>
+            <a:ext cx="10900568" cy="5453742"/>
+          </a:xfrm>
+        </p:spPr>
+        <p:txBody>
+          <a:bodyPr>
+            <a:normAutofit lnSpcReduction="10000"/>
+          </a:bodyPr>
+          <a:lstStyle/>
+          <a:p>
+            <a:pPr marL="0" indent="0">
+              <a:buNone/>
+            </a:pPr>
+            <a:r>
+              <a:rPr lang="en-US" sz="2800" b="1" dirty="0"/>
+              <a:t>✅ Final Result:</a:t>
+            </a:r>
+          </a:p>
+          <a:p>
+            <a:r>
+              <a:rPr lang="en-US" sz="2800" dirty="0"/>
+              <a:t>The silhouette score for point A1 is 0.84, which means:</a:t>
+            </a:r>
+          </a:p>
+          <a:p>
+            <a:r>
+              <a:rPr lang="en-US" sz="2800" dirty="0"/>
+              <a:t>It is well-clustered (far from the other cluster).</a:t>
+            </a:r>
+          </a:p>
+          <a:p>
+            <a:r>
+              <a:rPr lang="en-US" sz="2800" dirty="0"/>
+              <a:t>The clustering algorithm did a great job placing this point.</a:t>
+            </a:r>
+          </a:p>
+          <a:p>
+            <a:endParaRPr lang="en-US" sz="2800" dirty="0"/>
+          </a:p>
+          <a:p>
+            <a:pPr marL="0" indent="0">
+              <a:buNone/>
+            </a:pPr>
+            <a:r>
+              <a:rPr lang="en-US" sz="2800" dirty="0"/>
+              <a:t>To get the final performance (overall silhouette score) of your clustering result, you need to:</a:t>
+            </a:r>
+          </a:p>
+          <a:p>
+            <a:pPr marL="0" indent="0">
+              <a:buNone/>
+            </a:pPr>
+            <a:r>
+              <a:rPr lang="en-US" sz="2800" b="1" dirty="0">
+                <a:solidFill>
+                  <a:schemeClr val="tx2">
+                    <a:lumMod val="75000"/>
+                    <a:lumOff val="25000"/>
+                  </a:schemeClr>
+                </a:solidFill>
+              </a:rPr>
+              <a:t>Repeat</a:t>
+            </a:r>
+            <a:r>
+              <a:rPr lang="en-US" sz="2800" dirty="0"/>
+              <a:t> the following for every data point:</a:t>
+            </a:r>
+          </a:p>
+          <a:p>
+            <a:r>
+              <a:rPr lang="en-US" sz="2800" b="1" dirty="0"/>
+              <a:t>Compute a(</a:t>
+            </a:r>
+            <a:r>
+              <a:rPr lang="en-US" sz="2800" b="1" dirty="0" err="1"/>
+              <a:t>i</a:t>
+            </a:r>
+            <a:r>
+              <a:rPr lang="en-US" sz="2800" b="1" dirty="0"/>
+              <a:t>) </a:t>
+            </a:r>
+            <a:r>
+              <a:rPr lang="en-US" sz="2800" dirty="0"/>
+              <a:t>– average distance to all other points in the same cluster.</a:t>
+            </a:r>
+          </a:p>
+          <a:p>
+            <a:r>
+              <a:rPr lang="en-US" sz="2800" b="1" dirty="0"/>
+              <a:t>Compute b(</a:t>
+            </a:r>
+            <a:r>
+              <a:rPr lang="en-US" sz="2800" b="1" dirty="0" err="1"/>
+              <a:t>i</a:t>
+            </a:r>
+            <a:r>
+              <a:rPr lang="en-US" sz="2800" b="1" dirty="0"/>
+              <a:t>) </a:t>
+            </a:r>
+            <a:r>
+              <a:rPr lang="en-US" sz="2800" dirty="0"/>
+              <a:t>– average distance to all points in the nearest other cluster.</a:t>
+            </a:r>
+          </a:p>
+          <a:p>
+            <a:r>
+              <a:rPr lang="en-US" sz="2800" dirty="0"/>
+              <a:t>Apply the silhouette formula</a:t>
+            </a:r>
+            <a:endParaRPr lang="en-IN" sz="2800" dirty="0"/>
+          </a:p>
+        </p:txBody>
+      </p:sp>
+    </p:spTree>
+    <p:extLst>
+      <p:ext uri="{BB962C8B-B14F-4D97-AF65-F5344CB8AC3E}">
+        <p14:creationId xmlns:p14="http://schemas.microsoft.com/office/powerpoint/2010/main" val="2891824185"/>
       </p:ext>
     </p:extLst>
   </p:cSld>
@@ -13164,6 +14967,2514 @@
     <p:extLst>
       <p:ext uri="{BB962C8B-B14F-4D97-AF65-F5344CB8AC3E}">
         <p14:creationId xmlns:p14="http://schemas.microsoft.com/office/powerpoint/2010/main" val="1426868896"/>
+      </p:ext>
+    </p:extLst>
+  </p:cSld>
+  <p:clrMapOvr>
+    <a:masterClrMapping/>
+  </p:clrMapOvr>
+</p:sld>
+</file>
+
+<file path=ppt/slides/slide40.xml><?xml version="1.0" encoding="utf-8"?>
+<p:sld xmlns:a="http://schemas.openxmlformats.org/drawingml/2006/main" xmlns:r="http://schemas.openxmlformats.org/officeDocument/2006/relationships" xmlns:p="http://schemas.openxmlformats.org/presentationml/2006/main">
+  <p:cSld>
+    <p:spTree>
+      <p:nvGrpSpPr>
+        <p:cNvPr id="1" name="">
+          <a:extLst>
+            <a:ext uri="{FF2B5EF4-FFF2-40B4-BE49-F238E27FC236}">
+              <a16:creationId xmlns:a16="http://schemas.microsoft.com/office/drawing/2014/main" id="{B400475C-7859-5295-E4FB-A372E1B0324E}"/>
+            </a:ext>
+          </a:extLst>
+        </p:cNvPr>
+        <p:cNvGrpSpPr/>
+        <p:nvPr/>
+      </p:nvGrpSpPr>
+      <p:grpSpPr>
+        <a:xfrm>
+          <a:off x="0" y="0"/>
+          <a:ext cx="0" cy="0"/>
+          <a:chOff x="0" y="0"/>
+          <a:chExt cx="0" cy="0"/>
+        </a:xfrm>
+      </p:grpSpPr>
+      <p:sp>
+        <p:nvSpPr>
+          <p:cNvPr id="3" name="Content Placeholder 2">
+            <a:extLst>
+              <a:ext uri="{FF2B5EF4-FFF2-40B4-BE49-F238E27FC236}">
+                <a16:creationId xmlns:a16="http://schemas.microsoft.com/office/drawing/2014/main" id="{DDBA524E-170E-8B36-CF12-279A929395A1}"/>
+              </a:ext>
+            </a:extLst>
+          </p:cNvPr>
+          <p:cNvSpPr>
+            <a:spLocks noGrp="1"/>
+          </p:cNvSpPr>
+          <p:nvPr>
+            <p:ph idx="1"/>
+          </p:nvPr>
+        </p:nvSpPr>
+        <p:spPr>
+          <a:xfrm>
+            <a:off x="702853" y="707571"/>
+            <a:ext cx="10900568" cy="5486400"/>
+          </a:xfrm>
+        </p:spPr>
+        <p:txBody>
+          <a:bodyPr>
+            <a:normAutofit/>
+          </a:bodyPr>
+          <a:lstStyle/>
+          <a:p>
+            <a:pPr marL="0" indent="0">
+              <a:buNone/>
+            </a:pPr>
+            <a:r>
+              <a:rPr lang="en-US" sz="2800" b="1" dirty="0">
+                <a:solidFill>
+                  <a:srgbClr val="002060"/>
+                </a:solidFill>
+              </a:rPr>
+              <a:t>Then: </a:t>
+            </a:r>
+            <a:r>
+              <a:rPr lang="en-US" sz="2800" b="1" dirty="0">
+                <a:solidFill>
+                  <a:schemeClr val="tx2">
+                    <a:lumMod val="75000"/>
+                    <a:lumOff val="25000"/>
+                  </a:schemeClr>
+                </a:solidFill>
+              </a:rPr>
+              <a:t>Average</a:t>
+            </a:r>
+            <a:r>
+              <a:rPr lang="en-US" sz="2800" b="1" dirty="0">
+                <a:solidFill>
+                  <a:srgbClr val="002060"/>
+                </a:solidFill>
+              </a:rPr>
+              <a:t> all the individual scores</a:t>
+            </a:r>
+          </a:p>
+          <a:p>
+            <a:pPr marL="0" indent="0">
+              <a:buNone/>
+            </a:pPr>
+            <a:r>
+              <a:rPr lang="en-US" sz="2400" dirty="0"/>
+              <a:t>Once you compute s(</a:t>
+            </a:r>
+            <a:r>
+              <a:rPr lang="en-US" sz="2400" dirty="0" err="1"/>
+              <a:t>i</a:t>
+            </a:r>
+            <a:r>
+              <a:rPr lang="en-US" sz="2400" dirty="0"/>
+              <a:t>) for all points, take the average:</a:t>
+            </a:r>
+            <a:endParaRPr lang="en-IN" sz="2400" dirty="0"/>
+          </a:p>
+        </p:txBody>
+      </p:sp>
+      <p:pic>
+        <p:nvPicPr>
+          <p:cNvPr id="4" name="Picture 3">
+            <a:extLst>
+              <a:ext uri="{FF2B5EF4-FFF2-40B4-BE49-F238E27FC236}">
+                <a16:creationId xmlns:a16="http://schemas.microsoft.com/office/drawing/2014/main" id="{626AA302-2E38-B065-6BAC-2E3C1C6A76E5}"/>
+              </a:ext>
+            </a:extLst>
+          </p:cNvPr>
+          <p:cNvPicPr>
+            <a:picLocks noChangeAspect="1"/>
+          </p:cNvPicPr>
+          <p:nvPr/>
+        </p:nvPicPr>
+        <p:blipFill>
+          <a:blip r:embed="rId2"/>
+          <a:stretch>
+            <a:fillRect/>
+          </a:stretch>
+        </p:blipFill>
+        <p:spPr>
+          <a:xfrm>
+            <a:off x="1366009" y="2105781"/>
+            <a:ext cx="8523809" cy="1209524"/>
+          </a:xfrm>
+          <a:prstGeom prst="rect">
+            <a:avLst/>
+          </a:prstGeom>
+        </p:spPr>
+      </p:pic>
+    </p:spTree>
+    <p:extLst>
+      <p:ext uri="{BB962C8B-B14F-4D97-AF65-F5344CB8AC3E}">
+        <p14:creationId xmlns:p14="http://schemas.microsoft.com/office/powerpoint/2010/main" val="3058631524"/>
+      </p:ext>
+    </p:extLst>
+  </p:cSld>
+  <p:clrMapOvr>
+    <a:masterClrMapping/>
+  </p:clrMapOvr>
+</p:sld>
+</file>
+
+<file path=ppt/slides/slide41.xml><?xml version="1.0" encoding="utf-8"?>
+<p:sld xmlns:a="http://schemas.openxmlformats.org/drawingml/2006/main" xmlns:r="http://schemas.openxmlformats.org/officeDocument/2006/relationships" xmlns:p="http://schemas.openxmlformats.org/presentationml/2006/main">
+  <p:cSld>
+    <p:spTree>
+      <p:nvGrpSpPr>
+        <p:cNvPr id="1" name="">
+          <a:extLst>
+            <a:ext uri="{FF2B5EF4-FFF2-40B4-BE49-F238E27FC236}">
+              <a16:creationId xmlns:a16="http://schemas.microsoft.com/office/drawing/2014/main" id="{E858C9C5-B5C4-3DB1-C411-F06B645B7C25}"/>
+            </a:ext>
+          </a:extLst>
+        </p:cNvPr>
+        <p:cNvGrpSpPr/>
+        <p:nvPr/>
+      </p:nvGrpSpPr>
+      <p:grpSpPr>
+        <a:xfrm>
+          <a:off x="0" y="0"/>
+          <a:ext cx="0" cy="0"/>
+          <a:chOff x="0" y="0"/>
+          <a:chExt cx="0" cy="0"/>
+        </a:xfrm>
+      </p:grpSpPr>
+      <p:sp>
+        <p:nvSpPr>
+          <p:cNvPr id="3" name="Content Placeholder 2">
+            <a:extLst>
+              <a:ext uri="{FF2B5EF4-FFF2-40B4-BE49-F238E27FC236}">
+                <a16:creationId xmlns:a16="http://schemas.microsoft.com/office/drawing/2014/main" id="{3531F09F-9C9F-E329-8B05-FE8E014A1746}"/>
+              </a:ext>
+            </a:extLst>
+          </p:cNvPr>
+          <p:cNvSpPr>
+            <a:spLocks noGrp="1"/>
+          </p:cNvSpPr>
+          <p:nvPr>
+            <p:ph idx="1"/>
+          </p:nvPr>
+        </p:nvSpPr>
+        <p:spPr>
+          <a:xfrm>
+            <a:off x="702853" y="707571"/>
+            <a:ext cx="10900568" cy="5486400"/>
+          </a:xfrm>
+        </p:spPr>
+        <p:txBody>
+          <a:bodyPr>
+            <a:normAutofit/>
+          </a:bodyPr>
+          <a:lstStyle/>
+          <a:p>
+            <a:pPr marL="0" indent="0">
+              <a:buNone/>
+            </a:pPr>
+            <a:r>
+              <a:rPr lang="en-US" sz="2800" b="1" dirty="0"/>
+              <a:t>2. Inertia (SSE – Sum of Squared Errors):</a:t>
+            </a:r>
+          </a:p>
+          <a:p>
+            <a:pPr marL="0" indent="0">
+              <a:buNone/>
+            </a:pPr>
+            <a:r>
+              <a:rPr lang="en-US" sz="2400" dirty="0"/>
+              <a:t>Inertia (SSE) measures </a:t>
+            </a:r>
+            <a:r>
+              <a:rPr lang="en-US" sz="2400" b="1" dirty="0">
+                <a:solidFill>
+                  <a:schemeClr val="tx2">
+                    <a:lumMod val="75000"/>
+                    <a:lumOff val="25000"/>
+                  </a:schemeClr>
+                </a:solidFill>
+              </a:rPr>
+              <a:t>how compact the clusters are</a:t>
+            </a:r>
+            <a:r>
+              <a:rPr lang="en-US" sz="2400" dirty="0"/>
+              <a:t>. It is the </a:t>
+            </a:r>
+            <a:r>
+              <a:rPr lang="en-US" sz="2400" b="1" dirty="0">
+                <a:solidFill>
+                  <a:srgbClr val="002060"/>
+                </a:solidFill>
+              </a:rPr>
+              <a:t>sum of squared distances</a:t>
+            </a:r>
+            <a:r>
+              <a:rPr lang="en-US" sz="2400" dirty="0"/>
+              <a:t> </a:t>
+            </a:r>
+            <a:r>
+              <a:rPr lang="en-US" sz="2400" b="1" dirty="0">
+                <a:solidFill>
+                  <a:srgbClr val="002060"/>
+                </a:solidFill>
+              </a:rPr>
+              <a:t>between</a:t>
+            </a:r>
+            <a:r>
+              <a:rPr lang="en-US" sz="2400" dirty="0"/>
+              <a:t> </a:t>
+            </a:r>
+            <a:r>
+              <a:rPr lang="en-US" sz="2400" b="1" dirty="0"/>
+              <a:t>each point and the </a:t>
+            </a:r>
+            <a:r>
+              <a:rPr lang="en-US" sz="2400" b="1" dirty="0">
+                <a:solidFill>
+                  <a:schemeClr val="tx2">
+                    <a:lumMod val="75000"/>
+                    <a:lumOff val="25000"/>
+                  </a:schemeClr>
+                </a:solidFill>
+              </a:rPr>
+              <a:t>centroid</a:t>
+            </a:r>
+            <a:r>
+              <a:rPr lang="en-US" sz="2400" b="1" dirty="0"/>
+              <a:t> of its assigned cluster</a:t>
+            </a:r>
+            <a:r>
+              <a:rPr lang="en-US" sz="2400" dirty="0"/>
+              <a:t>.</a:t>
+            </a:r>
+          </a:p>
+          <a:p>
+            <a:pPr marL="0" indent="0">
+              <a:buNone/>
+            </a:pPr>
+            <a:r>
+              <a:rPr lang="en-IN" sz="2400" b="1" dirty="0"/>
+              <a:t>Formula for Inertia (SSE)</a:t>
+            </a:r>
+            <a:r>
+              <a:rPr lang="en-IN" sz="2400" dirty="0"/>
+              <a:t>:</a:t>
+            </a:r>
+          </a:p>
+          <a:p>
+            <a:pPr marL="0" indent="0">
+              <a:buNone/>
+            </a:pPr>
+            <a:endParaRPr lang="en-IN" sz="2400" dirty="0"/>
+          </a:p>
+          <a:p>
+            <a:pPr marL="0" indent="0">
+              <a:buNone/>
+            </a:pPr>
+            <a:endParaRPr lang="en-IN" sz="2400" dirty="0"/>
+          </a:p>
+          <a:p>
+            <a:pPr marL="0" indent="0">
+              <a:buNone/>
+            </a:pPr>
+            <a:endParaRPr lang="en-IN" sz="2400" dirty="0"/>
+          </a:p>
+          <a:p>
+            <a:pPr marL="0" indent="0">
+              <a:buNone/>
+            </a:pPr>
+            <a:endParaRPr lang="en-IN" sz="2400" dirty="0"/>
+          </a:p>
+          <a:p>
+            <a:pPr marL="0" indent="0">
+              <a:buNone/>
+            </a:pPr>
+            <a:r>
+              <a:rPr lang="en-IN" sz="2400" b="1" dirty="0"/>
+              <a:t>Where:</a:t>
+            </a:r>
+          </a:p>
+          <a:p>
+            <a:r>
+              <a:rPr lang="en-IN" sz="2400" dirty="0"/>
+              <a:t>𝑥𝑖 = data point</a:t>
+            </a:r>
+          </a:p>
+          <a:p>
+            <a:r>
+              <a:rPr lang="en-US" sz="2400" dirty="0" err="1"/>
+              <a:t>μCi</a:t>
+            </a:r>
+            <a:r>
+              <a:rPr lang="en-US" sz="2400" dirty="0"/>
+              <a:t> = centroid of the cluster that </a:t>
+            </a:r>
+          </a:p>
+          <a:p>
+            <a:r>
+              <a:rPr lang="en-IN" sz="2400" dirty="0"/>
+              <a:t>∥⋅∥</a:t>
+            </a:r>
+            <a:r>
+              <a:rPr lang="en-US" sz="2800" b="1" baseline="30000" dirty="0"/>
+              <a:t>2</a:t>
+            </a:r>
+            <a:r>
+              <a:rPr lang="en-IN" sz="3200" b="1" dirty="0"/>
+              <a:t>  </a:t>
+            </a:r>
+            <a:r>
+              <a:rPr lang="en-IN" sz="2400" dirty="0"/>
+              <a:t>= squared Euclidean distance</a:t>
+            </a:r>
+          </a:p>
+          <a:p>
+            <a:pPr marL="0" indent="0">
+              <a:buNone/>
+            </a:pPr>
+            <a:endParaRPr lang="en-IN" sz="2400" dirty="0"/>
+          </a:p>
+        </p:txBody>
+      </p:sp>
+      <p:pic>
+        <p:nvPicPr>
+          <p:cNvPr id="4" name="Picture 3">
+            <a:extLst>
+              <a:ext uri="{FF2B5EF4-FFF2-40B4-BE49-F238E27FC236}">
+                <a16:creationId xmlns:a16="http://schemas.microsoft.com/office/drawing/2014/main" id="{25A9E488-B372-606E-E439-C1AAAA4CCE25}"/>
+              </a:ext>
+            </a:extLst>
+          </p:cNvPr>
+          <p:cNvPicPr>
+            <a:picLocks noChangeAspect="1"/>
+          </p:cNvPicPr>
+          <p:nvPr/>
+        </p:nvPicPr>
+        <p:blipFill>
+          <a:blip r:embed="rId2"/>
+          <a:stretch>
+            <a:fillRect/>
+          </a:stretch>
+        </p:blipFill>
+        <p:spPr>
+          <a:xfrm>
+            <a:off x="2906200" y="2576177"/>
+            <a:ext cx="5682629" cy="1705646"/>
+          </a:xfrm>
+          <a:prstGeom prst="rect">
+            <a:avLst/>
+          </a:prstGeom>
+        </p:spPr>
+      </p:pic>
+    </p:spTree>
+    <p:extLst>
+      <p:ext uri="{BB962C8B-B14F-4D97-AF65-F5344CB8AC3E}">
+        <p14:creationId xmlns:p14="http://schemas.microsoft.com/office/powerpoint/2010/main" val="1213487708"/>
+      </p:ext>
+    </p:extLst>
+  </p:cSld>
+  <p:clrMapOvr>
+    <a:masterClrMapping/>
+  </p:clrMapOvr>
+</p:sld>
+</file>
+
+<file path=ppt/slides/slide42.xml><?xml version="1.0" encoding="utf-8"?>
+<p:sld xmlns:a="http://schemas.openxmlformats.org/drawingml/2006/main" xmlns:r="http://schemas.openxmlformats.org/officeDocument/2006/relationships" xmlns:p="http://schemas.openxmlformats.org/presentationml/2006/main">
+  <p:cSld>
+    <p:spTree>
+      <p:nvGrpSpPr>
+        <p:cNvPr id="1" name="">
+          <a:extLst>
+            <a:ext uri="{FF2B5EF4-FFF2-40B4-BE49-F238E27FC236}">
+              <a16:creationId xmlns:a16="http://schemas.microsoft.com/office/drawing/2014/main" id="{9C086368-1DB8-4813-FC5F-52DDBB199D7A}"/>
+            </a:ext>
+          </a:extLst>
+        </p:cNvPr>
+        <p:cNvGrpSpPr/>
+        <p:nvPr/>
+      </p:nvGrpSpPr>
+      <p:grpSpPr>
+        <a:xfrm>
+          <a:off x="0" y="0"/>
+          <a:ext cx="0" cy="0"/>
+          <a:chOff x="0" y="0"/>
+          <a:chExt cx="0" cy="0"/>
+        </a:xfrm>
+      </p:grpSpPr>
+      <p:sp>
+        <p:nvSpPr>
+          <p:cNvPr id="3" name="Content Placeholder 2">
+            <a:extLst>
+              <a:ext uri="{FF2B5EF4-FFF2-40B4-BE49-F238E27FC236}">
+                <a16:creationId xmlns:a16="http://schemas.microsoft.com/office/drawing/2014/main" id="{29CA7574-FA8B-7EEC-D184-DDC6D8906861}"/>
+              </a:ext>
+            </a:extLst>
+          </p:cNvPr>
+          <p:cNvSpPr>
+            <a:spLocks noGrp="1"/>
+          </p:cNvSpPr>
+          <p:nvPr>
+            <p:ph idx="1"/>
+          </p:nvPr>
+        </p:nvSpPr>
+        <p:spPr>
+          <a:xfrm>
+            <a:off x="702853" y="1230085"/>
+            <a:ext cx="10900568" cy="4963885"/>
+          </a:xfrm>
+        </p:spPr>
+        <p:txBody>
+          <a:bodyPr>
+            <a:normAutofit/>
+          </a:bodyPr>
+          <a:lstStyle/>
+          <a:p>
+            <a:pPr marL="0" indent="0">
+              <a:buNone/>
+            </a:pPr>
+            <a:r>
+              <a:rPr lang="en-US" sz="2800" b="1" dirty="0"/>
+              <a:t>Interpretation</a:t>
+            </a:r>
+            <a:r>
+              <a:rPr lang="en-US" sz="2800" dirty="0"/>
+              <a:t>:</a:t>
+            </a:r>
+          </a:p>
+          <a:p>
+            <a:r>
+              <a:rPr lang="en-US" sz="2400" b="1" dirty="0"/>
+              <a:t>Lower Inertia </a:t>
+            </a:r>
+            <a:r>
+              <a:rPr lang="en-US" sz="2400" dirty="0"/>
+              <a:t>= tighter, more compact clusters → </a:t>
+            </a:r>
+            <a:r>
+              <a:rPr lang="en-US" sz="2400" b="1" dirty="0">
+                <a:solidFill>
+                  <a:schemeClr val="tx2">
+                    <a:lumMod val="75000"/>
+                    <a:lumOff val="25000"/>
+                  </a:schemeClr>
+                </a:solidFill>
+              </a:rPr>
+              <a:t>good clustering</a:t>
+            </a:r>
+            <a:r>
+              <a:rPr lang="en-US" sz="2400" dirty="0"/>
+              <a:t>.</a:t>
+            </a:r>
+          </a:p>
+          <a:p>
+            <a:r>
+              <a:rPr lang="en-US" sz="2400" b="1" dirty="0"/>
+              <a:t>Higher Inertia </a:t>
+            </a:r>
+            <a:r>
+              <a:rPr lang="en-US" sz="2400" dirty="0"/>
+              <a:t>= points are spread out from their centroids → </a:t>
+            </a:r>
+            <a:r>
+              <a:rPr lang="en-US" sz="2400" b="1" dirty="0">
+                <a:solidFill>
+                  <a:schemeClr val="tx2">
+                    <a:lumMod val="75000"/>
+                    <a:lumOff val="25000"/>
+                  </a:schemeClr>
+                </a:solidFill>
+              </a:rPr>
+              <a:t>poor clustering</a:t>
+            </a:r>
+            <a:r>
+              <a:rPr lang="en-US" sz="2400" dirty="0"/>
+              <a:t>.</a:t>
+            </a:r>
+          </a:p>
+          <a:p>
+            <a:pPr marL="0" indent="0">
+              <a:buNone/>
+            </a:pPr>
+            <a:r>
+              <a:rPr lang="en-US" sz="2400" dirty="0"/>
+              <a:t>But too low inertia may mean </a:t>
+            </a:r>
+            <a:r>
+              <a:rPr lang="en-US" sz="2400" b="1" dirty="0">
+                <a:solidFill>
+                  <a:srgbClr val="C00000"/>
+                </a:solidFill>
+              </a:rPr>
+              <a:t>overfitting</a:t>
+            </a:r>
+            <a:r>
+              <a:rPr lang="en-US" sz="2400" dirty="0"/>
+              <a:t> with too many small clusters.</a:t>
+            </a:r>
+            <a:endParaRPr lang="en-IN" sz="2400" dirty="0"/>
+          </a:p>
+        </p:txBody>
+      </p:sp>
+    </p:spTree>
+    <p:extLst>
+      <p:ext uri="{BB962C8B-B14F-4D97-AF65-F5344CB8AC3E}">
+        <p14:creationId xmlns:p14="http://schemas.microsoft.com/office/powerpoint/2010/main" val="1796145993"/>
+      </p:ext>
+    </p:extLst>
+  </p:cSld>
+  <p:clrMapOvr>
+    <a:masterClrMapping/>
+  </p:clrMapOvr>
+</p:sld>
+</file>
+
+<file path=ppt/slides/slide43.xml><?xml version="1.0" encoding="utf-8"?>
+<p:sld xmlns:a="http://schemas.openxmlformats.org/drawingml/2006/main" xmlns:r="http://schemas.openxmlformats.org/officeDocument/2006/relationships" xmlns:p="http://schemas.openxmlformats.org/presentationml/2006/main">
+  <p:cSld>
+    <p:spTree>
+      <p:nvGrpSpPr>
+        <p:cNvPr id="1" name="">
+          <a:extLst>
+            <a:ext uri="{FF2B5EF4-FFF2-40B4-BE49-F238E27FC236}">
+              <a16:creationId xmlns:a16="http://schemas.microsoft.com/office/drawing/2014/main" id="{4741DE41-0F96-3F50-8D49-A22519845916}"/>
+            </a:ext>
+          </a:extLst>
+        </p:cNvPr>
+        <p:cNvGrpSpPr/>
+        <p:nvPr/>
+      </p:nvGrpSpPr>
+      <p:grpSpPr>
+        <a:xfrm>
+          <a:off x="0" y="0"/>
+          <a:ext cx="0" cy="0"/>
+          <a:chOff x="0" y="0"/>
+          <a:chExt cx="0" cy="0"/>
+        </a:xfrm>
+      </p:grpSpPr>
+      <p:sp>
+        <p:nvSpPr>
+          <p:cNvPr id="3" name="Content Placeholder 2">
+            <a:extLst>
+              <a:ext uri="{FF2B5EF4-FFF2-40B4-BE49-F238E27FC236}">
+                <a16:creationId xmlns:a16="http://schemas.microsoft.com/office/drawing/2014/main" id="{E0549CB9-859B-D9AF-CD49-30D4DF52841B}"/>
+              </a:ext>
+            </a:extLst>
+          </p:cNvPr>
+          <p:cNvSpPr>
+            <a:spLocks noGrp="1"/>
+          </p:cNvSpPr>
+          <p:nvPr>
+            <p:ph idx="1"/>
+          </p:nvPr>
+        </p:nvSpPr>
+        <p:spPr>
+          <a:xfrm>
+            <a:off x="702853" y="707571"/>
+            <a:ext cx="10900568" cy="5486400"/>
+          </a:xfrm>
+        </p:spPr>
+        <p:txBody>
+          <a:bodyPr>
+            <a:normAutofit/>
+          </a:bodyPr>
+          <a:lstStyle/>
+          <a:p>
+            <a:pPr marL="0" indent="0">
+              <a:buNone/>
+            </a:pPr>
+            <a:r>
+              <a:rPr lang="en-US" sz="2400" b="1" dirty="0"/>
+              <a:t>Example: Same as Before</a:t>
+            </a:r>
+          </a:p>
+          <a:p>
+            <a:pPr marL="0" indent="0">
+              <a:buNone/>
+            </a:pPr>
+            <a:r>
+              <a:rPr lang="en-US" sz="2400" dirty="0"/>
+              <a:t>Let’s reuse the </a:t>
+            </a:r>
+            <a:r>
+              <a:rPr lang="en-US" sz="2400" b="1" dirty="0"/>
+              <a:t>same 6 points</a:t>
+            </a:r>
+            <a:r>
+              <a:rPr lang="en-US" sz="2400" dirty="0"/>
+              <a:t> and compute Inertia for them.</a:t>
+            </a:r>
+          </a:p>
+          <a:p>
+            <a:r>
+              <a:rPr lang="en-US" sz="2400" b="1" dirty="0"/>
+              <a:t>➕ Cluster A: </a:t>
+            </a:r>
+            <a:r>
+              <a:rPr lang="en-US" sz="2400" dirty="0"/>
+              <a:t>A1(1,2), A2(2,1), A3(1,0)</a:t>
+            </a:r>
+          </a:p>
+          <a:p>
+            <a:pPr marL="0" indent="0">
+              <a:buNone/>
+            </a:pPr>
+            <a:r>
+              <a:rPr lang="en-US" sz="2400" b="1" dirty="0"/>
+              <a:t>Step-1: First, compute the </a:t>
+            </a:r>
+            <a:r>
+              <a:rPr lang="en-US" sz="2400" b="1" dirty="0">
+                <a:solidFill>
+                  <a:schemeClr val="tx2">
+                    <a:lumMod val="75000"/>
+                    <a:lumOff val="25000"/>
+                  </a:schemeClr>
+                </a:solidFill>
+              </a:rPr>
+              <a:t>centroid of Cluster A</a:t>
+            </a:r>
+            <a:r>
+              <a:rPr lang="en-US" sz="2400" b="1" dirty="0"/>
+              <a:t>:</a:t>
+            </a:r>
+          </a:p>
+          <a:p>
+            <a:pPr marL="0" indent="0">
+              <a:buNone/>
+            </a:pPr>
+            <a:endParaRPr lang="en-US" sz="2400" b="1" dirty="0"/>
+          </a:p>
+          <a:p>
+            <a:pPr marL="0" indent="0">
+              <a:buNone/>
+            </a:pPr>
+            <a:endParaRPr lang="en-US" sz="2400" b="1" dirty="0"/>
+          </a:p>
+          <a:p>
+            <a:pPr marL="0" indent="0">
+              <a:buNone/>
+            </a:pPr>
+            <a:endParaRPr lang="en-US" sz="2400" b="1" dirty="0"/>
+          </a:p>
+          <a:p>
+            <a:pPr marL="0" indent="0">
+              <a:buNone/>
+            </a:pPr>
+            <a:endParaRPr lang="en-US" sz="2400" b="1" dirty="0"/>
+          </a:p>
+          <a:p>
+            <a:pPr marL="0" indent="0">
+              <a:buNone/>
+            </a:pPr>
+            <a:endParaRPr lang="en-US" sz="2400" dirty="0"/>
+          </a:p>
+          <a:p>
+            <a:pPr marL="0" indent="0">
+              <a:buNone/>
+            </a:pPr>
+            <a:r>
+              <a:rPr lang="en-US" sz="2400" dirty="0"/>
+              <a:t>Now calculate </a:t>
+            </a:r>
+            <a:r>
+              <a:rPr lang="en-US" sz="2400" b="1" dirty="0">
+                <a:solidFill>
+                  <a:schemeClr val="tx2">
+                    <a:lumMod val="75000"/>
+                    <a:lumOff val="25000"/>
+                  </a:schemeClr>
+                </a:solidFill>
+              </a:rPr>
+              <a:t>squared distances from each point </a:t>
+            </a:r>
+            <a:r>
+              <a:rPr lang="en-US" sz="2400" dirty="0"/>
+              <a:t>to the </a:t>
+            </a:r>
+            <a:r>
+              <a:rPr lang="en-US" sz="2400" b="1" dirty="0">
+                <a:solidFill>
+                  <a:schemeClr val="tx2">
+                    <a:lumMod val="75000"/>
+                    <a:lumOff val="25000"/>
+                  </a:schemeClr>
+                </a:solidFill>
+              </a:rPr>
+              <a:t>centroid</a:t>
+            </a:r>
+            <a:r>
+              <a:rPr lang="en-US" sz="2400" dirty="0"/>
+              <a:t>:</a:t>
+            </a:r>
+            <a:endParaRPr lang="en-US" sz="2400" b="1" dirty="0"/>
+          </a:p>
+          <a:p>
+            <a:pPr marL="0" indent="0">
+              <a:buNone/>
+            </a:pPr>
+            <a:endParaRPr lang="en-IN" sz="2400" dirty="0"/>
+          </a:p>
+        </p:txBody>
+      </p:sp>
+      <p:pic>
+        <p:nvPicPr>
+          <p:cNvPr id="4" name="Picture 3">
+            <a:extLst>
+              <a:ext uri="{FF2B5EF4-FFF2-40B4-BE49-F238E27FC236}">
+                <a16:creationId xmlns:a16="http://schemas.microsoft.com/office/drawing/2014/main" id="{208D819C-9B66-D83C-C15C-8B8A9D74E0A5}"/>
+              </a:ext>
+            </a:extLst>
+          </p:cNvPr>
+          <p:cNvPicPr>
+            <a:picLocks noChangeAspect="1"/>
+          </p:cNvPicPr>
+          <p:nvPr/>
+        </p:nvPicPr>
+        <p:blipFill>
+          <a:blip r:embed="rId2"/>
+          <a:stretch>
+            <a:fillRect/>
+          </a:stretch>
+        </p:blipFill>
+        <p:spPr>
+          <a:xfrm>
+            <a:off x="2389400" y="2755380"/>
+            <a:ext cx="7413200" cy="1347239"/>
+          </a:xfrm>
+          <a:prstGeom prst="rect">
+            <a:avLst/>
+          </a:prstGeom>
+        </p:spPr>
+      </p:pic>
+    </p:spTree>
+    <p:extLst>
+      <p:ext uri="{BB962C8B-B14F-4D97-AF65-F5344CB8AC3E}">
+        <p14:creationId xmlns:p14="http://schemas.microsoft.com/office/powerpoint/2010/main" val="4195129001"/>
+      </p:ext>
+    </p:extLst>
+  </p:cSld>
+  <p:clrMapOvr>
+    <a:masterClrMapping/>
+  </p:clrMapOvr>
+</p:sld>
+</file>
+
+<file path=ppt/slides/slide44.xml><?xml version="1.0" encoding="utf-8"?>
+<p:sld xmlns:a="http://schemas.openxmlformats.org/drawingml/2006/main" xmlns:r="http://schemas.openxmlformats.org/officeDocument/2006/relationships" xmlns:p="http://schemas.openxmlformats.org/presentationml/2006/main">
+  <p:cSld>
+    <p:spTree>
+      <p:nvGrpSpPr>
+        <p:cNvPr id="1" name="">
+          <a:extLst>
+            <a:ext uri="{FF2B5EF4-FFF2-40B4-BE49-F238E27FC236}">
+              <a16:creationId xmlns:a16="http://schemas.microsoft.com/office/drawing/2014/main" id="{9278E34F-D472-D84C-FD9C-5DD1514C9503}"/>
+            </a:ext>
+          </a:extLst>
+        </p:cNvPr>
+        <p:cNvGrpSpPr/>
+        <p:nvPr/>
+      </p:nvGrpSpPr>
+      <p:grpSpPr>
+        <a:xfrm>
+          <a:off x="0" y="0"/>
+          <a:ext cx="0" cy="0"/>
+          <a:chOff x="0" y="0"/>
+          <a:chExt cx="0" cy="0"/>
+        </a:xfrm>
+      </p:grpSpPr>
+      <p:sp>
+        <p:nvSpPr>
+          <p:cNvPr id="3" name="Content Placeholder 2">
+            <a:extLst>
+              <a:ext uri="{FF2B5EF4-FFF2-40B4-BE49-F238E27FC236}">
+                <a16:creationId xmlns:a16="http://schemas.microsoft.com/office/drawing/2014/main" id="{4ADC0BE6-E1C7-B71A-DB8D-A09275172BD6}"/>
+              </a:ext>
+            </a:extLst>
+          </p:cNvPr>
+          <p:cNvSpPr>
+            <a:spLocks noGrp="1"/>
+          </p:cNvSpPr>
+          <p:nvPr>
+            <p:ph idx="1"/>
+          </p:nvPr>
+        </p:nvSpPr>
+        <p:spPr>
+          <a:xfrm>
+            <a:off x="702853" y="446314"/>
+            <a:ext cx="10900568" cy="5747657"/>
+          </a:xfrm>
+        </p:spPr>
+        <p:txBody>
+          <a:bodyPr>
+            <a:normAutofit/>
+          </a:bodyPr>
+          <a:lstStyle/>
+          <a:p>
+            <a:endParaRPr lang="en-IN" sz="2800" b="1" dirty="0"/>
+          </a:p>
+          <a:p>
+            <a:r>
+              <a:rPr lang="en-IN" sz="2800" b="1" dirty="0"/>
+              <a:t>A1 to centroid:</a:t>
+            </a:r>
+          </a:p>
+          <a:p>
+            <a:endParaRPr lang="en-IN" sz="2800" b="1" dirty="0"/>
+          </a:p>
+          <a:p>
+            <a:endParaRPr lang="en-IN" sz="500" b="1" dirty="0"/>
+          </a:p>
+          <a:p>
+            <a:r>
+              <a:rPr lang="en-IN" sz="2800" b="1" dirty="0"/>
+              <a:t>A2 to centroid:</a:t>
+            </a:r>
+          </a:p>
+          <a:p>
+            <a:endParaRPr lang="en-IN" sz="2800" b="1" dirty="0"/>
+          </a:p>
+          <a:p>
+            <a:endParaRPr lang="en-IN" sz="100" b="1" dirty="0"/>
+          </a:p>
+          <a:p>
+            <a:endParaRPr lang="en-IN" sz="800" dirty="0"/>
+          </a:p>
+          <a:p>
+            <a:r>
+              <a:rPr lang="en-IN" sz="2800" b="1" dirty="0"/>
+              <a:t>A3 to centroid:</a:t>
+            </a:r>
+          </a:p>
+          <a:p>
+            <a:endParaRPr lang="en-IN" sz="2800" b="1" dirty="0"/>
+          </a:p>
+          <a:p>
+            <a:endParaRPr lang="en-IN" sz="2800" b="1" dirty="0"/>
+          </a:p>
+          <a:p>
+            <a:pPr marL="0" indent="0">
+              <a:buNone/>
+            </a:pPr>
+            <a:r>
+              <a:rPr lang="en-IN" sz="2800" dirty="0"/>
+              <a:t>👉 </a:t>
+            </a:r>
+            <a:r>
+              <a:rPr lang="en-IN" sz="2800" b="1" dirty="0">
+                <a:solidFill>
+                  <a:schemeClr val="tx2">
+                    <a:lumMod val="75000"/>
+                    <a:lumOff val="25000"/>
+                  </a:schemeClr>
+                </a:solidFill>
+              </a:rPr>
+              <a:t>SSE</a:t>
+            </a:r>
+            <a:r>
+              <a:rPr lang="en-IN" sz="2800" dirty="0"/>
+              <a:t> for </a:t>
+            </a:r>
+            <a:r>
+              <a:rPr lang="en-IN" sz="2800" b="1" dirty="0">
+                <a:solidFill>
+                  <a:schemeClr val="tx2">
+                    <a:lumMod val="75000"/>
+                    <a:lumOff val="25000"/>
+                  </a:schemeClr>
+                </a:solidFill>
+              </a:rPr>
+              <a:t>Cluster</a:t>
+            </a:r>
+            <a:r>
+              <a:rPr lang="en-IN" sz="2800" dirty="0"/>
+              <a:t> </a:t>
+            </a:r>
+            <a:r>
+              <a:rPr lang="en-IN" sz="2800" b="1" dirty="0">
+                <a:solidFill>
+                  <a:schemeClr val="tx2">
+                    <a:lumMod val="75000"/>
+                    <a:lumOff val="25000"/>
+                  </a:schemeClr>
+                </a:solidFill>
+              </a:rPr>
+              <a:t>A</a:t>
+            </a:r>
+            <a:r>
+              <a:rPr lang="en-IN" sz="2800" dirty="0"/>
+              <a:t> = 1.11 + 0.44 + 1.11 = </a:t>
+            </a:r>
+            <a:r>
+              <a:rPr lang="en-IN" sz="2800" b="1" dirty="0">
+                <a:solidFill>
+                  <a:schemeClr val="tx2">
+                    <a:lumMod val="75000"/>
+                    <a:lumOff val="25000"/>
+                  </a:schemeClr>
+                </a:solidFill>
+              </a:rPr>
+              <a:t>2.66</a:t>
+            </a:r>
+          </a:p>
+          <a:p>
+            <a:pPr marL="0" indent="0">
+              <a:buNone/>
+            </a:pPr>
+            <a:endParaRPr lang="en-IN" sz="3200" dirty="0"/>
+          </a:p>
+        </p:txBody>
+      </p:sp>
+      <p:pic>
+        <p:nvPicPr>
+          <p:cNvPr id="4" name="Picture 3">
+            <a:extLst>
+              <a:ext uri="{FF2B5EF4-FFF2-40B4-BE49-F238E27FC236}">
+                <a16:creationId xmlns:a16="http://schemas.microsoft.com/office/drawing/2014/main" id="{D481E12B-09AA-FF9A-51DA-86A9F117E8C9}"/>
+              </a:ext>
+            </a:extLst>
+          </p:cNvPr>
+          <p:cNvPicPr>
+            <a:picLocks noChangeAspect="1"/>
+          </p:cNvPicPr>
+          <p:nvPr/>
+        </p:nvPicPr>
+        <p:blipFill>
+          <a:blip r:embed="rId2"/>
+          <a:srcRect t="4543" b="76577"/>
+          <a:stretch>
+            <a:fillRect/>
+          </a:stretch>
+        </p:blipFill>
+        <p:spPr>
+          <a:xfrm>
+            <a:off x="3538382" y="807115"/>
+            <a:ext cx="7477961" cy="697924"/>
+          </a:xfrm>
+          <a:prstGeom prst="rect">
+            <a:avLst/>
+          </a:prstGeom>
+        </p:spPr>
+      </p:pic>
+      <p:pic>
+        <p:nvPicPr>
+          <p:cNvPr id="5" name="Picture 4">
+            <a:extLst>
+              <a:ext uri="{FF2B5EF4-FFF2-40B4-BE49-F238E27FC236}">
+                <a16:creationId xmlns:a16="http://schemas.microsoft.com/office/drawing/2014/main" id="{AFA0B5ED-7879-79A8-DDD9-1DA1A9CD0836}"/>
+              </a:ext>
+            </a:extLst>
+          </p:cNvPr>
+          <p:cNvPicPr>
+            <a:picLocks noChangeAspect="1"/>
+          </p:cNvPicPr>
+          <p:nvPr/>
+        </p:nvPicPr>
+        <p:blipFill>
+          <a:blip r:embed="rId2"/>
+          <a:srcRect t="39246" b="39470"/>
+          <a:stretch>
+            <a:fillRect/>
+          </a:stretch>
+        </p:blipFill>
+        <p:spPr>
+          <a:xfrm>
+            <a:off x="3538382" y="2061278"/>
+            <a:ext cx="7477961" cy="786741"/>
+          </a:xfrm>
+          <a:prstGeom prst="rect">
+            <a:avLst/>
+          </a:prstGeom>
+        </p:spPr>
+      </p:pic>
+      <p:pic>
+        <p:nvPicPr>
+          <p:cNvPr id="6" name="Picture 5">
+            <a:extLst>
+              <a:ext uri="{FF2B5EF4-FFF2-40B4-BE49-F238E27FC236}">
+                <a16:creationId xmlns:a16="http://schemas.microsoft.com/office/drawing/2014/main" id="{D8D3F221-A98D-17E5-B028-721B5B56D059}"/>
+              </a:ext>
+            </a:extLst>
+          </p:cNvPr>
+          <p:cNvPicPr>
+            <a:picLocks noChangeAspect="1"/>
+          </p:cNvPicPr>
+          <p:nvPr/>
+        </p:nvPicPr>
+        <p:blipFill>
+          <a:blip r:embed="rId2"/>
+          <a:srcRect t="78378" b="2703"/>
+          <a:stretch>
+            <a:fillRect/>
+          </a:stretch>
+        </p:blipFill>
+        <p:spPr>
+          <a:xfrm>
+            <a:off x="3538382" y="3472006"/>
+            <a:ext cx="7477961" cy="699326"/>
+          </a:xfrm>
+          <a:prstGeom prst="rect">
+            <a:avLst/>
+          </a:prstGeom>
+        </p:spPr>
+      </p:pic>
+    </p:spTree>
+    <p:extLst>
+      <p:ext uri="{BB962C8B-B14F-4D97-AF65-F5344CB8AC3E}">
+        <p14:creationId xmlns:p14="http://schemas.microsoft.com/office/powerpoint/2010/main" val="413245036"/>
+      </p:ext>
+    </p:extLst>
+  </p:cSld>
+  <p:clrMapOvr>
+    <a:masterClrMapping/>
+  </p:clrMapOvr>
+</p:sld>
+</file>
+
+<file path=ppt/slides/slide45.xml><?xml version="1.0" encoding="utf-8"?>
+<p:sld xmlns:a="http://schemas.openxmlformats.org/drawingml/2006/main" xmlns:r="http://schemas.openxmlformats.org/officeDocument/2006/relationships" xmlns:p="http://schemas.openxmlformats.org/presentationml/2006/main">
+  <p:cSld>
+    <p:spTree>
+      <p:nvGrpSpPr>
+        <p:cNvPr id="1" name="">
+          <a:extLst>
+            <a:ext uri="{FF2B5EF4-FFF2-40B4-BE49-F238E27FC236}">
+              <a16:creationId xmlns:a16="http://schemas.microsoft.com/office/drawing/2014/main" id="{3CCAB568-9357-7A9C-9017-7037EB45D559}"/>
+            </a:ext>
+          </a:extLst>
+        </p:cNvPr>
+        <p:cNvGrpSpPr/>
+        <p:nvPr/>
+      </p:nvGrpSpPr>
+      <p:grpSpPr>
+        <a:xfrm>
+          <a:off x="0" y="0"/>
+          <a:ext cx="0" cy="0"/>
+          <a:chOff x="0" y="0"/>
+          <a:chExt cx="0" cy="0"/>
+        </a:xfrm>
+      </p:grpSpPr>
+      <p:sp>
+        <p:nvSpPr>
+          <p:cNvPr id="3" name="Content Placeholder 2">
+            <a:extLst>
+              <a:ext uri="{FF2B5EF4-FFF2-40B4-BE49-F238E27FC236}">
+                <a16:creationId xmlns:a16="http://schemas.microsoft.com/office/drawing/2014/main" id="{0B4960B8-5AE2-E906-364E-E11B7024E8BF}"/>
+              </a:ext>
+            </a:extLst>
+          </p:cNvPr>
+          <p:cNvSpPr>
+            <a:spLocks noGrp="1"/>
+          </p:cNvSpPr>
+          <p:nvPr>
+            <p:ph idx="1"/>
+          </p:nvPr>
+        </p:nvSpPr>
+        <p:spPr>
+          <a:xfrm>
+            <a:off x="702853" y="707571"/>
+            <a:ext cx="10900568" cy="5486400"/>
+          </a:xfrm>
+        </p:spPr>
+        <p:txBody>
+          <a:bodyPr>
+            <a:normAutofit/>
+          </a:bodyPr>
+          <a:lstStyle/>
+          <a:p>
+            <a:pPr marL="0" indent="0">
+              <a:buNone/>
+            </a:pPr>
+            <a:r>
+              <a:rPr lang="en-US" sz="2400" b="1" dirty="0"/>
+              <a:t>➕ Cluster B: </a:t>
+            </a:r>
+            <a:r>
+              <a:rPr lang="en-US" sz="2400" dirty="0"/>
+              <a:t>B1(8,8), B2(9,10), B3(10,9)</a:t>
+            </a:r>
+          </a:p>
+          <a:p>
+            <a:r>
+              <a:rPr lang="en-US" sz="2400" b="1" dirty="0"/>
+              <a:t>Centroid of Cluster B:</a:t>
+            </a:r>
+          </a:p>
+          <a:p>
+            <a:endParaRPr lang="en-US" sz="2400" b="1" dirty="0"/>
+          </a:p>
+          <a:p>
+            <a:endParaRPr lang="en-US" sz="2400" b="1" dirty="0"/>
+          </a:p>
+          <a:p>
+            <a:endParaRPr lang="en-US" sz="2400" b="1" dirty="0"/>
+          </a:p>
+          <a:p>
+            <a:endParaRPr lang="en-US" sz="2400" b="1" dirty="0"/>
+          </a:p>
+          <a:p>
+            <a:endParaRPr lang="en-US" sz="2400" b="1" dirty="0"/>
+          </a:p>
+          <a:p>
+            <a:r>
+              <a:rPr lang="en-US" sz="2800" dirty="0"/>
+              <a:t>Now calculate </a:t>
+            </a:r>
+            <a:r>
+              <a:rPr lang="en-US" sz="2800" b="1" dirty="0">
+                <a:solidFill>
+                  <a:schemeClr val="tx2">
+                    <a:lumMod val="75000"/>
+                    <a:lumOff val="25000"/>
+                  </a:schemeClr>
+                </a:solidFill>
+              </a:rPr>
+              <a:t>squared distances from each point </a:t>
+            </a:r>
+            <a:r>
+              <a:rPr lang="en-US" sz="2800" dirty="0"/>
+              <a:t>to the </a:t>
+            </a:r>
+            <a:r>
+              <a:rPr lang="en-US" sz="2800" b="1" dirty="0">
+                <a:solidFill>
+                  <a:schemeClr val="tx2">
+                    <a:lumMod val="75000"/>
+                    <a:lumOff val="25000"/>
+                  </a:schemeClr>
+                </a:solidFill>
+              </a:rPr>
+              <a:t>centroid</a:t>
+            </a:r>
+            <a:r>
+              <a:rPr lang="en-US" sz="2800" dirty="0"/>
+              <a:t> for Cluster B</a:t>
+            </a:r>
+            <a:endParaRPr lang="en-US" sz="2800" b="1" dirty="0"/>
+          </a:p>
+          <a:p>
+            <a:endParaRPr lang="en-IN" sz="2400" b="1" dirty="0"/>
+          </a:p>
+          <a:p>
+            <a:endParaRPr lang="en-US" sz="2400" b="1" dirty="0"/>
+          </a:p>
+          <a:p>
+            <a:pPr marL="0" indent="0">
+              <a:buNone/>
+            </a:pPr>
+            <a:endParaRPr lang="en-IN" sz="2800" dirty="0"/>
+          </a:p>
+        </p:txBody>
+      </p:sp>
+      <p:pic>
+        <p:nvPicPr>
+          <p:cNvPr id="4" name="Picture 3">
+            <a:extLst>
+              <a:ext uri="{FF2B5EF4-FFF2-40B4-BE49-F238E27FC236}">
+                <a16:creationId xmlns:a16="http://schemas.microsoft.com/office/drawing/2014/main" id="{02AE9942-342C-BF57-5C67-205B5C7E1A80}"/>
+              </a:ext>
+            </a:extLst>
+          </p:cNvPr>
+          <p:cNvPicPr>
+            <a:picLocks noChangeAspect="1"/>
+          </p:cNvPicPr>
+          <p:nvPr/>
+        </p:nvPicPr>
+        <p:blipFill>
+          <a:blip r:embed="rId2"/>
+          <a:stretch>
+            <a:fillRect/>
+          </a:stretch>
+        </p:blipFill>
+        <p:spPr>
+          <a:xfrm>
+            <a:off x="2645724" y="1845228"/>
+            <a:ext cx="6019305" cy="1215437"/>
+          </a:xfrm>
+          <a:prstGeom prst="rect">
+            <a:avLst/>
+          </a:prstGeom>
+        </p:spPr>
+      </p:pic>
+    </p:spTree>
+    <p:extLst>
+      <p:ext uri="{BB962C8B-B14F-4D97-AF65-F5344CB8AC3E}">
+        <p14:creationId xmlns:p14="http://schemas.microsoft.com/office/powerpoint/2010/main" val="2802643964"/>
+      </p:ext>
+    </p:extLst>
+  </p:cSld>
+  <p:clrMapOvr>
+    <a:masterClrMapping/>
+  </p:clrMapOvr>
+</p:sld>
+</file>
+
+<file path=ppt/slides/slide46.xml><?xml version="1.0" encoding="utf-8"?>
+<p:sld xmlns:a="http://schemas.openxmlformats.org/drawingml/2006/main" xmlns:r="http://schemas.openxmlformats.org/officeDocument/2006/relationships" xmlns:p="http://schemas.openxmlformats.org/presentationml/2006/main">
+  <p:cSld>
+    <p:spTree>
+      <p:nvGrpSpPr>
+        <p:cNvPr id="1" name="">
+          <a:extLst>
+            <a:ext uri="{FF2B5EF4-FFF2-40B4-BE49-F238E27FC236}">
+              <a16:creationId xmlns:a16="http://schemas.microsoft.com/office/drawing/2014/main" id="{29DA63FA-EE5F-5746-2365-0F2EEDD808F1}"/>
+            </a:ext>
+          </a:extLst>
+        </p:cNvPr>
+        <p:cNvGrpSpPr/>
+        <p:nvPr/>
+      </p:nvGrpSpPr>
+      <p:grpSpPr>
+        <a:xfrm>
+          <a:off x="0" y="0"/>
+          <a:ext cx="0" cy="0"/>
+          <a:chOff x="0" y="0"/>
+          <a:chExt cx="0" cy="0"/>
+        </a:xfrm>
+      </p:grpSpPr>
+      <p:sp>
+        <p:nvSpPr>
+          <p:cNvPr id="3" name="Content Placeholder 2">
+            <a:extLst>
+              <a:ext uri="{FF2B5EF4-FFF2-40B4-BE49-F238E27FC236}">
+                <a16:creationId xmlns:a16="http://schemas.microsoft.com/office/drawing/2014/main" id="{92E2CC4C-D021-5080-651F-CEBB5632018F}"/>
+              </a:ext>
+            </a:extLst>
+          </p:cNvPr>
+          <p:cNvSpPr>
+            <a:spLocks noGrp="1"/>
+          </p:cNvSpPr>
+          <p:nvPr>
+            <p:ph idx="1"/>
+          </p:nvPr>
+        </p:nvSpPr>
+        <p:spPr>
+          <a:xfrm>
+            <a:off x="702853" y="707571"/>
+            <a:ext cx="10900568" cy="5486400"/>
+          </a:xfrm>
+        </p:spPr>
+        <p:txBody>
+          <a:bodyPr>
+            <a:normAutofit/>
+          </a:bodyPr>
+          <a:lstStyle/>
+          <a:p>
+            <a:r>
+              <a:rPr lang="en-IN" sz="2400" b="1" dirty="0"/>
+              <a:t>B1 to centroid:</a:t>
+            </a:r>
+          </a:p>
+          <a:p>
+            <a:endParaRPr lang="en-IN" sz="2400" b="1" dirty="0"/>
+          </a:p>
+          <a:p>
+            <a:endParaRPr lang="en-IN" sz="2400" b="1" dirty="0"/>
+          </a:p>
+          <a:p>
+            <a:r>
+              <a:rPr lang="en-IN" sz="2400" b="1" dirty="0"/>
+              <a:t>B2 to centroid:</a:t>
+            </a:r>
+          </a:p>
+          <a:p>
+            <a:endParaRPr lang="en-IN" sz="2400" b="1" dirty="0"/>
+          </a:p>
+          <a:p>
+            <a:endParaRPr lang="en-IN" sz="2400" b="1" dirty="0"/>
+          </a:p>
+          <a:p>
+            <a:r>
+              <a:rPr lang="en-IN" sz="2400" b="1" dirty="0"/>
+              <a:t>B3 to centroid:</a:t>
+            </a:r>
+          </a:p>
+          <a:p>
+            <a:endParaRPr lang="en-IN" sz="2400" b="1" dirty="0"/>
+          </a:p>
+          <a:p>
+            <a:endParaRPr lang="en-IN" sz="2400" b="1" dirty="0"/>
+          </a:p>
+          <a:p>
+            <a:pPr marL="0" indent="0">
+              <a:buNone/>
+            </a:pPr>
+            <a:r>
+              <a:rPr lang="en-IN" sz="2400" b="1" dirty="0"/>
+              <a:t>👉 </a:t>
+            </a:r>
+            <a:r>
+              <a:rPr lang="en-IN" sz="2400" b="1" dirty="0">
+                <a:solidFill>
+                  <a:schemeClr val="tx2">
+                    <a:lumMod val="75000"/>
+                    <a:lumOff val="25000"/>
+                  </a:schemeClr>
+                </a:solidFill>
+              </a:rPr>
+              <a:t>SSE</a:t>
+            </a:r>
+            <a:r>
+              <a:rPr lang="en-IN" sz="2400" b="1" dirty="0"/>
+              <a:t> for </a:t>
+            </a:r>
+            <a:r>
+              <a:rPr lang="en-IN" sz="2400" b="1" dirty="0">
+                <a:solidFill>
+                  <a:schemeClr val="tx2">
+                    <a:lumMod val="75000"/>
+                    <a:lumOff val="25000"/>
+                  </a:schemeClr>
+                </a:solidFill>
+              </a:rPr>
+              <a:t>Cluster</a:t>
+            </a:r>
+            <a:r>
+              <a:rPr lang="en-IN" sz="2400" b="1" dirty="0"/>
+              <a:t> </a:t>
+            </a:r>
+            <a:r>
+              <a:rPr lang="en-IN" sz="2400" b="1" dirty="0">
+                <a:solidFill>
+                  <a:schemeClr val="tx2">
+                    <a:lumMod val="75000"/>
+                    <a:lumOff val="25000"/>
+                  </a:schemeClr>
+                </a:solidFill>
+              </a:rPr>
+              <a:t>B</a:t>
+            </a:r>
+            <a:r>
+              <a:rPr lang="en-IN" sz="2400" b="1" dirty="0"/>
+              <a:t> = 2 + 1 + 1 = </a:t>
+            </a:r>
+            <a:r>
+              <a:rPr lang="en-IN" sz="2400" b="1" dirty="0">
+                <a:solidFill>
+                  <a:schemeClr val="tx2">
+                    <a:lumMod val="75000"/>
+                    <a:lumOff val="25000"/>
+                  </a:schemeClr>
+                </a:solidFill>
+              </a:rPr>
+              <a:t>4</a:t>
+            </a:r>
+          </a:p>
+          <a:p>
+            <a:endParaRPr lang="en-IN" sz="2400" b="1" dirty="0"/>
+          </a:p>
+          <a:p>
+            <a:endParaRPr lang="en-IN" sz="2400" b="1" dirty="0"/>
+          </a:p>
+          <a:p>
+            <a:pPr marL="0" indent="0">
+              <a:buNone/>
+            </a:pPr>
+            <a:endParaRPr lang="en-IN" sz="2400" dirty="0"/>
+          </a:p>
+        </p:txBody>
+      </p:sp>
+      <p:pic>
+        <p:nvPicPr>
+          <p:cNvPr id="4" name="Picture 3">
+            <a:extLst>
+              <a:ext uri="{FF2B5EF4-FFF2-40B4-BE49-F238E27FC236}">
+                <a16:creationId xmlns:a16="http://schemas.microsoft.com/office/drawing/2014/main" id="{A4012B9F-35B1-B7BE-973B-D8048CBE0675}"/>
+              </a:ext>
+            </a:extLst>
+          </p:cNvPr>
+          <p:cNvPicPr>
+            <a:picLocks noChangeAspect="1"/>
+          </p:cNvPicPr>
+          <p:nvPr/>
+        </p:nvPicPr>
+        <p:blipFill>
+          <a:blip r:embed="rId2"/>
+          <a:srcRect t="77781" b="2375"/>
+          <a:stretch>
+            <a:fillRect/>
+          </a:stretch>
+        </p:blipFill>
+        <p:spPr>
+          <a:xfrm>
+            <a:off x="3047772" y="3450771"/>
+            <a:ext cx="7228571" cy="816428"/>
+          </a:xfrm>
+          <a:prstGeom prst="rect">
+            <a:avLst/>
+          </a:prstGeom>
+        </p:spPr>
+      </p:pic>
+      <p:pic>
+        <p:nvPicPr>
+          <p:cNvPr id="5" name="Picture 4">
+            <a:extLst>
+              <a:ext uri="{FF2B5EF4-FFF2-40B4-BE49-F238E27FC236}">
+                <a16:creationId xmlns:a16="http://schemas.microsoft.com/office/drawing/2014/main" id="{D5F71527-0A55-AE04-35F9-0F5E13EBFD5B}"/>
+              </a:ext>
+            </a:extLst>
+          </p:cNvPr>
+          <p:cNvPicPr>
+            <a:picLocks noChangeAspect="1"/>
+          </p:cNvPicPr>
+          <p:nvPr/>
+        </p:nvPicPr>
+        <p:blipFill>
+          <a:blip r:embed="rId2"/>
+          <a:srcRect t="40475" b="39682"/>
+          <a:stretch>
+            <a:fillRect/>
+          </a:stretch>
+        </p:blipFill>
+        <p:spPr>
+          <a:xfrm>
+            <a:off x="3047772" y="2005693"/>
+            <a:ext cx="7228571" cy="816428"/>
+          </a:xfrm>
+          <a:prstGeom prst="rect">
+            <a:avLst/>
+          </a:prstGeom>
+        </p:spPr>
+      </p:pic>
+      <p:pic>
+        <p:nvPicPr>
+          <p:cNvPr id="6" name="Picture 5">
+            <a:extLst>
+              <a:ext uri="{FF2B5EF4-FFF2-40B4-BE49-F238E27FC236}">
+                <a16:creationId xmlns:a16="http://schemas.microsoft.com/office/drawing/2014/main" id="{A8BDC228-548A-E046-65AD-FCB07CFFD46B}"/>
+              </a:ext>
+            </a:extLst>
+          </p:cNvPr>
+          <p:cNvPicPr>
+            <a:picLocks noChangeAspect="1"/>
+          </p:cNvPicPr>
+          <p:nvPr/>
+        </p:nvPicPr>
+        <p:blipFill>
+          <a:blip r:embed="rId2"/>
+          <a:srcRect t="3169" b="76987"/>
+          <a:stretch>
+            <a:fillRect/>
+          </a:stretch>
+        </p:blipFill>
+        <p:spPr>
+          <a:xfrm>
+            <a:off x="3047772" y="664029"/>
+            <a:ext cx="7228571" cy="816428"/>
+          </a:xfrm>
+          <a:prstGeom prst="rect">
+            <a:avLst/>
+          </a:prstGeom>
+        </p:spPr>
+      </p:pic>
+    </p:spTree>
+    <p:extLst>
+      <p:ext uri="{BB962C8B-B14F-4D97-AF65-F5344CB8AC3E}">
+        <p14:creationId xmlns:p14="http://schemas.microsoft.com/office/powerpoint/2010/main" val="1988245452"/>
+      </p:ext>
+    </p:extLst>
+  </p:cSld>
+  <p:clrMapOvr>
+    <a:masterClrMapping/>
+  </p:clrMapOvr>
+</p:sld>
+</file>
+
+<file path=ppt/slides/slide47.xml><?xml version="1.0" encoding="utf-8"?>
+<p:sld xmlns:a="http://schemas.openxmlformats.org/drawingml/2006/main" xmlns:r="http://schemas.openxmlformats.org/officeDocument/2006/relationships" xmlns:p="http://schemas.openxmlformats.org/presentationml/2006/main">
+  <p:cSld>
+    <p:spTree>
+      <p:nvGrpSpPr>
+        <p:cNvPr id="1" name="">
+          <a:extLst>
+            <a:ext uri="{FF2B5EF4-FFF2-40B4-BE49-F238E27FC236}">
+              <a16:creationId xmlns:a16="http://schemas.microsoft.com/office/drawing/2014/main" id="{0C54F2F0-A2B8-0189-23B0-7B4878CC8D99}"/>
+            </a:ext>
+          </a:extLst>
+        </p:cNvPr>
+        <p:cNvGrpSpPr/>
+        <p:nvPr/>
+      </p:nvGrpSpPr>
+      <p:grpSpPr>
+        <a:xfrm>
+          <a:off x="0" y="0"/>
+          <a:ext cx="0" cy="0"/>
+          <a:chOff x="0" y="0"/>
+          <a:chExt cx="0" cy="0"/>
+        </a:xfrm>
+      </p:grpSpPr>
+      <p:sp>
+        <p:nvSpPr>
+          <p:cNvPr id="3" name="Content Placeholder 2">
+            <a:extLst>
+              <a:ext uri="{FF2B5EF4-FFF2-40B4-BE49-F238E27FC236}">
+                <a16:creationId xmlns:a16="http://schemas.microsoft.com/office/drawing/2014/main" id="{E5644C78-2613-9265-AABF-3AFEA9DDCFFD}"/>
+              </a:ext>
+            </a:extLst>
+          </p:cNvPr>
+          <p:cNvSpPr>
+            <a:spLocks noGrp="1"/>
+          </p:cNvSpPr>
+          <p:nvPr>
+            <p:ph idx="1"/>
+          </p:nvPr>
+        </p:nvSpPr>
+        <p:spPr>
+          <a:xfrm>
+            <a:off x="702853" y="707571"/>
+            <a:ext cx="10900568" cy="5486400"/>
+          </a:xfrm>
+        </p:spPr>
+        <p:txBody>
+          <a:bodyPr>
+            <a:normAutofit/>
+          </a:bodyPr>
+          <a:lstStyle/>
+          <a:p>
+            <a:pPr marL="0" indent="0">
+              <a:buNone/>
+            </a:pPr>
+            <a:r>
+              <a:rPr lang="en-IN" sz="2800" b="1" dirty="0">
+                <a:solidFill>
+                  <a:schemeClr val="tx2">
+                    <a:lumMod val="75000"/>
+                    <a:lumOff val="25000"/>
+                  </a:schemeClr>
+                </a:solidFill>
+              </a:rPr>
+              <a:t>Total Inertia (SSE) </a:t>
+            </a:r>
+            <a:r>
+              <a:rPr lang="en-IN" sz="2800" dirty="0"/>
+              <a:t>= 2.66 + 4 = </a:t>
+            </a:r>
+            <a:r>
+              <a:rPr lang="en-IN" sz="2800" b="1" dirty="0">
+                <a:solidFill>
+                  <a:schemeClr val="tx2">
+                    <a:lumMod val="75000"/>
+                    <a:lumOff val="25000"/>
+                  </a:schemeClr>
+                </a:solidFill>
+              </a:rPr>
+              <a:t>6.66</a:t>
+            </a:r>
+          </a:p>
+          <a:p>
+            <a:pPr marL="0" indent="0">
+              <a:buNone/>
+            </a:pPr>
+            <a:endParaRPr lang="en-IN" sz="2400" dirty="0"/>
+          </a:p>
+          <a:p>
+            <a:pPr marL="0" indent="0">
+              <a:buNone/>
+            </a:pPr>
+            <a:r>
+              <a:rPr lang="en-IN" sz="2800" b="1" dirty="0"/>
+              <a:t>Conclusion:</a:t>
+            </a:r>
+          </a:p>
+          <a:p>
+            <a:pPr marL="0" indent="0">
+              <a:buNone/>
+            </a:pPr>
+            <a:endParaRPr lang="en-IN" sz="2400" dirty="0"/>
+          </a:p>
+          <a:p>
+            <a:pPr marL="0" indent="0">
+              <a:buNone/>
+            </a:pPr>
+            <a:endParaRPr lang="en-IN" sz="2800" dirty="0"/>
+          </a:p>
+        </p:txBody>
+      </p:sp>
+      <p:graphicFrame>
+        <p:nvGraphicFramePr>
+          <p:cNvPr id="2" name="Table 1">
+            <a:extLst>
+              <a:ext uri="{FF2B5EF4-FFF2-40B4-BE49-F238E27FC236}">
+                <a16:creationId xmlns:a16="http://schemas.microsoft.com/office/drawing/2014/main" id="{0832A4A3-6F0D-949E-F36D-23F03DAAD87E}"/>
+              </a:ext>
+            </a:extLst>
+          </p:cNvPr>
+          <p:cNvGraphicFramePr>
+            <a:graphicFrameLocks noGrp="1"/>
+          </p:cNvGraphicFramePr>
+          <p:nvPr>
+            <p:extLst>
+              <p:ext uri="{D42A27DB-BD31-4B8C-83A1-F6EECF244321}">
+                <p14:modId xmlns:p14="http://schemas.microsoft.com/office/powerpoint/2010/main" val="2002789784"/>
+              </p:ext>
+            </p:extLst>
+          </p:nvPr>
+        </p:nvGraphicFramePr>
+        <p:xfrm>
+          <a:off x="1208904" y="2280158"/>
+          <a:ext cx="9698582" cy="1616929"/>
+        </p:xfrm>
+        <a:graphic>
+          <a:graphicData uri="http://schemas.openxmlformats.org/drawingml/2006/table">
+            <a:tbl>
+              <a:tblPr firstRow="1" firstCol="1" bandRow="1">
+                <a:tableStyleId>{5C22544A-7EE6-4342-B048-85BDC9FD1C3A}</a:tableStyleId>
+              </a:tblPr>
+              <a:tblGrid>
+                <a:gridCol w="2542873">
+                  <a:extLst>
+                    <a:ext uri="{9D8B030D-6E8A-4147-A177-3AD203B41FA5}">
+                      <a16:colId xmlns:a16="http://schemas.microsoft.com/office/drawing/2014/main" val="1559825982"/>
+                    </a:ext>
+                  </a:extLst>
+                </a:gridCol>
+                <a:gridCol w="1375394">
+                  <a:extLst>
+                    <a:ext uri="{9D8B030D-6E8A-4147-A177-3AD203B41FA5}">
+                      <a16:colId xmlns:a16="http://schemas.microsoft.com/office/drawing/2014/main" val="3615750455"/>
+                    </a:ext>
+                  </a:extLst>
+                </a:gridCol>
+                <a:gridCol w="5780315">
+                  <a:extLst>
+                    <a:ext uri="{9D8B030D-6E8A-4147-A177-3AD203B41FA5}">
+                      <a16:colId xmlns:a16="http://schemas.microsoft.com/office/drawing/2014/main" val="1452286803"/>
+                    </a:ext>
+                  </a:extLst>
+                </a:gridCol>
+              </a:tblGrid>
+              <a:tr h="400444">
+                <a:tc>
+                  <a:txBody>
+                    <a:bodyPr/>
+                    <a:lstStyle/>
+                    <a:p>
+                      <a:pPr>
+                        <a:lnSpc>
+                          <a:spcPct val="107000"/>
+                        </a:lnSpc>
+                        <a:spcAft>
+                          <a:spcPts val="800"/>
+                        </a:spcAft>
+                        <a:buNone/>
+                      </a:pPr>
+                      <a:r>
+                        <a:rPr lang="en-US" sz="2400" kern="100">
+                          <a:effectLst/>
+                        </a:rPr>
+                        <a:t>A</a:t>
+                      </a:r>
+                      <a:r>
+                        <a:rPr lang="en-IN" sz="2400" kern="100">
+                          <a:effectLst/>
+                        </a:rPr>
+                        <a:t>Metric</a:t>
+                      </a:r>
+                      <a:endParaRPr lang="en-IN" sz="2400" kern="100">
+                        <a:effectLst/>
+                        <a:latin typeface="Aptos" panose="020B0004020202020204" pitchFamily="34" charset="0"/>
+                        <a:ea typeface="Aptos" panose="020B0004020202020204" pitchFamily="34" charset="0"/>
+                        <a:cs typeface="Tunga" panose="020B0502040204020203" pitchFamily="34" charset="0"/>
+                      </a:endParaRPr>
+                    </a:p>
+                  </a:txBody>
+                  <a:tcPr marL="68580" marR="68580" marT="0" marB="0"/>
+                </a:tc>
+                <a:tc>
+                  <a:txBody>
+                    <a:bodyPr/>
+                    <a:lstStyle/>
+                    <a:p>
+                      <a:pPr>
+                        <a:lnSpc>
+                          <a:spcPct val="107000"/>
+                        </a:lnSpc>
+                        <a:spcAft>
+                          <a:spcPts val="800"/>
+                        </a:spcAft>
+                        <a:buNone/>
+                      </a:pPr>
+                      <a:r>
+                        <a:rPr lang="en-IN" sz="2400" kern="100">
+                          <a:effectLst/>
+                        </a:rPr>
+                        <a:t>Value</a:t>
+                      </a:r>
+                      <a:endParaRPr lang="en-IN" sz="2400" kern="100">
+                        <a:effectLst/>
+                        <a:latin typeface="Aptos" panose="020B0004020202020204" pitchFamily="34" charset="0"/>
+                        <a:ea typeface="Aptos" panose="020B0004020202020204" pitchFamily="34" charset="0"/>
+                        <a:cs typeface="Tunga" panose="020B0502040204020203" pitchFamily="34" charset="0"/>
+                      </a:endParaRPr>
+                    </a:p>
+                  </a:txBody>
+                  <a:tcPr marL="68580" marR="68580" marT="0" marB="0"/>
+                </a:tc>
+                <a:tc>
+                  <a:txBody>
+                    <a:bodyPr/>
+                    <a:lstStyle/>
+                    <a:p>
+                      <a:pPr>
+                        <a:lnSpc>
+                          <a:spcPct val="107000"/>
+                        </a:lnSpc>
+                        <a:spcAft>
+                          <a:spcPts val="800"/>
+                        </a:spcAft>
+                        <a:buNone/>
+                      </a:pPr>
+                      <a:r>
+                        <a:rPr lang="en-IN" sz="2400" kern="100">
+                          <a:effectLst/>
+                        </a:rPr>
+                        <a:t>Meaning</a:t>
+                      </a:r>
+                      <a:endParaRPr lang="en-IN" sz="2400" kern="100">
+                        <a:effectLst/>
+                        <a:latin typeface="Aptos" panose="020B0004020202020204" pitchFamily="34" charset="0"/>
+                        <a:ea typeface="Aptos" panose="020B0004020202020204" pitchFamily="34" charset="0"/>
+                        <a:cs typeface="Tunga" panose="020B0502040204020203" pitchFamily="34" charset="0"/>
+                      </a:endParaRPr>
+                    </a:p>
+                  </a:txBody>
+                  <a:tcPr marL="68580" marR="68580" marT="0" marB="0"/>
+                </a:tc>
+                <a:extLst>
+                  <a:ext uri="{0D108BD9-81ED-4DB2-BD59-A6C34878D82A}">
+                    <a16:rowId xmlns:a16="http://schemas.microsoft.com/office/drawing/2014/main" val="2369521064"/>
+                  </a:ext>
+                </a:extLst>
+              </a:tr>
+              <a:tr h="400444">
+                <a:tc>
+                  <a:txBody>
+                    <a:bodyPr/>
+                    <a:lstStyle/>
+                    <a:p>
+                      <a:pPr>
+                        <a:lnSpc>
+                          <a:spcPct val="107000"/>
+                        </a:lnSpc>
+                        <a:spcAft>
+                          <a:spcPts val="800"/>
+                        </a:spcAft>
+                        <a:buNone/>
+                      </a:pPr>
+                      <a:r>
+                        <a:rPr lang="en-IN" sz="2400" kern="100">
+                          <a:effectLst/>
+                        </a:rPr>
+                        <a:t>Inertia (SSE)</a:t>
+                      </a:r>
+                      <a:endParaRPr lang="en-IN" sz="2400" kern="100">
+                        <a:effectLst/>
+                        <a:latin typeface="Aptos" panose="020B0004020202020204" pitchFamily="34" charset="0"/>
+                        <a:ea typeface="Aptos" panose="020B0004020202020204" pitchFamily="34" charset="0"/>
+                        <a:cs typeface="Tunga" panose="020B0502040204020203" pitchFamily="34" charset="0"/>
+                      </a:endParaRPr>
+                    </a:p>
+                  </a:txBody>
+                  <a:tcPr marL="68580" marR="68580" marT="0" marB="0"/>
+                </a:tc>
+                <a:tc>
+                  <a:txBody>
+                    <a:bodyPr/>
+                    <a:lstStyle/>
+                    <a:p>
+                      <a:pPr>
+                        <a:lnSpc>
+                          <a:spcPct val="107000"/>
+                        </a:lnSpc>
+                        <a:spcAft>
+                          <a:spcPts val="800"/>
+                        </a:spcAft>
+                        <a:buNone/>
+                      </a:pPr>
+                      <a:r>
+                        <a:rPr lang="en-IN" sz="2400" kern="100">
+                          <a:effectLst/>
+                        </a:rPr>
+                        <a:t>6.66</a:t>
+                      </a:r>
+                      <a:endParaRPr lang="en-IN" sz="2400" kern="100">
+                        <a:effectLst/>
+                        <a:latin typeface="Aptos" panose="020B0004020202020204" pitchFamily="34" charset="0"/>
+                        <a:ea typeface="Aptos" panose="020B0004020202020204" pitchFamily="34" charset="0"/>
+                        <a:cs typeface="Tunga" panose="020B0502040204020203" pitchFamily="34" charset="0"/>
+                      </a:endParaRPr>
+                    </a:p>
+                  </a:txBody>
+                  <a:tcPr marL="68580" marR="68580" marT="0" marB="0"/>
+                </a:tc>
+                <a:tc>
+                  <a:txBody>
+                    <a:bodyPr/>
+                    <a:lstStyle/>
+                    <a:p>
+                      <a:pPr>
+                        <a:lnSpc>
+                          <a:spcPct val="107000"/>
+                        </a:lnSpc>
+                        <a:spcAft>
+                          <a:spcPts val="800"/>
+                        </a:spcAft>
+                        <a:buNone/>
+                      </a:pPr>
+                      <a:r>
+                        <a:rPr lang="en-IN" sz="2400" kern="100" dirty="0">
+                          <a:effectLst/>
+                        </a:rPr>
+                        <a:t>How compact all clusters are</a:t>
+                      </a:r>
+                      <a:endParaRPr lang="en-IN" sz="2400" kern="100" dirty="0">
+                        <a:effectLst/>
+                        <a:latin typeface="Aptos" panose="020B0004020202020204" pitchFamily="34" charset="0"/>
+                        <a:ea typeface="Aptos" panose="020B0004020202020204" pitchFamily="34" charset="0"/>
+                        <a:cs typeface="Tunga" panose="020B0502040204020203" pitchFamily="34" charset="0"/>
+                      </a:endParaRPr>
+                    </a:p>
+                  </a:txBody>
+                  <a:tcPr marL="68580" marR="68580" marT="0" marB="0"/>
+                </a:tc>
+                <a:extLst>
+                  <a:ext uri="{0D108BD9-81ED-4DB2-BD59-A6C34878D82A}">
+                    <a16:rowId xmlns:a16="http://schemas.microsoft.com/office/drawing/2014/main" val="2644347281"/>
+                  </a:ext>
+                </a:extLst>
+              </a:tr>
+              <a:tr h="816041">
+                <a:tc>
+                  <a:txBody>
+                    <a:bodyPr/>
+                    <a:lstStyle/>
+                    <a:p>
+                      <a:pPr>
+                        <a:lnSpc>
+                          <a:spcPct val="107000"/>
+                        </a:lnSpc>
+                        <a:spcAft>
+                          <a:spcPts val="800"/>
+                        </a:spcAft>
+                        <a:buNone/>
+                      </a:pPr>
+                      <a:r>
+                        <a:rPr lang="en-IN" sz="2400" kern="100">
+                          <a:effectLst/>
+                        </a:rPr>
+                        <a:t>Lower is better</a:t>
+                      </a:r>
+                      <a:endParaRPr lang="en-IN" sz="2400" kern="100">
+                        <a:effectLst/>
+                        <a:latin typeface="Aptos" panose="020B0004020202020204" pitchFamily="34" charset="0"/>
+                        <a:ea typeface="Aptos" panose="020B0004020202020204" pitchFamily="34" charset="0"/>
+                        <a:cs typeface="Tunga" panose="020B0502040204020203" pitchFamily="34" charset="0"/>
+                      </a:endParaRPr>
+                    </a:p>
+                  </a:txBody>
+                  <a:tcPr marL="68580" marR="68580" marT="0" marB="0"/>
+                </a:tc>
+                <a:tc>
+                  <a:txBody>
+                    <a:bodyPr/>
+                    <a:lstStyle/>
+                    <a:p>
+                      <a:pPr>
+                        <a:lnSpc>
+                          <a:spcPct val="107000"/>
+                        </a:lnSpc>
+                        <a:spcAft>
+                          <a:spcPts val="800"/>
+                        </a:spcAft>
+                        <a:buNone/>
+                      </a:pPr>
+                      <a:r>
+                        <a:rPr lang="en-IN" sz="2400" kern="100">
+                          <a:effectLst/>
+                        </a:rPr>
+                        <a:t>✔</a:t>
+                      </a:r>
+                      <a:endParaRPr lang="en-IN" sz="2400" kern="100">
+                        <a:effectLst/>
+                        <a:latin typeface="Aptos" panose="020B0004020202020204" pitchFamily="34" charset="0"/>
+                        <a:ea typeface="Aptos" panose="020B0004020202020204" pitchFamily="34" charset="0"/>
+                        <a:cs typeface="Tunga" panose="020B0502040204020203" pitchFamily="34" charset="0"/>
+                      </a:endParaRPr>
+                    </a:p>
+                  </a:txBody>
+                  <a:tcPr marL="68580" marR="68580" marT="0" marB="0"/>
+                </a:tc>
+                <a:tc>
+                  <a:txBody>
+                    <a:bodyPr/>
+                    <a:lstStyle/>
+                    <a:p>
+                      <a:pPr>
+                        <a:lnSpc>
+                          <a:spcPct val="107000"/>
+                        </a:lnSpc>
+                        <a:spcAft>
+                          <a:spcPts val="800"/>
+                        </a:spcAft>
+                        <a:buNone/>
+                      </a:pPr>
+                      <a:r>
+                        <a:rPr lang="en-IN" sz="2400" kern="100" dirty="0">
+                          <a:effectLst/>
+                        </a:rPr>
+                        <a:t>But don’t make too many clusters</a:t>
+                      </a:r>
+                      <a:endParaRPr lang="en-IN" sz="2400" kern="100" dirty="0">
+                        <a:effectLst/>
+                        <a:latin typeface="Aptos" panose="020B0004020202020204" pitchFamily="34" charset="0"/>
+                        <a:ea typeface="Aptos" panose="020B0004020202020204" pitchFamily="34" charset="0"/>
+                        <a:cs typeface="Tunga" panose="020B0502040204020203" pitchFamily="34" charset="0"/>
+                      </a:endParaRPr>
+                    </a:p>
+                  </a:txBody>
+                  <a:tcPr marL="68580" marR="68580" marT="0" marB="0"/>
+                </a:tc>
+                <a:extLst>
+                  <a:ext uri="{0D108BD9-81ED-4DB2-BD59-A6C34878D82A}">
+                    <a16:rowId xmlns:a16="http://schemas.microsoft.com/office/drawing/2014/main" val="2505430840"/>
+                  </a:ext>
+                </a:extLst>
+              </a:tr>
+            </a:tbl>
+          </a:graphicData>
+        </a:graphic>
+      </p:graphicFrame>
+    </p:spTree>
+    <p:extLst>
+      <p:ext uri="{BB962C8B-B14F-4D97-AF65-F5344CB8AC3E}">
+        <p14:creationId xmlns:p14="http://schemas.microsoft.com/office/powerpoint/2010/main" val="1290250124"/>
+      </p:ext>
+    </p:extLst>
+  </p:cSld>
+  <p:clrMapOvr>
+    <a:masterClrMapping/>
+  </p:clrMapOvr>
+</p:sld>
+</file>
+
+<file path=ppt/slides/slide48.xml><?xml version="1.0" encoding="utf-8"?>
+<p:sld xmlns:a="http://schemas.openxmlformats.org/drawingml/2006/main" xmlns:r="http://schemas.openxmlformats.org/officeDocument/2006/relationships" xmlns:p="http://schemas.openxmlformats.org/presentationml/2006/main">
+  <p:cSld>
+    <p:spTree>
+      <p:nvGrpSpPr>
+        <p:cNvPr id="1" name="">
+          <a:extLst>
+            <a:ext uri="{FF2B5EF4-FFF2-40B4-BE49-F238E27FC236}">
+              <a16:creationId xmlns:a16="http://schemas.microsoft.com/office/drawing/2014/main" id="{AD0CA548-D05F-D88F-69B1-1CA3F1C09213}"/>
+            </a:ext>
+          </a:extLst>
+        </p:cNvPr>
+        <p:cNvGrpSpPr/>
+        <p:nvPr/>
+      </p:nvGrpSpPr>
+      <p:grpSpPr>
+        <a:xfrm>
+          <a:off x="0" y="0"/>
+          <a:ext cx="0" cy="0"/>
+          <a:chOff x="0" y="0"/>
+          <a:chExt cx="0" cy="0"/>
+        </a:xfrm>
+      </p:grpSpPr>
+      <p:sp>
+        <p:nvSpPr>
+          <p:cNvPr id="2" name="TextBox 1">
+            <a:extLst>
+              <a:ext uri="{FF2B5EF4-FFF2-40B4-BE49-F238E27FC236}">
+                <a16:creationId xmlns:a16="http://schemas.microsoft.com/office/drawing/2014/main" id="{33A8C71F-0EB3-C855-A476-343871A042B8}"/>
+              </a:ext>
+            </a:extLst>
+          </p:cNvPr>
+          <p:cNvSpPr txBox="1"/>
+          <p:nvPr/>
+        </p:nvSpPr>
+        <p:spPr>
+          <a:xfrm>
+            <a:off x="437321" y="221676"/>
+            <a:ext cx="11062253" cy="1815882"/>
+          </a:xfrm>
+          <a:prstGeom prst="rect">
+            <a:avLst/>
+          </a:prstGeom>
+          <a:noFill/>
+        </p:spPr>
+        <p:txBody>
+          <a:bodyPr wrap="square">
+            <a:spAutoFit/>
+          </a:bodyPr>
+          <a:lstStyle/>
+          <a:p>
+            <a:r>
+              <a:rPr lang="en-US" sz="2400" b="1" dirty="0">
+                <a:solidFill>
+                  <a:srgbClr val="002060"/>
+                </a:solidFill>
+              </a:rPr>
+              <a:t>How to Determine Correct Number of Clusters (K): (</a:t>
+            </a:r>
+            <a:r>
+              <a:rPr lang="en-US" sz="2400" b="1" dirty="0">
+                <a:solidFill>
+                  <a:schemeClr val="tx2">
+                    <a:lumMod val="75000"/>
+                    <a:lumOff val="25000"/>
+                  </a:schemeClr>
+                </a:solidFill>
+              </a:rPr>
+              <a:t>Elbow Method</a:t>
+            </a:r>
+            <a:r>
+              <a:rPr lang="en-US" sz="2400" b="1" dirty="0"/>
+              <a:t>)</a:t>
+            </a:r>
+          </a:p>
+          <a:p>
+            <a:r>
+              <a:rPr lang="en-US" sz="2200" dirty="0"/>
+              <a:t>Find </a:t>
+            </a:r>
+            <a:r>
+              <a:rPr lang="en-US" sz="2200" b="1" dirty="0">
+                <a:solidFill>
+                  <a:schemeClr val="accent6"/>
+                </a:solidFill>
+              </a:rPr>
+              <a:t>Sum of Squared Errors (SSE) </a:t>
+            </a:r>
+            <a:r>
+              <a:rPr lang="en-US" sz="2200" b="1" dirty="0"/>
+              <a:t>for Each Cluster in Each Iteration. </a:t>
+            </a:r>
+          </a:p>
+          <a:p>
+            <a:r>
+              <a:rPr lang="en-US" sz="2200" dirty="0"/>
+              <a:t>Which means For each of the cluster you try to </a:t>
+            </a:r>
+            <a:r>
+              <a:rPr lang="en-US" sz="2200" b="1" dirty="0">
+                <a:solidFill>
+                  <a:srgbClr val="C00000"/>
+                </a:solidFill>
+              </a:rPr>
+              <a:t>compute the distance of individual data point from the centroid and then square it and sum it up</a:t>
+            </a:r>
+            <a:r>
+              <a:rPr lang="en-US" sz="2200" dirty="0"/>
+              <a:t>. Do the same for all of the clusters you have and at the end you will get the following: </a:t>
+            </a:r>
+            <a:r>
+              <a:rPr lang="en-US" sz="2200" b="1" dirty="0"/>
+              <a:t>SSE1 + SSE2 + ………… + </a:t>
+            </a:r>
+            <a:r>
+              <a:rPr lang="en-US" sz="2200" b="1" dirty="0" err="1"/>
+              <a:t>SSEk</a:t>
+            </a:r>
+            <a:endParaRPr lang="en-US" sz="2200" b="1" dirty="0"/>
+          </a:p>
+        </p:txBody>
+      </p:sp>
+      <p:grpSp>
+        <p:nvGrpSpPr>
+          <p:cNvPr id="6" name="Group 5">
+            <a:extLst>
+              <a:ext uri="{FF2B5EF4-FFF2-40B4-BE49-F238E27FC236}">
+                <a16:creationId xmlns:a16="http://schemas.microsoft.com/office/drawing/2014/main" id="{F912232D-209F-E237-1D76-0F879F5B9E0B}"/>
+              </a:ext>
+            </a:extLst>
+          </p:cNvPr>
+          <p:cNvGrpSpPr/>
+          <p:nvPr/>
+        </p:nvGrpSpPr>
+        <p:grpSpPr>
+          <a:xfrm>
+            <a:off x="1514672" y="1976002"/>
+            <a:ext cx="9162656" cy="4881998"/>
+            <a:chOff x="1514672" y="1976002"/>
+            <a:chExt cx="9162656" cy="4881998"/>
+          </a:xfrm>
+        </p:grpSpPr>
+        <p:pic>
+          <p:nvPicPr>
+            <p:cNvPr id="4" name="Picture 3">
+              <a:extLst>
+                <a:ext uri="{FF2B5EF4-FFF2-40B4-BE49-F238E27FC236}">
+                  <a16:creationId xmlns:a16="http://schemas.microsoft.com/office/drawing/2014/main" id="{0953A063-ED2B-A9C8-73CB-30F905594EF2}"/>
+                </a:ext>
+              </a:extLst>
+            </p:cNvPr>
+            <p:cNvPicPr>
+              <a:picLocks noChangeAspect="1"/>
+            </p:cNvPicPr>
+            <p:nvPr/>
+          </p:nvPicPr>
+          <p:blipFill>
+            <a:blip r:embed="rId2">
+              <a:extLst>
+                <a:ext uri="{28A0092B-C50C-407E-A947-70E740481C1C}">
+                  <a14:useLocalDpi xmlns:a14="http://schemas.microsoft.com/office/drawing/2010/main" val="0"/>
+                </a:ext>
+              </a:extLst>
+            </a:blip>
+            <a:stretch>
+              <a:fillRect/>
+            </a:stretch>
+          </p:blipFill>
+          <p:spPr>
+            <a:xfrm>
+              <a:off x="1514672" y="1976002"/>
+              <a:ext cx="8552727" cy="4881998"/>
+            </a:xfrm>
+            <a:prstGeom prst="rect">
+              <a:avLst/>
+            </a:prstGeom>
+          </p:spPr>
+        </p:pic>
+        <p:sp>
+          <p:nvSpPr>
+            <p:cNvPr id="5" name="Rectangle 4">
+              <a:extLst>
+                <a:ext uri="{FF2B5EF4-FFF2-40B4-BE49-F238E27FC236}">
+                  <a16:creationId xmlns:a16="http://schemas.microsoft.com/office/drawing/2014/main" id="{A497A2CB-0835-A1CC-D30A-65639A0D4FA7}"/>
+                </a:ext>
+              </a:extLst>
+            </p:cNvPr>
+            <p:cNvSpPr/>
+            <p:nvPr/>
+          </p:nvSpPr>
+          <p:spPr>
+            <a:xfrm>
+              <a:off x="8642845" y="5949885"/>
+              <a:ext cx="2034483" cy="908115"/>
+            </a:xfrm>
+            <a:prstGeom prst="rect">
+              <a:avLst/>
+            </a:prstGeom>
+            <a:solidFill>
+              <a:schemeClr val="bg1"/>
+            </a:solidFill>
+            <a:ln>
+              <a:solidFill>
+                <a:schemeClr val="bg1"/>
+              </a:solidFill>
+            </a:ln>
+          </p:spPr>
+          <p:style>
+            <a:lnRef idx="2">
+              <a:schemeClr val="accent1">
+                <a:shade val="15000"/>
+              </a:schemeClr>
+            </a:lnRef>
+            <a:fillRef idx="1">
+              <a:schemeClr val="accent1"/>
+            </a:fillRef>
+            <a:effectRef idx="0">
+              <a:schemeClr val="accent1"/>
+            </a:effectRef>
+            <a:fontRef idx="minor">
+              <a:schemeClr val="lt1"/>
+            </a:fontRef>
+          </p:style>
+          <p:txBody>
+            <a:bodyPr rtlCol="0" anchor="ctr"/>
+            <a:lstStyle/>
+            <a:p>
+              <a:pPr algn="ctr"/>
+              <a:endParaRPr lang="en-US">
+                <a:ln>
+                  <a:solidFill>
+                    <a:schemeClr val="bg1"/>
+                  </a:solidFill>
+                </a:ln>
+              </a:endParaRPr>
+            </a:p>
+          </p:txBody>
+        </p:sp>
+      </p:grpSp>
+    </p:spTree>
+    <p:extLst>
+      <p:ext uri="{BB962C8B-B14F-4D97-AF65-F5344CB8AC3E}">
+        <p14:creationId xmlns:p14="http://schemas.microsoft.com/office/powerpoint/2010/main" val="1626295152"/>
+      </p:ext>
+    </p:extLst>
+  </p:cSld>
+  <p:clrMapOvr>
+    <a:masterClrMapping/>
+  </p:clrMapOvr>
+</p:sld>
+</file>
+
+<file path=ppt/slides/slide49.xml><?xml version="1.0" encoding="utf-8"?>
+<p:sld xmlns:a="http://schemas.openxmlformats.org/drawingml/2006/main" xmlns:r="http://schemas.openxmlformats.org/officeDocument/2006/relationships" xmlns:p="http://schemas.openxmlformats.org/presentationml/2006/main">
+  <p:cSld>
+    <p:spTree>
+      <p:nvGrpSpPr>
+        <p:cNvPr id="1" name="">
+          <a:extLst>
+            <a:ext uri="{FF2B5EF4-FFF2-40B4-BE49-F238E27FC236}">
+              <a16:creationId xmlns:a16="http://schemas.microsoft.com/office/drawing/2014/main" id="{405CE768-31BE-68AD-B4E9-F6A9338239B2}"/>
+            </a:ext>
+          </a:extLst>
+        </p:cNvPr>
+        <p:cNvGrpSpPr/>
+        <p:nvPr/>
+      </p:nvGrpSpPr>
+      <p:grpSpPr>
+        <a:xfrm>
+          <a:off x="0" y="0"/>
+          <a:ext cx="0" cy="0"/>
+          <a:chOff x="0" y="0"/>
+          <a:chExt cx="0" cy="0"/>
+        </a:xfrm>
+      </p:grpSpPr>
+      <p:sp>
+        <p:nvSpPr>
+          <p:cNvPr id="2" name="TextBox 1">
+            <a:extLst>
+              <a:ext uri="{FF2B5EF4-FFF2-40B4-BE49-F238E27FC236}">
+                <a16:creationId xmlns:a16="http://schemas.microsoft.com/office/drawing/2014/main" id="{2CE9C6C3-2F7D-F427-426E-E99E0CAB4F08}"/>
+              </a:ext>
+            </a:extLst>
+          </p:cNvPr>
+          <p:cNvSpPr txBox="1"/>
+          <p:nvPr/>
+        </p:nvSpPr>
+        <p:spPr>
+          <a:xfrm>
+            <a:off x="437321" y="221676"/>
+            <a:ext cx="11062253" cy="830997"/>
+          </a:xfrm>
+          <a:prstGeom prst="rect">
+            <a:avLst/>
+          </a:prstGeom>
+          <a:noFill/>
+        </p:spPr>
+        <p:txBody>
+          <a:bodyPr wrap="square">
+            <a:spAutoFit/>
+          </a:bodyPr>
+          <a:lstStyle/>
+          <a:p>
+            <a:r>
+              <a:rPr lang="en-US" sz="2400" dirty="0"/>
+              <a:t>	Once we get SSE for all the Clusters then we will </a:t>
+            </a:r>
+            <a:r>
+              <a:rPr lang="en-US" sz="2400" b="1" dirty="0">
+                <a:solidFill>
+                  <a:srgbClr val="C00000"/>
+                </a:solidFill>
+              </a:rPr>
+              <a:t>plot a graph </a:t>
+            </a:r>
+            <a:r>
+              <a:rPr lang="en-US" sz="2400" dirty="0"/>
+              <a:t>as below to find the </a:t>
+            </a:r>
+            <a:r>
+              <a:rPr lang="en-US" sz="2400" b="1" dirty="0">
+                <a:solidFill>
+                  <a:srgbClr val="C00000"/>
+                </a:solidFill>
+              </a:rPr>
+              <a:t>Elbow</a:t>
+            </a:r>
+            <a:r>
+              <a:rPr lang="en-US" sz="2400" dirty="0"/>
+              <a:t> which indicates the best number of cluster to consider or take initially.</a:t>
+            </a:r>
+          </a:p>
+        </p:txBody>
+      </p:sp>
+      <p:sp>
+        <p:nvSpPr>
+          <p:cNvPr id="5" name="Rectangle 4">
+            <a:extLst>
+              <a:ext uri="{FF2B5EF4-FFF2-40B4-BE49-F238E27FC236}">
+                <a16:creationId xmlns:a16="http://schemas.microsoft.com/office/drawing/2014/main" id="{CEB2A1D8-9019-B97E-6A28-D39D9B60DB0C}"/>
+              </a:ext>
+            </a:extLst>
+          </p:cNvPr>
+          <p:cNvSpPr/>
+          <p:nvPr/>
+        </p:nvSpPr>
+        <p:spPr>
+          <a:xfrm>
+            <a:off x="8672662" y="5481981"/>
+            <a:ext cx="2034483" cy="908115"/>
+          </a:xfrm>
+          <a:prstGeom prst="rect">
+            <a:avLst/>
+          </a:prstGeom>
+          <a:solidFill>
+            <a:schemeClr val="bg1"/>
+          </a:solidFill>
+          <a:ln>
+            <a:solidFill>
+              <a:schemeClr val="bg1"/>
+            </a:solidFill>
+          </a:ln>
+        </p:spPr>
+        <p:style>
+          <a:lnRef idx="2">
+            <a:schemeClr val="accent1">
+              <a:shade val="15000"/>
+            </a:schemeClr>
+          </a:lnRef>
+          <a:fillRef idx="1">
+            <a:schemeClr val="accent1"/>
+          </a:fillRef>
+          <a:effectRef idx="0">
+            <a:schemeClr val="accent1"/>
+          </a:effectRef>
+          <a:fontRef idx="minor">
+            <a:schemeClr val="lt1"/>
+          </a:fontRef>
+        </p:style>
+        <p:txBody>
+          <a:bodyPr rtlCol="0" anchor="ctr"/>
+          <a:lstStyle/>
+          <a:p>
+            <a:pPr algn="ctr"/>
+            <a:endParaRPr lang="en-US" b="1">
+              <a:ln>
+                <a:solidFill>
+                  <a:schemeClr val="bg1"/>
+                </a:solidFill>
+              </a:ln>
+            </a:endParaRPr>
+          </a:p>
+        </p:txBody>
+      </p:sp>
+      <p:grpSp>
+        <p:nvGrpSpPr>
+          <p:cNvPr id="10" name="Group 9">
+            <a:extLst>
+              <a:ext uri="{FF2B5EF4-FFF2-40B4-BE49-F238E27FC236}">
+                <a16:creationId xmlns:a16="http://schemas.microsoft.com/office/drawing/2014/main" id="{8D31FB51-2FFE-1016-ED21-F0BC0BED17B7}"/>
+              </a:ext>
+            </a:extLst>
+          </p:cNvPr>
+          <p:cNvGrpSpPr/>
+          <p:nvPr/>
+        </p:nvGrpSpPr>
+        <p:grpSpPr>
+          <a:xfrm>
+            <a:off x="858065" y="1032805"/>
+            <a:ext cx="9849080" cy="5568375"/>
+            <a:chOff x="858065" y="1032805"/>
+            <a:chExt cx="9849080" cy="5568375"/>
+          </a:xfrm>
+        </p:grpSpPr>
+        <p:pic>
+          <p:nvPicPr>
+            <p:cNvPr id="8" name="Picture 7">
+              <a:extLst>
+                <a:ext uri="{FF2B5EF4-FFF2-40B4-BE49-F238E27FC236}">
+                  <a16:creationId xmlns:a16="http://schemas.microsoft.com/office/drawing/2014/main" id="{5757498A-46E4-CFE7-96D8-FBD76C2224F5}"/>
+                </a:ext>
+              </a:extLst>
+            </p:cNvPr>
+            <p:cNvPicPr>
+              <a:picLocks noChangeAspect="1"/>
+            </p:cNvPicPr>
+            <p:nvPr/>
+          </p:nvPicPr>
+          <p:blipFill>
+            <a:blip r:embed="rId2">
+              <a:extLst>
+                <a:ext uri="{28A0092B-C50C-407E-A947-70E740481C1C}">
+                  <a14:useLocalDpi xmlns:a14="http://schemas.microsoft.com/office/drawing/2010/main" val="0"/>
+                </a:ext>
+              </a:extLst>
+            </a:blip>
+            <a:stretch>
+              <a:fillRect/>
+            </a:stretch>
+          </p:blipFill>
+          <p:spPr>
+            <a:xfrm>
+              <a:off x="858065" y="1032805"/>
+              <a:ext cx="9458753" cy="5498014"/>
+            </a:xfrm>
+            <a:prstGeom prst="rect">
+              <a:avLst/>
+            </a:prstGeom>
+          </p:spPr>
+        </p:pic>
+        <p:sp>
+          <p:nvSpPr>
+            <p:cNvPr id="9" name="Rectangle 8">
+              <a:extLst>
+                <a:ext uri="{FF2B5EF4-FFF2-40B4-BE49-F238E27FC236}">
+                  <a16:creationId xmlns:a16="http://schemas.microsoft.com/office/drawing/2014/main" id="{7811E87F-B287-B672-54D1-942AE0663A62}"/>
+                </a:ext>
+              </a:extLst>
+            </p:cNvPr>
+            <p:cNvSpPr/>
+            <p:nvPr/>
+          </p:nvSpPr>
+          <p:spPr>
+            <a:xfrm>
+              <a:off x="8672662" y="5693065"/>
+              <a:ext cx="2034483" cy="908115"/>
+            </a:xfrm>
+            <a:prstGeom prst="rect">
+              <a:avLst/>
+            </a:prstGeom>
+            <a:solidFill>
+              <a:schemeClr val="bg1"/>
+            </a:solidFill>
+            <a:ln>
+              <a:solidFill>
+                <a:schemeClr val="bg1"/>
+              </a:solidFill>
+            </a:ln>
+          </p:spPr>
+          <p:style>
+            <a:lnRef idx="2">
+              <a:schemeClr val="accent1">
+                <a:shade val="15000"/>
+              </a:schemeClr>
+            </a:lnRef>
+            <a:fillRef idx="1">
+              <a:schemeClr val="accent1"/>
+            </a:fillRef>
+            <a:effectRef idx="0">
+              <a:schemeClr val="accent1"/>
+            </a:effectRef>
+            <a:fontRef idx="minor">
+              <a:schemeClr val="lt1"/>
+            </a:fontRef>
+          </p:style>
+          <p:txBody>
+            <a:bodyPr rtlCol="0" anchor="ctr"/>
+            <a:lstStyle/>
+            <a:p>
+              <a:pPr algn="ctr"/>
+              <a:endParaRPr lang="en-US">
+                <a:ln>
+                  <a:solidFill>
+                    <a:schemeClr val="bg1"/>
+                  </a:solidFill>
+                </a:ln>
+              </a:endParaRPr>
+            </a:p>
+          </p:txBody>
+        </p:sp>
+      </p:grpSp>
+    </p:spTree>
+    <p:extLst>
+      <p:ext uri="{BB962C8B-B14F-4D97-AF65-F5344CB8AC3E}">
+        <p14:creationId xmlns:p14="http://schemas.microsoft.com/office/powerpoint/2010/main" val="3253842179"/>
       </p:ext>
     </p:extLst>
   </p:cSld>
@@ -13239,6 +17550,2639 @@
 </p:sld>
 </file>
 
+<file path=ppt/slides/slide50.xml><?xml version="1.0" encoding="utf-8"?>
+<p:sld xmlns:a="http://schemas.openxmlformats.org/drawingml/2006/main" xmlns:r="http://schemas.openxmlformats.org/officeDocument/2006/relationships" xmlns:p="http://schemas.openxmlformats.org/presentationml/2006/main">
+  <p:cSld>
+    <p:spTree>
+      <p:nvGrpSpPr>
+        <p:cNvPr id="1" name="">
+          <a:extLst>
+            <a:ext uri="{FF2B5EF4-FFF2-40B4-BE49-F238E27FC236}">
+              <a16:creationId xmlns:a16="http://schemas.microsoft.com/office/drawing/2014/main" id="{0269C1F4-6269-B35F-F43A-CEC24380E4E7}"/>
+            </a:ext>
+          </a:extLst>
+        </p:cNvPr>
+        <p:cNvGrpSpPr/>
+        <p:nvPr/>
+      </p:nvGrpSpPr>
+      <p:grpSpPr>
+        <a:xfrm>
+          <a:off x="0" y="0"/>
+          <a:ext cx="0" cy="0"/>
+          <a:chOff x="0" y="0"/>
+          <a:chExt cx="0" cy="0"/>
+        </a:xfrm>
+      </p:grpSpPr>
+      <p:sp>
+        <p:nvSpPr>
+          <p:cNvPr id="3" name="Content Placeholder 2">
+            <a:extLst>
+              <a:ext uri="{FF2B5EF4-FFF2-40B4-BE49-F238E27FC236}">
+                <a16:creationId xmlns:a16="http://schemas.microsoft.com/office/drawing/2014/main" id="{53380701-88D7-9CA1-836B-9C85B24767A3}"/>
+              </a:ext>
+            </a:extLst>
+          </p:cNvPr>
+          <p:cNvSpPr>
+            <a:spLocks noGrp="1"/>
+          </p:cNvSpPr>
+          <p:nvPr>
+            <p:ph idx="1"/>
+          </p:nvPr>
+        </p:nvSpPr>
+        <p:spPr>
+          <a:xfrm>
+            <a:off x="702853" y="707571"/>
+            <a:ext cx="10900568" cy="5486400"/>
+          </a:xfrm>
+        </p:spPr>
+        <p:txBody>
+          <a:bodyPr>
+            <a:normAutofit/>
+          </a:bodyPr>
+          <a:lstStyle/>
+          <a:p>
+            <a:pPr marL="0" indent="0">
+              <a:buNone/>
+            </a:pPr>
+            <a:r>
+              <a:rPr lang="en-US" sz="2800" b="1" dirty="0"/>
+              <a:t>2. External Evaluation Metrics (if true labels are known)</a:t>
+            </a:r>
+          </a:p>
+          <a:p>
+            <a:pPr marL="0" indent="0">
+              <a:buNone/>
+            </a:pPr>
+            <a:endParaRPr lang="en-IN" sz="2800" b="1" dirty="0"/>
+          </a:p>
+        </p:txBody>
+      </p:sp>
+      <p:graphicFrame>
+        <p:nvGraphicFramePr>
+          <p:cNvPr id="2" name="Table 1">
+            <a:extLst>
+              <a:ext uri="{FF2B5EF4-FFF2-40B4-BE49-F238E27FC236}">
+                <a16:creationId xmlns:a16="http://schemas.microsoft.com/office/drawing/2014/main" id="{4B28A8F8-01D7-C0CD-A0C4-582452A2B91E}"/>
+              </a:ext>
+            </a:extLst>
+          </p:cNvPr>
+          <p:cNvGraphicFramePr>
+            <a:graphicFrameLocks noGrp="1"/>
+          </p:cNvGraphicFramePr>
+          <p:nvPr>
+            <p:extLst>
+              <p:ext uri="{D42A27DB-BD31-4B8C-83A1-F6EECF244321}">
+                <p14:modId xmlns:p14="http://schemas.microsoft.com/office/powerpoint/2010/main" val="2135021600"/>
+              </p:ext>
+            </p:extLst>
+          </p:nvPr>
+        </p:nvGraphicFramePr>
+        <p:xfrm>
+          <a:off x="980303" y="1548678"/>
+          <a:ext cx="10101354" cy="3116126"/>
+        </p:xfrm>
+        <a:graphic>
+          <a:graphicData uri="http://schemas.openxmlformats.org/drawingml/2006/table">
+            <a:tbl>
+              <a:tblPr firstRow="1" firstCol="1" bandRow="1">
+                <a:tableStyleId>{5C22544A-7EE6-4342-B048-85BDC9FD1C3A}</a:tableStyleId>
+              </a:tblPr>
+              <a:tblGrid>
+                <a:gridCol w="4103326">
+                  <a:extLst>
+                    <a:ext uri="{9D8B030D-6E8A-4147-A177-3AD203B41FA5}">
+                      <a16:colId xmlns:a16="http://schemas.microsoft.com/office/drawing/2014/main" val="2275536008"/>
+                    </a:ext>
+                  </a:extLst>
+                </a:gridCol>
+                <a:gridCol w="5998028">
+                  <a:extLst>
+                    <a:ext uri="{9D8B030D-6E8A-4147-A177-3AD203B41FA5}">
+                      <a16:colId xmlns:a16="http://schemas.microsoft.com/office/drawing/2014/main" val="1280908205"/>
+                    </a:ext>
+                  </a:extLst>
+                </a:gridCol>
+              </a:tblGrid>
+              <a:tr h="658861">
+                <a:tc>
+                  <a:txBody>
+                    <a:bodyPr/>
+                    <a:lstStyle/>
+                    <a:p>
+                      <a:pPr>
+                        <a:lnSpc>
+                          <a:spcPct val="107000"/>
+                        </a:lnSpc>
+                        <a:spcAft>
+                          <a:spcPts val="800"/>
+                        </a:spcAft>
+                        <a:buNone/>
+                      </a:pPr>
+                      <a:r>
+                        <a:rPr lang="en-IN" sz="2000" kern="100">
+                          <a:effectLst/>
+                        </a:rPr>
+                        <a:t>Metric Name</a:t>
+                      </a:r>
+                      <a:endParaRPr lang="en-IN" sz="2000" kern="100">
+                        <a:effectLst/>
+                        <a:latin typeface="Aptos" panose="020B0004020202020204" pitchFamily="34" charset="0"/>
+                        <a:ea typeface="Aptos" panose="020B0004020202020204" pitchFamily="34" charset="0"/>
+                        <a:cs typeface="Tunga" panose="020B0502040204020203" pitchFamily="34" charset="0"/>
+                      </a:endParaRPr>
+                    </a:p>
+                  </a:txBody>
+                  <a:tcPr marL="68580" marR="68580" marT="0" marB="0"/>
+                </a:tc>
+                <a:tc>
+                  <a:txBody>
+                    <a:bodyPr/>
+                    <a:lstStyle/>
+                    <a:p>
+                      <a:pPr>
+                        <a:lnSpc>
+                          <a:spcPct val="107000"/>
+                        </a:lnSpc>
+                        <a:spcAft>
+                          <a:spcPts val="800"/>
+                        </a:spcAft>
+                        <a:buNone/>
+                      </a:pPr>
+                      <a:r>
+                        <a:rPr lang="en-IN" sz="2000" kern="100">
+                          <a:effectLst/>
+                        </a:rPr>
+                        <a:t>Meaning</a:t>
+                      </a:r>
+                      <a:endParaRPr lang="en-IN" sz="2000" kern="100">
+                        <a:effectLst/>
+                        <a:latin typeface="Aptos" panose="020B0004020202020204" pitchFamily="34" charset="0"/>
+                        <a:ea typeface="Aptos" panose="020B0004020202020204" pitchFamily="34" charset="0"/>
+                        <a:cs typeface="Tunga" panose="020B0502040204020203" pitchFamily="34" charset="0"/>
+                      </a:endParaRPr>
+                    </a:p>
+                  </a:txBody>
+                  <a:tcPr marL="68580" marR="68580" marT="0" marB="0"/>
+                </a:tc>
+                <a:extLst>
+                  <a:ext uri="{0D108BD9-81ED-4DB2-BD59-A6C34878D82A}">
+                    <a16:rowId xmlns:a16="http://schemas.microsoft.com/office/drawing/2014/main" val="411824883"/>
+                  </a:ext>
+                </a:extLst>
+              </a:tr>
+              <a:tr h="764261">
+                <a:tc>
+                  <a:txBody>
+                    <a:bodyPr/>
+                    <a:lstStyle/>
+                    <a:p>
+                      <a:pPr>
+                        <a:lnSpc>
+                          <a:spcPct val="107000"/>
+                        </a:lnSpc>
+                        <a:spcAft>
+                          <a:spcPts val="800"/>
+                        </a:spcAft>
+                        <a:buNone/>
+                      </a:pPr>
+                      <a:r>
+                        <a:rPr lang="en-IN" sz="2000" kern="100" dirty="0">
+                          <a:effectLst/>
+                        </a:rPr>
+                        <a:t>Adjusted Rand Index (ARI)</a:t>
+                      </a:r>
+                      <a:endParaRPr lang="en-IN" sz="2000" kern="100" dirty="0">
+                        <a:effectLst/>
+                        <a:latin typeface="Aptos" panose="020B0004020202020204" pitchFamily="34" charset="0"/>
+                        <a:ea typeface="Aptos" panose="020B0004020202020204" pitchFamily="34" charset="0"/>
+                        <a:cs typeface="Tunga" panose="020B0502040204020203" pitchFamily="34" charset="0"/>
+                      </a:endParaRPr>
+                    </a:p>
+                  </a:txBody>
+                  <a:tcPr marL="68580" marR="68580" marT="0" marB="0"/>
+                </a:tc>
+                <a:tc>
+                  <a:txBody>
+                    <a:bodyPr/>
+                    <a:lstStyle/>
+                    <a:p>
+                      <a:pPr>
+                        <a:lnSpc>
+                          <a:spcPct val="107000"/>
+                        </a:lnSpc>
+                        <a:spcAft>
+                          <a:spcPts val="800"/>
+                        </a:spcAft>
+                        <a:buNone/>
+                      </a:pPr>
+                      <a:r>
+                        <a:rPr lang="en-IN" sz="2000" kern="100" dirty="0">
+                          <a:effectLst/>
+                        </a:rPr>
+                        <a:t>Measures similarity between clustering and true labels.</a:t>
+                      </a:r>
+                      <a:endParaRPr lang="en-IN" sz="2000" kern="100" dirty="0">
+                        <a:effectLst/>
+                        <a:latin typeface="Aptos" panose="020B0004020202020204" pitchFamily="34" charset="0"/>
+                        <a:ea typeface="Aptos" panose="020B0004020202020204" pitchFamily="34" charset="0"/>
+                        <a:cs typeface="Tunga" panose="020B0502040204020203" pitchFamily="34" charset="0"/>
+                      </a:endParaRPr>
+                    </a:p>
+                  </a:txBody>
+                  <a:tcPr marL="68580" marR="68580" marT="0" marB="0"/>
+                </a:tc>
+                <a:extLst>
+                  <a:ext uri="{0D108BD9-81ED-4DB2-BD59-A6C34878D82A}">
+                    <a16:rowId xmlns:a16="http://schemas.microsoft.com/office/drawing/2014/main" val="3520767462"/>
+                  </a:ext>
+                </a:extLst>
+              </a:tr>
+              <a:tr h="1034143">
+                <a:tc>
+                  <a:txBody>
+                    <a:bodyPr/>
+                    <a:lstStyle/>
+                    <a:p>
+                      <a:pPr>
+                        <a:lnSpc>
+                          <a:spcPct val="107000"/>
+                        </a:lnSpc>
+                        <a:spcAft>
+                          <a:spcPts val="800"/>
+                        </a:spcAft>
+                        <a:buNone/>
+                      </a:pPr>
+                      <a:r>
+                        <a:rPr lang="en-IN" sz="2000" kern="100">
+                          <a:effectLst/>
+                        </a:rPr>
+                        <a:t>Normalized Mutual Information (NMI)</a:t>
+                      </a:r>
+                      <a:endParaRPr lang="en-IN" sz="2000" kern="100">
+                        <a:effectLst/>
+                        <a:latin typeface="Aptos" panose="020B0004020202020204" pitchFamily="34" charset="0"/>
+                        <a:ea typeface="Aptos" panose="020B0004020202020204" pitchFamily="34" charset="0"/>
+                        <a:cs typeface="Tunga" panose="020B0502040204020203" pitchFamily="34" charset="0"/>
+                      </a:endParaRPr>
+                    </a:p>
+                  </a:txBody>
+                  <a:tcPr marL="68580" marR="68580" marT="0" marB="0"/>
+                </a:tc>
+                <a:tc>
+                  <a:txBody>
+                    <a:bodyPr/>
+                    <a:lstStyle/>
+                    <a:p>
+                      <a:pPr>
+                        <a:lnSpc>
+                          <a:spcPct val="107000"/>
+                        </a:lnSpc>
+                        <a:spcAft>
+                          <a:spcPts val="800"/>
+                        </a:spcAft>
+                        <a:buNone/>
+                      </a:pPr>
+                      <a:r>
+                        <a:rPr lang="en-IN" sz="2000" kern="100" dirty="0">
+                          <a:effectLst/>
+                        </a:rPr>
+                        <a:t>Measures mutual dependence between clusters and labels.</a:t>
+                      </a:r>
+                      <a:endParaRPr lang="en-IN" sz="2000" kern="100" dirty="0">
+                        <a:effectLst/>
+                        <a:latin typeface="Aptos" panose="020B0004020202020204" pitchFamily="34" charset="0"/>
+                        <a:ea typeface="Aptos" panose="020B0004020202020204" pitchFamily="34" charset="0"/>
+                        <a:cs typeface="Tunga" panose="020B0502040204020203" pitchFamily="34" charset="0"/>
+                      </a:endParaRPr>
+                    </a:p>
+                  </a:txBody>
+                  <a:tcPr marL="68580" marR="68580" marT="0" marB="0"/>
+                </a:tc>
+                <a:extLst>
+                  <a:ext uri="{0D108BD9-81ED-4DB2-BD59-A6C34878D82A}">
+                    <a16:rowId xmlns:a16="http://schemas.microsoft.com/office/drawing/2014/main" val="990173030"/>
+                  </a:ext>
+                </a:extLst>
+              </a:tr>
+              <a:tr h="658861">
+                <a:tc>
+                  <a:txBody>
+                    <a:bodyPr/>
+                    <a:lstStyle/>
+                    <a:p>
+                      <a:pPr>
+                        <a:lnSpc>
+                          <a:spcPct val="107000"/>
+                        </a:lnSpc>
+                        <a:spcAft>
+                          <a:spcPts val="800"/>
+                        </a:spcAft>
+                        <a:buNone/>
+                      </a:pPr>
+                      <a:r>
+                        <a:rPr lang="en-IN" sz="2000" kern="100">
+                          <a:effectLst/>
+                        </a:rPr>
+                        <a:t>Fowlkes–Mallows Index (FMI)</a:t>
+                      </a:r>
+                      <a:endParaRPr lang="en-IN" sz="2000" kern="100">
+                        <a:effectLst/>
+                        <a:latin typeface="Aptos" panose="020B0004020202020204" pitchFamily="34" charset="0"/>
+                        <a:ea typeface="Aptos" panose="020B0004020202020204" pitchFamily="34" charset="0"/>
+                        <a:cs typeface="Tunga" panose="020B0502040204020203" pitchFamily="34" charset="0"/>
+                      </a:endParaRPr>
+                    </a:p>
+                  </a:txBody>
+                  <a:tcPr marL="68580" marR="68580" marT="0" marB="0"/>
+                </a:tc>
+                <a:tc>
+                  <a:txBody>
+                    <a:bodyPr/>
+                    <a:lstStyle/>
+                    <a:p>
+                      <a:pPr>
+                        <a:lnSpc>
+                          <a:spcPct val="107000"/>
+                        </a:lnSpc>
+                        <a:spcAft>
+                          <a:spcPts val="800"/>
+                        </a:spcAft>
+                        <a:buNone/>
+                      </a:pPr>
+                      <a:r>
+                        <a:rPr lang="en-IN" sz="2000" kern="100" dirty="0">
+                          <a:effectLst/>
+                        </a:rPr>
+                        <a:t>Geometric mean of precision and recall.</a:t>
+                      </a:r>
+                      <a:endParaRPr lang="en-IN" sz="2000" kern="100" dirty="0">
+                        <a:effectLst/>
+                        <a:latin typeface="Aptos" panose="020B0004020202020204" pitchFamily="34" charset="0"/>
+                        <a:ea typeface="Aptos" panose="020B0004020202020204" pitchFamily="34" charset="0"/>
+                        <a:cs typeface="Tunga" panose="020B0502040204020203" pitchFamily="34" charset="0"/>
+                      </a:endParaRPr>
+                    </a:p>
+                  </a:txBody>
+                  <a:tcPr marL="68580" marR="68580" marT="0" marB="0"/>
+                </a:tc>
+                <a:extLst>
+                  <a:ext uri="{0D108BD9-81ED-4DB2-BD59-A6C34878D82A}">
+                    <a16:rowId xmlns:a16="http://schemas.microsoft.com/office/drawing/2014/main" val="2635229628"/>
+                  </a:ext>
+                </a:extLst>
+              </a:tr>
+            </a:tbl>
+          </a:graphicData>
+        </a:graphic>
+      </p:graphicFrame>
+    </p:spTree>
+    <p:extLst>
+      <p:ext uri="{BB962C8B-B14F-4D97-AF65-F5344CB8AC3E}">
+        <p14:creationId xmlns:p14="http://schemas.microsoft.com/office/powerpoint/2010/main" val="4106113749"/>
+      </p:ext>
+    </p:extLst>
+  </p:cSld>
+  <p:clrMapOvr>
+    <a:masterClrMapping/>
+  </p:clrMapOvr>
+</p:sld>
+</file>
+
+<file path=ppt/slides/slide51.xml><?xml version="1.0" encoding="utf-8"?>
+<p:sld xmlns:a="http://schemas.openxmlformats.org/drawingml/2006/main" xmlns:r="http://schemas.openxmlformats.org/officeDocument/2006/relationships" xmlns:p="http://schemas.openxmlformats.org/presentationml/2006/main">
+  <p:cSld>
+    <p:spTree>
+      <p:nvGrpSpPr>
+        <p:cNvPr id="1" name="">
+          <a:extLst>
+            <a:ext uri="{FF2B5EF4-FFF2-40B4-BE49-F238E27FC236}">
+              <a16:creationId xmlns:a16="http://schemas.microsoft.com/office/drawing/2014/main" id="{1C1E2F96-366E-4A0E-6B43-2FDE04497671}"/>
+            </a:ext>
+          </a:extLst>
+        </p:cNvPr>
+        <p:cNvGrpSpPr/>
+        <p:nvPr/>
+      </p:nvGrpSpPr>
+      <p:grpSpPr>
+        <a:xfrm>
+          <a:off x="0" y="0"/>
+          <a:ext cx="0" cy="0"/>
+          <a:chOff x="0" y="0"/>
+          <a:chExt cx="0" cy="0"/>
+        </a:xfrm>
+      </p:grpSpPr>
+      <p:sp>
+        <p:nvSpPr>
+          <p:cNvPr id="3" name="Content Placeholder 2">
+            <a:extLst>
+              <a:ext uri="{FF2B5EF4-FFF2-40B4-BE49-F238E27FC236}">
+                <a16:creationId xmlns:a16="http://schemas.microsoft.com/office/drawing/2014/main" id="{2F14BADC-4C56-0E02-E8B9-DCB7CBBA2A7D}"/>
+              </a:ext>
+            </a:extLst>
+          </p:cNvPr>
+          <p:cNvSpPr>
+            <a:spLocks noGrp="1"/>
+          </p:cNvSpPr>
+          <p:nvPr>
+            <p:ph idx="1"/>
+          </p:nvPr>
+        </p:nvSpPr>
+        <p:spPr>
+          <a:xfrm>
+            <a:off x="702853" y="707571"/>
+            <a:ext cx="10900568" cy="5486400"/>
+          </a:xfrm>
+        </p:spPr>
+        <p:txBody>
+          <a:bodyPr>
+            <a:normAutofit/>
+          </a:bodyPr>
+          <a:lstStyle/>
+          <a:p>
+            <a:pPr marL="0" indent="0">
+              <a:buNone/>
+            </a:pPr>
+            <a:r>
+              <a:rPr lang="en-IN" sz="2400" b="1" kern="100" dirty="0"/>
+              <a:t>1. Adjusted Rand Index (ARI):</a:t>
+            </a:r>
+          </a:p>
+          <a:p>
+            <a:pPr marL="0" indent="0">
+              <a:buNone/>
+            </a:pPr>
+            <a:r>
+              <a:rPr lang="en-US" sz="2400" dirty="0"/>
+              <a:t>ARI is used to evaluate </a:t>
+            </a:r>
+            <a:r>
+              <a:rPr lang="en-US" sz="2400" b="1" dirty="0">
+                <a:solidFill>
+                  <a:schemeClr val="tx2">
+                    <a:lumMod val="75000"/>
+                    <a:lumOff val="25000"/>
+                  </a:schemeClr>
+                </a:solidFill>
+              </a:rPr>
+              <a:t>clustering performance </a:t>
+            </a:r>
+            <a:r>
+              <a:rPr lang="en-US" sz="2400" dirty="0"/>
+              <a:t>when you already know the </a:t>
+            </a:r>
+            <a:r>
+              <a:rPr lang="en-US" sz="2400" b="1" dirty="0">
+                <a:solidFill>
+                  <a:srgbClr val="002060"/>
+                </a:solidFill>
+              </a:rPr>
+              <a:t>true group labels </a:t>
+            </a:r>
+            <a:r>
+              <a:rPr lang="en-US" sz="2400" dirty="0"/>
+              <a:t>(called “</a:t>
+            </a:r>
+            <a:r>
+              <a:rPr lang="en-US" sz="2400" b="1" dirty="0">
+                <a:solidFill>
+                  <a:schemeClr val="tx2">
+                    <a:lumMod val="75000"/>
+                    <a:lumOff val="25000"/>
+                  </a:schemeClr>
+                </a:solidFill>
+              </a:rPr>
+              <a:t>ground truth</a:t>
+            </a:r>
+            <a:r>
+              <a:rPr lang="en-US" sz="2400" dirty="0"/>
+              <a:t>”).</a:t>
+            </a:r>
+          </a:p>
+          <a:p>
+            <a:r>
+              <a:rPr lang="en-US" sz="2400" b="1" dirty="0"/>
+              <a:t>It checks how many pairs of points are:</a:t>
+            </a:r>
+          </a:p>
+          <a:p>
+            <a:pPr lvl="1"/>
+            <a:r>
+              <a:rPr lang="en-US" sz="2400" dirty="0"/>
+              <a:t>correctly clustered together</a:t>
+            </a:r>
+          </a:p>
+          <a:p>
+            <a:pPr lvl="1"/>
+            <a:r>
+              <a:rPr lang="en-US" sz="2400" dirty="0"/>
+              <a:t>correctly clustered apart</a:t>
+            </a:r>
+          </a:p>
+          <a:p>
+            <a:pPr lvl="1"/>
+            <a:r>
+              <a:rPr lang="en-US" sz="2400" dirty="0"/>
+              <a:t>and adjusts for chance grouping</a:t>
+            </a:r>
+          </a:p>
+          <a:p>
+            <a:pPr marL="0" indent="0">
+              <a:buNone/>
+            </a:pPr>
+            <a:endParaRPr lang="en-US" sz="1400" dirty="0"/>
+          </a:p>
+          <a:p>
+            <a:pPr marL="0" indent="0">
+              <a:buNone/>
+            </a:pPr>
+            <a:r>
+              <a:rPr lang="en-US" sz="2400" dirty="0"/>
+              <a:t>ARI range:</a:t>
+            </a:r>
+          </a:p>
+          <a:p>
+            <a:r>
+              <a:rPr lang="en-US" sz="2400" b="1" dirty="0">
+                <a:solidFill>
+                  <a:schemeClr val="tx2">
+                    <a:lumMod val="75000"/>
+                    <a:lumOff val="25000"/>
+                  </a:schemeClr>
+                </a:solidFill>
+              </a:rPr>
+              <a:t>+1 </a:t>
+            </a:r>
+            <a:r>
+              <a:rPr lang="en-US" sz="2400" dirty="0"/>
+              <a:t>= </a:t>
+            </a:r>
+            <a:r>
+              <a:rPr lang="en-US" sz="2400" b="1" dirty="0">
+                <a:solidFill>
+                  <a:srgbClr val="C00000"/>
+                </a:solidFill>
+              </a:rPr>
+              <a:t>Perfect</a:t>
+            </a:r>
+            <a:r>
+              <a:rPr lang="en-US" sz="2400" dirty="0"/>
+              <a:t> clustering</a:t>
+            </a:r>
+          </a:p>
+          <a:p>
+            <a:r>
+              <a:rPr lang="en-US" sz="2400" b="1" dirty="0">
+                <a:solidFill>
+                  <a:schemeClr val="tx2">
+                    <a:lumMod val="75000"/>
+                    <a:lumOff val="25000"/>
+                  </a:schemeClr>
+                </a:solidFill>
+              </a:rPr>
+              <a:t>0</a:t>
+            </a:r>
+            <a:r>
+              <a:rPr lang="en-US" sz="2400" dirty="0"/>
+              <a:t> = </a:t>
+            </a:r>
+            <a:r>
+              <a:rPr lang="en-US" sz="2400" b="1" dirty="0">
+                <a:solidFill>
+                  <a:srgbClr val="C00000"/>
+                </a:solidFill>
+              </a:rPr>
+              <a:t>Random</a:t>
+            </a:r>
+            <a:r>
+              <a:rPr lang="en-US" sz="2400" dirty="0"/>
+              <a:t> clustering</a:t>
+            </a:r>
+          </a:p>
+          <a:p>
+            <a:r>
+              <a:rPr lang="en-US" sz="2400" b="1" dirty="0">
+                <a:solidFill>
+                  <a:schemeClr val="tx2">
+                    <a:lumMod val="75000"/>
+                    <a:lumOff val="25000"/>
+                  </a:schemeClr>
+                </a:solidFill>
+              </a:rPr>
+              <a:t>&lt; 0 </a:t>
+            </a:r>
+            <a:r>
+              <a:rPr lang="en-US" sz="2400" dirty="0"/>
+              <a:t>= </a:t>
+            </a:r>
+            <a:r>
+              <a:rPr lang="en-US" sz="2400" b="1" dirty="0">
+                <a:solidFill>
+                  <a:srgbClr val="C00000"/>
+                </a:solidFill>
+              </a:rPr>
+              <a:t>Worse</a:t>
+            </a:r>
+            <a:r>
+              <a:rPr lang="en-US" sz="2400" dirty="0"/>
+              <a:t> than random (bad)</a:t>
+            </a:r>
+          </a:p>
+          <a:p>
+            <a:pPr marL="0" indent="0">
+              <a:buNone/>
+            </a:pPr>
+            <a:endParaRPr lang="en-IN" sz="2400" dirty="0"/>
+          </a:p>
+        </p:txBody>
+      </p:sp>
+    </p:spTree>
+    <p:extLst>
+      <p:ext uri="{BB962C8B-B14F-4D97-AF65-F5344CB8AC3E}">
+        <p14:creationId xmlns:p14="http://schemas.microsoft.com/office/powerpoint/2010/main" val="3188012118"/>
+      </p:ext>
+    </p:extLst>
+  </p:cSld>
+  <p:clrMapOvr>
+    <a:masterClrMapping/>
+  </p:clrMapOvr>
+</p:sld>
+</file>
+
+<file path=ppt/slides/slide52.xml><?xml version="1.0" encoding="utf-8"?>
+<p:sld xmlns:a="http://schemas.openxmlformats.org/drawingml/2006/main" xmlns:r="http://schemas.openxmlformats.org/officeDocument/2006/relationships" xmlns:p="http://schemas.openxmlformats.org/presentationml/2006/main">
+  <p:cSld>
+    <p:spTree>
+      <p:nvGrpSpPr>
+        <p:cNvPr id="1" name="">
+          <a:extLst>
+            <a:ext uri="{FF2B5EF4-FFF2-40B4-BE49-F238E27FC236}">
+              <a16:creationId xmlns:a16="http://schemas.microsoft.com/office/drawing/2014/main" id="{A8EC124D-C54A-DE44-8E7F-614C4A15A6AE}"/>
+            </a:ext>
+          </a:extLst>
+        </p:cNvPr>
+        <p:cNvGrpSpPr/>
+        <p:nvPr/>
+      </p:nvGrpSpPr>
+      <p:grpSpPr>
+        <a:xfrm>
+          <a:off x="0" y="0"/>
+          <a:ext cx="0" cy="0"/>
+          <a:chOff x="0" y="0"/>
+          <a:chExt cx="0" cy="0"/>
+        </a:xfrm>
+      </p:grpSpPr>
+      <p:sp>
+        <p:nvSpPr>
+          <p:cNvPr id="3" name="Content Placeholder 2">
+            <a:extLst>
+              <a:ext uri="{FF2B5EF4-FFF2-40B4-BE49-F238E27FC236}">
+                <a16:creationId xmlns:a16="http://schemas.microsoft.com/office/drawing/2014/main" id="{50A31D7E-0E45-4DC3-BFCE-B66A8F468A0C}"/>
+              </a:ext>
+            </a:extLst>
+          </p:cNvPr>
+          <p:cNvSpPr>
+            <a:spLocks noGrp="1"/>
+          </p:cNvSpPr>
+          <p:nvPr>
+            <p:ph idx="1"/>
+          </p:nvPr>
+        </p:nvSpPr>
+        <p:spPr>
+          <a:xfrm>
+            <a:off x="702853" y="957943"/>
+            <a:ext cx="10900568" cy="5236028"/>
+          </a:xfrm>
+        </p:spPr>
+        <p:txBody>
+          <a:bodyPr>
+            <a:normAutofit/>
+          </a:bodyPr>
+          <a:lstStyle/>
+          <a:p>
+            <a:pPr marL="0" indent="0">
+              <a:buNone/>
+            </a:pPr>
+            <a:r>
+              <a:rPr lang="en-US" sz="2800" b="1" dirty="0"/>
+              <a:t>🔍 Example:</a:t>
+            </a:r>
+          </a:p>
+          <a:p>
+            <a:pPr marL="0" indent="0">
+              <a:buNone/>
+            </a:pPr>
+            <a:r>
+              <a:rPr lang="en-US" sz="2800" b="1" dirty="0"/>
+              <a:t>Let’s take 4 students: </a:t>
+            </a:r>
+            <a:r>
+              <a:rPr lang="en-US" sz="2800" dirty="0"/>
+              <a:t>A, B, C, D</a:t>
+            </a:r>
+          </a:p>
+          <a:p>
+            <a:r>
+              <a:rPr lang="en-US" sz="2800" b="1" dirty="0"/>
+              <a:t>True groups (</a:t>
+            </a:r>
+            <a:r>
+              <a:rPr lang="en-IN" sz="2800" b="1" dirty="0"/>
+              <a:t>Actual Known Groups or </a:t>
+            </a:r>
+            <a:r>
+              <a:rPr lang="en-US" sz="2800" b="1" dirty="0"/>
+              <a:t>labels):</a:t>
+            </a:r>
+          </a:p>
+          <a:p>
+            <a:pPr lvl="1">
+              <a:buFont typeface="Wingdings" panose="05000000000000000000" pitchFamily="2" charset="2"/>
+              <a:buChar char="§"/>
+            </a:pPr>
+            <a:r>
+              <a:rPr lang="en-US" sz="2400" dirty="0"/>
+              <a:t>Group 1: A, B</a:t>
+            </a:r>
+          </a:p>
+          <a:p>
+            <a:pPr lvl="1">
+              <a:buFont typeface="Wingdings" panose="05000000000000000000" pitchFamily="2" charset="2"/>
+              <a:buChar char="§"/>
+            </a:pPr>
+            <a:r>
+              <a:rPr lang="en-US" sz="2400" dirty="0"/>
+              <a:t>Group 2: C, D</a:t>
+            </a:r>
+          </a:p>
+          <a:p>
+            <a:r>
+              <a:rPr lang="en-US" sz="2800" b="1" dirty="0"/>
+              <a:t>Clustered result (</a:t>
+            </a:r>
+            <a:r>
+              <a:rPr lang="en-IN" sz="2800" b="1" dirty="0"/>
+              <a:t>Algorithm/Model Output</a:t>
+            </a:r>
+            <a:r>
+              <a:rPr lang="en-IN" sz="2800" dirty="0"/>
+              <a:t>)</a:t>
+            </a:r>
+            <a:r>
+              <a:rPr lang="en-US" sz="2800" b="1" dirty="0"/>
+              <a:t>:</a:t>
+            </a:r>
+          </a:p>
+          <a:p>
+            <a:pPr lvl="1">
+              <a:buFont typeface="Wingdings" panose="05000000000000000000" pitchFamily="2" charset="2"/>
+              <a:buChar char="§"/>
+            </a:pPr>
+            <a:r>
+              <a:rPr lang="en-US" sz="2400" dirty="0"/>
+              <a:t>Cluster 1: A, C</a:t>
+            </a:r>
+          </a:p>
+          <a:p>
+            <a:pPr lvl="1">
+              <a:buFont typeface="Wingdings" panose="05000000000000000000" pitchFamily="2" charset="2"/>
+              <a:buChar char="§"/>
+            </a:pPr>
+            <a:r>
+              <a:rPr lang="en-US" sz="2400" dirty="0"/>
+              <a:t>Cluster 2: B, D</a:t>
+            </a:r>
+          </a:p>
+          <a:p>
+            <a:pPr marL="0" indent="0">
+              <a:buNone/>
+            </a:pPr>
+            <a:endParaRPr lang="en-US" dirty="0"/>
+          </a:p>
+          <a:p>
+            <a:pPr marL="0" indent="0">
+              <a:buNone/>
+            </a:pPr>
+            <a:r>
+              <a:rPr lang="en-US" sz="2400" b="1" dirty="0"/>
+              <a:t>👉 </a:t>
+            </a:r>
+            <a:r>
+              <a:rPr lang="en-US" sz="2400" b="1" dirty="0">
+                <a:solidFill>
+                  <a:schemeClr val="tx2">
+                    <a:lumMod val="75000"/>
+                    <a:lumOff val="25000"/>
+                  </a:schemeClr>
+                </a:solidFill>
+              </a:rPr>
+              <a:t>Goal</a:t>
+            </a:r>
+            <a:r>
+              <a:rPr lang="en-US" sz="2400" b="1" dirty="0"/>
+              <a:t>: Compare Clustered Result with True Labels using ARI!</a:t>
+            </a:r>
+          </a:p>
+          <a:p>
+            <a:pPr marL="0" indent="0">
+              <a:buNone/>
+            </a:pPr>
+            <a:endParaRPr lang="en-IN" sz="3200" dirty="0"/>
+          </a:p>
+        </p:txBody>
+      </p:sp>
+    </p:spTree>
+    <p:extLst>
+      <p:ext uri="{BB962C8B-B14F-4D97-AF65-F5344CB8AC3E}">
+        <p14:creationId xmlns:p14="http://schemas.microsoft.com/office/powerpoint/2010/main" val="1736834541"/>
+      </p:ext>
+    </p:extLst>
+  </p:cSld>
+  <p:clrMapOvr>
+    <a:masterClrMapping/>
+  </p:clrMapOvr>
+</p:sld>
+</file>
+
+<file path=ppt/slides/slide53.xml><?xml version="1.0" encoding="utf-8"?>
+<p:sld xmlns:a="http://schemas.openxmlformats.org/drawingml/2006/main" xmlns:r="http://schemas.openxmlformats.org/officeDocument/2006/relationships" xmlns:p="http://schemas.openxmlformats.org/presentationml/2006/main">
+  <p:cSld>
+    <p:spTree>
+      <p:nvGrpSpPr>
+        <p:cNvPr id="1" name="">
+          <a:extLst>
+            <a:ext uri="{FF2B5EF4-FFF2-40B4-BE49-F238E27FC236}">
+              <a16:creationId xmlns:a16="http://schemas.microsoft.com/office/drawing/2014/main" id="{1BABC559-41B0-CCE4-0E7B-3D937BBA50FD}"/>
+            </a:ext>
+          </a:extLst>
+        </p:cNvPr>
+        <p:cNvGrpSpPr/>
+        <p:nvPr/>
+      </p:nvGrpSpPr>
+      <p:grpSpPr>
+        <a:xfrm>
+          <a:off x="0" y="0"/>
+          <a:ext cx="0" cy="0"/>
+          <a:chOff x="0" y="0"/>
+          <a:chExt cx="0" cy="0"/>
+        </a:xfrm>
+      </p:grpSpPr>
+      <p:sp>
+        <p:nvSpPr>
+          <p:cNvPr id="3" name="Content Placeholder 2">
+            <a:extLst>
+              <a:ext uri="{FF2B5EF4-FFF2-40B4-BE49-F238E27FC236}">
+                <a16:creationId xmlns:a16="http://schemas.microsoft.com/office/drawing/2014/main" id="{391FA15E-6FE9-5508-A217-8CD25AF5CED0}"/>
+              </a:ext>
+            </a:extLst>
+          </p:cNvPr>
+          <p:cNvSpPr>
+            <a:spLocks noGrp="1"/>
+          </p:cNvSpPr>
+          <p:nvPr>
+            <p:ph idx="1"/>
+          </p:nvPr>
+        </p:nvSpPr>
+        <p:spPr>
+          <a:xfrm>
+            <a:off x="702853" y="478971"/>
+            <a:ext cx="10900568" cy="6052458"/>
+          </a:xfrm>
+        </p:spPr>
+        <p:txBody>
+          <a:bodyPr>
+            <a:normAutofit lnSpcReduction="10000"/>
+          </a:bodyPr>
+          <a:lstStyle/>
+          <a:p>
+            <a:pPr marL="0" indent="0">
+              <a:buNone/>
+            </a:pPr>
+            <a:r>
+              <a:rPr lang="en-IN" sz="2400" b="1" dirty="0"/>
+              <a:t>All possible 2 student pairs:</a:t>
+            </a:r>
+          </a:p>
+          <a:p>
+            <a:pPr marL="0" indent="0">
+              <a:buNone/>
+            </a:pPr>
+            <a:br>
+              <a:rPr lang="en-IN" sz="2400" b="1" dirty="0"/>
+            </a:br>
+            <a:endParaRPr lang="en-IN" sz="2400" b="1" dirty="0"/>
+          </a:p>
+          <a:p>
+            <a:pPr marL="0" indent="0">
+              <a:buNone/>
+            </a:pPr>
+            <a:endParaRPr lang="en-IN" sz="2800" b="1" dirty="0"/>
+          </a:p>
+          <a:p>
+            <a:pPr marL="0" indent="0">
+              <a:buNone/>
+            </a:pPr>
+            <a:endParaRPr lang="en-IN" sz="2800" b="1" dirty="0"/>
+          </a:p>
+          <a:p>
+            <a:pPr marL="0" indent="0">
+              <a:buNone/>
+            </a:pPr>
+            <a:endParaRPr lang="en-IN" sz="2800" b="1" dirty="0"/>
+          </a:p>
+          <a:p>
+            <a:pPr marL="0" indent="0">
+              <a:buNone/>
+            </a:pPr>
+            <a:endParaRPr lang="en-IN" sz="2800" b="1" dirty="0"/>
+          </a:p>
+          <a:p>
+            <a:pPr marL="0" indent="0">
+              <a:buNone/>
+            </a:pPr>
+            <a:endParaRPr lang="en-IN" sz="2800" b="1" dirty="0"/>
+          </a:p>
+          <a:p>
+            <a:pPr marL="0" indent="0">
+              <a:buNone/>
+            </a:pPr>
+            <a:endParaRPr lang="en-IN" sz="2800" b="1" dirty="0"/>
+          </a:p>
+          <a:p>
+            <a:pPr marL="0" indent="0">
+              <a:buNone/>
+            </a:pPr>
+            <a:endParaRPr lang="en-IN" sz="2800" b="1" dirty="0"/>
+          </a:p>
+          <a:p>
+            <a:pPr marL="0" indent="0">
+              <a:buNone/>
+            </a:pPr>
+            <a:endParaRPr lang="en-IN" sz="2800" b="1" dirty="0"/>
+          </a:p>
+          <a:p>
+            <a:pPr marL="0" indent="0">
+              <a:buNone/>
+            </a:pPr>
+            <a:endParaRPr lang="en-IN" sz="2800" b="1" dirty="0"/>
+          </a:p>
+          <a:p>
+            <a:pPr marL="0" indent="0">
+              <a:buNone/>
+            </a:pPr>
+            <a:r>
+              <a:rPr lang="en-IN" sz="2800" b="1" dirty="0"/>
+              <a:t>Total pairs = 6</a:t>
+            </a:r>
+          </a:p>
+        </p:txBody>
+      </p:sp>
+      <p:graphicFrame>
+        <p:nvGraphicFramePr>
+          <p:cNvPr id="2" name="Table 1">
+            <a:extLst>
+              <a:ext uri="{FF2B5EF4-FFF2-40B4-BE49-F238E27FC236}">
+                <a16:creationId xmlns:a16="http://schemas.microsoft.com/office/drawing/2014/main" id="{1C91B3F7-F3A9-A70D-B6EA-CF9A08DF3D5C}"/>
+              </a:ext>
+            </a:extLst>
+          </p:cNvPr>
+          <p:cNvGraphicFramePr>
+            <a:graphicFrameLocks noGrp="1"/>
+          </p:cNvGraphicFramePr>
+          <p:nvPr>
+            <p:extLst>
+              <p:ext uri="{D42A27DB-BD31-4B8C-83A1-F6EECF244321}">
+                <p14:modId xmlns:p14="http://schemas.microsoft.com/office/powerpoint/2010/main" val="1852417510"/>
+              </p:ext>
+            </p:extLst>
+          </p:nvPr>
+        </p:nvGraphicFramePr>
+        <p:xfrm>
+          <a:off x="806132" y="1164772"/>
+          <a:ext cx="10057811" cy="4299859"/>
+        </p:xfrm>
+        <a:graphic>
+          <a:graphicData uri="http://schemas.openxmlformats.org/drawingml/2006/table">
+            <a:tbl>
+              <a:tblPr firstRow="1" firstCol="1" bandRow="1">
+                <a:tableStyleId>{5C22544A-7EE6-4342-B048-85BDC9FD1C3A}</a:tableStyleId>
+              </a:tblPr>
+              <a:tblGrid>
+                <a:gridCol w="3352232">
+                  <a:extLst>
+                    <a:ext uri="{9D8B030D-6E8A-4147-A177-3AD203B41FA5}">
+                      <a16:colId xmlns:a16="http://schemas.microsoft.com/office/drawing/2014/main" val="3611389032"/>
+                    </a:ext>
+                  </a:extLst>
+                </a:gridCol>
+                <a:gridCol w="3352232">
+                  <a:extLst>
+                    <a:ext uri="{9D8B030D-6E8A-4147-A177-3AD203B41FA5}">
+                      <a16:colId xmlns:a16="http://schemas.microsoft.com/office/drawing/2014/main" val="609777505"/>
+                    </a:ext>
+                  </a:extLst>
+                </a:gridCol>
+                <a:gridCol w="3353347">
+                  <a:extLst>
+                    <a:ext uri="{9D8B030D-6E8A-4147-A177-3AD203B41FA5}">
+                      <a16:colId xmlns:a16="http://schemas.microsoft.com/office/drawing/2014/main" val="3864479174"/>
+                    </a:ext>
+                  </a:extLst>
+                </a:gridCol>
+              </a:tblGrid>
+              <a:tr h="613111">
+                <a:tc>
+                  <a:txBody>
+                    <a:bodyPr/>
+                    <a:lstStyle/>
+                    <a:p>
+                      <a:pPr>
+                        <a:lnSpc>
+                          <a:spcPct val="107000"/>
+                        </a:lnSpc>
+                        <a:spcAft>
+                          <a:spcPts val="800"/>
+                        </a:spcAft>
+                        <a:buNone/>
+                      </a:pPr>
+                      <a:r>
+                        <a:rPr lang="en-IN" sz="2800" kern="100" baseline="30000">
+                          <a:effectLst/>
+                        </a:rPr>
+                        <a:t>Pair</a:t>
+                      </a:r>
+                      <a:endParaRPr lang="en-IN" sz="2800" kern="100">
+                        <a:effectLst/>
+                        <a:latin typeface="Aptos" panose="020B0004020202020204" pitchFamily="34" charset="0"/>
+                        <a:ea typeface="Aptos" panose="020B0004020202020204" pitchFamily="34" charset="0"/>
+                        <a:cs typeface="Tunga" panose="020B0502040204020203" pitchFamily="34" charset="0"/>
+                      </a:endParaRPr>
+                    </a:p>
+                  </a:txBody>
+                  <a:tcPr marL="68580" marR="68580" marT="0" marB="0"/>
+                </a:tc>
+                <a:tc>
+                  <a:txBody>
+                    <a:bodyPr/>
+                    <a:lstStyle/>
+                    <a:p>
+                      <a:pPr>
+                        <a:lnSpc>
+                          <a:spcPct val="107000"/>
+                        </a:lnSpc>
+                        <a:spcAft>
+                          <a:spcPts val="800"/>
+                        </a:spcAft>
+                        <a:buNone/>
+                      </a:pPr>
+                      <a:r>
+                        <a:rPr lang="en-IN" sz="2800" kern="100" baseline="30000" dirty="0">
+                          <a:effectLst/>
+                        </a:rPr>
+                        <a:t>Same Group in True?</a:t>
+                      </a:r>
+                      <a:endParaRPr lang="en-IN" sz="2800" kern="100" dirty="0">
+                        <a:effectLst/>
+                        <a:latin typeface="Aptos" panose="020B0004020202020204" pitchFamily="34" charset="0"/>
+                        <a:ea typeface="Aptos" panose="020B0004020202020204" pitchFamily="34" charset="0"/>
+                        <a:cs typeface="Tunga" panose="020B0502040204020203" pitchFamily="34" charset="0"/>
+                      </a:endParaRPr>
+                    </a:p>
+                  </a:txBody>
+                  <a:tcPr marL="68580" marR="68580" marT="0" marB="0"/>
+                </a:tc>
+                <a:tc>
+                  <a:txBody>
+                    <a:bodyPr/>
+                    <a:lstStyle/>
+                    <a:p>
+                      <a:pPr>
+                        <a:lnSpc>
+                          <a:spcPct val="107000"/>
+                        </a:lnSpc>
+                        <a:spcAft>
+                          <a:spcPts val="800"/>
+                        </a:spcAft>
+                        <a:buNone/>
+                      </a:pPr>
+                      <a:r>
+                        <a:rPr lang="en-IN" sz="2800" kern="100" baseline="30000">
+                          <a:effectLst/>
+                        </a:rPr>
+                        <a:t>Same Clustered Group?</a:t>
+                      </a:r>
+                      <a:endParaRPr lang="en-IN" sz="2800" kern="100">
+                        <a:effectLst/>
+                        <a:latin typeface="Aptos" panose="020B0004020202020204" pitchFamily="34" charset="0"/>
+                        <a:ea typeface="Aptos" panose="020B0004020202020204" pitchFamily="34" charset="0"/>
+                        <a:cs typeface="Tunga" panose="020B0502040204020203" pitchFamily="34" charset="0"/>
+                      </a:endParaRPr>
+                    </a:p>
+                  </a:txBody>
+                  <a:tcPr marL="68580" marR="68580" marT="0" marB="0"/>
+                </a:tc>
+                <a:extLst>
+                  <a:ext uri="{0D108BD9-81ED-4DB2-BD59-A6C34878D82A}">
+                    <a16:rowId xmlns:a16="http://schemas.microsoft.com/office/drawing/2014/main" val="2295854184"/>
+                  </a:ext>
+                </a:extLst>
+              </a:tr>
+              <a:tr h="614458">
+                <a:tc>
+                  <a:txBody>
+                    <a:bodyPr/>
+                    <a:lstStyle/>
+                    <a:p>
+                      <a:pPr>
+                        <a:lnSpc>
+                          <a:spcPct val="107000"/>
+                        </a:lnSpc>
+                        <a:spcAft>
+                          <a:spcPts val="800"/>
+                        </a:spcAft>
+                        <a:buNone/>
+                      </a:pPr>
+                      <a:r>
+                        <a:rPr lang="en-IN" sz="2800" kern="100" baseline="30000">
+                          <a:effectLst/>
+                        </a:rPr>
+                        <a:t>A-B</a:t>
+                      </a:r>
+                      <a:endParaRPr lang="en-IN" sz="2800" kern="100">
+                        <a:effectLst/>
+                        <a:latin typeface="Aptos" panose="020B0004020202020204" pitchFamily="34" charset="0"/>
+                        <a:ea typeface="Aptos" panose="020B0004020202020204" pitchFamily="34" charset="0"/>
+                        <a:cs typeface="Tunga" panose="020B0502040204020203" pitchFamily="34" charset="0"/>
+                      </a:endParaRPr>
+                    </a:p>
+                  </a:txBody>
+                  <a:tcPr marL="68580" marR="68580" marT="0" marB="0"/>
+                </a:tc>
+                <a:tc>
+                  <a:txBody>
+                    <a:bodyPr/>
+                    <a:lstStyle/>
+                    <a:p>
+                      <a:pPr>
+                        <a:lnSpc>
+                          <a:spcPct val="107000"/>
+                        </a:lnSpc>
+                        <a:spcAft>
+                          <a:spcPts val="800"/>
+                        </a:spcAft>
+                        <a:buNone/>
+                      </a:pPr>
+                      <a:r>
+                        <a:rPr lang="en-IN" sz="2800" kern="100" baseline="30000">
+                          <a:effectLst/>
+                        </a:rPr>
+                        <a:t>✅ Yes</a:t>
+                      </a:r>
+                      <a:endParaRPr lang="en-IN" sz="2800" kern="100">
+                        <a:effectLst/>
+                        <a:latin typeface="Aptos" panose="020B0004020202020204" pitchFamily="34" charset="0"/>
+                        <a:ea typeface="Aptos" panose="020B0004020202020204" pitchFamily="34" charset="0"/>
+                        <a:cs typeface="Tunga" panose="020B0502040204020203" pitchFamily="34" charset="0"/>
+                      </a:endParaRPr>
+                    </a:p>
+                  </a:txBody>
+                  <a:tcPr marL="68580" marR="68580" marT="0" marB="0"/>
+                </a:tc>
+                <a:tc>
+                  <a:txBody>
+                    <a:bodyPr/>
+                    <a:lstStyle/>
+                    <a:p>
+                      <a:pPr>
+                        <a:lnSpc>
+                          <a:spcPct val="107000"/>
+                        </a:lnSpc>
+                        <a:spcAft>
+                          <a:spcPts val="800"/>
+                        </a:spcAft>
+                        <a:buNone/>
+                      </a:pPr>
+                      <a:r>
+                        <a:rPr lang="en-IN" sz="2800" kern="100" baseline="30000">
+                          <a:effectLst/>
+                        </a:rPr>
+                        <a:t>❌ No</a:t>
+                      </a:r>
+                      <a:endParaRPr lang="en-IN" sz="2800" kern="100">
+                        <a:effectLst/>
+                        <a:latin typeface="Aptos" panose="020B0004020202020204" pitchFamily="34" charset="0"/>
+                        <a:ea typeface="Aptos" panose="020B0004020202020204" pitchFamily="34" charset="0"/>
+                        <a:cs typeface="Tunga" panose="020B0502040204020203" pitchFamily="34" charset="0"/>
+                      </a:endParaRPr>
+                    </a:p>
+                  </a:txBody>
+                  <a:tcPr marL="68580" marR="68580" marT="0" marB="0"/>
+                </a:tc>
+                <a:extLst>
+                  <a:ext uri="{0D108BD9-81ED-4DB2-BD59-A6C34878D82A}">
+                    <a16:rowId xmlns:a16="http://schemas.microsoft.com/office/drawing/2014/main" val="2582901529"/>
+                  </a:ext>
+                </a:extLst>
+              </a:tr>
+              <a:tr h="614458">
+                <a:tc>
+                  <a:txBody>
+                    <a:bodyPr/>
+                    <a:lstStyle/>
+                    <a:p>
+                      <a:pPr>
+                        <a:lnSpc>
+                          <a:spcPct val="107000"/>
+                        </a:lnSpc>
+                        <a:spcAft>
+                          <a:spcPts val="800"/>
+                        </a:spcAft>
+                        <a:buNone/>
+                      </a:pPr>
+                      <a:r>
+                        <a:rPr lang="pt-BR" sz="2800" kern="100" baseline="30000">
+                          <a:effectLst/>
+                        </a:rPr>
+                        <a:t>A-C</a:t>
+                      </a:r>
+                      <a:endParaRPr lang="en-IN" sz="2800" kern="100">
+                        <a:effectLst/>
+                        <a:latin typeface="Aptos" panose="020B0004020202020204" pitchFamily="34" charset="0"/>
+                        <a:ea typeface="Aptos" panose="020B0004020202020204" pitchFamily="34" charset="0"/>
+                        <a:cs typeface="Tunga" panose="020B0502040204020203" pitchFamily="34" charset="0"/>
+                      </a:endParaRPr>
+                    </a:p>
+                  </a:txBody>
+                  <a:tcPr marL="68580" marR="68580" marT="0" marB="0"/>
+                </a:tc>
+                <a:tc>
+                  <a:txBody>
+                    <a:bodyPr/>
+                    <a:lstStyle/>
+                    <a:p>
+                      <a:pPr>
+                        <a:lnSpc>
+                          <a:spcPct val="107000"/>
+                        </a:lnSpc>
+                        <a:spcAft>
+                          <a:spcPts val="800"/>
+                        </a:spcAft>
+                        <a:buNone/>
+                      </a:pPr>
+                      <a:r>
+                        <a:rPr lang="pt-BR" sz="2800" kern="100" baseline="30000">
+                          <a:effectLst/>
+                        </a:rPr>
+                        <a:t>❌ No</a:t>
+                      </a:r>
+                      <a:endParaRPr lang="en-IN" sz="2800" kern="100">
+                        <a:effectLst/>
+                        <a:latin typeface="Aptos" panose="020B0004020202020204" pitchFamily="34" charset="0"/>
+                        <a:ea typeface="Aptos" panose="020B0004020202020204" pitchFamily="34" charset="0"/>
+                        <a:cs typeface="Tunga" panose="020B0502040204020203" pitchFamily="34" charset="0"/>
+                      </a:endParaRPr>
+                    </a:p>
+                  </a:txBody>
+                  <a:tcPr marL="68580" marR="68580" marT="0" marB="0"/>
+                </a:tc>
+                <a:tc>
+                  <a:txBody>
+                    <a:bodyPr/>
+                    <a:lstStyle/>
+                    <a:p>
+                      <a:pPr>
+                        <a:lnSpc>
+                          <a:spcPct val="107000"/>
+                        </a:lnSpc>
+                        <a:spcAft>
+                          <a:spcPts val="800"/>
+                        </a:spcAft>
+                        <a:buNone/>
+                      </a:pPr>
+                      <a:r>
+                        <a:rPr lang="pt-BR" sz="2800" kern="100" baseline="30000">
+                          <a:effectLst/>
+                        </a:rPr>
+                        <a:t>✅ Yes</a:t>
+                      </a:r>
+                      <a:endParaRPr lang="en-IN" sz="2800" kern="100">
+                        <a:effectLst/>
+                        <a:latin typeface="Aptos" panose="020B0004020202020204" pitchFamily="34" charset="0"/>
+                        <a:ea typeface="Aptos" panose="020B0004020202020204" pitchFamily="34" charset="0"/>
+                        <a:cs typeface="Tunga" panose="020B0502040204020203" pitchFamily="34" charset="0"/>
+                      </a:endParaRPr>
+                    </a:p>
+                  </a:txBody>
+                  <a:tcPr marL="68580" marR="68580" marT="0" marB="0"/>
+                </a:tc>
+                <a:extLst>
+                  <a:ext uri="{0D108BD9-81ED-4DB2-BD59-A6C34878D82A}">
+                    <a16:rowId xmlns:a16="http://schemas.microsoft.com/office/drawing/2014/main" val="2437362430"/>
+                  </a:ext>
+                </a:extLst>
+              </a:tr>
+              <a:tr h="614458">
+                <a:tc>
+                  <a:txBody>
+                    <a:bodyPr/>
+                    <a:lstStyle/>
+                    <a:p>
+                      <a:pPr>
+                        <a:lnSpc>
+                          <a:spcPct val="107000"/>
+                        </a:lnSpc>
+                        <a:spcAft>
+                          <a:spcPts val="800"/>
+                        </a:spcAft>
+                        <a:buNone/>
+                      </a:pPr>
+                      <a:r>
+                        <a:rPr lang="pt-BR" sz="2800" kern="100" baseline="30000">
+                          <a:effectLst/>
+                        </a:rPr>
+                        <a:t>A-D</a:t>
+                      </a:r>
+                      <a:endParaRPr lang="en-IN" sz="2800" kern="100">
+                        <a:effectLst/>
+                        <a:latin typeface="Aptos" panose="020B0004020202020204" pitchFamily="34" charset="0"/>
+                        <a:ea typeface="Aptos" panose="020B0004020202020204" pitchFamily="34" charset="0"/>
+                        <a:cs typeface="Tunga" panose="020B0502040204020203" pitchFamily="34" charset="0"/>
+                      </a:endParaRPr>
+                    </a:p>
+                  </a:txBody>
+                  <a:tcPr marL="68580" marR="68580" marT="0" marB="0"/>
+                </a:tc>
+                <a:tc>
+                  <a:txBody>
+                    <a:bodyPr/>
+                    <a:lstStyle/>
+                    <a:p>
+                      <a:pPr>
+                        <a:lnSpc>
+                          <a:spcPct val="107000"/>
+                        </a:lnSpc>
+                        <a:spcAft>
+                          <a:spcPts val="800"/>
+                        </a:spcAft>
+                        <a:buNone/>
+                      </a:pPr>
+                      <a:r>
+                        <a:rPr lang="pt-BR" sz="2800" kern="100" baseline="30000" dirty="0">
+                          <a:effectLst/>
+                        </a:rPr>
+                        <a:t>❌ No</a:t>
+                      </a:r>
+                      <a:endParaRPr lang="en-IN" sz="2800" kern="100" dirty="0">
+                        <a:effectLst/>
+                        <a:latin typeface="Aptos" panose="020B0004020202020204" pitchFamily="34" charset="0"/>
+                        <a:ea typeface="Aptos" panose="020B0004020202020204" pitchFamily="34" charset="0"/>
+                        <a:cs typeface="Tunga" panose="020B0502040204020203" pitchFamily="34" charset="0"/>
+                      </a:endParaRPr>
+                    </a:p>
+                  </a:txBody>
+                  <a:tcPr marL="68580" marR="68580" marT="0" marB="0"/>
+                </a:tc>
+                <a:tc>
+                  <a:txBody>
+                    <a:bodyPr/>
+                    <a:lstStyle/>
+                    <a:p>
+                      <a:pPr>
+                        <a:lnSpc>
+                          <a:spcPct val="107000"/>
+                        </a:lnSpc>
+                        <a:spcAft>
+                          <a:spcPts val="800"/>
+                        </a:spcAft>
+                        <a:buNone/>
+                      </a:pPr>
+                      <a:r>
+                        <a:rPr lang="pt-BR" sz="2800" kern="100" baseline="30000">
+                          <a:effectLst/>
+                        </a:rPr>
+                        <a:t>❌ No</a:t>
+                      </a:r>
+                      <a:endParaRPr lang="en-IN" sz="2800" kern="100">
+                        <a:effectLst/>
+                        <a:latin typeface="Aptos" panose="020B0004020202020204" pitchFamily="34" charset="0"/>
+                        <a:ea typeface="Aptos" panose="020B0004020202020204" pitchFamily="34" charset="0"/>
+                        <a:cs typeface="Tunga" panose="020B0502040204020203" pitchFamily="34" charset="0"/>
+                      </a:endParaRPr>
+                    </a:p>
+                  </a:txBody>
+                  <a:tcPr marL="68580" marR="68580" marT="0" marB="0"/>
+                </a:tc>
+                <a:extLst>
+                  <a:ext uri="{0D108BD9-81ED-4DB2-BD59-A6C34878D82A}">
+                    <a16:rowId xmlns:a16="http://schemas.microsoft.com/office/drawing/2014/main" val="3027983888"/>
+                  </a:ext>
+                </a:extLst>
+              </a:tr>
+              <a:tr h="614458">
+                <a:tc>
+                  <a:txBody>
+                    <a:bodyPr/>
+                    <a:lstStyle/>
+                    <a:p>
+                      <a:pPr>
+                        <a:lnSpc>
+                          <a:spcPct val="107000"/>
+                        </a:lnSpc>
+                        <a:spcAft>
+                          <a:spcPts val="800"/>
+                        </a:spcAft>
+                        <a:buNone/>
+                      </a:pPr>
+                      <a:r>
+                        <a:rPr lang="pt-BR" sz="2800" kern="100" baseline="30000">
+                          <a:effectLst/>
+                        </a:rPr>
+                        <a:t>B-C</a:t>
+                      </a:r>
+                      <a:endParaRPr lang="en-IN" sz="2800" kern="100">
+                        <a:effectLst/>
+                        <a:latin typeface="Aptos" panose="020B0004020202020204" pitchFamily="34" charset="0"/>
+                        <a:ea typeface="Aptos" panose="020B0004020202020204" pitchFamily="34" charset="0"/>
+                        <a:cs typeface="Tunga" panose="020B0502040204020203" pitchFamily="34" charset="0"/>
+                      </a:endParaRPr>
+                    </a:p>
+                  </a:txBody>
+                  <a:tcPr marL="68580" marR="68580" marT="0" marB="0"/>
+                </a:tc>
+                <a:tc>
+                  <a:txBody>
+                    <a:bodyPr/>
+                    <a:lstStyle/>
+                    <a:p>
+                      <a:pPr>
+                        <a:lnSpc>
+                          <a:spcPct val="107000"/>
+                        </a:lnSpc>
+                        <a:spcAft>
+                          <a:spcPts val="800"/>
+                        </a:spcAft>
+                        <a:buNone/>
+                      </a:pPr>
+                      <a:r>
+                        <a:rPr lang="pt-BR" sz="2800" kern="100" baseline="30000">
+                          <a:effectLst/>
+                        </a:rPr>
+                        <a:t>❌ No</a:t>
+                      </a:r>
+                      <a:endParaRPr lang="en-IN" sz="2800" kern="100">
+                        <a:effectLst/>
+                        <a:latin typeface="Aptos" panose="020B0004020202020204" pitchFamily="34" charset="0"/>
+                        <a:ea typeface="Aptos" panose="020B0004020202020204" pitchFamily="34" charset="0"/>
+                        <a:cs typeface="Tunga" panose="020B0502040204020203" pitchFamily="34" charset="0"/>
+                      </a:endParaRPr>
+                    </a:p>
+                  </a:txBody>
+                  <a:tcPr marL="68580" marR="68580" marT="0" marB="0"/>
+                </a:tc>
+                <a:tc>
+                  <a:txBody>
+                    <a:bodyPr/>
+                    <a:lstStyle/>
+                    <a:p>
+                      <a:pPr>
+                        <a:lnSpc>
+                          <a:spcPct val="107000"/>
+                        </a:lnSpc>
+                        <a:spcAft>
+                          <a:spcPts val="800"/>
+                        </a:spcAft>
+                        <a:buNone/>
+                      </a:pPr>
+                      <a:r>
+                        <a:rPr lang="pt-BR" sz="2800" kern="100" baseline="30000">
+                          <a:effectLst/>
+                        </a:rPr>
+                        <a:t>❌ No</a:t>
+                      </a:r>
+                      <a:endParaRPr lang="en-IN" sz="2800" kern="100">
+                        <a:effectLst/>
+                        <a:latin typeface="Aptos" panose="020B0004020202020204" pitchFamily="34" charset="0"/>
+                        <a:ea typeface="Aptos" panose="020B0004020202020204" pitchFamily="34" charset="0"/>
+                        <a:cs typeface="Tunga" panose="020B0502040204020203" pitchFamily="34" charset="0"/>
+                      </a:endParaRPr>
+                    </a:p>
+                  </a:txBody>
+                  <a:tcPr marL="68580" marR="68580" marT="0" marB="0"/>
+                </a:tc>
+                <a:extLst>
+                  <a:ext uri="{0D108BD9-81ED-4DB2-BD59-A6C34878D82A}">
+                    <a16:rowId xmlns:a16="http://schemas.microsoft.com/office/drawing/2014/main" val="745486664"/>
+                  </a:ext>
+                </a:extLst>
+              </a:tr>
+              <a:tr h="614458">
+                <a:tc>
+                  <a:txBody>
+                    <a:bodyPr/>
+                    <a:lstStyle/>
+                    <a:p>
+                      <a:pPr>
+                        <a:lnSpc>
+                          <a:spcPct val="107000"/>
+                        </a:lnSpc>
+                        <a:spcAft>
+                          <a:spcPts val="800"/>
+                        </a:spcAft>
+                        <a:buNone/>
+                      </a:pPr>
+                      <a:r>
+                        <a:rPr lang="pt-BR" sz="2800" kern="100" baseline="30000">
+                          <a:effectLst/>
+                        </a:rPr>
+                        <a:t>B-D</a:t>
+                      </a:r>
+                      <a:endParaRPr lang="en-IN" sz="2800" kern="100">
+                        <a:effectLst/>
+                        <a:latin typeface="Aptos" panose="020B0004020202020204" pitchFamily="34" charset="0"/>
+                        <a:ea typeface="Aptos" panose="020B0004020202020204" pitchFamily="34" charset="0"/>
+                        <a:cs typeface="Tunga" panose="020B0502040204020203" pitchFamily="34" charset="0"/>
+                      </a:endParaRPr>
+                    </a:p>
+                  </a:txBody>
+                  <a:tcPr marL="68580" marR="68580" marT="0" marB="0"/>
+                </a:tc>
+                <a:tc>
+                  <a:txBody>
+                    <a:bodyPr/>
+                    <a:lstStyle/>
+                    <a:p>
+                      <a:pPr>
+                        <a:lnSpc>
+                          <a:spcPct val="107000"/>
+                        </a:lnSpc>
+                        <a:spcAft>
+                          <a:spcPts val="800"/>
+                        </a:spcAft>
+                        <a:buNone/>
+                      </a:pPr>
+                      <a:r>
+                        <a:rPr lang="pt-BR" sz="2800" kern="100" baseline="30000">
+                          <a:effectLst/>
+                        </a:rPr>
+                        <a:t>❌ No</a:t>
+                      </a:r>
+                      <a:endParaRPr lang="en-IN" sz="2800" kern="100">
+                        <a:effectLst/>
+                        <a:latin typeface="Aptos" panose="020B0004020202020204" pitchFamily="34" charset="0"/>
+                        <a:ea typeface="Aptos" panose="020B0004020202020204" pitchFamily="34" charset="0"/>
+                        <a:cs typeface="Tunga" panose="020B0502040204020203" pitchFamily="34" charset="0"/>
+                      </a:endParaRPr>
+                    </a:p>
+                  </a:txBody>
+                  <a:tcPr marL="68580" marR="68580" marT="0" marB="0"/>
+                </a:tc>
+                <a:tc>
+                  <a:txBody>
+                    <a:bodyPr/>
+                    <a:lstStyle/>
+                    <a:p>
+                      <a:pPr>
+                        <a:lnSpc>
+                          <a:spcPct val="107000"/>
+                        </a:lnSpc>
+                        <a:spcAft>
+                          <a:spcPts val="800"/>
+                        </a:spcAft>
+                        <a:buNone/>
+                      </a:pPr>
+                      <a:r>
+                        <a:rPr lang="pt-BR" sz="2800" kern="100" baseline="30000">
+                          <a:effectLst/>
+                        </a:rPr>
+                        <a:t>✅ Yes</a:t>
+                      </a:r>
+                      <a:endParaRPr lang="en-IN" sz="2800" kern="100">
+                        <a:effectLst/>
+                        <a:latin typeface="Aptos" panose="020B0004020202020204" pitchFamily="34" charset="0"/>
+                        <a:ea typeface="Aptos" panose="020B0004020202020204" pitchFamily="34" charset="0"/>
+                        <a:cs typeface="Tunga" panose="020B0502040204020203" pitchFamily="34" charset="0"/>
+                      </a:endParaRPr>
+                    </a:p>
+                  </a:txBody>
+                  <a:tcPr marL="68580" marR="68580" marT="0" marB="0"/>
+                </a:tc>
+                <a:extLst>
+                  <a:ext uri="{0D108BD9-81ED-4DB2-BD59-A6C34878D82A}">
+                    <a16:rowId xmlns:a16="http://schemas.microsoft.com/office/drawing/2014/main" val="3625713285"/>
+                  </a:ext>
+                </a:extLst>
+              </a:tr>
+              <a:tr h="614458">
+                <a:tc>
+                  <a:txBody>
+                    <a:bodyPr/>
+                    <a:lstStyle/>
+                    <a:p>
+                      <a:pPr>
+                        <a:lnSpc>
+                          <a:spcPct val="107000"/>
+                        </a:lnSpc>
+                        <a:spcAft>
+                          <a:spcPts val="800"/>
+                        </a:spcAft>
+                        <a:buNone/>
+                      </a:pPr>
+                      <a:r>
+                        <a:rPr lang="en-IN" sz="2800" kern="100" baseline="30000">
+                          <a:effectLst/>
+                        </a:rPr>
+                        <a:t>C-D</a:t>
+                      </a:r>
+                      <a:endParaRPr lang="en-IN" sz="2800" kern="100">
+                        <a:effectLst/>
+                        <a:latin typeface="Aptos" panose="020B0004020202020204" pitchFamily="34" charset="0"/>
+                        <a:ea typeface="Aptos" panose="020B0004020202020204" pitchFamily="34" charset="0"/>
+                        <a:cs typeface="Tunga" panose="020B0502040204020203" pitchFamily="34" charset="0"/>
+                      </a:endParaRPr>
+                    </a:p>
+                  </a:txBody>
+                  <a:tcPr marL="68580" marR="68580" marT="0" marB="0"/>
+                </a:tc>
+                <a:tc>
+                  <a:txBody>
+                    <a:bodyPr/>
+                    <a:lstStyle/>
+                    <a:p>
+                      <a:pPr>
+                        <a:lnSpc>
+                          <a:spcPct val="107000"/>
+                        </a:lnSpc>
+                        <a:spcAft>
+                          <a:spcPts val="800"/>
+                        </a:spcAft>
+                        <a:buNone/>
+                      </a:pPr>
+                      <a:r>
+                        <a:rPr lang="en-IN" sz="2800" kern="100" baseline="30000">
+                          <a:effectLst/>
+                        </a:rPr>
+                        <a:t>✅ Yes</a:t>
+                      </a:r>
+                      <a:endParaRPr lang="en-IN" sz="2800" kern="100">
+                        <a:effectLst/>
+                        <a:latin typeface="Aptos" panose="020B0004020202020204" pitchFamily="34" charset="0"/>
+                        <a:ea typeface="Aptos" panose="020B0004020202020204" pitchFamily="34" charset="0"/>
+                        <a:cs typeface="Tunga" panose="020B0502040204020203" pitchFamily="34" charset="0"/>
+                      </a:endParaRPr>
+                    </a:p>
+                  </a:txBody>
+                  <a:tcPr marL="68580" marR="68580" marT="0" marB="0"/>
+                </a:tc>
+                <a:tc>
+                  <a:txBody>
+                    <a:bodyPr/>
+                    <a:lstStyle/>
+                    <a:p>
+                      <a:pPr>
+                        <a:lnSpc>
+                          <a:spcPct val="107000"/>
+                        </a:lnSpc>
+                        <a:spcAft>
+                          <a:spcPts val="800"/>
+                        </a:spcAft>
+                        <a:buNone/>
+                      </a:pPr>
+                      <a:r>
+                        <a:rPr lang="en-IN" sz="2800" kern="100" baseline="30000" dirty="0">
+                          <a:effectLst/>
+                        </a:rPr>
+                        <a:t>❌ No</a:t>
+                      </a:r>
+                      <a:endParaRPr lang="en-IN" sz="2800" kern="100" dirty="0">
+                        <a:effectLst/>
+                        <a:latin typeface="Aptos" panose="020B0004020202020204" pitchFamily="34" charset="0"/>
+                        <a:ea typeface="Aptos" panose="020B0004020202020204" pitchFamily="34" charset="0"/>
+                        <a:cs typeface="Tunga" panose="020B0502040204020203" pitchFamily="34" charset="0"/>
+                      </a:endParaRPr>
+                    </a:p>
+                  </a:txBody>
+                  <a:tcPr marL="68580" marR="68580" marT="0" marB="0"/>
+                </a:tc>
+                <a:extLst>
+                  <a:ext uri="{0D108BD9-81ED-4DB2-BD59-A6C34878D82A}">
+                    <a16:rowId xmlns:a16="http://schemas.microsoft.com/office/drawing/2014/main" val="2016334121"/>
+                  </a:ext>
+                </a:extLst>
+              </a:tr>
+            </a:tbl>
+          </a:graphicData>
+        </a:graphic>
+      </p:graphicFrame>
+    </p:spTree>
+    <p:extLst>
+      <p:ext uri="{BB962C8B-B14F-4D97-AF65-F5344CB8AC3E}">
+        <p14:creationId xmlns:p14="http://schemas.microsoft.com/office/powerpoint/2010/main" val="3160242362"/>
+      </p:ext>
+    </p:extLst>
+  </p:cSld>
+  <p:clrMapOvr>
+    <a:masterClrMapping/>
+  </p:clrMapOvr>
+</p:sld>
+</file>
+
+<file path=ppt/slides/slide54.xml><?xml version="1.0" encoding="utf-8"?>
+<p:sld xmlns:a="http://schemas.openxmlformats.org/drawingml/2006/main" xmlns:r="http://schemas.openxmlformats.org/officeDocument/2006/relationships" xmlns:p="http://schemas.openxmlformats.org/presentationml/2006/main">
+  <p:cSld>
+    <p:spTree>
+      <p:nvGrpSpPr>
+        <p:cNvPr id="1" name="">
+          <a:extLst>
+            <a:ext uri="{FF2B5EF4-FFF2-40B4-BE49-F238E27FC236}">
+              <a16:creationId xmlns:a16="http://schemas.microsoft.com/office/drawing/2014/main" id="{827F32DA-5F64-4470-5258-5529D93D3A36}"/>
+            </a:ext>
+          </a:extLst>
+        </p:cNvPr>
+        <p:cNvGrpSpPr/>
+        <p:nvPr/>
+      </p:nvGrpSpPr>
+      <p:grpSpPr>
+        <a:xfrm>
+          <a:off x="0" y="0"/>
+          <a:ext cx="0" cy="0"/>
+          <a:chOff x="0" y="0"/>
+          <a:chExt cx="0" cy="0"/>
+        </a:xfrm>
+      </p:grpSpPr>
+      <p:sp>
+        <p:nvSpPr>
+          <p:cNvPr id="3" name="Content Placeholder 2">
+            <a:extLst>
+              <a:ext uri="{FF2B5EF4-FFF2-40B4-BE49-F238E27FC236}">
+                <a16:creationId xmlns:a16="http://schemas.microsoft.com/office/drawing/2014/main" id="{4891EF13-68A2-3CCF-BC20-48EA225E1E2C}"/>
+              </a:ext>
+            </a:extLst>
+          </p:cNvPr>
+          <p:cNvSpPr>
+            <a:spLocks noGrp="1"/>
+          </p:cNvSpPr>
+          <p:nvPr>
+            <p:ph idx="1"/>
+          </p:nvPr>
+        </p:nvSpPr>
+        <p:spPr>
+          <a:xfrm>
+            <a:off x="702853" y="707571"/>
+            <a:ext cx="10900568" cy="5486400"/>
+          </a:xfrm>
+        </p:spPr>
+        <p:txBody>
+          <a:bodyPr>
+            <a:normAutofit/>
+          </a:bodyPr>
+          <a:lstStyle/>
+          <a:p>
+            <a:pPr marL="0" indent="0">
+              <a:buNone/>
+            </a:pPr>
+            <a:r>
+              <a:rPr lang="en-US" sz="2800" b="1" dirty="0"/>
+              <a:t>Count the pairs:</a:t>
+            </a:r>
+          </a:p>
+          <a:p>
+            <a:r>
+              <a:rPr lang="en-US" sz="2400" dirty="0"/>
+              <a:t>✅ SS = </a:t>
+            </a:r>
+            <a:r>
+              <a:rPr lang="en-US" sz="2400" b="1" dirty="0">
+                <a:solidFill>
+                  <a:schemeClr val="tx2">
+                    <a:lumMod val="75000"/>
+                    <a:lumOff val="25000"/>
+                  </a:schemeClr>
+                </a:solidFill>
+              </a:rPr>
+              <a:t>Same in both </a:t>
+            </a:r>
+            <a:r>
+              <a:rPr lang="en-US" sz="2400" dirty="0"/>
+              <a:t>→ 0 pairs</a:t>
+            </a:r>
+          </a:p>
+          <a:p>
+            <a:r>
+              <a:rPr lang="en-US" sz="2400" dirty="0"/>
+              <a:t>✅ DD = </a:t>
+            </a:r>
+            <a:r>
+              <a:rPr lang="en-US" sz="2400" b="1" dirty="0">
+                <a:solidFill>
+                  <a:schemeClr val="tx2">
+                    <a:lumMod val="75000"/>
+                    <a:lumOff val="25000"/>
+                  </a:schemeClr>
+                </a:solidFill>
+              </a:rPr>
+              <a:t>Different in both </a:t>
+            </a:r>
+            <a:r>
+              <a:rPr lang="en-US" sz="2400" dirty="0"/>
+              <a:t>→ 2 pairs (A-D, B-C)</a:t>
+            </a:r>
+          </a:p>
+          <a:p>
+            <a:r>
+              <a:rPr lang="en-US" sz="2400" dirty="0"/>
+              <a:t>❌ SD / DS = </a:t>
+            </a:r>
+            <a:r>
+              <a:rPr lang="en-US" sz="2400" b="1" dirty="0">
+                <a:solidFill>
+                  <a:schemeClr val="tx2">
+                    <a:lumMod val="75000"/>
+                    <a:lumOff val="25000"/>
+                  </a:schemeClr>
+                </a:solidFill>
+              </a:rPr>
+              <a:t>Mismatches</a:t>
+            </a:r>
+            <a:r>
+              <a:rPr lang="en-US" sz="2400" dirty="0"/>
+              <a:t> → 4 pairs</a:t>
+            </a:r>
+          </a:p>
+          <a:p>
+            <a:pPr marL="0" indent="0">
+              <a:buNone/>
+            </a:pPr>
+            <a:endParaRPr lang="en-US" sz="2400" dirty="0"/>
+          </a:p>
+          <a:p>
+            <a:pPr marL="0" indent="0">
+              <a:buNone/>
+            </a:pPr>
+            <a:r>
+              <a:rPr lang="en-US" sz="2400" dirty="0"/>
+              <a:t>So, only </a:t>
+            </a:r>
+            <a:r>
+              <a:rPr lang="en-US" sz="2400" b="1" dirty="0">
+                <a:solidFill>
+                  <a:schemeClr val="tx2">
+                    <a:lumMod val="75000"/>
+                    <a:lumOff val="25000"/>
+                  </a:schemeClr>
+                </a:solidFill>
+              </a:rPr>
+              <a:t>2 out of 6 pairs match </a:t>
+            </a:r>
+            <a:r>
+              <a:rPr lang="en-US" sz="2400" dirty="0"/>
+              <a:t>the real grouping.</a:t>
+            </a:r>
+          </a:p>
+          <a:p>
+            <a:pPr marL="0" indent="0">
+              <a:buNone/>
+            </a:pPr>
+            <a:endParaRPr lang="en-IN" sz="2800" dirty="0"/>
+          </a:p>
+        </p:txBody>
+      </p:sp>
+    </p:spTree>
+    <p:extLst>
+      <p:ext uri="{BB962C8B-B14F-4D97-AF65-F5344CB8AC3E}">
+        <p14:creationId xmlns:p14="http://schemas.microsoft.com/office/powerpoint/2010/main" val="2024877199"/>
+      </p:ext>
+    </p:extLst>
+  </p:cSld>
+  <p:clrMapOvr>
+    <a:masterClrMapping/>
+  </p:clrMapOvr>
+</p:sld>
+</file>
+
+<file path=ppt/slides/slide55.xml><?xml version="1.0" encoding="utf-8"?>
+<p:sld xmlns:a="http://schemas.openxmlformats.org/drawingml/2006/main" xmlns:r="http://schemas.openxmlformats.org/officeDocument/2006/relationships" xmlns:p="http://schemas.openxmlformats.org/presentationml/2006/main">
+  <p:cSld>
+    <p:spTree>
+      <p:nvGrpSpPr>
+        <p:cNvPr id="1" name="">
+          <a:extLst>
+            <a:ext uri="{FF2B5EF4-FFF2-40B4-BE49-F238E27FC236}">
+              <a16:creationId xmlns:a16="http://schemas.microsoft.com/office/drawing/2014/main" id="{A30AB1CB-F264-986D-3298-81ED19D478D1}"/>
+            </a:ext>
+          </a:extLst>
+        </p:cNvPr>
+        <p:cNvGrpSpPr/>
+        <p:nvPr/>
+      </p:nvGrpSpPr>
+      <p:grpSpPr>
+        <a:xfrm>
+          <a:off x="0" y="0"/>
+          <a:ext cx="0" cy="0"/>
+          <a:chOff x="0" y="0"/>
+          <a:chExt cx="0" cy="0"/>
+        </a:xfrm>
+      </p:grpSpPr>
+      <p:sp>
+        <p:nvSpPr>
+          <p:cNvPr id="3" name="Content Placeholder 2">
+            <a:extLst>
+              <a:ext uri="{FF2B5EF4-FFF2-40B4-BE49-F238E27FC236}">
+                <a16:creationId xmlns:a16="http://schemas.microsoft.com/office/drawing/2014/main" id="{81B63299-E217-09B1-36D8-ECD552F46EC4}"/>
+              </a:ext>
+            </a:extLst>
+          </p:cNvPr>
+          <p:cNvSpPr>
+            <a:spLocks noGrp="1"/>
+          </p:cNvSpPr>
+          <p:nvPr>
+            <p:ph idx="1"/>
+          </p:nvPr>
+        </p:nvSpPr>
+        <p:spPr>
+          <a:xfrm>
+            <a:off x="702853" y="707571"/>
+            <a:ext cx="10900568" cy="5486400"/>
+          </a:xfrm>
+        </p:spPr>
+        <p:txBody>
+          <a:bodyPr>
+            <a:normAutofit/>
+          </a:bodyPr>
+          <a:lstStyle/>
+          <a:p>
+            <a:pPr marL="0" indent="0">
+              <a:buNone/>
+            </a:pPr>
+            <a:r>
+              <a:rPr lang="en-US" sz="2400" b="1" dirty="0"/>
+              <a:t>Apply ARI Formula (Simplified)</a:t>
+            </a:r>
+          </a:p>
+          <a:p>
+            <a:r>
+              <a:rPr lang="en-US" sz="2400" dirty="0"/>
+              <a:t>The </a:t>
+            </a:r>
+            <a:r>
+              <a:rPr lang="en-US" sz="2400" b="1" dirty="0">
+                <a:solidFill>
+                  <a:schemeClr val="tx2">
+                    <a:lumMod val="75000"/>
+                    <a:lumOff val="25000"/>
+                  </a:schemeClr>
+                </a:solidFill>
+              </a:rPr>
+              <a:t>ARI</a:t>
+            </a:r>
+            <a:r>
+              <a:rPr lang="en-US" sz="2400" dirty="0"/>
+              <a:t> formula is:</a:t>
+            </a:r>
+          </a:p>
+          <a:p>
+            <a:endParaRPr lang="en-US" sz="2400" dirty="0"/>
+          </a:p>
+          <a:p>
+            <a:endParaRPr lang="en-US" sz="2400" dirty="0"/>
+          </a:p>
+          <a:p>
+            <a:endParaRPr lang="en-US" sz="2400" dirty="0"/>
+          </a:p>
+          <a:p>
+            <a:endParaRPr lang="en-US" sz="2400" dirty="0"/>
+          </a:p>
+          <a:p>
+            <a:r>
+              <a:rPr lang="en-US" sz="2400" dirty="0"/>
+              <a:t>In basic cases, you can think of it as:</a:t>
+            </a:r>
+          </a:p>
+          <a:p>
+            <a:endParaRPr lang="en-US" sz="2200" dirty="0"/>
+          </a:p>
+          <a:p>
+            <a:pPr marL="0" indent="0">
+              <a:buNone/>
+            </a:pPr>
+            <a:endParaRPr lang="en-IN" sz="2800" dirty="0"/>
+          </a:p>
+        </p:txBody>
+      </p:sp>
+      <p:pic>
+        <p:nvPicPr>
+          <p:cNvPr id="4" name="Picture 3">
+            <a:extLst>
+              <a:ext uri="{FF2B5EF4-FFF2-40B4-BE49-F238E27FC236}">
+                <a16:creationId xmlns:a16="http://schemas.microsoft.com/office/drawing/2014/main" id="{564FB859-DA37-6987-60F8-98785C0A4D3B}"/>
+              </a:ext>
+            </a:extLst>
+          </p:cNvPr>
+          <p:cNvPicPr>
+            <a:picLocks noChangeAspect="1"/>
+          </p:cNvPicPr>
+          <p:nvPr/>
+        </p:nvPicPr>
+        <p:blipFill>
+          <a:blip r:embed="rId2"/>
+          <a:stretch>
+            <a:fillRect/>
+          </a:stretch>
+        </p:blipFill>
+        <p:spPr>
+          <a:xfrm>
+            <a:off x="2184438" y="1728200"/>
+            <a:ext cx="6872477" cy="1297949"/>
+          </a:xfrm>
+          <a:prstGeom prst="rect">
+            <a:avLst/>
+          </a:prstGeom>
+        </p:spPr>
+      </p:pic>
+      <p:pic>
+        <p:nvPicPr>
+          <p:cNvPr id="6" name="Picture 5">
+            <a:extLst>
+              <a:ext uri="{FF2B5EF4-FFF2-40B4-BE49-F238E27FC236}">
+                <a16:creationId xmlns:a16="http://schemas.microsoft.com/office/drawing/2014/main" id="{C5210F56-167A-081E-3A36-B2F04CD0EC98}"/>
+              </a:ext>
+            </a:extLst>
+          </p:cNvPr>
+          <p:cNvPicPr>
+            <a:picLocks noChangeAspect="1"/>
+          </p:cNvPicPr>
+          <p:nvPr/>
+        </p:nvPicPr>
+        <p:blipFill>
+          <a:blip r:embed="rId3"/>
+          <a:stretch>
+            <a:fillRect/>
+          </a:stretch>
+        </p:blipFill>
+        <p:spPr>
+          <a:xfrm>
+            <a:off x="1405518" y="4166600"/>
+            <a:ext cx="9495238" cy="1485714"/>
+          </a:xfrm>
+          <a:prstGeom prst="rect">
+            <a:avLst/>
+          </a:prstGeom>
+        </p:spPr>
+      </p:pic>
+    </p:spTree>
+    <p:extLst>
+      <p:ext uri="{BB962C8B-B14F-4D97-AF65-F5344CB8AC3E}">
+        <p14:creationId xmlns:p14="http://schemas.microsoft.com/office/powerpoint/2010/main" val="3038132228"/>
+      </p:ext>
+    </p:extLst>
+  </p:cSld>
+  <p:clrMapOvr>
+    <a:masterClrMapping/>
+  </p:clrMapOvr>
+</p:sld>
+</file>
+
+<file path=ppt/slides/slide56.xml><?xml version="1.0" encoding="utf-8"?>
+<p:sld xmlns:a="http://schemas.openxmlformats.org/drawingml/2006/main" xmlns:r="http://schemas.openxmlformats.org/officeDocument/2006/relationships" xmlns:p="http://schemas.openxmlformats.org/presentationml/2006/main">
+  <p:cSld>
+    <p:spTree>
+      <p:nvGrpSpPr>
+        <p:cNvPr id="1" name="">
+          <a:extLst>
+            <a:ext uri="{FF2B5EF4-FFF2-40B4-BE49-F238E27FC236}">
+              <a16:creationId xmlns:a16="http://schemas.microsoft.com/office/drawing/2014/main" id="{DD31F798-B717-967F-17ED-13FB4F5EF59E}"/>
+            </a:ext>
+          </a:extLst>
+        </p:cNvPr>
+        <p:cNvGrpSpPr/>
+        <p:nvPr/>
+      </p:nvGrpSpPr>
+      <p:grpSpPr>
+        <a:xfrm>
+          <a:off x="0" y="0"/>
+          <a:ext cx="0" cy="0"/>
+          <a:chOff x="0" y="0"/>
+          <a:chExt cx="0" cy="0"/>
+        </a:xfrm>
+      </p:grpSpPr>
+      <p:sp>
+        <p:nvSpPr>
+          <p:cNvPr id="3" name="Content Placeholder 2">
+            <a:extLst>
+              <a:ext uri="{FF2B5EF4-FFF2-40B4-BE49-F238E27FC236}">
+                <a16:creationId xmlns:a16="http://schemas.microsoft.com/office/drawing/2014/main" id="{0797D6F2-7386-CE7E-BA8A-D12D23A658B8}"/>
+              </a:ext>
+            </a:extLst>
+          </p:cNvPr>
+          <p:cNvSpPr>
+            <a:spLocks noGrp="1"/>
+          </p:cNvSpPr>
+          <p:nvPr>
+            <p:ph idx="1"/>
+          </p:nvPr>
+        </p:nvSpPr>
+        <p:spPr>
+          <a:xfrm>
+            <a:off x="702853" y="707571"/>
+            <a:ext cx="10900568" cy="5486400"/>
+          </a:xfrm>
+        </p:spPr>
+        <p:txBody>
+          <a:bodyPr>
+            <a:normAutofit fontScale="92500" lnSpcReduction="10000"/>
+          </a:bodyPr>
+          <a:lstStyle/>
+          <a:p>
+            <a:pPr marL="0" indent="0">
+              <a:buNone/>
+            </a:pPr>
+            <a:r>
+              <a:rPr lang="en-US" sz="2400" b="1" dirty="0"/>
+              <a:t>Let’s say:</a:t>
+            </a:r>
+          </a:p>
+          <a:p>
+            <a:r>
+              <a:rPr lang="en-US" sz="2400" b="1" dirty="0">
+                <a:solidFill>
+                  <a:schemeClr val="tx2">
+                    <a:lumMod val="75000"/>
+                    <a:lumOff val="25000"/>
+                  </a:schemeClr>
+                </a:solidFill>
+              </a:rPr>
+              <a:t>Agreements</a:t>
+            </a:r>
+            <a:r>
+              <a:rPr lang="en-US" sz="2400" dirty="0"/>
+              <a:t> = 2  (</a:t>
+            </a:r>
+            <a:r>
+              <a:rPr lang="en-US" dirty="0"/>
+              <a:t>The clustering algorithm and the true labels both agreed that the pair was either in the same group, or in different groups)</a:t>
+            </a:r>
+          </a:p>
+          <a:p>
+            <a:r>
+              <a:rPr lang="en-US" sz="2400" b="1" dirty="0">
+                <a:solidFill>
+                  <a:schemeClr val="tx2">
+                    <a:lumMod val="75000"/>
+                    <a:lumOff val="25000"/>
+                  </a:schemeClr>
+                </a:solidFill>
+              </a:rPr>
+              <a:t>Expected</a:t>
+            </a:r>
+            <a:r>
+              <a:rPr lang="en-US" sz="2400" dirty="0"/>
+              <a:t> = 1.8 (</a:t>
+            </a:r>
+            <a:r>
+              <a:rPr lang="en-US" dirty="0"/>
+              <a:t>the number of agreements we’d expect by random chance </a:t>
+            </a:r>
+            <a:r>
+              <a:rPr lang="en-US" sz="2400" dirty="0"/>
+              <a:t>it’s close to the 2 actual agreements we got)</a:t>
+            </a:r>
+          </a:p>
+          <a:p>
+            <a:r>
+              <a:rPr lang="en-US" sz="2400" dirty="0"/>
+              <a:t>Total pairs = 6</a:t>
+            </a:r>
+          </a:p>
+          <a:p>
+            <a:pPr marL="0" indent="0">
+              <a:buNone/>
+            </a:pPr>
+            <a:r>
+              <a:rPr lang="en-US" sz="2400" b="1" dirty="0"/>
+              <a:t>Then:</a:t>
+            </a:r>
+          </a:p>
+          <a:p>
+            <a:pPr marL="0" indent="0">
+              <a:buNone/>
+            </a:pPr>
+            <a:endParaRPr lang="en-US" sz="2400" b="1" dirty="0"/>
+          </a:p>
+          <a:p>
+            <a:pPr marL="0" indent="0">
+              <a:buNone/>
+            </a:pPr>
+            <a:endParaRPr lang="en-US" sz="2400" b="1" dirty="0"/>
+          </a:p>
+          <a:p>
+            <a:pPr marL="0" indent="0">
+              <a:buNone/>
+            </a:pPr>
+            <a:endParaRPr lang="en-US" sz="2400" b="1" dirty="0"/>
+          </a:p>
+          <a:p>
+            <a:pPr marL="0" indent="0">
+              <a:buNone/>
+            </a:pPr>
+            <a:r>
+              <a:rPr lang="en-US" b="1" dirty="0"/>
+              <a:t>Final Interpretation:</a:t>
+            </a:r>
+          </a:p>
+          <a:p>
+            <a:r>
+              <a:rPr lang="en-US" dirty="0"/>
+              <a:t>ARI ≈ </a:t>
+            </a:r>
+            <a:r>
+              <a:rPr lang="en-US" b="1" dirty="0">
+                <a:solidFill>
+                  <a:schemeClr val="tx2">
+                    <a:lumMod val="75000"/>
+                    <a:lumOff val="25000"/>
+                  </a:schemeClr>
+                </a:solidFill>
+              </a:rPr>
+              <a:t>0.047 </a:t>
+            </a:r>
+            <a:r>
+              <a:rPr lang="en-US" dirty="0"/>
+              <a:t>→ Very close to 0</a:t>
+            </a:r>
+          </a:p>
+          <a:p>
+            <a:r>
+              <a:rPr lang="en-US" dirty="0"/>
+              <a:t>This means the clustering is almost </a:t>
+            </a:r>
+            <a:r>
+              <a:rPr lang="en-US" b="1" dirty="0">
+                <a:solidFill>
+                  <a:schemeClr val="tx2">
+                    <a:lumMod val="75000"/>
+                    <a:lumOff val="25000"/>
+                  </a:schemeClr>
+                </a:solidFill>
+              </a:rPr>
+              <a:t>random</a:t>
+            </a:r>
+            <a:r>
+              <a:rPr lang="en-US" dirty="0"/>
+              <a:t> ❌</a:t>
+            </a:r>
+          </a:p>
+          <a:p>
+            <a:r>
+              <a:rPr lang="en-US" dirty="0"/>
+              <a:t>If ARI was near 1, it would be perfect </a:t>
+            </a:r>
+            <a:endParaRPr lang="en-US" sz="2400" b="1" dirty="0"/>
+          </a:p>
+          <a:p>
+            <a:pPr marL="0" indent="0">
+              <a:buNone/>
+            </a:pPr>
+            <a:endParaRPr lang="en-IN" sz="2400" dirty="0"/>
+          </a:p>
+        </p:txBody>
+      </p:sp>
+      <p:pic>
+        <p:nvPicPr>
+          <p:cNvPr id="4" name="Picture 3">
+            <a:extLst>
+              <a:ext uri="{FF2B5EF4-FFF2-40B4-BE49-F238E27FC236}">
+                <a16:creationId xmlns:a16="http://schemas.microsoft.com/office/drawing/2014/main" id="{509EE46B-7F94-C090-7E77-7BADAFEFF15C}"/>
+              </a:ext>
+            </a:extLst>
+          </p:cNvPr>
+          <p:cNvPicPr>
+            <a:picLocks noChangeAspect="1"/>
+          </p:cNvPicPr>
+          <p:nvPr/>
+        </p:nvPicPr>
+        <p:blipFill>
+          <a:blip r:embed="rId2"/>
+          <a:srcRect t="15593"/>
+          <a:stretch>
+            <a:fillRect/>
+          </a:stretch>
+        </p:blipFill>
+        <p:spPr>
+          <a:xfrm>
+            <a:off x="3179857" y="2481943"/>
+            <a:ext cx="5832286" cy="1380366"/>
+          </a:xfrm>
+          <a:prstGeom prst="rect">
+            <a:avLst/>
+          </a:prstGeom>
+        </p:spPr>
+      </p:pic>
+    </p:spTree>
+    <p:extLst>
+      <p:ext uri="{BB962C8B-B14F-4D97-AF65-F5344CB8AC3E}">
+        <p14:creationId xmlns:p14="http://schemas.microsoft.com/office/powerpoint/2010/main" val="1564425786"/>
+      </p:ext>
+    </p:extLst>
+  </p:cSld>
+  <p:clrMapOvr>
+    <a:masterClrMapping/>
+  </p:clrMapOvr>
+</p:sld>
+</file>
+
+<file path=ppt/slides/slide57.xml><?xml version="1.0" encoding="utf-8"?>
+<p:sld xmlns:a="http://schemas.openxmlformats.org/drawingml/2006/main" xmlns:r="http://schemas.openxmlformats.org/officeDocument/2006/relationships" xmlns:p="http://schemas.openxmlformats.org/presentationml/2006/main">
+  <p:cSld>
+    <p:spTree>
+      <p:nvGrpSpPr>
+        <p:cNvPr id="1" name="">
+          <a:extLst>
+            <a:ext uri="{FF2B5EF4-FFF2-40B4-BE49-F238E27FC236}">
+              <a16:creationId xmlns:a16="http://schemas.microsoft.com/office/drawing/2014/main" id="{76DA7F37-AADC-0B1A-5080-691DCE6AA48C}"/>
+            </a:ext>
+          </a:extLst>
+        </p:cNvPr>
+        <p:cNvGrpSpPr/>
+        <p:nvPr/>
+      </p:nvGrpSpPr>
+      <p:grpSpPr>
+        <a:xfrm>
+          <a:off x="0" y="0"/>
+          <a:ext cx="0" cy="0"/>
+          <a:chOff x="0" y="0"/>
+          <a:chExt cx="0" cy="0"/>
+        </a:xfrm>
+      </p:grpSpPr>
+      <p:sp>
+        <p:nvSpPr>
+          <p:cNvPr id="3" name="Content Placeholder 2">
+            <a:extLst>
+              <a:ext uri="{FF2B5EF4-FFF2-40B4-BE49-F238E27FC236}">
+                <a16:creationId xmlns:a16="http://schemas.microsoft.com/office/drawing/2014/main" id="{34FAB684-9594-9344-F277-9CFB4B5DF2C1}"/>
+              </a:ext>
+            </a:extLst>
+          </p:cNvPr>
+          <p:cNvSpPr>
+            <a:spLocks noGrp="1"/>
+          </p:cNvSpPr>
+          <p:nvPr>
+            <p:ph idx="1"/>
+          </p:nvPr>
+        </p:nvSpPr>
+        <p:spPr>
+          <a:xfrm>
+            <a:off x="702853" y="707571"/>
+            <a:ext cx="10900568" cy="5486400"/>
+          </a:xfrm>
+        </p:spPr>
+        <p:txBody>
+          <a:bodyPr>
+            <a:normAutofit/>
+          </a:bodyPr>
+          <a:lstStyle/>
+          <a:p>
+            <a:pPr marL="0" indent="0">
+              <a:buNone/>
+            </a:pPr>
+            <a:r>
+              <a:rPr lang="en-US" sz="2400" b="1" dirty="0"/>
+              <a:t>Dimensionality Reduction:</a:t>
+            </a:r>
+          </a:p>
+          <a:p>
+            <a:pPr marL="0" indent="0">
+              <a:buNone/>
+            </a:pPr>
+            <a:endParaRPr lang="en-IN" sz="2400" dirty="0"/>
+          </a:p>
+        </p:txBody>
+      </p:sp>
+    </p:spTree>
+    <p:extLst>
+      <p:ext uri="{BB962C8B-B14F-4D97-AF65-F5344CB8AC3E}">
+        <p14:creationId xmlns:p14="http://schemas.microsoft.com/office/powerpoint/2010/main" val="971674483"/>
+      </p:ext>
+    </p:extLst>
+  </p:cSld>
+  <p:clrMapOvr>
+    <a:masterClrMapping/>
+  </p:clrMapOvr>
+</p:sld>
+</file>
+
+<file path=ppt/slides/slide58.xml><?xml version="1.0" encoding="utf-8"?>
+<p:sld xmlns:a="http://schemas.openxmlformats.org/drawingml/2006/main" xmlns:r="http://schemas.openxmlformats.org/officeDocument/2006/relationships" xmlns:p="http://schemas.openxmlformats.org/presentationml/2006/main">
+  <p:cSld>
+    <p:spTree>
+      <p:nvGrpSpPr>
+        <p:cNvPr id="1" name="">
+          <a:extLst>
+            <a:ext uri="{FF2B5EF4-FFF2-40B4-BE49-F238E27FC236}">
+              <a16:creationId xmlns:a16="http://schemas.microsoft.com/office/drawing/2014/main" id="{BF3CB578-9E14-2602-8E80-FECBE2ABF9A3}"/>
+            </a:ext>
+          </a:extLst>
+        </p:cNvPr>
+        <p:cNvGrpSpPr/>
+        <p:nvPr/>
+      </p:nvGrpSpPr>
+      <p:grpSpPr>
+        <a:xfrm>
+          <a:off x="0" y="0"/>
+          <a:ext cx="0" cy="0"/>
+          <a:chOff x="0" y="0"/>
+          <a:chExt cx="0" cy="0"/>
+        </a:xfrm>
+      </p:grpSpPr>
+      <p:sp>
+        <p:nvSpPr>
+          <p:cNvPr id="3" name="Content Placeholder 2">
+            <a:extLst>
+              <a:ext uri="{FF2B5EF4-FFF2-40B4-BE49-F238E27FC236}">
+                <a16:creationId xmlns:a16="http://schemas.microsoft.com/office/drawing/2014/main" id="{2A513252-8515-5192-5692-4098998FE324}"/>
+              </a:ext>
+            </a:extLst>
+          </p:cNvPr>
+          <p:cNvSpPr>
+            <a:spLocks noGrp="1"/>
+          </p:cNvSpPr>
+          <p:nvPr>
+            <p:ph idx="1"/>
+          </p:nvPr>
+        </p:nvSpPr>
+        <p:spPr>
+          <a:xfrm>
+            <a:off x="743688" y="1088572"/>
+            <a:ext cx="10900568" cy="4354286"/>
+          </a:xfrm>
+        </p:spPr>
+        <p:txBody>
+          <a:bodyPr>
+            <a:normAutofit/>
+          </a:bodyPr>
+          <a:lstStyle/>
+          <a:p>
+            <a:pPr marL="0" indent="0">
+              <a:buNone/>
+            </a:pPr>
+            <a:r>
+              <a:rPr lang="en-US" sz="3200" b="1" dirty="0">
+                <a:solidFill>
+                  <a:srgbClr val="C00000"/>
+                </a:solidFill>
+              </a:rPr>
+              <a:t>Module-3: </a:t>
+            </a:r>
+            <a:r>
+              <a:rPr lang="en-US" sz="3200" b="1" dirty="0">
+                <a:solidFill>
+                  <a:schemeClr val="accent3">
+                    <a:lumMod val="50000"/>
+                  </a:schemeClr>
+                </a:solidFill>
+              </a:rPr>
+              <a:t>Unsupervised Learning: </a:t>
+            </a:r>
+          </a:p>
+          <a:p>
+            <a:pPr marL="0" indent="0">
+              <a:buNone/>
+            </a:pPr>
+            <a:r>
+              <a:rPr lang="en-US" sz="3200" b="1" dirty="0"/>
+              <a:t>Clustering: K-Means clustering</a:t>
+            </a:r>
+            <a:r>
+              <a:rPr lang="en-US" sz="3200" dirty="0"/>
+              <a:t>, </a:t>
+            </a:r>
+            <a:r>
+              <a:rPr lang="en-US" sz="3200" b="1" dirty="0"/>
+              <a:t>Hierarchical clustering</a:t>
+            </a:r>
+            <a:r>
+              <a:rPr lang="en-US" sz="3200" dirty="0"/>
+              <a:t>, </a:t>
+            </a:r>
+            <a:r>
+              <a:rPr lang="en-US" sz="3200" b="1" dirty="0"/>
+              <a:t>Evaluation of clustering results. </a:t>
+            </a:r>
+          </a:p>
+          <a:p>
+            <a:pPr marL="0" indent="0">
+              <a:buNone/>
+            </a:pPr>
+            <a:r>
+              <a:rPr lang="en-US" sz="3200" b="1" dirty="0"/>
+              <a:t>Dimensionality Reduction: </a:t>
+            </a:r>
+            <a:r>
+              <a:rPr lang="en-US" sz="3200" dirty="0"/>
+              <a:t>Principal Component Analysis (PCA), Linear Discriminant Analysis (LDA) t-Distributed Stochastic Neighbor Embedding (t-SNE).  </a:t>
+            </a:r>
+          </a:p>
+          <a:p>
+            <a:pPr marL="0" indent="0">
+              <a:buNone/>
+            </a:pPr>
+            <a:r>
+              <a:rPr lang="en-US" sz="3200" b="1" dirty="0"/>
+              <a:t>Association Rule Learning: </a:t>
+            </a:r>
+            <a:r>
+              <a:rPr lang="en-US" sz="3200" dirty="0" err="1"/>
+              <a:t>Apriori</a:t>
+            </a:r>
+            <a:r>
+              <a:rPr lang="en-US" sz="3200" dirty="0"/>
+              <a:t> algorithm, Market Basket Analysis, Evaluation metrics for association rules </a:t>
+            </a:r>
+            <a:endParaRPr lang="en-IN" sz="3200" dirty="0"/>
+          </a:p>
+        </p:txBody>
+      </p:sp>
+    </p:spTree>
+    <p:extLst>
+      <p:ext uri="{BB962C8B-B14F-4D97-AF65-F5344CB8AC3E}">
+        <p14:creationId xmlns:p14="http://schemas.microsoft.com/office/powerpoint/2010/main" val="1788168237"/>
+      </p:ext>
+    </p:extLst>
+  </p:cSld>
+  <p:clrMapOvr>
+    <a:masterClrMapping/>
+  </p:clrMapOvr>
+</p:sld>
+</file>
+
+<file path=ppt/slides/slide59.xml><?xml version="1.0" encoding="utf-8"?>
+<p:sld xmlns:a="http://schemas.openxmlformats.org/drawingml/2006/main" xmlns:r="http://schemas.openxmlformats.org/officeDocument/2006/relationships" xmlns:p="http://schemas.openxmlformats.org/presentationml/2006/main">
+  <p:cSld>
+    <p:spTree>
+      <p:nvGrpSpPr>
+        <p:cNvPr id="1" name="">
+          <a:extLst>
+            <a:ext uri="{FF2B5EF4-FFF2-40B4-BE49-F238E27FC236}">
+              <a16:creationId xmlns:a16="http://schemas.microsoft.com/office/drawing/2014/main" id="{E6562071-CECF-69D3-C9FA-206659204241}"/>
+            </a:ext>
+          </a:extLst>
+        </p:cNvPr>
+        <p:cNvGrpSpPr/>
+        <p:nvPr/>
+      </p:nvGrpSpPr>
+      <p:grpSpPr>
+        <a:xfrm>
+          <a:off x="0" y="0"/>
+          <a:ext cx="0" cy="0"/>
+          <a:chOff x="0" y="0"/>
+          <a:chExt cx="0" cy="0"/>
+        </a:xfrm>
+      </p:grpSpPr>
+      <p:sp>
+        <p:nvSpPr>
+          <p:cNvPr id="3" name="Content Placeholder 2">
+            <a:extLst>
+              <a:ext uri="{FF2B5EF4-FFF2-40B4-BE49-F238E27FC236}">
+                <a16:creationId xmlns:a16="http://schemas.microsoft.com/office/drawing/2014/main" id="{82A95F8D-4110-D599-3870-8A0A07F9A7AD}"/>
+              </a:ext>
+            </a:extLst>
+          </p:cNvPr>
+          <p:cNvSpPr>
+            <a:spLocks noGrp="1"/>
+          </p:cNvSpPr>
+          <p:nvPr>
+            <p:ph idx="1"/>
+          </p:nvPr>
+        </p:nvSpPr>
+        <p:spPr>
+          <a:xfrm>
+            <a:off x="702853" y="707571"/>
+            <a:ext cx="10900568" cy="5486400"/>
+          </a:xfrm>
+        </p:spPr>
+        <p:txBody>
+          <a:bodyPr>
+            <a:normAutofit/>
+          </a:bodyPr>
+          <a:lstStyle/>
+          <a:p>
+            <a:pPr marL="0" indent="0">
+              <a:buNone/>
+            </a:pPr>
+            <a:endParaRPr lang="en-IN" sz="2400" dirty="0"/>
+          </a:p>
+        </p:txBody>
+      </p:sp>
+    </p:spTree>
+    <p:extLst>
+      <p:ext uri="{BB962C8B-B14F-4D97-AF65-F5344CB8AC3E}">
+        <p14:creationId xmlns:p14="http://schemas.microsoft.com/office/powerpoint/2010/main" val="1141885452"/>
+      </p:ext>
+    </p:extLst>
+  </p:cSld>
+  <p:clrMapOvr>
+    <a:masterClrMapping/>
+  </p:clrMapOvr>
+</p:sld>
+</file>
+
 <file path=ppt/slides/slide6.xml><?xml version="1.0" encoding="utf-8"?>
 <p:sld xmlns:a="http://schemas.openxmlformats.org/drawingml/2006/main" xmlns:r="http://schemas.openxmlformats.org/officeDocument/2006/relationships" xmlns:p="http://schemas.openxmlformats.org/presentationml/2006/main">
   <p:cSld>
@@ -13407,6 +20351,574 @@
     <p:extLst>
       <p:ext uri="{BB962C8B-B14F-4D97-AF65-F5344CB8AC3E}">
         <p14:creationId xmlns:p14="http://schemas.microsoft.com/office/powerpoint/2010/main" val="1588033813"/>
+      </p:ext>
+    </p:extLst>
+  </p:cSld>
+  <p:clrMapOvr>
+    <a:masterClrMapping/>
+  </p:clrMapOvr>
+</p:sld>
+</file>
+
+<file path=ppt/slides/slide60.xml><?xml version="1.0" encoding="utf-8"?>
+<p:sld xmlns:a="http://schemas.openxmlformats.org/drawingml/2006/main" xmlns:r="http://schemas.openxmlformats.org/officeDocument/2006/relationships" xmlns:p="http://schemas.openxmlformats.org/presentationml/2006/main">
+  <p:cSld>
+    <p:spTree>
+      <p:nvGrpSpPr>
+        <p:cNvPr id="1" name="">
+          <a:extLst>
+            <a:ext uri="{FF2B5EF4-FFF2-40B4-BE49-F238E27FC236}">
+              <a16:creationId xmlns:a16="http://schemas.microsoft.com/office/drawing/2014/main" id="{D377D591-311A-B7CD-E3B0-CC631B0B7577}"/>
+            </a:ext>
+          </a:extLst>
+        </p:cNvPr>
+        <p:cNvGrpSpPr/>
+        <p:nvPr/>
+      </p:nvGrpSpPr>
+      <p:grpSpPr>
+        <a:xfrm>
+          <a:off x="0" y="0"/>
+          <a:ext cx="0" cy="0"/>
+          <a:chOff x="0" y="0"/>
+          <a:chExt cx="0" cy="0"/>
+        </a:xfrm>
+      </p:grpSpPr>
+      <p:sp>
+        <p:nvSpPr>
+          <p:cNvPr id="3" name="Content Placeholder 2">
+            <a:extLst>
+              <a:ext uri="{FF2B5EF4-FFF2-40B4-BE49-F238E27FC236}">
+                <a16:creationId xmlns:a16="http://schemas.microsoft.com/office/drawing/2014/main" id="{FAE25D29-6B6F-33B7-9FE9-18535FE12C7A}"/>
+              </a:ext>
+            </a:extLst>
+          </p:cNvPr>
+          <p:cNvSpPr>
+            <a:spLocks noGrp="1"/>
+          </p:cNvSpPr>
+          <p:nvPr>
+            <p:ph idx="1"/>
+          </p:nvPr>
+        </p:nvSpPr>
+        <p:spPr>
+          <a:xfrm>
+            <a:off x="702853" y="707571"/>
+            <a:ext cx="10900568" cy="5486400"/>
+          </a:xfrm>
+        </p:spPr>
+        <p:txBody>
+          <a:bodyPr>
+            <a:normAutofit/>
+          </a:bodyPr>
+          <a:lstStyle/>
+          <a:p>
+            <a:pPr marL="0" indent="0">
+              <a:buNone/>
+            </a:pPr>
+            <a:endParaRPr lang="en-IN" sz="2400" dirty="0"/>
+          </a:p>
+        </p:txBody>
+      </p:sp>
+    </p:spTree>
+    <p:extLst>
+      <p:ext uri="{BB962C8B-B14F-4D97-AF65-F5344CB8AC3E}">
+        <p14:creationId xmlns:p14="http://schemas.microsoft.com/office/powerpoint/2010/main" val="3727450145"/>
+      </p:ext>
+    </p:extLst>
+  </p:cSld>
+  <p:clrMapOvr>
+    <a:masterClrMapping/>
+  </p:clrMapOvr>
+</p:sld>
+</file>
+
+<file path=ppt/slides/slide61.xml><?xml version="1.0" encoding="utf-8"?>
+<p:sld xmlns:a="http://schemas.openxmlformats.org/drawingml/2006/main" xmlns:r="http://schemas.openxmlformats.org/officeDocument/2006/relationships" xmlns:p="http://schemas.openxmlformats.org/presentationml/2006/main">
+  <p:cSld>
+    <p:spTree>
+      <p:nvGrpSpPr>
+        <p:cNvPr id="1" name="">
+          <a:extLst>
+            <a:ext uri="{FF2B5EF4-FFF2-40B4-BE49-F238E27FC236}">
+              <a16:creationId xmlns:a16="http://schemas.microsoft.com/office/drawing/2014/main" id="{568A8377-7812-4BDD-30DE-DDF1BBD563C3}"/>
+            </a:ext>
+          </a:extLst>
+        </p:cNvPr>
+        <p:cNvGrpSpPr/>
+        <p:nvPr/>
+      </p:nvGrpSpPr>
+      <p:grpSpPr>
+        <a:xfrm>
+          <a:off x="0" y="0"/>
+          <a:ext cx="0" cy="0"/>
+          <a:chOff x="0" y="0"/>
+          <a:chExt cx="0" cy="0"/>
+        </a:xfrm>
+      </p:grpSpPr>
+      <p:sp>
+        <p:nvSpPr>
+          <p:cNvPr id="3" name="Content Placeholder 2">
+            <a:extLst>
+              <a:ext uri="{FF2B5EF4-FFF2-40B4-BE49-F238E27FC236}">
+                <a16:creationId xmlns:a16="http://schemas.microsoft.com/office/drawing/2014/main" id="{D80D5B20-DC5C-1B61-A4C0-C7774F006B1A}"/>
+              </a:ext>
+            </a:extLst>
+          </p:cNvPr>
+          <p:cNvSpPr>
+            <a:spLocks noGrp="1"/>
+          </p:cNvSpPr>
+          <p:nvPr>
+            <p:ph idx="1"/>
+          </p:nvPr>
+        </p:nvSpPr>
+        <p:spPr>
+          <a:xfrm>
+            <a:off x="702853" y="707571"/>
+            <a:ext cx="10900568" cy="5486400"/>
+          </a:xfrm>
+        </p:spPr>
+        <p:txBody>
+          <a:bodyPr>
+            <a:normAutofit/>
+          </a:bodyPr>
+          <a:lstStyle/>
+          <a:p>
+            <a:pPr marL="0" indent="0">
+              <a:buNone/>
+            </a:pPr>
+            <a:endParaRPr lang="en-IN" sz="2400" dirty="0"/>
+          </a:p>
+        </p:txBody>
+      </p:sp>
+    </p:spTree>
+    <p:extLst>
+      <p:ext uri="{BB962C8B-B14F-4D97-AF65-F5344CB8AC3E}">
+        <p14:creationId xmlns:p14="http://schemas.microsoft.com/office/powerpoint/2010/main" val="380204240"/>
+      </p:ext>
+    </p:extLst>
+  </p:cSld>
+  <p:clrMapOvr>
+    <a:masterClrMapping/>
+  </p:clrMapOvr>
+</p:sld>
+</file>
+
+<file path=ppt/slides/slide62.xml><?xml version="1.0" encoding="utf-8"?>
+<p:sld xmlns:a="http://schemas.openxmlformats.org/drawingml/2006/main" xmlns:r="http://schemas.openxmlformats.org/officeDocument/2006/relationships" xmlns:p="http://schemas.openxmlformats.org/presentationml/2006/main">
+  <p:cSld>
+    <p:spTree>
+      <p:nvGrpSpPr>
+        <p:cNvPr id="1" name="">
+          <a:extLst>
+            <a:ext uri="{FF2B5EF4-FFF2-40B4-BE49-F238E27FC236}">
+              <a16:creationId xmlns:a16="http://schemas.microsoft.com/office/drawing/2014/main" id="{054CE6FD-D251-340C-FECF-27BE36341ADF}"/>
+            </a:ext>
+          </a:extLst>
+        </p:cNvPr>
+        <p:cNvGrpSpPr/>
+        <p:nvPr/>
+      </p:nvGrpSpPr>
+      <p:grpSpPr>
+        <a:xfrm>
+          <a:off x="0" y="0"/>
+          <a:ext cx="0" cy="0"/>
+          <a:chOff x="0" y="0"/>
+          <a:chExt cx="0" cy="0"/>
+        </a:xfrm>
+      </p:grpSpPr>
+      <p:sp>
+        <p:nvSpPr>
+          <p:cNvPr id="3" name="Content Placeholder 2">
+            <a:extLst>
+              <a:ext uri="{FF2B5EF4-FFF2-40B4-BE49-F238E27FC236}">
+                <a16:creationId xmlns:a16="http://schemas.microsoft.com/office/drawing/2014/main" id="{75B236B8-9AB4-D677-8457-4886B14F6DC1}"/>
+              </a:ext>
+            </a:extLst>
+          </p:cNvPr>
+          <p:cNvSpPr>
+            <a:spLocks noGrp="1"/>
+          </p:cNvSpPr>
+          <p:nvPr>
+            <p:ph idx="1"/>
+          </p:nvPr>
+        </p:nvSpPr>
+        <p:spPr>
+          <a:xfrm>
+            <a:off x="702853" y="707571"/>
+            <a:ext cx="10900568" cy="5486400"/>
+          </a:xfrm>
+        </p:spPr>
+        <p:txBody>
+          <a:bodyPr>
+            <a:normAutofit/>
+          </a:bodyPr>
+          <a:lstStyle/>
+          <a:p>
+            <a:pPr marL="0" indent="0">
+              <a:buNone/>
+            </a:pPr>
+            <a:endParaRPr lang="en-IN" sz="2400" dirty="0"/>
+          </a:p>
+        </p:txBody>
+      </p:sp>
+    </p:spTree>
+    <p:extLst>
+      <p:ext uri="{BB962C8B-B14F-4D97-AF65-F5344CB8AC3E}">
+        <p14:creationId xmlns:p14="http://schemas.microsoft.com/office/powerpoint/2010/main" val="3901879110"/>
+      </p:ext>
+    </p:extLst>
+  </p:cSld>
+  <p:clrMapOvr>
+    <a:masterClrMapping/>
+  </p:clrMapOvr>
+</p:sld>
+</file>
+
+<file path=ppt/slides/slide63.xml><?xml version="1.0" encoding="utf-8"?>
+<p:sld xmlns:a="http://schemas.openxmlformats.org/drawingml/2006/main" xmlns:r="http://schemas.openxmlformats.org/officeDocument/2006/relationships" xmlns:p="http://schemas.openxmlformats.org/presentationml/2006/main">
+  <p:cSld>
+    <p:spTree>
+      <p:nvGrpSpPr>
+        <p:cNvPr id="1" name="">
+          <a:extLst>
+            <a:ext uri="{FF2B5EF4-FFF2-40B4-BE49-F238E27FC236}">
+              <a16:creationId xmlns:a16="http://schemas.microsoft.com/office/drawing/2014/main" id="{83645D7C-7368-F04A-500E-7E58103ADA42}"/>
+            </a:ext>
+          </a:extLst>
+        </p:cNvPr>
+        <p:cNvGrpSpPr/>
+        <p:nvPr/>
+      </p:nvGrpSpPr>
+      <p:grpSpPr>
+        <a:xfrm>
+          <a:off x="0" y="0"/>
+          <a:ext cx="0" cy="0"/>
+          <a:chOff x="0" y="0"/>
+          <a:chExt cx="0" cy="0"/>
+        </a:xfrm>
+      </p:grpSpPr>
+      <p:sp>
+        <p:nvSpPr>
+          <p:cNvPr id="3" name="Content Placeholder 2">
+            <a:extLst>
+              <a:ext uri="{FF2B5EF4-FFF2-40B4-BE49-F238E27FC236}">
+                <a16:creationId xmlns:a16="http://schemas.microsoft.com/office/drawing/2014/main" id="{D999850B-89D1-B1DD-9CA0-5325B19F5C00}"/>
+              </a:ext>
+            </a:extLst>
+          </p:cNvPr>
+          <p:cNvSpPr>
+            <a:spLocks noGrp="1"/>
+          </p:cNvSpPr>
+          <p:nvPr>
+            <p:ph idx="1"/>
+          </p:nvPr>
+        </p:nvSpPr>
+        <p:spPr>
+          <a:xfrm>
+            <a:off x="702853" y="707571"/>
+            <a:ext cx="10900568" cy="5486400"/>
+          </a:xfrm>
+        </p:spPr>
+        <p:txBody>
+          <a:bodyPr>
+            <a:normAutofit/>
+          </a:bodyPr>
+          <a:lstStyle/>
+          <a:p>
+            <a:pPr marL="0" indent="0">
+              <a:buNone/>
+            </a:pPr>
+            <a:endParaRPr lang="en-IN" sz="2400" dirty="0"/>
+          </a:p>
+        </p:txBody>
+      </p:sp>
+    </p:spTree>
+    <p:extLst>
+      <p:ext uri="{BB962C8B-B14F-4D97-AF65-F5344CB8AC3E}">
+        <p14:creationId xmlns:p14="http://schemas.microsoft.com/office/powerpoint/2010/main" val="2385198514"/>
+      </p:ext>
+    </p:extLst>
+  </p:cSld>
+  <p:clrMapOvr>
+    <a:masterClrMapping/>
+  </p:clrMapOvr>
+</p:sld>
+</file>
+
+<file path=ppt/slides/slide64.xml><?xml version="1.0" encoding="utf-8"?>
+<p:sld xmlns:a="http://schemas.openxmlformats.org/drawingml/2006/main" xmlns:r="http://schemas.openxmlformats.org/officeDocument/2006/relationships" xmlns:p="http://schemas.openxmlformats.org/presentationml/2006/main">
+  <p:cSld>
+    <p:spTree>
+      <p:nvGrpSpPr>
+        <p:cNvPr id="1" name="">
+          <a:extLst>
+            <a:ext uri="{FF2B5EF4-FFF2-40B4-BE49-F238E27FC236}">
+              <a16:creationId xmlns:a16="http://schemas.microsoft.com/office/drawing/2014/main" id="{45ABF8D7-CF2C-E274-D321-8E8D1F628F5E}"/>
+            </a:ext>
+          </a:extLst>
+        </p:cNvPr>
+        <p:cNvGrpSpPr/>
+        <p:nvPr/>
+      </p:nvGrpSpPr>
+      <p:grpSpPr>
+        <a:xfrm>
+          <a:off x="0" y="0"/>
+          <a:ext cx="0" cy="0"/>
+          <a:chOff x="0" y="0"/>
+          <a:chExt cx="0" cy="0"/>
+        </a:xfrm>
+      </p:grpSpPr>
+      <p:sp>
+        <p:nvSpPr>
+          <p:cNvPr id="3" name="Content Placeholder 2">
+            <a:extLst>
+              <a:ext uri="{FF2B5EF4-FFF2-40B4-BE49-F238E27FC236}">
+                <a16:creationId xmlns:a16="http://schemas.microsoft.com/office/drawing/2014/main" id="{5A5439F9-7860-B787-7E26-C1399B3A7F05}"/>
+              </a:ext>
+            </a:extLst>
+          </p:cNvPr>
+          <p:cNvSpPr>
+            <a:spLocks noGrp="1"/>
+          </p:cNvSpPr>
+          <p:nvPr>
+            <p:ph idx="1"/>
+          </p:nvPr>
+        </p:nvSpPr>
+        <p:spPr>
+          <a:xfrm>
+            <a:off x="702853" y="707571"/>
+            <a:ext cx="10900568" cy="5486400"/>
+          </a:xfrm>
+        </p:spPr>
+        <p:txBody>
+          <a:bodyPr>
+            <a:normAutofit/>
+          </a:bodyPr>
+          <a:lstStyle/>
+          <a:p>
+            <a:pPr marL="0" indent="0">
+              <a:buNone/>
+            </a:pPr>
+            <a:endParaRPr lang="en-IN" sz="2400" dirty="0"/>
+          </a:p>
+        </p:txBody>
+      </p:sp>
+    </p:spTree>
+    <p:extLst>
+      <p:ext uri="{BB962C8B-B14F-4D97-AF65-F5344CB8AC3E}">
+        <p14:creationId xmlns:p14="http://schemas.microsoft.com/office/powerpoint/2010/main" val="2368056313"/>
+      </p:ext>
+    </p:extLst>
+  </p:cSld>
+  <p:clrMapOvr>
+    <a:masterClrMapping/>
+  </p:clrMapOvr>
+</p:sld>
+</file>
+
+<file path=ppt/slides/slide65.xml><?xml version="1.0" encoding="utf-8"?>
+<p:sld xmlns:a="http://schemas.openxmlformats.org/drawingml/2006/main" xmlns:r="http://schemas.openxmlformats.org/officeDocument/2006/relationships" xmlns:p="http://schemas.openxmlformats.org/presentationml/2006/main">
+  <p:cSld>
+    <p:spTree>
+      <p:nvGrpSpPr>
+        <p:cNvPr id="1" name="">
+          <a:extLst>
+            <a:ext uri="{FF2B5EF4-FFF2-40B4-BE49-F238E27FC236}">
+              <a16:creationId xmlns:a16="http://schemas.microsoft.com/office/drawing/2014/main" id="{710F620A-9028-9D71-BA6C-5BCF75391506}"/>
+            </a:ext>
+          </a:extLst>
+        </p:cNvPr>
+        <p:cNvGrpSpPr/>
+        <p:nvPr/>
+      </p:nvGrpSpPr>
+      <p:grpSpPr>
+        <a:xfrm>
+          <a:off x="0" y="0"/>
+          <a:ext cx="0" cy="0"/>
+          <a:chOff x="0" y="0"/>
+          <a:chExt cx="0" cy="0"/>
+        </a:xfrm>
+      </p:grpSpPr>
+      <p:sp>
+        <p:nvSpPr>
+          <p:cNvPr id="3" name="Content Placeholder 2">
+            <a:extLst>
+              <a:ext uri="{FF2B5EF4-FFF2-40B4-BE49-F238E27FC236}">
+                <a16:creationId xmlns:a16="http://schemas.microsoft.com/office/drawing/2014/main" id="{762CBF46-EA37-8B6A-392D-229161886391}"/>
+              </a:ext>
+            </a:extLst>
+          </p:cNvPr>
+          <p:cNvSpPr>
+            <a:spLocks noGrp="1"/>
+          </p:cNvSpPr>
+          <p:nvPr>
+            <p:ph idx="1"/>
+          </p:nvPr>
+        </p:nvSpPr>
+        <p:spPr>
+          <a:xfrm>
+            <a:off x="702853" y="707571"/>
+            <a:ext cx="10900568" cy="5486400"/>
+          </a:xfrm>
+        </p:spPr>
+        <p:txBody>
+          <a:bodyPr>
+            <a:normAutofit/>
+          </a:bodyPr>
+          <a:lstStyle/>
+          <a:p>
+            <a:pPr marL="0" indent="0">
+              <a:buNone/>
+            </a:pPr>
+            <a:endParaRPr lang="en-IN" sz="2400" dirty="0"/>
+          </a:p>
+        </p:txBody>
+      </p:sp>
+    </p:spTree>
+    <p:extLst>
+      <p:ext uri="{BB962C8B-B14F-4D97-AF65-F5344CB8AC3E}">
+        <p14:creationId xmlns:p14="http://schemas.microsoft.com/office/powerpoint/2010/main" val="1265237306"/>
+      </p:ext>
+    </p:extLst>
+  </p:cSld>
+  <p:clrMapOvr>
+    <a:masterClrMapping/>
+  </p:clrMapOvr>
+</p:sld>
+</file>
+
+<file path=ppt/slides/slide66.xml><?xml version="1.0" encoding="utf-8"?>
+<p:sld xmlns:a="http://schemas.openxmlformats.org/drawingml/2006/main" xmlns:r="http://schemas.openxmlformats.org/officeDocument/2006/relationships" xmlns:p="http://schemas.openxmlformats.org/presentationml/2006/main">
+  <p:cSld>
+    <p:spTree>
+      <p:nvGrpSpPr>
+        <p:cNvPr id="1" name="">
+          <a:extLst>
+            <a:ext uri="{FF2B5EF4-FFF2-40B4-BE49-F238E27FC236}">
+              <a16:creationId xmlns:a16="http://schemas.microsoft.com/office/drawing/2014/main" id="{198AE243-E3DD-DC42-90FE-01838628192E}"/>
+            </a:ext>
+          </a:extLst>
+        </p:cNvPr>
+        <p:cNvGrpSpPr/>
+        <p:nvPr/>
+      </p:nvGrpSpPr>
+      <p:grpSpPr>
+        <a:xfrm>
+          <a:off x="0" y="0"/>
+          <a:ext cx="0" cy="0"/>
+          <a:chOff x="0" y="0"/>
+          <a:chExt cx="0" cy="0"/>
+        </a:xfrm>
+      </p:grpSpPr>
+      <p:sp>
+        <p:nvSpPr>
+          <p:cNvPr id="3" name="Content Placeholder 2">
+            <a:extLst>
+              <a:ext uri="{FF2B5EF4-FFF2-40B4-BE49-F238E27FC236}">
+                <a16:creationId xmlns:a16="http://schemas.microsoft.com/office/drawing/2014/main" id="{C87B1D10-881C-1B16-43B7-F20DB7AC5E2E}"/>
+              </a:ext>
+            </a:extLst>
+          </p:cNvPr>
+          <p:cNvSpPr>
+            <a:spLocks noGrp="1"/>
+          </p:cNvSpPr>
+          <p:nvPr>
+            <p:ph idx="1"/>
+          </p:nvPr>
+        </p:nvSpPr>
+        <p:spPr>
+          <a:xfrm>
+            <a:off x="702853" y="707571"/>
+            <a:ext cx="10900568" cy="5486400"/>
+          </a:xfrm>
+        </p:spPr>
+        <p:txBody>
+          <a:bodyPr>
+            <a:normAutofit/>
+          </a:bodyPr>
+          <a:lstStyle/>
+          <a:p>
+            <a:pPr marL="0" indent="0">
+              <a:buNone/>
+            </a:pPr>
+            <a:endParaRPr lang="en-IN" sz="2400" dirty="0"/>
+          </a:p>
+        </p:txBody>
+      </p:sp>
+    </p:spTree>
+    <p:extLst>
+      <p:ext uri="{BB962C8B-B14F-4D97-AF65-F5344CB8AC3E}">
+        <p14:creationId xmlns:p14="http://schemas.microsoft.com/office/powerpoint/2010/main" val="1053734906"/>
+      </p:ext>
+    </p:extLst>
+  </p:cSld>
+  <p:clrMapOvr>
+    <a:masterClrMapping/>
+  </p:clrMapOvr>
+</p:sld>
+</file>
+
+<file path=ppt/slides/slide67.xml><?xml version="1.0" encoding="utf-8"?>
+<p:sld xmlns:a="http://schemas.openxmlformats.org/drawingml/2006/main" xmlns:r="http://schemas.openxmlformats.org/officeDocument/2006/relationships" xmlns:p="http://schemas.openxmlformats.org/presentationml/2006/main">
+  <p:cSld>
+    <p:spTree>
+      <p:nvGrpSpPr>
+        <p:cNvPr id="1" name="">
+          <a:extLst>
+            <a:ext uri="{FF2B5EF4-FFF2-40B4-BE49-F238E27FC236}">
+              <a16:creationId xmlns:a16="http://schemas.microsoft.com/office/drawing/2014/main" id="{310EB7DE-BB7F-0890-69CF-AE40EDF73CBE}"/>
+            </a:ext>
+          </a:extLst>
+        </p:cNvPr>
+        <p:cNvGrpSpPr/>
+        <p:nvPr/>
+      </p:nvGrpSpPr>
+      <p:grpSpPr>
+        <a:xfrm>
+          <a:off x="0" y="0"/>
+          <a:ext cx="0" cy="0"/>
+          <a:chOff x="0" y="0"/>
+          <a:chExt cx="0" cy="0"/>
+        </a:xfrm>
+      </p:grpSpPr>
+      <p:sp>
+        <p:nvSpPr>
+          <p:cNvPr id="3" name="Content Placeholder 2">
+            <a:extLst>
+              <a:ext uri="{FF2B5EF4-FFF2-40B4-BE49-F238E27FC236}">
+                <a16:creationId xmlns:a16="http://schemas.microsoft.com/office/drawing/2014/main" id="{517E18DF-55E6-3A7C-6BCF-9360BF36799E}"/>
+              </a:ext>
+            </a:extLst>
+          </p:cNvPr>
+          <p:cNvSpPr>
+            <a:spLocks noGrp="1"/>
+          </p:cNvSpPr>
+          <p:nvPr>
+            <p:ph idx="1"/>
+          </p:nvPr>
+        </p:nvSpPr>
+        <p:spPr>
+          <a:xfrm>
+            <a:off x="702853" y="707571"/>
+            <a:ext cx="10900568" cy="5486400"/>
+          </a:xfrm>
+        </p:spPr>
+        <p:txBody>
+          <a:bodyPr>
+            <a:normAutofit/>
+          </a:bodyPr>
+          <a:lstStyle/>
+          <a:p>
+            <a:pPr marL="0" indent="0">
+              <a:buNone/>
+            </a:pPr>
+            <a:endParaRPr lang="en-IN" sz="2400" dirty="0"/>
+          </a:p>
+        </p:txBody>
+      </p:sp>
+    </p:spTree>
+    <p:extLst>
+      <p:ext uri="{BB962C8B-B14F-4D97-AF65-F5344CB8AC3E}">
+        <p14:creationId xmlns:p14="http://schemas.microsoft.com/office/powerpoint/2010/main" val="2916877025"/>
       </p:ext>
     </p:extLst>
   </p:cSld>

--- a/Theory Class-Notes/Unit-3 Unsupervised Learning.pptx
+++ b/Theory Class-Notes/Unit-3 Unsupervised Learning.pptx
@@ -96,13 +96,13 @@
     <p:sldId id="515" r:id="rId90"/>
     <p:sldId id="516" r:id="rId91"/>
     <p:sldId id="520" r:id="rId92"/>
-    <p:sldId id="847" r:id="rId93"/>
-    <p:sldId id="899" r:id="rId94"/>
-    <p:sldId id="900" r:id="rId95"/>
-    <p:sldId id="901" r:id="rId96"/>
-    <p:sldId id="902" r:id="rId97"/>
-    <p:sldId id="903" r:id="rId98"/>
-    <p:sldId id="904" r:id="rId99"/>
+    <p:sldId id="899" r:id="rId93"/>
+    <p:sldId id="900" r:id="rId94"/>
+    <p:sldId id="901" r:id="rId95"/>
+    <p:sldId id="902" r:id="rId96"/>
+    <p:sldId id="903" r:id="rId97"/>
+    <p:sldId id="904" r:id="rId98"/>
+    <p:sldId id="847" r:id="rId99"/>
   </p:sldIdLst>
   <p:sldSz cx="12192000" cy="6858000"/>
   <p:notesSz cx="6858000" cy="9144000"/>
@@ -212,7 +212,7 @@
 <file path=ppt/revisionInfo.xml><?xml version="1.0" encoding="utf-8"?>
 <p1510:revInfo xmlns:a="http://schemas.openxmlformats.org/drawingml/2006/main" xmlns:r="http://schemas.openxmlformats.org/officeDocument/2006/relationships" xmlns:p1510="http://schemas.microsoft.com/office/powerpoint/2015/10/main">
   <p1510:revLst>
-    <p1510:client id="{8D8496C7-5C44-4372-99BE-D015FA3DC895}" v="116" dt="2025-07-13T18:31:05.532"/>
+    <p1510:client id="{8D8496C7-5C44-4372-99BE-D015FA3DC895}" v="138" dt="2025-07-19T10:50:36.134"/>
   </p1510:revLst>
 </p1510:revInfo>
 </file>
@@ -222,7 +222,7 @@
   <pc:docChgLst>
     <pc:chgData name="Pramod Naik" userId="ceb6df04-ef15-4d9b-a141-998a03559d75" providerId="ADAL" clId="{8D8496C7-5C44-4372-99BE-D015FA3DC895}"/>
     <pc:docChg chg="undo redo custSel addSld delSld modSld sldOrd">
-      <pc:chgData name="Pramod Naik" userId="ceb6df04-ef15-4d9b-a141-998a03559d75" providerId="ADAL" clId="{8D8496C7-5C44-4372-99BE-D015FA3DC895}" dt="2025-07-13T18:44:45.932" v="1102" actId="404"/>
+      <pc:chgData name="Pramod Naik" userId="ceb6df04-ef15-4d9b-a141-998a03559d75" providerId="ADAL" clId="{8D8496C7-5C44-4372-99BE-D015FA3DC895}" dt="2025-07-19T10:53:32.463" v="1294" actId="47"/>
       <pc:docMkLst>
         <pc:docMk/>
       </pc:docMkLst>
@@ -655,14 +655,6 @@
             <ac:graphicFrameMk id="2" creationId="{A68E7BE2-9C96-FBC0-B5F5-2F6053A3CCD4}"/>
           </ac:graphicFrameMkLst>
         </pc:graphicFrameChg>
-        <pc:graphicFrameChg chg="del modGraphic">
-          <ac:chgData name="Pramod Naik" userId="ceb6df04-ef15-4d9b-a141-998a03559d75" providerId="ADAL" clId="{8D8496C7-5C44-4372-99BE-D015FA3DC895}" dt="2025-07-13T17:24:23.227" v="875" actId="478"/>
-          <ac:graphicFrameMkLst>
-            <pc:docMk/>
-            <pc:sldMk cId="1807256370" sldId="516"/>
-            <ac:graphicFrameMk id="6" creationId="{D3927EDC-A23A-B83A-ACF7-8993E27B4508}"/>
-          </ac:graphicFrameMkLst>
-        </pc:graphicFrameChg>
       </pc:sldChg>
       <pc:sldChg chg="modSp add mod">
         <pc:chgData name="Pramod Naik" userId="ceb6df04-ef15-4d9b-a141-998a03559d75" providerId="ADAL" clId="{8D8496C7-5C44-4372-99BE-D015FA3DC895}" dt="2025-07-13T17:25:56.996" v="914" actId="1076"/>
@@ -1031,13 +1023,13 @@
         </pc:spChg>
       </pc:sldChg>
       <pc:sldChg chg="modSp add mod ord">
-        <pc:chgData name="Pramod Naik" userId="ceb6df04-ef15-4d9b-a141-998a03559d75" providerId="ADAL" clId="{8D8496C7-5C44-4372-99BE-D015FA3DC895}" dt="2025-07-13T17:15:14.305" v="774" actId="113"/>
+        <pc:chgData name="Pramod Naik" userId="ceb6df04-ef15-4d9b-a141-998a03559d75" providerId="ADAL" clId="{8D8496C7-5C44-4372-99BE-D015FA3DC895}" dt="2025-07-19T10:53:04.132" v="1284" actId="113"/>
         <pc:sldMkLst>
           <pc:docMk/>
           <pc:sldMk cId="1788168237" sldId="847"/>
         </pc:sldMkLst>
         <pc:spChg chg="mod">
-          <ac:chgData name="Pramod Naik" userId="ceb6df04-ef15-4d9b-a141-998a03559d75" providerId="ADAL" clId="{8D8496C7-5C44-4372-99BE-D015FA3DC895}" dt="2025-07-13T17:15:14.305" v="774" actId="113"/>
+          <ac:chgData name="Pramod Naik" userId="ceb6df04-ef15-4d9b-a141-998a03559d75" providerId="ADAL" clId="{8D8496C7-5C44-4372-99BE-D015FA3DC895}" dt="2025-07-19T10:53:04.132" v="1284" actId="113"/>
           <ac:spMkLst>
             <pc:docMk/>
             <pc:sldMk cId="1788168237" sldId="847"/>
@@ -1096,14 +1088,6 @@
           <pc:docMk/>
           <pc:sldMk cId="380204240" sldId="883"/>
         </pc:sldMkLst>
-        <pc:spChg chg="add">
-          <ac:chgData name="Pramod Naik" userId="ceb6df04-ef15-4d9b-a141-998a03559d75" providerId="ADAL" clId="{8D8496C7-5C44-4372-99BE-D015FA3DC895}" dt="2025-07-13T15:42:56.012" v="345"/>
-          <ac:spMkLst>
-            <pc:docMk/>
-            <pc:sldMk cId="380204240" sldId="883"/>
-            <ac:spMk id="2" creationId="{8B219D29-CF38-1A88-EAEE-4BBB130F4EBF}"/>
-          </ac:spMkLst>
-        </pc:spChg>
         <pc:spChg chg="mod">
           <ac:chgData name="Pramod Naik" userId="ceb6df04-ef15-4d9b-a141-998a03559d75" providerId="ADAL" clId="{8D8496C7-5C44-4372-99BE-D015FA3DC895}" dt="2025-07-13T15:43:37.451" v="370" actId="113"/>
           <ac:spMkLst>
@@ -1157,38 +1141,6 @@
             <ac:spMk id="3" creationId="{5A5439F9-7860-B787-7E26-C1399B3A7F05}"/>
           </ac:spMkLst>
         </pc:spChg>
-        <pc:spChg chg="add">
-          <ac:chgData name="Pramod Naik" userId="ceb6df04-ef15-4d9b-a141-998a03559d75" providerId="ADAL" clId="{8D8496C7-5C44-4372-99BE-D015FA3DC895}" dt="2025-07-13T15:44:59.860" v="380"/>
-          <ac:spMkLst>
-            <pc:docMk/>
-            <pc:sldMk cId="2368056313" sldId="886"/>
-            <ac:spMk id="4" creationId="{A24D0274-78D9-5934-81CA-4F1E50B77508}"/>
-          </ac:spMkLst>
-        </pc:spChg>
-        <pc:spChg chg="add mod">
-          <ac:chgData name="Pramod Naik" userId="ceb6df04-ef15-4d9b-a141-998a03559d75" providerId="ADAL" clId="{8D8496C7-5C44-4372-99BE-D015FA3DC895}" dt="2025-07-13T15:45:23.104" v="387"/>
-          <ac:spMkLst>
-            <pc:docMk/>
-            <pc:sldMk cId="2368056313" sldId="886"/>
-            <ac:spMk id="6" creationId="{A6E50A05-179E-487F-2D7E-39F9B81DCA92}"/>
-          </ac:spMkLst>
-        </pc:spChg>
-        <pc:graphicFrameChg chg="add mod">
-          <ac:chgData name="Pramod Naik" userId="ceb6df04-ef15-4d9b-a141-998a03559d75" providerId="ADAL" clId="{8D8496C7-5C44-4372-99BE-D015FA3DC895}" dt="2025-07-13T15:45:00.827" v="381"/>
-          <ac:graphicFrameMkLst>
-            <pc:docMk/>
-            <pc:sldMk cId="2368056313" sldId="886"/>
-            <ac:graphicFrameMk id="2" creationId="{EB7D58F2-601B-7569-66B6-C3CE2C78AC14}"/>
-          </ac:graphicFrameMkLst>
-        </pc:graphicFrameChg>
-        <pc:graphicFrameChg chg="add mod">
-          <ac:chgData name="Pramod Naik" userId="ceb6df04-ef15-4d9b-a141-998a03559d75" providerId="ADAL" clId="{8D8496C7-5C44-4372-99BE-D015FA3DC895}" dt="2025-07-13T15:45:21.831" v="386"/>
-          <ac:graphicFrameMkLst>
-            <pc:docMk/>
-            <pc:sldMk cId="2368056313" sldId="886"/>
-            <ac:graphicFrameMk id="5" creationId="{8C3852BB-5405-1F31-02DB-5CB4A67B414C}"/>
-          </ac:graphicFrameMkLst>
-        </pc:graphicFrameChg>
         <pc:graphicFrameChg chg="add mod modGraphic">
           <ac:chgData name="Pramod Naik" userId="ceb6df04-ef15-4d9b-a141-998a03559d75" providerId="ADAL" clId="{8D8496C7-5C44-4372-99BE-D015FA3DC895}" dt="2025-07-13T15:49:39.712" v="420" actId="1076"/>
           <ac:graphicFrameMkLst>
@@ -1212,14 +1164,6 @@
             <ac:spMk id="3" creationId="{762CBF46-EA37-8B6A-392D-229161886391}"/>
           </ac:spMkLst>
         </pc:spChg>
-        <pc:picChg chg="add del mod">
-          <ac:chgData name="Pramod Naik" userId="ceb6df04-ef15-4d9b-a141-998a03559d75" providerId="ADAL" clId="{8D8496C7-5C44-4372-99BE-D015FA3DC895}" dt="2025-07-13T16:48:56.480" v="464" actId="478"/>
-          <ac:picMkLst>
-            <pc:docMk/>
-            <pc:sldMk cId="1265237306" sldId="887"/>
-            <ac:picMk id="4" creationId="{9466ADD9-89F1-6A67-7D72-5DEE4BB97A5F}"/>
-          </ac:picMkLst>
-        </pc:picChg>
       </pc:sldChg>
       <pc:sldChg chg="addSp delSp modSp mod ord">
         <pc:chgData name="Pramod Naik" userId="ceb6df04-ef15-4d9b-a141-998a03559d75" providerId="ADAL" clId="{8D8496C7-5C44-4372-99BE-D015FA3DC895}" dt="2025-07-13T16:52:54.658" v="501" actId="403"/>
@@ -1227,14 +1171,6 @@
           <pc:docMk/>
           <pc:sldMk cId="1053734906" sldId="888"/>
         </pc:sldMkLst>
-        <pc:spChg chg="add mod">
-          <ac:chgData name="Pramod Naik" userId="ceb6df04-ef15-4d9b-a141-998a03559d75" providerId="ADAL" clId="{8D8496C7-5C44-4372-99BE-D015FA3DC895}" dt="2025-07-13T16:52:27.049" v="492"/>
-          <ac:spMkLst>
-            <pc:docMk/>
-            <pc:sldMk cId="1053734906" sldId="888"/>
-            <ac:spMk id="2" creationId="{500287A6-9AA2-4B94-190B-97BBC64C8B11}"/>
-          </ac:spMkLst>
-        </pc:spChg>
         <pc:spChg chg="add del mod">
           <ac:chgData name="Pramod Naik" userId="ceb6df04-ef15-4d9b-a141-998a03559d75" providerId="ADAL" clId="{8D8496C7-5C44-4372-99BE-D015FA3DC895}" dt="2025-07-13T16:52:54.658" v="501" actId="403"/>
           <ac:spMkLst>
@@ -1258,22 +1194,6 @@
             <ac:spMk id="3" creationId="{517E18DF-55E6-3A7C-6BCF-9360BF36799E}"/>
           </ac:spMkLst>
         </pc:spChg>
-        <pc:spChg chg="add">
-          <ac:chgData name="Pramod Naik" userId="ceb6df04-ef15-4d9b-a141-998a03559d75" providerId="ADAL" clId="{8D8496C7-5C44-4372-99BE-D015FA3DC895}" dt="2025-07-13T16:53:49.664" v="507"/>
-          <ac:spMkLst>
-            <pc:docMk/>
-            <pc:sldMk cId="2916877025" sldId="889"/>
-            <ac:spMk id="4" creationId="{1A5EC38F-D3AA-008D-6059-434EAF247E40}"/>
-          </ac:spMkLst>
-        </pc:spChg>
-        <pc:graphicFrameChg chg="add mod">
-          <ac:chgData name="Pramod Naik" userId="ceb6df04-ef15-4d9b-a141-998a03559d75" providerId="ADAL" clId="{8D8496C7-5C44-4372-99BE-D015FA3DC895}" dt="2025-07-13T16:53:51.987" v="508"/>
-          <ac:graphicFrameMkLst>
-            <pc:docMk/>
-            <pc:sldMk cId="2916877025" sldId="889"/>
-            <ac:graphicFrameMk id="2" creationId="{BC4BC0E3-7B50-4D8B-DE94-FE1C82ACDEC7}"/>
-          </ac:graphicFrameMkLst>
-        </pc:graphicFrameChg>
         <pc:graphicFrameChg chg="add mod modGraphic">
           <ac:chgData name="Pramod Naik" userId="ceb6df04-ef15-4d9b-a141-998a03559d75" providerId="ADAL" clId="{8D8496C7-5C44-4372-99BE-D015FA3DC895}" dt="2025-07-13T16:54:19.273" v="516" actId="1076"/>
           <ac:graphicFrameMkLst>
@@ -1289,14 +1209,6 @@
           <pc:docMk/>
           <pc:sldMk cId="3499875619" sldId="890"/>
         </pc:sldMkLst>
-        <pc:spChg chg="add">
-          <ac:chgData name="Pramod Naik" userId="ceb6df04-ef15-4d9b-a141-998a03559d75" providerId="ADAL" clId="{8D8496C7-5C44-4372-99BE-D015FA3DC895}" dt="2025-07-13T16:55:31.653" v="527"/>
-          <ac:spMkLst>
-            <pc:docMk/>
-            <pc:sldMk cId="3499875619" sldId="890"/>
-            <ac:spMk id="2" creationId="{3B5D278A-1202-65FA-1BDD-D0FDD93468A4}"/>
-          </ac:spMkLst>
-        </pc:spChg>
         <pc:spChg chg="mod">
           <ac:chgData name="Pramod Naik" userId="ceb6df04-ef15-4d9b-a141-998a03559d75" providerId="ADAL" clId="{8D8496C7-5C44-4372-99BE-D015FA3DC895}" dt="2025-07-13T16:56:06.988" v="541" actId="403"/>
           <ac:spMkLst>
@@ -1365,14 +1277,6 @@
           <pc:docMk/>
           <pc:sldMk cId="3470635879" sldId="894"/>
         </pc:sldMkLst>
-        <pc:spChg chg="add">
-          <ac:chgData name="Pramod Naik" userId="ceb6df04-ef15-4d9b-a141-998a03559d75" providerId="ADAL" clId="{8D8496C7-5C44-4372-99BE-D015FA3DC895}" dt="2025-07-13T17:04:20.903" v="653"/>
-          <ac:spMkLst>
-            <pc:docMk/>
-            <pc:sldMk cId="3470635879" sldId="894"/>
-            <ac:spMk id="2" creationId="{D3E26C5B-27A5-2468-EC17-86C28A9496E0}"/>
-          </ac:spMkLst>
-        </pc:spChg>
         <pc:spChg chg="mod">
           <ac:chgData name="Pramod Naik" userId="ceb6df04-ef15-4d9b-a141-998a03559d75" providerId="ADAL" clId="{8D8496C7-5C44-4372-99BE-D015FA3DC895}" dt="2025-07-13T18:44:45.932" v="1102" actId="404"/>
           <ac:spMkLst>
@@ -1449,14 +1353,6 @@
           <pc:docMk/>
           <pc:sldMk cId="854932922" sldId="898"/>
         </pc:sldMkLst>
-        <pc:spChg chg="add">
-          <ac:chgData name="Pramod Naik" userId="ceb6df04-ef15-4d9b-a141-998a03559d75" providerId="ADAL" clId="{8D8496C7-5C44-4372-99BE-D015FA3DC895}" dt="2025-07-13T17:53:47.721" v="920"/>
-          <ac:spMkLst>
-            <pc:docMk/>
-            <pc:sldMk cId="854932922" sldId="898"/>
-            <ac:spMk id="2" creationId="{5EB70DE6-E71A-67A4-7135-20BB14F2F138}"/>
-          </ac:spMkLst>
-        </pc:spChg>
         <pc:spChg chg="mod">
           <ac:chgData name="Pramod Naik" userId="ceb6df04-ef15-4d9b-a141-998a03559d75" providerId="ADAL" clId="{8D8496C7-5C44-4372-99BE-D015FA3DC895}" dt="2025-07-13T17:55:54.656" v="938" actId="14100"/>
           <ac:spMkLst>
@@ -1472,56 +1368,152 @@
           <pc:docMk/>
           <pc:sldMk cId="2644376933" sldId="898"/>
         </pc:sldMkLst>
-        <pc:spChg chg="mod">
-          <ac:chgData name="Pramod Naik" userId="ceb6df04-ef15-4d9b-a141-998a03559d75" providerId="ADAL" clId="{8D8496C7-5C44-4372-99BE-D015FA3DC895}" dt="2025-07-13T17:28:22.591" v="917" actId="20577"/>
-          <ac:spMkLst>
-            <pc:docMk/>
-            <pc:sldMk cId="2644376933" sldId="898"/>
-            <ac:spMk id="3" creationId="{DA0B2AD2-5232-10AF-6E18-7F7FD64F2094}"/>
-          </ac:spMkLst>
-        </pc:spChg>
       </pc:sldChg>
-      <pc:sldChg chg="add">
-        <pc:chgData name="Pramod Naik" userId="ceb6df04-ef15-4d9b-a141-998a03559d75" providerId="ADAL" clId="{8D8496C7-5C44-4372-99BE-D015FA3DC895}" dt="2025-07-13T15:51:17.562" v="452"/>
+      <pc:sldChg chg="addSp modSp add mod">
+        <pc:chgData name="Pramod Naik" userId="ceb6df04-ef15-4d9b-a141-998a03559d75" providerId="ADAL" clId="{8D8496C7-5C44-4372-99BE-D015FA3DC895}" dt="2025-07-19T10:36:41.264" v="1113" actId="21"/>
         <pc:sldMkLst>
           <pc:docMk/>
           <pc:sldMk cId="1000350292" sldId="899"/>
         </pc:sldMkLst>
+        <pc:spChg chg="add">
+          <ac:chgData name="Pramod Naik" userId="ceb6df04-ef15-4d9b-a141-998a03559d75" providerId="ADAL" clId="{8D8496C7-5C44-4372-99BE-D015FA3DC895}" dt="2025-07-19T10:36:21.267" v="1111"/>
+          <ac:spMkLst>
+            <pc:docMk/>
+            <pc:sldMk cId="1000350292" sldId="899"/>
+            <ac:spMk id="2" creationId="{D6EDF6B6-C504-7FFE-549D-A3A90A6CABF7}"/>
+          </ac:spMkLst>
+        </pc:spChg>
+        <pc:spChg chg="mod">
+          <ac:chgData name="Pramod Naik" userId="ceb6df04-ef15-4d9b-a141-998a03559d75" providerId="ADAL" clId="{8D8496C7-5C44-4372-99BE-D015FA3DC895}" dt="2025-07-19T10:36:41.264" v="1113" actId="21"/>
+          <ac:spMkLst>
+            <pc:docMk/>
+            <pc:sldMk cId="1000350292" sldId="899"/>
+            <ac:spMk id="3" creationId="{E92B3EE8-1122-572D-3390-C170BAF0B246}"/>
+          </ac:spMkLst>
+        </pc:spChg>
       </pc:sldChg>
-      <pc:sldChg chg="add">
-        <pc:chgData name="Pramod Naik" userId="ceb6df04-ef15-4d9b-a141-998a03559d75" providerId="ADAL" clId="{8D8496C7-5C44-4372-99BE-D015FA3DC895}" dt="2025-07-13T17:15:09.781" v="769"/>
+      <pc:sldChg chg="addSp modSp add mod">
+        <pc:chgData name="Pramod Naik" userId="ceb6df04-ef15-4d9b-a141-998a03559d75" providerId="ADAL" clId="{8D8496C7-5C44-4372-99BE-D015FA3DC895}" dt="2025-07-19T10:38:51.074" v="1158" actId="27636"/>
         <pc:sldMkLst>
           <pc:docMk/>
           <pc:sldMk cId="2198157093" sldId="900"/>
         </pc:sldMkLst>
+        <pc:spChg chg="mod">
+          <ac:chgData name="Pramod Naik" userId="ceb6df04-ef15-4d9b-a141-998a03559d75" providerId="ADAL" clId="{8D8496C7-5C44-4372-99BE-D015FA3DC895}" dt="2025-07-19T10:38:51.074" v="1158" actId="27636"/>
+          <ac:spMkLst>
+            <pc:docMk/>
+            <pc:sldMk cId="2198157093" sldId="900"/>
+            <ac:spMk id="3" creationId="{D91EE14E-13DD-021C-F3FD-EF0CF2605D13}"/>
+          </ac:spMkLst>
+        </pc:spChg>
+        <pc:picChg chg="add mod">
+          <ac:chgData name="Pramod Naik" userId="ceb6df04-ef15-4d9b-a141-998a03559d75" providerId="ADAL" clId="{8D8496C7-5C44-4372-99BE-D015FA3DC895}" dt="2025-07-19T10:38:41.319" v="1154" actId="1076"/>
+          <ac:picMkLst>
+            <pc:docMk/>
+            <pc:sldMk cId="2198157093" sldId="900"/>
+            <ac:picMk id="4" creationId="{9C258B87-3569-DD92-A5F8-0DD5C7E87FC2}"/>
+          </ac:picMkLst>
+        </pc:picChg>
       </pc:sldChg>
-      <pc:sldChg chg="add">
-        <pc:chgData name="Pramod Naik" userId="ceb6df04-ef15-4d9b-a141-998a03559d75" providerId="ADAL" clId="{8D8496C7-5C44-4372-99BE-D015FA3DC895}" dt="2025-07-13T17:15:09.946" v="770"/>
+      <pc:sldChg chg="addSp modSp add mod ord">
+        <pc:chgData name="Pramod Naik" userId="ceb6df04-ef15-4d9b-a141-998a03559d75" providerId="ADAL" clId="{8D8496C7-5C44-4372-99BE-D015FA3DC895}" dt="2025-07-19T10:40:32.631" v="1186" actId="207"/>
         <pc:sldMkLst>
           <pc:docMk/>
           <pc:sldMk cId="91788410" sldId="901"/>
         </pc:sldMkLst>
+        <pc:spChg chg="mod">
+          <ac:chgData name="Pramod Naik" userId="ceb6df04-ef15-4d9b-a141-998a03559d75" providerId="ADAL" clId="{8D8496C7-5C44-4372-99BE-D015FA3DC895}" dt="2025-07-19T10:40:32.631" v="1186" actId="207"/>
+          <ac:spMkLst>
+            <pc:docMk/>
+            <pc:sldMk cId="91788410" sldId="901"/>
+            <ac:spMk id="3" creationId="{29C6FB69-9D1F-BAB3-6FF7-52672910CDFA}"/>
+          </ac:spMkLst>
+        </pc:spChg>
+        <pc:picChg chg="add mod">
+          <ac:chgData name="Pramod Naik" userId="ceb6df04-ef15-4d9b-a141-998a03559d75" providerId="ADAL" clId="{8D8496C7-5C44-4372-99BE-D015FA3DC895}" dt="2025-07-19T10:39:53.992" v="1172" actId="14100"/>
+          <ac:picMkLst>
+            <pc:docMk/>
+            <pc:sldMk cId="91788410" sldId="901"/>
+            <ac:picMk id="4" creationId="{AB695A12-F76C-C0A6-1DBF-043B55E6C34B}"/>
+          </ac:picMkLst>
+        </pc:picChg>
       </pc:sldChg>
-      <pc:sldChg chg="add">
-        <pc:chgData name="Pramod Naik" userId="ceb6df04-ef15-4d9b-a141-998a03559d75" providerId="ADAL" clId="{8D8496C7-5C44-4372-99BE-D015FA3DC895}" dt="2025-07-13T17:15:10.110" v="771"/>
+      <pc:sldChg chg="addSp modSp add mod">
+        <pc:chgData name="Pramod Naik" userId="ceb6df04-ef15-4d9b-a141-998a03559d75" providerId="ADAL" clId="{8D8496C7-5C44-4372-99BE-D015FA3DC895}" dt="2025-07-19T10:45:50.403" v="1231" actId="113"/>
         <pc:sldMkLst>
           <pc:docMk/>
           <pc:sldMk cId="3134277368" sldId="902"/>
         </pc:sldMkLst>
+        <pc:spChg chg="mod">
+          <ac:chgData name="Pramod Naik" userId="ceb6df04-ef15-4d9b-a141-998a03559d75" providerId="ADAL" clId="{8D8496C7-5C44-4372-99BE-D015FA3DC895}" dt="2025-07-19T10:45:50.403" v="1231" actId="113"/>
+          <ac:spMkLst>
+            <pc:docMk/>
+            <pc:sldMk cId="3134277368" sldId="902"/>
+            <ac:spMk id="3" creationId="{2860F1AF-0822-C1E4-6652-B77395283E06}"/>
+          </ac:spMkLst>
+        </pc:spChg>
+        <pc:spChg chg="add">
+          <ac:chgData name="Pramod Naik" userId="ceb6df04-ef15-4d9b-a141-998a03559d75" providerId="ADAL" clId="{8D8496C7-5C44-4372-99BE-D015FA3DC895}" dt="2025-07-19T10:45:20.750" v="1215"/>
+          <ac:spMkLst>
+            <pc:docMk/>
+            <pc:sldMk cId="3134277368" sldId="902"/>
+            <ac:spMk id="5" creationId="{1A03F089-D010-BD1A-AD3A-60E6F94A3766}"/>
+          </ac:spMkLst>
+        </pc:spChg>
+        <pc:picChg chg="add mod">
+          <ac:chgData name="Pramod Naik" userId="ceb6df04-ef15-4d9b-a141-998a03559d75" providerId="ADAL" clId="{8D8496C7-5C44-4372-99BE-D015FA3DC895}" dt="2025-07-19T10:45:38.529" v="1228" actId="1076"/>
+          <ac:picMkLst>
+            <pc:docMk/>
+            <pc:sldMk cId="3134277368" sldId="902"/>
+            <ac:picMk id="4" creationId="{557B5D92-E155-6259-6378-7422699BF07A}"/>
+          </ac:picMkLst>
+        </pc:picChg>
       </pc:sldChg>
-      <pc:sldChg chg="add">
-        <pc:chgData name="Pramod Naik" userId="ceb6df04-ef15-4d9b-a141-998a03559d75" providerId="ADAL" clId="{8D8496C7-5C44-4372-99BE-D015FA3DC895}" dt="2025-07-13T17:15:10.255" v="772"/>
+      <pc:sldChg chg="addSp modSp add mod">
+        <pc:chgData name="Pramod Naik" userId="ceb6df04-ef15-4d9b-a141-998a03559d75" providerId="ADAL" clId="{8D8496C7-5C44-4372-99BE-D015FA3DC895}" dt="2025-07-19T10:49:24.335" v="1257" actId="403"/>
         <pc:sldMkLst>
           <pc:docMk/>
           <pc:sldMk cId="1213493839" sldId="903"/>
         </pc:sldMkLst>
+        <pc:spChg chg="mod">
+          <ac:chgData name="Pramod Naik" userId="ceb6df04-ef15-4d9b-a141-998a03559d75" providerId="ADAL" clId="{8D8496C7-5C44-4372-99BE-D015FA3DC895}" dt="2025-07-19T10:49:24.335" v="1257" actId="403"/>
+          <ac:spMkLst>
+            <pc:docMk/>
+            <pc:sldMk cId="1213493839" sldId="903"/>
+            <ac:spMk id="3" creationId="{FCF28CB9-BD11-553C-E9C5-7F80AC459311}"/>
+          </ac:spMkLst>
+        </pc:spChg>
+        <pc:picChg chg="add mod">
+          <ac:chgData name="Pramod Naik" userId="ceb6df04-ef15-4d9b-a141-998a03559d75" providerId="ADAL" clId="{8D8496C7-5C44-4372-99BE-D015FA3DC895}" dt="2025-07-19T10:49:08.298" v="1254" actId="14100"/>
+          <ac:picMkLst>
+            <pc:docMk/>
+            <pc:sldMk cId="1213493839" sldId="903"/>
+            <ac:picMk id="4" creationId="{02ED37E5-D3EE-7242-68A0-8363AA6F9215}"/>
+          </ac:picMkLst>
+        </pc:picChg>
       </pc:sldChg>
-      <pc:sldChg chg="add">
-        <pc:chgData name="Pramod Naik" userId="ceb6df04-ef15-4d9b-a141-998a03559d75" providerId="ADAL" clId="{8D8496C7-5C44-4372-99BE-D015FA3DC895}" dt="2025-07-13T17:15:10.395" v="773"/>
+      <pc:sldChg chg="addSp modSp add mod">
+        <pc:chgData name="Pramod Naik" userId="ceb6df04-ef15-4d9b-a141-998a03559d75" providerId="ADAL" clId="{8D8496C7-5C44-4372-99BE-D015FA3DC895}" dt="2025-07-19T10:52:58.878" v="1283" actId="403"/>
         <pc:sldMkLst>
           <pc:docMk/>
           <pc:sldMk cId="3928362473" sldId="904"/>
         </pc:sldMkLst>
+        <pc:spChg chg="mod">
+          <ac:chgData name="Pramod Naik" userId="ceb6df04-ef15-4d9b-a141-998a03559d75" providerId="ADAL" clId="{8D8496C7-5C44-4372-99BE-D015FA3DC895}" dt="2025-07-19T10:52:58.878" v="1283" actId="403"/>
+          <ac:spMkLst>
+            <pc:docMk/>
+            <pc:sldMk cId="3928362473" sldId="904"/>
+            <ac:spMk id="3" creationId="{16F682A0-C9A6-0F2D-0FFF-F547A12C9339}"/>
+          </ac:spMkLst>
+        </pc:spChg>
+        <pc:picChg chg="add mod">
+          <ac:chgData name="Pramod Naik" userId="ceb6df04-ef15-4d9b-a141-998a03559d75" providerId="ADAL" clId="{8D8496C7-5C44-4372-99BE-D015FA3DC895}" dt="2025-07-19T10:51:46.187" v="1279" actId="1076"/>
+          <ac:picMkLst>
+            <pc:docMk/>
+            <pc:sldMk cId="3928362473" sldId="904"/>
+            <ac:picMk id="4" creationId="{058531C0-1108-6902-387A-7E239AF3D806}"/>
+          </ac:picMkLst>
+        </pc:picChg>
       </pc:sldChg>
       <pc:sldChg chg="addSp modSp add mod">
         <pc:chgData name="Pramod Naik" userId="ceb6df04-ef15-4d9b-a141-998a03559d75" providerId="ADAL" clId="{8D8496C7-5C44-4372-99BE-D015FA3DC895}" dt="2025-07-13T18:25:35.983" v="999" actId="313"/>
@@ -1628,14 +1620,6 @@
             <ac:spMk id="3" creationId="{123C7D65-EB9F-3957-9428-57A858884EAD}"/>
           </ac:spMkLst>
         </pc:spChg>
-        <pc:graphicFrameChg chg="add mod">
-          <ac:chgData name="Pramod Naik" userId="ceb6df04-ef15-4d9b-a141-998a03559d75" providerId="ADAL" clId="{8D8496C7-5C44-4372-99BE-D015FA3DC895}" dt="2025-07-13T18:30:53.396" v="1070"/>
-          <ac:graphicFrameMkLst>
-            <pc:docMk/>
-            <pc:sldMk cId="1278631954" sldId="910"/>
-            <ac:graphicFrameMk id="2" creationId="{050EC438-C30A-3E8C-FE7C-E3140DA35EF9}"/>
-          </ac:graphicFrameMkLst>
-        </pc:graphicFrameChg>
         <pc:graphicFrameChg chg="add mod modGraphic">
           <ac:chgData name="Pramod Naik" userId="ceb6df04-ef15-4d9b-a141-998a03559d75" providerId="ADAL" clId="{8D8496C7-5C44-4372-99BE-D015FA3DC895}" dt="2025-07-13T18:34:59.467" v="1089" actId="14734"/>
           <ac:graphicFrameMkLst>
@@ -1644,6 +1628,41 @@
             <ac:graphicFrameMk id="4" creationId="{561F74AF-5CC1-BAEB-C328-0C2DD2DB2777}"/>
           </ac:graphicFrameMkLst>
         </pc:graphicFrameChg>
+      </pc:sldChg>
+      <pc:sldChg chg="add del">
+        <pc:chgData name="Pramod Naik" userId="ceb6df04-ef15-4d9b-a141-998a03559d75" providerId="ADAL" clId="{8D8496C7-5C44-4372-99BE-D015FA3DC895}" dt="2025-07-19T10:53:32.463" v="1294" actId="47"/>
+        <pc:sldMkLst>
+          <pc:docMk/>
+          <pc:sldMk cId="1086613291" sldId="911"/>
+        </pc:sldMkLst>
+      </pc:sldChg>
+      <pc:sldChg chg="add del ord">
+        <pc:chgData name="Pramod Naik" userId="ceb6df04-ef15-4d9b-a141-998a03559d75" providerId="ADAL" clId="{8D8496C7-5C44-4372-99BE-D015FA3DC895}" dt="2025-07-19T10:41:57.062" v="1194"/>
+        <pc:sldMkLst>
+          <pc:docMk/>
+          <pc:sldMk cId="1797508762" sldId="911"/>
+        </pc:sldMkLst>
+      </pc:sldChg>
+      <pc:sldChg chg="add del">
+        <pc:chgData name="Pramod Naik" userId="ceb6df04-ef15-4d9b-a141-998a03559d75" providerId="ADAL" clId="{8D8496C7-5C44-4372-99BE-D015FA3DC895}" dt="2025-07-19T10:53:31.571" v="1293" actId="47"/>
+        <pc:sldMkLst>
+          <pc:docMk/>
+          <pc:sldMk cId="2549258975" sldId="912"/>
+        </pc:sldMkLst>
+      </pc:sldChg>
+      <pc:sldChg chg="add del">
+        <pc:chgData name="Pramod Naik" userId="ceb6df04-ef15-4d9b-a141-998a03559d75" providerId="ADAL" clId="{8D8496C7-5C44-4372-99BE-D015FA3DC895}" dt="2025-07-19T10:53:30.975" v="1292" actId="47"/>
+        <pc:sldMkLst>
+          <pc:docMk/>
+          <pc:sldMk cId="404509194" sldId="913"/>
+        </pc:sldMkLst>
+      </pc:sldChg>
+      <pc:sldChg chg="add del">
+        <pc:chgData name="Pramod Naik" userId="ceb6df04-ef15-4d9b-a141-998a03559d75" providerId="ADAL" clId="{8D8496C7-5C44-4372-99BE-D015FA3DC895}" dt="2025-07-19T10:53:30.408" v="1291" actId="47"/>
+        <pc:sldMkLst>
+          <pc:docMk/>
+          <pc:sldMk cId="469867402" sldId="914"/>
+        </pc:sldMkLst>
       </pc:sldChg>
     </pc:docChg>
   </pc:docChgLst>
@@ -1799,7 +1818,7 @@
           <a:p>
             <a:fld id="{050FF069-687C-4110-9C8F-B52BF36C2535}" type="datetimeFigureOut">
               <a:rPr lang="en-IN" smtClean="0"/>
-              <a:t>13-07-2025</a:t>
+              <a:t>19-07-2025</a:t>
             </a:fld>
             <a:endParaRPr lang="en-IN"/>
           </a:p>
@@ -1997,7 +2016,7 @@
           <a:p>
             <a:fld id="{050FF069-687C-4110-9C8F-B52BF36C2535}" type="datetimeFigureOut">
               <a:rPr lang="en-IN" smtClean="0"/>
-              <a:t>13-07-2025</a:t>
+              <a:t>19-07-2025</a:t>
             </a:fld>
             <a:endParaRPr lang="en-IN"/>
           </a:p>
@@ -2205,7 +2224,7 @@
           <a:p>
             <a:fld id="{050FF069-687C-4110-9C8F-B52BF36C2535}" type="datetimeFigureOut">
               <a:rPr lang="en-IN" smtClean="0"/>
-              <a:t>13-07-2025</a:t>
+              <a:t>19-07-2025</a:t>
             </a:fld>
             <a:endParaRPr lang="en-IN"/>
           </a:p>
@@ -2403,7 +2422,7 @@
           <a:p>
             <a:fld id="{050FF069-687C-4110-9C8F-B52BF36C2535}" type="datetimeFigureOut">
               <a:rPr lang="en-IN" smtClean="0"/>
-              <a:t>13-07-2025</a:t>
+              <a:t>19-07-2025</a:t>
             </a:fld>
             <a:endParaRPr lang="en-IN"/>
           </a:p>
@@ -2679,7 +2698,7 @@
           <a:p>
             <a:fld id="{050FF069-687C-4110-9C8F-B52BF36C2535}" type="datetimeFigureOut">
               <a:rPr lang="en-IN" smtClean="0"/>
-              <a:t>13-07-2025</a:t>
+              <a:t>19-07-2025</a:t>
             </a:fld>
             <a:endParaRPr lang="en-IN"/>
           </a:p>
@@ -2946,7 +2965,7 @@
           <a:p>
             <a:fld id="{050FF069-687C-4110-9C8F-B52BF36C2535}" type="datetimeFigureOut">
               <a:rPr lang="en-IN" smtClean="0"/>
-              <a:t>13-07-2025</a:t>
+              <a:t>19-07-2025</a:t>
             </a:fld>
             <a:endParaRPr lang="en-IN"/>
           </a:p>
@@ -3360,7 +3379,7 @@
           <a:p>
             <a:fld id="{050FF069-687C-4110-9C8F-B52BF36C2535}" type="datetimeFigureOut">
               <a:rPr lang="en-IN" smtClean="0"/>
-              <a:t>13-07-2025</a:t>
+              <a:t>19-07-2025</a:t>
             </a:fld>
             <a:endParaRPr lang="en-IN"/>
           </a:p>
@@ -3507,7 +3526,7 @@
           <a:p>
             <a:fld id="{050FF069-687C-4110-9C8F-B52BF36C2535}" type="datetimeFigureOut">
               <a:rPr lang="en-IN" smtClean="0"/>
-              <a:t>13-07-2025</a:t>
+              <a:t>19-07-2025</a:t>
             </a:fld>
             <a:endParaRPr lang="en-IN"/>
           </a:p>
@@ -3620,7 +3639,7 @@
           <a:p>
             <a:fld id="{050FF069-687C-4110-9C8F-B52BF36C2535}" type="datetimeFigureOut">
               <a:rPr lang="en-IN" smtClean="0"/>
-              <a:t>13-07-2025</a:t>
+              <a:t>19-07-2025</a:t>
             </a:fld>
             <a:endParaRPr lang="en-IN"/>
           </a:p>
@@ -3939,7 +3958,7 @@
           <a:p>
             <a:fld id="{050FF069-687C-4110-9C8F-B52BF36C2535}" type="datetimeFigureOut">
               <a:rPr lang="en-IN" smtClean="0"/>
-              <a:t>13-07-2025</a:t>
+              <a:t>19-07-2025</a:t>
             </a:fld>
             <a:endParaRPr lang="en-IN"/>
           </a:p>
@@ -4234,7 +4253,7 @@
           <a:p>
             <a:fld id="{050FF069-687C-4110-9C8F-B52BF36C2535}" type="datetimeFigureOut">
               <a:rPr lang="en-IN" smtClean="0"/>
-              <a:t>13-07-2025</a:t>
+              <a:t>19-07-2025</a:t>
             </a:fld>
             <a:endParaRPr lang="en-IN"/>
           </a:p>
@@ -5619,7 +5638,7 @@
           <a:p>
             <a:fld id="{050FF069-687C-4110-9C8F-B52BF36C2535}" type="datetimeFigureOut">
               <a:rPr lang="en-IN" smtClean="0"/>
-              <a:t>13-07-2025</a:t>
+              <a:t>19-07-2025</a:t>
             </a:fld>
             <a:endParaRPr lang="en-IN"/>
           </a:p>
@@ -19396,14 +19415,14 @@
           <p:nvPr>
             <p:extLst>
               <p:ext uri="{D42A27DB-BD31-4B8C-83A1-F6EECF244321}">
-                <p14:modId xmlns:p14="http://schemas.microsoft.com/office/powerpoint/2010/main" val="1852417510"/>
+                <p14:modId xmlns:p14="http://schemas.microsoft.com/office/powerpoint/2010/main" val="4110988763"/>
               </p:ext>
             </p:extLst>
           </p:nvPr>
         </p:nvGraphicFramePr>
         <p:xfrm>
-          <a:off x="806132" y="1164772"/>
-          <a:ext cx="10057811" cy="4299859"/>
+          <a:off x="806132" y="864524"/>
+          <a:ext cx="10515803" cy="4941711"/>
         </p:xfrm>
         <a:graphic>
           <a:graphicData uri="http://schemas.openxmlformats.org/drawingml/2006/table">
@@ -19412,21 +19431,21 @@
                 <a:tableStyleId>{5C22544A-7EE6-4342-B048-85BDC9FD1C3A}</a:tableStyleId>
               </a:tblPr>
               <a:tblGrid>
-                <a:gridCol w="3352232">
+                <a:gridCol w="2564132">
                   <a:extLst>
                     <a:ext uri="{9D8B030D-6E8A-4147-A177-3AD203B41FA5}">
                       <a16:colId xmlns:a16="http://schemas.microsoft.com/office/drawing/2014/main" val="3611389032"/>
                     </a:ext>
                   </a:extLst>
                 </a:gridCol>
-                <a:gridCol w="3352232">
+                <a:gridCol w="4061314">
                   <a:extLst>
                     <a:ext uri="{9D8B030D-6E8A-4147-A177-3AD203B41FA5}">
                       <a16:colId xmlns:a16="http://schemas.microsoft.com/office/drawing/2014/main" val="609777505"/>
                     </a:ext>
                   </a:extLst>
                 </a:gridCol>
-                <a:gridCol w="3353347">
+                <a:gridCol w="3890357">
                   <a:extLst>
                     <a:ext uri="{9D8B030D-6E8A-4147-A177-3AD203B41FA5}">
                       <a16:colId xmlns:a16="http://schemas.microsoft.com/office/drawing/2014/main" val="3864479174"/>
@@ -19434,7 +19453,7 @@
                   </a:extLst>
                 </a:gridCol>
               </a:tblGrid>
-              <a:tr h="613111">
+              <a:tr h="997527">
                 <a:tc>
                   <a:txBody>
                     <a:bodyPr/>
@@ -19479,18 +19498,38 @@
                         </a:spcAft>
                         <a:buNone/>
                       </a:pPr>
+                      <a:endParaRPr lang="en-IN" sz="1050" kern="100" baseline="30000" dirty="0">
+                        <a:effectLst/>
+                      </a:endParaRPr>
+                    </a:p>
+                    <a:p>
+                      <a:pPr>
+                        <a:lnSpc>
+                          <a:spcPct val="107000"/>
+                        </a:lnSpc>
+                        <a:spcAft>
+                          <a:spcPts val="800"/>
+                        </a:spcAft>
+                        <a:buNone/>
+                      </a:pPr>
                       <a:r>
                         <a:rPr lang="en-IN" sz="2800" kern="100" baseline="30000" dirty="0">
                           <a:effectLst/>
                         </a:rPr>
-                        <a:t>Same Group in True?</a:t>
+                        <a:t>Same Group in True Group (</a:t>
                       </a:r>
-                      <a:endParaRPr lang="en-IN" sz="2800" kern="100" dirty="0">
-                        <a:effectLst/>
-                        <a:latin typeface="Aptos" panose="020B0004020202020204" pitchFamily="34" charset="0"/>
-                        <a:ea typeface="Aptos" panose="020B0004020202020204" pitchFamily="34" charset="0"/>
-                        <a:cs typeface="Tunga" panose="020B0502040204020203" pitchFamily="34" charset="0"/>
-                      </a:endParaRPr>
+                      <a:r>
+                        <a:rPr lang="en-IN" sz="2800" b="1" kern="100" baseline="30000" dirty="0">
+                          <a:solidFill>
+                            <a:schemeClr val="lt1"/>
+                          </a:solidFill>
+                          <a:effectLst/>
+                          <a:latin typeface="+mn-lt"/>
+                          <a:ea typeface="+mn-ea"/>
+                          <a:cs typeface="+mn-cs"/>
+                        </a:rPr>
+                        <a:t>Actual Known Groups )?</a:t>
+                      </a:r>
                     </a:p>
                   </a:txBody>
                   <a:tcPr marL="68580" marR="68580" marT="0" marB="0"/>
@@ -19510,12 +19549,15 @@
                         <a:buNone/>
                       </a:pPr>
                       <a:r>
-                        <a:rPr lang="en-IN" sz="2800" kern="100" baseline="30000">
+                        <a:rPr lang="en-US" sz="1800" kern="100" dirty="0">
                           <a:effectLst/>
+                          <a:latin typeface="Aptos" panose="020B0004020202020204" pitchFamily="34" charset="0"/>
+                          <a:ea typeface="Aptos" panose="020B0004020202020204" pitchFamily="34" charset="0"/>
+                          <a:cs typeface="Tunga" panose="020B0502040204020203" pitchFamily="34" charset="0"/>
                         </a:rPr>
-                        <a:t>Same Clustered Group?</a:t>
+                        <a:t>Same Clustered Group(Algorithm/Model Output)?</a:t>
                       </a:r>
-                      <a:endParaRPr lang="en-IN" sz="2800" kern="100">
+                      <a:endParaRPr lang="en-IN" sz="1800" kern="100" dirty="0">
                         <a:effectLst/>
                         <a:latin typeface="Aptos" panose="020B0004020202020204" pitchFamily="34" charset="0"/>
                         <a:ea typeface="Aptos" panose="020B0004020202020204" pitchFamily="34" charset="0"/>
@@ -19531,7 +19573,7 @@
                   </a:ext>
                 </a:extLst>
               </a:tr>
-              <a:tr h="614458">
+              <a:tr h="657364">
                 <a:tc>
                   <a:txBody>
                     <a:bodyPr/>
@@ -19607,12 +19649,12 @@
                         <a:buNone/>
                       </a:pPr>
                       <a:r>
-                        <a:rPr lang="en-IN" sz="2800" kern="100" baseline="30000">
+                        <a:rPr lang="en-IN" sz="2800" kern="100" baseline="30000" dirty="0">
                           <a:effectLst/>
                         </a:rPr>
                         <a:t>❌ No</a:t>
                       </a:r>
-                      <a:endParaRPr lang="en-IN" sz="2800" kern="100">
+                      <a:endParaRPr lang="en-IN" sz="2800" kern="100" dirty="0">
                         <a:effectLst/>
                         <a:latin typeface="Aptos" panose="020B0004020202020204" pitchFamily="34" charset="0"/>
                         <a:ea typeface="Aptos" panose="020B0004020202020204" pitchFamily="34" charset="0"/>
@@ -19628,7 +19670,7 @@
                   </a:ext>
                 </a:extLst>
               </a:tr>
-              <a:tr h="614458">
+              <a:tr h="657364">
                 <a:tc>
                   <a:txBody>
                     <a:bodyPr/>
@@ -19725,7 +19767,7 @@
                   </a:ext>
                 </a:extLst>
               </a:tr>
-              <a:tr h="614458">
+              <a:tr h="657364">
                 <a:tc>
                   <a:txBody>
                     <a:bodyPr/>
@@ -19822,7 +19864,7 @@
                   </a:ext>
                 </a:extLst>
               </a:tr>
-              <a:tr h="614458">
+              <a:tr h="657364">
                 <a:tc>
                   <a:txBody>
                     <a:bodyPr/>
@@ -19919,7 +19961,7 @@
                   </a:ext>
                 </a:extLst>
               </a:tr>
-              <a:tr h="614458">
+              <a:tr h="657364">
                 <a:tc>
                   <a:txBody>
                     <a:bodyPr/>
@@ -20016,7 +20058,7 @@
                   </a:ext>
                 </a:extLst>
               </a:tr>
-              <a:tr h="614458">
+              <a:tr h="657364">
                 <a:tc>
                   <a:txBody>
                     <a:bodyPr/>
@@ -38212,154 +38254,6 @@
         <p:cNvPr id="1" name="">
           <a:extLst>
             <a:ext uri="{FF2B5EF4-FFF2-40B4-BE49-F238E27FC236}">
-              <a16:creationId xmlns:a16="http://schemas.microsoft.com/office/drawing/2014/main" id="{BF3CB578-9E14-2602-8E80-FECBE2ABF9A3}"/>
-            </a:ext>
-          </a:extLst>
-        </p:cNvPr>
-        <p:cNvGrpSpPr/>
-        <p:nvPr/>
-      </p:nvGrpSpPr>
-      <p:grpSpPr>
-        <a:xfrm>
-          <a:off x="0" y="0"/>
-          <a:ext cx="0" cy="0"/>
-          <a:chOff x="0" y="0"/>
-          <a:chExt cx="0" cy="0"/>
-        </a:xfrm>
-      </p:grpSpPr>
-      <p:sp>
-        <p:nvSpPr>
-          <p:cNvPr id="3" name="Content Placeholder 2">
-            <a:extLst>
-              <a:ext uri="{FF2B5EF4-FFF2-40B4-BE49-F238E27FC236}">
-                <a16:creationId xmlns:a16="http://schemas.microsoft.com/office/drawing/2014/main" id="{2A513252-8515-5192-5692-4098998FE324}"/>
-              </a:ext>
-            </a:extLst>
-          </p:cNvPr>
-          <p:cNvSpPr>
-            <a:spLocks noGrp="1"/>
-          </p:cNvSpPr>
-          <p:nvPr>
-            <p:ph idx="1"/>
-          </p:nvPr>
-        </p:nvSpPr>
-        <p:spPr>
-          <a:xfrm>
-            <a:off x="743688" y="1088572"/>
-            <a:ext cx="10900568" cy="4354286"/>
-          </a:xfrm>
-        </p:spPr>
-        <p:txBody>
-          <a:bodyPr>
-            <a:normAutofit/>
-          </a:bodyPr>
-          <a:lstStyle/>
-          <a:p>
-            <a:pPr marL="0" indent="0">
-              <a:buNone/>
-            </a:pPr>
-            <a:r>
-              <a:rPr lang="en-US" sz="3200" b="1" dirty="0">
-                <a:solidFill>
-                  <a:srgbClr val="C00000"/>
-                </a:solidFill>
-              </a:rPr>
-              <a:t>Module-3: </a:t>
-            </a:r>
-            <a:r>
-              <a:rPr lang="en-US" sz="3200" b="1" dirty="0">
-                <a:solidFill>
-                  <a:schemeClr val="accent3">
-                    <a:lumMod val="50000"/>
-                  </a:schemeClr>
-                </a:solidFill>
-              </a:rPr>
-              <a:t>Unsupervised Learning: </a:t>
-            </a:r>
-          </a:p>
-          <a:p>
-            <a:pPr marL="0" indent="0">
-              <a:buNone/>
-            </a:pPr>
-            <a:r>
-              <a:rPr lang="en-US" sz="3200" b="1" dirty="0"/>
-              <a:t>Clustering: K-Means clustering</a:t>
-            </a:r>
-            <a:r>
-              <a:rPr lang="en-US" sz="3200" dirty="0"/>
-              <a:t>, </a:t>
-            </a:r>
-            <a:r>
-              <a:rPr lang="en-US" sz="3200" b="1" dirty="0"/>
-              <a:t>Hierarchical clustering</a:t>
-            </a:r>
-            <a:r>
-              <a:rPr lang="en-US" sz="3200" dirty="0"/>
-              <a:t>, </a:t>
-            </a:r>
-            <a:r>
-              <a:rPr lang="en-US" sz="3200" b="1" dirty="0"/>
-              <a:t>Evaluation of clustering results. </a:t>
-            </a:r>
-          </a:p>
-          <a:p>
-            <a:pPr marL="0" indent="0">
-              <a:buNone/>
-            </a:pPr>
-            <a:r>
-              <a:rPr lang="en-US" sz="3200" b="1" dirty="0"/>
-              <a:t>Dimensionality Reduction: Principal Component Analysis (PCA), Linear Discriminant Analysis (LDA), t-Distributed Stochastic Neighbor Embedding (t-SNE). </a:t>
-            </a:r>
-            <a:r>
-              <a:rPr lang="en-US" sz="3200" dirty="0"/>
-              <a:t> </a:t>
-            </a:r>
-          </a:p>
-          <a:p>
-            <a:pPr marL="0" indent="0">
-              <a:buNone/>
-            </a:pPr>
-            <a:r>
-              <a:rPr lang="en-US" sz="3200" b="1" dirty="0"/>
-              <a:t>Association Rule Learning: </a:t>
-            </a:r>
-            <a:r>
-              <a:rPr lang="en-US" sz="3200" b="1" dirty="0" err="1"/>
-              <a:t>Apriori</a:t>
-            </a:r>
-            <a:r>
-              <a:rPr lang="en-US" sz="3200" b="1" dirty="0"/>
-              <a:t> algorithm</a:t>
-            </a:r>
-            <a:r>
-              <a:rPr lang="en-US" sz="3200" dirty="0"/>
-              <a:t>, Market Basket Analysis, Evaluation metrics for association rules </a:t>
-            </a:r>
-            <a:endParaRPr lang="en-IN" sz="3200" dirty="0"/>
-          </a:p>
-        </p:txBody>
-      </p:sp>
-    </p:spTree>
-    <p:extLst>
-      <p:ext uri="{BB962C8B-B14F-4D97-AF65-F5344CB8AC3E}">
-        <p14:creationId xmlns:p14="http://schemas.microsoft.com/office/powerpoint/2010/main" val="1788168237"/>
-      </p:ext>
-    </p:extLst>
-  </p:cSld>
-  <p:clrMapOvr>
-    <a:masterClrMapping/>
-  </p:clrMapOvr>
-</p:sld>
-</file>
-
-<file path=ppt/slides/slide93.xml><?xml version="1.0" encoding="utf-8"?>
-<p:sld xmlns:a="http://schemas.openxmlformats.org/drawingml/2006/main" xmlns:r="http://schemas.openxmlformats.org/officeDocument/2006/relationships" xmlns:p="http://schemas.openxmlformats.org/presentationml/2006/main">
-  <p:cSld>
-    <p:spTree>
-      <p:nvGrpSpPr>
-        <p:cNvPr id="1" name="">
-          <a:extLst>
-            <a:ext uri="{FF2B5EF4-FFF2-40B4-BE49-F238E27FC236}">
               <a16:creationId xmlns:a16="http://schemas.microsoft.com/office/drawing/2014/main" id="{8A70DD98-FEF8-D173-3C1C-0982A439F1DF}"/>
             </a:ext>
           </a:extLst>
@@ -38406,7 +38300,41 @@
             <a:pPr marL="0" indent="0">
               <a:buNone/>
             </a:pPr>
-            <a:endParaRPr lang="en-IN" sz="2400" dirty="0"/>
+            <a:r>
+              <a:rPr lang="en-US" sz="2400" b="1" dirty="0"/>
+              <a:t>Evaluation metrics for association rules:</a:t>
+            </a:r>
+          </a:p>
+          <a:p>
+            <a:pPr marL="0" indent="0">
+              <a:buNone/>
+            </a:pPr>
+            <a:r>
+              <a:rPr lang="en-US" sz="2400" dirty="0"/>
+              <a:t>Evaluation metrics for </a:t>
+            </a:r>
+            <a:r>
+              <a:rPr lang="en-US" sz="2400" b="1" dirty="0"/>
+              <a:t>association rules</a:t>
+            </a:r>
+            <a:r>
+              <a:rPr lang="en-US" sz="2400" dirty="0"/>
+              <a:t> help determine the quality, usefulness, and interestingness of the rules discovered in association rule mining (like in the </a:t>
+            </a:r>
+            <a:r>
+              <a:rPr lang="en-US" sz="2400" dirty="0" err="1"/>
+              <a:t>Apriori</a:t>
+            </a:r>
+            <a:r>
+              <a:rPr lang="en-US" sz="2400" dirty="0"/>
+              <a:t> or FP-Growth algorithms). These metrics help decide which rules to keep and which ones to discard.</a:t>
+            </a:r>
+          </a:p>
+          <a:p>
+            <a:pPr marL="0" indent="0">
+              <a:buNone/>
+            </a:pPr>
+            <a:endParaRPr lang="en-IN" sz="2400" b="1" dirty="0"/>
           </a:p>
         </p:txBody>
       </p:sp>
@@ -38423,7 +38351,7 @@
 </p:sld>
 </file>
 
-<file path=ppt/slides/slide94.xml><?xml version="1.0" encoding="utf-8"?>
+<file path=ppt/slides/slide93.xml><?xml version="1.0" encoding="utf-8"?>
 <p:sld xmlns:a="http://schemas.openxmlformats.org/drawingml/2006/main" xmlns:r="http://schemas.openxmlformats.org/officeDocument/2006/relationships" xmlns:p="http://schemas.openxmlformats.org/presentationml/2006/main">
   <p:cSld>
     <p:spTree>
@@ -38477,10 +38405,170 @@
             <a:pPr marL="0" indent="0">
               <a:buNone/>
             </a:pPr>
+            <a:r>
+              <a:rPr lang="en-US" sz="2400" b="1" dirty="0"/>
+              <a:t>1</a:t>
+            </a:r>
+            <a:r>
+              <a:rPr lang="en-US" sz="3000" b="1" dirty="0"/>
+              <a:t>. Support</a:t>
+            </a:r>
+          </a:p>
+          <a:p>
+            <a:pPr marL="0" indent="0">
+              <a:buNone/>
+            </a:pPr>
+            <a:r>
+              <a:rPr lang="en-US" sz="2400" b="1" dirty="0"/>
+              <a:t>Definition</a:t>
+            </a:r>
+            <a:r>
+              <a:rPr lang="en-US" sz="2400" dirty="0"/>
+              <a:t>: Indicates how frequently the itemset appears in the dataset.</a:t>
+            </a:r>
+          </a:p>
+          <a:p>
+            <a:pPr marL="0" indent="0">
+              <a:buNone/>
+            </a:pPr>
+            <a:r>
+              <a:rPr lang="en-US" sz="2400" b="1" dirty="0"/>
+              <a:t>Formula</a:t>
+            </a:r>
+            <a:r>
+              <a:rPr lang="en-US" sz="2400" dirty="0"/>
+              <a:t>:</a:t>
+            </a:r>
+          </a:p>
+          <a:p>
+            <a:pPr marL="0" indent="0">
+              <a:buNone/>
+            </a:pPr>
+            <a:endParaRPr lang="en-US" sz="2400" dirty="0"/>
+          </a:p>
+          <a:p>
+            <a:pPr marL="0" indent="0">
+              <a:buNone/>
+            </a:pPr>
+            <a:endParaRPr lang="en-US" sz="2400" dirty="0"/>
+          </a:p>
+          <a:p>
+            <a:pPr marL="0" indent="0">
+              <a:buNone/>
+            </a:pPr>
+            <a:endParaRPr lang="en-US" sz="2400" dirty="0"/>
+          </a:p>
+          <a:p>
+            <a:pPr marL="0" indent="0">
+              <a:buNone/>
+            </a:pPr>
+            <a:endParaRPr lang="en-US" sz="2400" dirty="0"/>
+          </a:p>
+          <a:p>
+            <a:pPr marL="0" indent="0">
+              <a:buNone/>
+            </a:pPr>
+            <a:r>
+              <a:rPr lang="en-US" sz="2400" dirty="0"/>
+              <a:t>	</a:t>
+            </a:r>
+            <a:r>
+              <a:rPr lang="en-US" dirty="0"/>
+              <a:t>Where </a:t>
+            </a:r>
+            <a:r>
+              <a:rPr lang="en-US" b="1" dirty="0"/>
+              <a:t>X∪Y</a:t>
+            </a:r>
+            <a:r>
+              <a:rPr lang="en-US" dirty="0"/>
+              <a:t> is the </a:t>
+            </a:r>
+            <a:r>
+              <a:rPr lang="en-US" b="1" dirty="0">
+                <a:solidFill>
+                  <a:srgbClr val="FF0000"/>
+                </a:solidFill>
+              </a:rPr>
+              <a:t>union</a:t>
+            </a:r>
+            <a:r>
+              <a:rPr lang="en-US" dirty="0"/>
+              <a:t> of both </a:t>
+            </a:r>
+            <a:r>
+              <a:rPr lang="en-US" dirty="0" err="1"/>
+              <a:t>itemsets</a:t>
+            </a:r>
+            <a:r>
+              <a:rPr lang="en-US" dirty="0"/>
+              <a:t>, and N is the total number of transactions.</a:t>
+            </a:r>
+          </a:p>
+          <a:p>
+            <a:pPr marL="0" indent="0">
+              <a:buNone/>
+            </a:pPr>
+            <a:endParaRPr lang="en-US" sz="2400" dirty="0"/>
+          </a:p>
+          <a:p>
+            <a:r>
+              <a:rPr lang="en-US" sz="2400" b="1" dirty="0"/>
+              <a:t>Purpose: </a:t>
+            </a:r>
+            <a:r>
+              <a:rPr lang="en-US" sz="2400" dirty="0"/>
+              <a:t>Filters out infrequent rules.</a:t>
+            </a:r>
+          </a:p>
+          <a:p>
+            <a:r>
+              <a:rPr lang="en-US" sz="2400" b="1" dirty="0"/>
+              <a:t>Example: </a:t>
+            </a:r>
+            <a:r>
+              <a:rPr lang="en-US" sz="2400" dirty="0"/>
+              <a:t>If 2 out of 10 transactions contain both bread and butter, support = 2/10 = 0.2</a:t>
+            </a:r>
+          </a:p>
+          <a:p>
+            <a:pPr marL="0" indent="0">
+              <a:buNone/>
+            </a:pPr>
             <a:endParaRPr lang="en-IN" sz="2400" dirty="0"/>
           </a:p>
         </p:txBody>
       </p:sp>
+      <p:pic>
+        <p:nvPicPr>
+          <p:cNvPr id="4" name="Picture 3">
+            <a:extLst>
+              <a:ext uri="{FF2B5EF4-FFF2-40B4-BE49-F238E27FC236}">
+                <a16:creationId xmlns:a16="http://schemas.microsoft.com/office/drawing/2014/main" id="{9C258B87-3569-DD92-A5F8-0DD5C7E87FC2}"/>
+              </a:ext>
+            </a:extLst>
+          </p:cNvPr>
+          <p:cNvPicPr>
+            <a:picLocks noChangeAspect="1"/>
+          </p:cNvPicPr>
+          <p:nvPr/>
+        </p:nvPicPr>
+        <p:blipFill>
+          <a:blip r:embed="rId2"/>
+          <a:stretch>
+            <a:fillRect/>
+          </a:stretch>
+        </p:blipFill>
+        <p:spPr>
+          <a:xfrm>
+            <a:off x="2002239" y="2160943"/>
+            <a:ext cx="6586590" cy="1349814"/>
+          </a:xfrm>
+          <a:prstGeom prst="rect">
+            <a:avLst/>
+          </a:prstGeom>
+        </p:spPr>
+      </p:pic>
     </p:spTree>
     <p:extLst>
       <p:ext uri="{BB962C8B-B14F-4D97-AF65-F5344CB8AC3E}">
@@ -38494,7 +38582,7 @@
 </p:sld>
 </file>
 
-<file path=ppt/slides/slide95.xml><?xml version="1.0" encoding="utf-8"?>
+<file path=ppt/slides/slide94.xml><?xml version="1.0" encoding="utf-8"?>
 <p:sld xmlns:a="http://schemas.openxmlformats.org/drawingml/2006/main" xmlns:r="http://schemas.openxmlformats.org/officeDocument/2006/relationships" xmlns:p="http://schemas.openxmlformats.org/presentationml/2006/main">
   <p:cSld>
     <p:spTree>
@@ -38548,10 +38636,124 @@
             <a:pPr marL="0" indent="0">
               <a:buNone/>
             </a:pPr>
+            <a:r>
+              <a:rPr lang="en-IN" sz="2800" b="1" dirty="0"/>
+              <a:t>2. </a:t>
+            </a:r>
+            <a:r>
+              <a:rPr lang="en-US" sz="2800" b="1" dirty="0"/>
+              <a:t>Confidence</a:t>
+            </a:r>
+          </a:p>
+          <a:p>
+            <a:r>
+              <a:rPr lang="en-US" sz="2400" b="1" dirty="0"/>
+              <a:t>Definition</a:t>
+            </a:r>
+            <a:r>
+              <a:rPr lang="en-US" sz="2400" dirty="0"/>
+              <a:t>: Measures how often items in Y appear in transactions that contain X.</a:t>
+            </a:r>
+          </a:p>
+          <a:p>
+            <a:r>
+              <a:rPr lang="en-US" sz="2400" b="1" dirty="0"/>
+              <a:t>Formula</a:t>
+            </a:r>
+            <a:r>
+              <a:rPr lang="en-US" sz="2400" dirty="0"/>
+              <a:t>:</a:t>
+            </a:r>
+          </a:p>
+          <a:p>
+            <a:pPr marL="457200" lvl="1" indent="0">
+              <a:buNone/>
+            </a:pPr>
+            <a:endParaRPr lang="en-US" sz="2200" dirty="0"/>
+          </a:p>
+          <a:p>
+            <a:pPr marL="0" indent="0">
+              <a:buNone/>
+            </a:pPr>
+            <a:endParaRPr lang="en-IN" sz="2400" dirty="0"/>
+          </a:p>
+          <a:p>
+            <a:pPr marL="0" indent="0">
+              <a:buNone/>
+            </a:pPr>
+            <a:endParaRPr lang="en-IN" sz="2400" dirty="0"/>
+          </a:p>
+          <a:p>
+            <a:pPr marL="0" indent="0">
+              <a:buNone/>
+            </a:pPr>
+            <a:endParaRPr lang="en-IN" sz="2400" dirty="0"/>
+          </a:p>
+          <a:p>
+            <a:r>
+              <a:rPr lang="en-US" sz="2400" b="1" dirty="0"/>
+              <a:t>Purpose: </a:t>
+            </a:r>
+            <a:r>
+              <a:rPr lang="en-US" sz="2400" dirty="0"/>
+              <a:t>Measures the </a:t>
+            </a:r>
+            <a:r>
+              <a:rPr lang="en-US" sz="2400" b="1" dirty="0">
+                <a:solidFill>
+                  <a:srgbClr val="C00000"/>
+                </a:solidFill>
+              </a:rPr>
+              <a:t>predictive power </a:t>
+            </a:r>
+            <a:r>
+              <a:rPr lang="en-US" sz="2400" dirty="0"/>
+              <a:t>of the rule.</a:t>
+            </a:r>
+          </a:p>
+          <a:p>
+            <a:r>
+              <a:rPr lang="en-US" sz="2400" b="1" dirty="0"/>
+              <a:t>Example: </a:t>
+            </a:r>
+            <a:r>
+              <a:rPr lang="en-US" sz="2400" dirty="0"/>
+              <a:t>If 4 out of 5 transactions that contain bread also contain butter, confidence = 4/5 = 0.8</a:t>
+            </a:r>
             <a:endParaRPr lang="en-IN" sz="2400" dirty="0"/>
           </a:p>
         </p:txBody>
       </p:sp>
+      <p:pic>
+        <p:nvPicPr>
+          <p:cNvPr id="4" name="Picture 3">
+            <a:extLst>
+              <a:ext uri="{FF2B5EF4-FFF2-40B4-BE49-F238E27FC236}">
+                <a16:creationId xmlns:a16="http://schemas.microsoft.com/office/drawing/2014/main" id="{AB695A12-F76C-C0A6-1DBF-043B55E6C34B}"/>
+              </a:ext>
+            </a:extLst>
+          </p:cNvPr>
+          <p:cNvPicPr>
+            <a:picLocks noChangeAspect="1"/>
+          </p:cNvPicPr>
+          <p:nvPr/>
+        </p:nvPicPr>
+        <p:blipFill>
+          <a:blip r:embed="rId2"/>
+          <a:stretch>
+            <a:fillRect/>
+          </a:stretch>
+        </p:blipFill>
+        <p:spPr>
+          <a:xfrm>
+            <a:off x="2170952" y="2287910"/>
+            <a:ext cx="7484798" cy="1293490"/>
+          </a:xfrm>
+          <a:prstGeom prst="rect">
+            <a:avLst/>
+          </a:prstGeom>
+        </p:spPr>
+      </p:pic>
     </p:spTree>
     <p:extLst>
       <p:ext uri="{BB962C8B-B14F-4D97-AF65-F5344CB8AC3E}">
@@ -38565,7 +38767,7 @@
 </p:sld>
 </file>
 
-<file path=ppt/slides/slide96.xml><?xml version="1.0" encoding="utf-8"?>
+<file path=ppt/slides/slide95.xml><?xml version="1.0" encoding="utf-8"?>
 <p:sld xmlns:a="http://schemas.openxmlformats.org/drawingml/2006/main" xmlns:r="http://schemas.openxmlformats.org/officeDocument/2006/relationships" xmlns:p="http://schemas.openxmlformats.org/presentationml/2006/main">
   <p:cSld>
     <p:spTree>
@@ -38612,9 +38814,93 @@
         </p:spPr>
         <p:txBody>
           <a:bodyPr>
-            <a:normAutofit/>
+            <a:normAutofit lnSpcReduction="10000"/>
           </a:bodyPr>
           <a:lstStyle/>
+          <a:p>
+            <a:pPr marL="0" indent="0">
+              <a:buNone/>
+            </a:pPr>
+            <a:r>
+              <a:rPr lang="en-US" sz="2800" b="1" dirty="0"/>
+              <a:t>3. Lift</a:t>
+            </a:r>
+          </a:p>
+          <a:p>
+            <a:r>
+              <a:rPr lang="en-US" sz="2400" b="1" dirty="0"/>
+              <a:t>Definition</a:t>
+            </a:r>
+            <a:r>
+              <a:rPr lang="en-US" sz="2400" dirty="0"/>
+              <a:t>: Measures how much more likely Y is to be bought when X is bought, compared to the baseline probability of buying Y.</a:t>
+            </a:r>
+          </a:p>
+          <a:p>
+            <a:r>
+              <a:rPr lang="en-US" sz="2400" b="1" dirty="0"/>
+              <a:t>Formula</a:t>
+            </a:r>
+            <a:r>
+              <a:rPr lang="en-US" sz="2400" dirty="0"/>
+              <a:t>:</a:t>
+            </a:r>
+          </a:p>
+          <a:p>
+            <a:endParaRPr lang="en-US" sz="2400" dirty="0"/>
+          </a:p>
+          <a:p>
+            <a:endParaRPr lang="en-US" sz="2400" dirty="0"/>
+          </a:p>
+          <a:p>
+            <a:endParaRPr lang="en-US" sz="2400" dirty="0"/>
+          </a:p>
+          <a:p>
+            <a:r>
+              <a:rPr lang="en-US" sz="2400" b="1" dirty="0"/>
+              <a:t>Interpretation:</a:t>
+            </a:r>
+          </a:p>
+          <a:p>
+            <a:pPr lvl="1"/>
+            <a:r>
+              <a:rPr lang="en-US" sz="2200" dirty="0"/>
+              <a:t>Lift = 1 → X and Y are independent</a:t>
+            </a:r>
+          </a:p>
+          <a:p>
+            <a:pPr lvl="1"/>
+            <a:r>
+              <a:rPr lang="en-US" sz="2200" dirty="0"/>
+              <a:t>Lift &gt; 1 → Positive association</a:t>
+            </a:r>
+          </a:p>
+          <a:p>
+            <a:pPr lvl="1"/>
+            <a:r>
+              <a:rPr lang="en-US" sz="2200" dirty="0"/>
+              <a:t>Lift &lt; 1 → Negative association</a:t>
+            </a:r>
+          </a:p>
+          <a:p>
+            <a:endParaRPr lang="en-US" sz="2400" dirty="0"/>
+          </a:p>
+          <a:p>
+            <a:r>
+              <a:rPr lang="en-US" sz="2400" b="1" dirty="0"/>
+              <a:t>Example: </a:t>
+            </a:r>
+            <a:r>
+              <a:rPr lang="en-US" sz="2400" dirty="0"/>
+              <a:t>A lift of 1.5 means buying X makes buying Y 1.5 times more likely.</a:t>
+            </a:r>
+          </a:p>
+          <a:p>
+            <a:pPr marL="457200" lvl="1" indent="0">
+              <a:buNone/>
+            </a:pPr>
+            <a:endParaRPr lang="en-US" sz="2200" dirty="0"/>
+          </a:p>
           <a:p>
             <a:pPr marL="0" indent="0">
               <a:buNone/>
@@ -38623,6 +38909,36 @@
           </a:p>
         </p:txBody>
       </p:sp>
+      <p:pic>
+        <p:nvPicPr>
+          <p:cNvPr id="4" name="Picture 3">
+            <a:extLst>
+              <a:ext uri="{FF2B5EF4-FFF2-40B4-BE49-F238E27FC236}">
+                <a16:creationId xmlns:a16="http://schemas.microsoft.com/office/drawing/2014/main" id="{557B5D92-E155-6259-6378-7422699BF07A}"/>
+              </a:ext>
+            </a:extLst>
+          </p:cNvPr>
+          <p:cNvPicPr>
+            <a:picLocks noChangeAspect="1"/>
+          </p:cNvPicPr>
+          <p:nvPr/>
+        </p:nvPicPr>
+        <p:blipFill>
+          <a:blip r:embed="rId2"/>
+          <a:stretch>
+            <a:fillRect/>
+          </a:stretch>
+        </p:blipFill>
+        <p:spPr>
+          <a:xfrm>
+            <a:off x="2942529" y="2159266"/>
+            <a:ext cx="6306941" cy="1291505"/>
+          </a:xfrm>
+          <a:prstGeom prst="rect">
+            <a:avLst/>
+          </a:prstGeom>
+        </p:spPr>
+      </p:pic>
     </p:spTree>
     <p:extLst>
       <p:ext uri="{BB962C8B-B14F-4D97-AF65-F5344CB8AC3E}">
@@ -38636,7 +38952,7 @@
 </p:sld>
 </file>
 
-<file path=ppt/slides/slide97.xml><?xml version="1.0" encoding="utf-8"?>
+<file path=ppt/slides/slide96.xml><?xml version="1.0" encoding="utf-8"?>
 <p:sld xmlns:a="http://schemas.openxmlformats.org/drawingml/2006/main" xmlns:r="http://schemas.openxmlformats.org/officeDocument/2006/relationships" xmlns:p="http://schemas.openxmlformats.org/presentationml/2006/main">
   <p:cSld>
     <p:spTree>
@@ -38690,10 +39006,102 @@
             <a:pPr marL="0" indent="0">
               <a:buNone/>
             </a:pPr>
+            <a:r>
+              <a:rPr lang="en-US" sz="2800" b="1" dirty="0"/>
+              <a:t>4. Leverage</a:t>
+            </a:r>
+          </a:p>
+          <a:p>
+            <a:r>
+              <a:rPr lang="en-US" sz="2400" b="1" dirty="0"/>
+              <a:t>Definition</a:t>
+            </a:r>
+            <a:r>
+              <a:rPr lang="en-US" sz="2400" dirty="0"/>
+              <a:t>: Measures the difference between the observed frequency of X and Y appearing together and what would be expected if X and Y were independent.</a:t>
+            </a:r>
+          </a:p>
+          <a:p>
+            <a:r>
+              <a:rPr lang="en-US" sz="2400" b="1" dirty="0"/>
+              <a:t>Formula</a:t>
+            </a:r>
+            <a:r>
+              <a:rPr lang="en-US" sz="2400" dirty="0"/>
+              <a:t>:</a:t>
+            </a:r>
+          </a:p>
+          <a:p>
+            <a:endParaRPr lang="en-US" sz="2400" b="1" dirty="0"/>
+          </a:p>
+          <a:p>
+            <a:endParaRPr lang="en-US" sz="2400" b="1" dirty="0"/>
+          </a:p>
+          <a:p>
+            <a:endParaRPr lang="en-US" sz="2400" b="1" dirty="0"/>
+          </a:p>
+          <a:p>
+            <a:r>
+              <a:rPr lang="en-US" sz="2400" b="1" dirty="0"/>
+              <a:t>Interpretation</a:t>
+            </a:r>
+            <a:r>
+              <a:rPr lang="en-US" sz="2400" dirty="0"/>
+              <a:t>:</a:t>
+            </a:r>
+          </a:p>
+          <a:p>
+            <a:pPr lvl="1"/>
+            <a:r>
+              <a:rPr lang="en-US" sz="2400" dirty="0"/>
+              <a:t>Value close to 0 means independence</a:t>
+            </a:r>
+          </a:p>
+          <a:p>
+            <a:pPr lvl="1"/>
+            <a:r>
+              <a:rPr lang="en-US" sz="2400" dirty="0"/>
+              <a:t>Higher value means stronger correlation</a:t>
+            </a:r>
+          </a:p>
+          <a:p>
+            <a:pPr marL="0" indent="0">
+              <a:buNone/>
+            </a:pPr>
             <a:endParaRPr lang="en-IN" sz="2400" dirty="0"/>
           </a:p>
         </p:txBody>
       </p:sp>
+      <p:pic>
+        <p:nvPicPr>
+          <p:cNvPr id="4" name="Picture 3">
+            <a:extLst>
+              <a:ext uri="{FF2B5EF4-FFF2-40B4-BE49-F238E27FC236}">
+                <a16:creationId xmlns:a16="http://schemas.microsoft.com/office/drawing/2014/main" id="{02ED37E5-D3EE-7242-68A0-8363AA6F9215}"/>
+              </a:ext>
+            </a:extLst>
+          </p:cNvPr>
+          <p:cNvPicPr>
+            <a:picLocks noChangeAspect="1"/>
+          </p:cNvPicPr>
+          <p:nvPr/>
+        </p:nvPicPr>
+        <p:blipFill>
+          <a:blip r:embed="rId2"/>
+          <a:stretch>
+            <a:fillRect/>
+          </a:stretch>
+        </p:blipFill>
+        <p:spPr>
+          <a:xfrm>
+            <a:off x="1641008" y="2744638"/>
+            <a:ext cx="9858971" cy="771448"/>
+          </a:xfrm>
+          <a:prstGeom prst="rect">
+            <a:avLst/>
+          </a:prstGeom>
+        </p:spPr>
+      </p:pic>
     </p:spTree>
     <p:extLst>
       <p:ext uri="{BB962C8B-B14F-4D97-AF65-F5344CB8AC3E}">
@@ -38707,7 +39115,7 @@
 </p:sld>
 </file>
 
-<file path=ppt/slides/slide98.xml><?xml version="1.0" encoding="utf-8"?>
+<file path=ppt/slides/slide97.xml><?xml version="1.0" encoding="utf-8"?>
 <p:sld xmlns:a="http://schemas.openxmlformats.org/drawingml/2006/main" xmlns:r="http://schemas.openxmlformats.org/officeDocument/2006/relationships" xmlns:p="http://schemas.openxmlformats.org/presentationml/2006/main">
   <p:cSld>
     <p:spTree>
@@ -38761,14 +39169,270 @@
             <a:pPr marL="0" indent="0">
               <a:buNone/>
             </a:pPr>
+            <a:r>
+              <a:rPr lang="en-US" sz="2800" b="1" dirty="0"/>
+              <a:t>5. Conviction</a:t>
+            </a:r>
+          </a:p>
+          <a:p>
+            <a:r>
+              <a:rPr lang="en-US" sz="2400" b="1" dirty="0"/>
+              <a:t>Definition</a:t>
+            </a:r>
+            <a:r>
+              <a:rPr lang="en-US" sz="2400" dirty="0"/>
+              <a:t>: Measures how frequently X occurs without Y, assuming X → Y is a rule.</a:t>
+            </a:r>
+          </a:p>
+          <a:p>
+            <a:r>
+              <a:rPr lang="en-US" sz="2400" b="1" dirty="0"/>
+              <a:t>Formula</a:t>
+            </a:r>
+            <a:r>
+              <a:rPr lang="en-US" sz="2400" dirty="0"/>
+              <a:t>:</a:t>
+            </a:r>
+          </a:p>
+          <a:p>
+            <a:endParaRPr lang="en-US" sz="2400" dirty="0"/>
+          </a:p>
+          <a:p>
+            <a:endParaRPr lang="en-US" sz="2400" dirty="0"/>
+          </a:p>
+          <a:p>
+            <a:endParaRPr lang="en-US" sz="2400" dirty="0"/>
+          </a:p>
+          <a:p>
+            <a:endParaRPr lang="en-US" sz="2400" dirty="0"/>
+          </a:p>
+          <a:p>
+            <a:pPr marL="0" indent="0">
+              <a:buNone/>
+            </a:pPr>
+            <a:r>
+              <a:rPr lang="en-US" sz="2400" b="1" dirty="0"/>
+              <a:t>Interpretation</a:t>
+            </a:r>
+            <a:r>
+              <a:rPr lang="en-US" sz="2400" dirty="0"/>
+              <a:t>:</a:t>
+            </a:r>
+          </a:p>
+          <a:p>
+            <a:r>
+              <a:rPr lang="en-US" sz="2400" dirty="0"/>
+              <a:t>Conviction &gt; 1 suggests a stronger rule.</a:t>
+            </a:r>
+          </a:p>
+          <a:p>
+            <a:r>
+              <a:rPr lang="en-US" sz="2400" dirty="0"/>
+              <a:t>Higher conviction means fewer contradictions.</a:t>
+            </a:r>
+          </a:p>
+          <a:p>
+            <a:pPr marL="0" indent="0">
+              <a:buNone/>
+            </a:pPr>
             <a:endParaRPr lang="en-IN" sz="2400" dirty="0"/>
+          </a:p>
+        </p:txBody>
+      </p:sp>
+      <p:pic>
+        <p:nvPicPr>
+          <p:cNvPr id="4" name="Picture 3">
+            <a:extLst>
+              <a:ext uri="{FF2B5EF4-FFF2-40B4-BE49-F238E27FC236}">
+                <a16:creationId xmlns:a16="http://schemas.microsoft.com/office/drawing/2014/main" id="{058531C0-1108-6902-387A-7E239AF3D806}"/>
+              </a:ext>
+            </a:extLst>
+          </p:cNvPr>
+          <p:cNvPicPr>
+            <a:picLocks noChangeAspect="1"/>
+          </p:cNvPicPr>
+          <p:nvPr/>
+        </p:nvPicPr>
+        <p:blipFill>
+          <a:blip r:embed="rId2"/>
+          <a:stretch>
+            <a:fillRect/>
+          </a:stretch>
+        </p:blipFill>
+        <p:spPr>
+          <a:xfrm>
+            <a:off x="1971666" y="2345981"/>
+            <a:ext cx="7836362" cy="1277140"/>
+          </a:xfrm>
+          <a:prstGeom prst="rect">
+            <a:avLst/>
+          </a:prstGeom>
+        </p:spPr>
+      </p:pic>
+    </p:spTree>
+    <p:extLst>
+      <p:ext uri="{BB962C8B-B14F-4D97-AF65-F5344CB8AC3E}">
+        <p14:creationId xmlns:p14="http://schemas.microsoft.com/office/powerpoint/2010/main" val="3928362473"/>
+      </p:ext>
+    </p:extLst>
+  </p:cSld>
+  <p:clrMapOvr>
+    <a:masterClrMapping/>
+  </p:clrMapOvr>
+</p:sld>
+</file>
+
+<file path=ppt/slides/slide98.xml><?xml version="1.0" encoding="utf-8"?>
+<p:sld xmlns:a="http://schemas.openxmlformats.org/drawingml/2006/main" xmlns:r="http://schemas.openxmlformats.org/officeDocument/2006/relationships" xmlns:p="http://schemas.openxmlformats.org/presentationml/2006/main">
+  <p:cSld>
+    <p:spTree>
+      <p:nvGrpSpPr>
+        <p:cNvPr id="1" name="">
+          <a:extLst>
+            <a:ext uri="{FF2B5EF4-FFF2-40B4-BE49-F238E27FC236}">
+              <a16:creationId xmlns:a16="http://schemas.microsoft.com/office/drawing/2014/main" id="{BF3CB578-9E14-2602-8E80-FECBE2ABF9A3}"/>
+            </a:ext>
+          </a:extLst>
+        </p:cNvPr>
+        <p:cNvGrpSpPr/>
+        <p:nvPr/>
+      </p:nvGrpSpPr>
+      <p:grpSpPr>
+        <a:xfrm>
+          <a:off x="0" y="0"/>
+          <a:ext cx="0" cy="0"/>
+          <a:chOff x="0" y="0"/>
+          <a:chExt cx="0" cy="0"/>
+        </a:xfrm>
+      </p:grpSpPr>
+      <p:sp>
+        <p:nvSpPr>
+          <p:cNvPr id="3" name="Content Placeholder 2">
+            <a:extLst>
+              <a:ext uri="{FF2B5EF4-FFF2-40B4-BE49-F238E27FC236}">
+                <a16:creationId xmlns:a16="http://schemas.microsoft.com/office/drawing/2014/main" id="{2A513252-8515-5192-5692-4098998FE324}"/>
+              </a:ext>
+            </a:extLst>
+          </p:cNvPr>
+          <p:cNvSpPr>
+            <a:spLocks noGrp="1"/>
+          </p:cNvSpPr>
+          <p:nvPr>
+            <p:ph idx="1"/>
+          </p:nvPr>
+        </p:nvSpPr>
+        <p:spPr>
+          <a:xfrm>
+            <a:off x="743688" y="1088572"/>
+            <a:ext cx="10900568" cy="4354286"/>
+          </a:xfrm>
+        </p:spPr>
+        <p:txBody>
+          <a:bodyPr>
+            <a:normAutofit/>
+          </a:bodyPr>
+          <a:lstStyle/>
+          <a:p>
+            <a:pPr marL="0" indent="0">
+              <a:buNone/>
+            </a:pPr>
+            <a:r>
+              <a:rPr lang="en-US" sz="3200" b="1" dirty="0">
+                <a:solidFill>
+                  <a:srgbClr val="C00000"/>
+                </a:solidFill>
+              </a:rPr>
+              <a:t>Module-3: </a:t>
+            </a:r>
+            <a:r>
+              <a:rPr lang="en-US" sz="3200" b="1" dirty="0">
+                <a:solidFill>
+                  <a:schemeClr val="accent3">
+                    <a:lumMod val="50000"/>
+                  </a:schemeClr>
+                </a:solidFill>
+              </a:rPr>
+              <a:t>Unsupervised Learning: </a:t>
+            </a:r>
+          </a:p>
+          <a:p>
+            <a:pPr marL="0" indent="0">
+              <a:buNone/>
+            </a:pPr>
+            <a:r>
+              <a:rPr lang="en-US" sz="3200" b="1" dirty="0"/>
+              <a:t>Clustering: K-Means clustering</a:t>
+            </a:r>
+            <a:r>
+              <a:rPr lang="en-US" sz="3200" dirty="0"/>
+              <a:t>, </a:t>
+            </a:r>
+            <a:r>
+              <a:rPr lang="en-US" sz="3200" b="1" dirty="0"/>
+              <a:t>Hierarchical clustering</a:t>
+            </a:r>
+            <a:r>
+              <a:rPr lang="en-US" sz="3200" dirty="0"/>
+              <a:t>, </a:t>
+            </a:r>
+            <a:r>
+              <a:rPr lang="en-US" sz="3200" b="1" dirty="0"/>
+              <a:t>Evaluation of clustering results. </a:t>
+            </a:r>
+          </a:p>
+          <a:p>
+            <a:pPr marL="0" indent="0">
+              <a:buNone/>
+            </a:pPr>
+            <a:r>
+              <a:rPr lang="en-US" sz="3200" b="1" dirty="0"/>
+              <a:t>Dimensionality Reduction: Principal Component Analysis (PCA), Linear Discriminant Analysis (LDA), t-Distributed Stochastic Neighbor Embedding (t-SNE). </a:t>
+            </a:r>
+            <a:r>
+              <a:rPr lang="en-US" sz="3200" dirty="0"/>
+              <a:t> </a:t>
+            </a:r>
+          </a:p>
+          <a:p>
+            <a:pPr marL="0" indent="0">
+              <a:buNone/>
+            </a:pPr>
+            <a:r>
+              <a:rPr lang="en-US" sz="3200" b="1" dirty="0"/>
+              <a:t>Association Rule Learning: </a:t>
+            </a:r>
+            <a:r>
+              <a:rPr lang="en-US" sz="3200" b="1" dirty="0" err="1"/>
+              <a:t>Apriori</a:t>
+            </a:r>
+            <a:r>
+              <a:rPr lang="en-US" sz="3200" b="1" dirty="0"/>
+              <a:t> algorithm</a:t>
+            </a:r>
+            <a:r>
+              <a:rPr lang="en-US" sz="3200" dirty="0"/>
+              <a:t>, </a:t>
+            </a:r>
+            <a:r>
+              <a:rPr lang="en-US" sz="3200" b="1" dirty="0"/>
+              <a:t>Market Basket Analysis</a:t>
+            </a:r>
+            <a:r>
+              <a:rPr lang="en-US" sz="3200" dirty="0"/>
+              <a:t>, </a:t>
+            </a:r>
+            <a:r>
+              <a:rPr lang="en-US" sz="3200" b="1" dirty="0"/>
+              <a:t>Evaluation metrics for association rules </a:t>
+            </a:r>
+            <a:endParaRPr lang="en-IN" sz="3200" b="1" dirty="0"/>
           </a:p>
         </p:txBody>
       </p:sp>
     </p:spTree>
     <p:extLst>
       <p:ext uri="{BB962C8B-B14F-4D97-AF65-F5344CB8AC3E}">
-        <p14:creationId xmlns:p14="http://schemas.microsoft.com/office/powerpoint/2010/main" val="3928362473"/>
+        <p14:creationId xmlns:p14="http://schemas.microsoft.com/office/powerpoint/2010/main" val="1788168237"/>
       </p:ext>
     </p:extLst>
   </p:cSld>
